--- a/RA2 - Emmagatzematge i copies de seguretat/AA2 - Sistemes demmagatzematge/RA2_AA2_Sistemes_emmagatzematge.pptx
+++ b/RA2 - Emmagatzematge i copies de seguretat/AA2 - Sistemes demmagatzematge/RA2_AA2_Sistemes_emmagatzematge.pptx
@@ -11,14 +11,21 @@
     <p:sldId id="259" r:id="rId5"/>
     <p:sldId id="260" r:id="rId6"/>
     <p:sldId id="261" r:id="rId7"/>
+    <p:sldId id="274" r:id="rId25"/>
     <p:sldId id="262" r:id="rId8"/>
+    <p:sldId id="275" r:id="rId26"/>
     <p:sldId id="263" r:id="rId9"/>
+    <p:sldId id="276" r:id="rId27"/>
     <p:sldId id="264" r:id="rId10"/>
+    <p:sldId id="277" r:id="rId28"/>
     <p:sldId id="265" r:id="rId11"/>
     <p:sldId id="266" r:id="rId12"/>
     <p:sldId id="267" r:id="rId13"/>
+    <p:sldId id="278" r:id="rId29"/>
     <p:sldId id="268" r:id="rId14"/>
+    <p:sldId id="279" r:id="rId30"/>
     <p:sldId id="269" r:id="rId15"/>
+    <p:sldId id="280" r:id="rId31"/>
     <p:sldId id="270" r:id="rId16"/>
     <p:sldId id="271" r:id="rId17"/>
     <p:sldId id="272" r:id="rId18"/>
@@ -2407,6 +2414,10 @@
           </a:solidFill>
           <a:ln/>
         </p:spPr>
+        <p:txBody>
+          <a:bodyPr/>
+          <a:p/>
+        </p:txBody>
       </p:sp>
       <p:sp>
         <p:nvSpPr>
@@ -2427,6 +2438,10 @@
           </a:solidFill>
           <a:ln/>
         </p:spPr>
+        <p:txBody>
+          <a:bodyPr/>
+          <a:p/>
+        </p:txBody>
       </p:sp>
       <p:sp>
         <p:nvSpPr>
@@ -2813,7 +2828,7 @@
                 <a:ea typeface="Calibri" pitchFamily="34" charset="-122"/>
                 <a:cs typeface="Calibri" pitchFamily="34" charset="-120"/>
               </a:rPr>
-              <a:t>9</a:t>
+              <a:t>14</a:t>
             </a:r>
             <a:endParaRPr lang="en-US" sz="1100" dirty="0"/>
           </a:p>
@@ -5905,7 +5920,7 @@
                 <a:ea typeface="Calibri" pitchFamily="34" charset="-122"/>
                 <a:cs typeface="Calibri" pitchFamily="34" charset="-120"/>
               </a:rPr>
-              <a:t>10</a:t>
+              <a:t>15</a:t>
             </a:r>
             <a:endParaRPr lang="en-US" sz="1100" dirty="0"/>
           </a:p>
@@ -6148,7 +6163,7 @@
                 <a:ea typeface="Calibri" pitchFamily="34" charset="-122"/>
                 <a:cs typeface="Calibri" pitchFamily="34" charset="-120"/>
               </a:rPr>
-              <a:t>11</a:t>
+              <a:t>16</a:t>
             </a:r>
             <a:endParaRPr lang="en-US" sz="1100" dirty="0"/>
           </a:p>
@@ -6187,6 +6202,10 @@
             </a:outerShdw>
           </a:effectLst>
         </p:spPr>
+        <p:txBody>
+          <a:bodyPr/>
+          <a:p/>
+        </p:txBody>
       </p:sp>
       <p:sp>
         <p:nvSpPr>
@@ -6207,6 +6226,10 @@
           </a:solidFill>
           <a:ln/>
         </p:spPr>
+        <p:txBody>
+          <a:bodyPr/>
+          <a:p/>
+        </p:txBody>
       </p:sp>
       <p:pic>
         <p:nvPicPr>
@@ -6346,6 +6369,10 @@
             </a:outerShdw>
           </a:effectLst>
         </p:spPr>
+        <p:txBody>
+          <a:bodyPr/>
+          <a:p/>
+        </p:txBody>
       </p:sp>
       <p:sp>
         <p:nvSpPr>
@@ -6366,6 +6393,10 @@
           </a:solidFill>
           <a:ln/>
         </p:spPr>
+        <p:txBody>
+          <a:bodyPr/>
+          <a:p/>
+        </p:txBody>
       </p:sp>
       <p:pic>
         <p:nvPicPr>
@@ -6615,7 +6646,7 @@
                 <a:ea typeface="Calibri" pitchFamily="34" charset="-122"/>
                 <a:cs typeface="Calibri" pitchFamily="34" charset="-120"/>
               </a:rPr>
-              <a:t>12</a:t>
+              <a:t>18</a:t>
             </a:r>
             <a:endParaRPr lang="en-US" sz="1100" dirty="0"/>
           </a:p>
@@ -6654,6 +6685,10 @@
             </a:outerShdw>
           </a:effectLst>
         </p:spPr>
+        <p:txBody>
+          <a:bodyPr/>
+          <a:p/>
+        </p:txBody>
       </p:sp>
       <p:sp>
         <p:nvSpPr>
@@ -6674,6 +6709,10 @@
           </a:solidFill>
           <a:ln/>
         </p:spPr>
+        <p:txBody>
+          <a:bodyPr/>
+          <a:p/>
+        </p:txBody>
       </p:sp>
       <p:pic>
         <p:nvPicPr>
@@ -6813,6 +6852,10 @@
             </a:outerShdw>
           </a:effectLst>
         </p:spPr>
+        <p:txBody>
+          <a:bodyPr/>
+          <a:p/>
+        </p:txBody>
       </p:sp>
       <p:sp>
         <p:nvSpPr>
@@ -6833,6 +6876,10 @@
           </a:solidFill>
           <a:ln/>
         </p:spPr>
+        <p:txBody>
+          <a:bodyPr/>
+          <a:p/>
+        </p:txBody>
       </p:sp>
       <p:pic>
         <p:nvPicPr>
@@ -7082,7 +7129,7 @@
                 <a:ea typeface="Calibri" pitchFamily="34" charset="-122"/>
                 <a:cs typeface="Calibri" pitchFamily="34" charset="-120"/>
               </a:rPr>
-              <a:t>13</a:t>
+              <a:t>20</a:t>
             </a:r>
             <a:endParaRPr lang="en-US" sz="1100" dirty="0"/>
           </a:p>
@@ -7203,6 +7250,10 @@
           </a:solidFill>
           <a:ln/>
         </p:spPr>
+        <p:txBody>
+          <a:bodyPr/>
+          <a:p/>
+        </p:txBody>
       </p:sp>
       <p:pic>
         <p:nvPicPr>
@@ -7413,7 +7464,7 @@
                 <a:ea typeface="Calibri" pitchFamily="34" charset="-122"/>
                 <a:cs typeface="Calibri" pitchFamily="34" charset="-120"/>
               </a:rPr>
-              <a:t>14</a:t>
+              <a:t>22</a:t>
             </a:r>
             <a:endParaRPr lang="en-US" sz="1100" dirty="0"/>
           </a:p>
@@ -7720,7 +7771,7 @@
                 <a:ea typeface="Calibri" pitchFamily="34" charset="-122"/>
                 <a:cs typeface="Calibri" pitchFamily="34" charset="-120"/>
               </a:rPr>
-              <a:t>15</a:t>
+              <a:t>23</a:t>
             </a:r>
             <a:endParaRPr lang="en-US" sz="1100" dirty="0"/>
           </a:p>
@@ -8451,7 +8502,7 @@
                 <a:ea typeface="Calibri" pitchFamily="34" charset="-122"/>
                 <a:cs typeface="Calibri" pitchFamily="34" charset="-120"/>
               </a:rPr>
-              <a:t>16</a:t>
+              <a:t>24</a:t>
             </a:r>
             <a:endParaRPr lang="en-US" sz="1100" dirty="0"/>
           </a:p>
@@ -8954,9 +9005,198 @@
                 <a:ea typeface="Calibri" pitchFamily="34" charset="-122"/>
                 <a:cs typeface="Calibri" pitchFamily="34" charset="-120"/>
               </a:rPr>
-              <a:t>17</a:t>
+              <a:t>25</a:t>
             </a:r>
             <a:endParaRPr lang="en-US" sz="1100" dirty="0"/>
+          </a:p>
+        </p:txBody>
+      </p:sp>
+    </p:spTree>
+  </p:cSld>
+  <p:clrMapOvr>
+    <a:masterClrMapping/>
+  </p:clrMapOvr>
+</p:sld>
+</file>
+
+<file path=ppt/slides/slide19.xml><?xml version="1.0" encoding="utf-8"?>
+<p:sld xmlns:a="http://schemas.openxmlformats.org/drawingml/2006/main" xmlns:p="http://schemas.openxmlformats.org/presentationml/2006/main" xmlns:r="http://schemas.openxmlformats.org/officeDocument/2006/relationships">
+  <p:cSld>
+    <p:bg>
+      <p:bgPr>
+        <a:solidFill>
+          <a:srgbClr val="F4F7F9"/>
+        </a:solidFill>
+        <a:effectLst/>
+      </p:bgPr>
+    </p:bg>
+    <p:spTree>
+      <p:nvGrpSpPr>
+        <p:cNvPr id="1" name=""/>
+        <p:cNvGrpSpPr/>
+        <p:nvPr/>
+      </p:nvGrpSpPr>
+      <p:grpSpPr/>
+      <p:sp>
+        <p:nvSpPr>
+          <p:cNvPr id="2" name="TextBox 1"/>
+          <p:cNvSpPr txBox="1"/>
+          <p:nvPr/>
+        </p:nvSpPr>
+        <p:spPr>
+          <a:xfrm>
+            <a:off x="548640" y="411480"/>
+            <a:ext cx="10515600" cy="320040"/>
+          </a:xfrm>
+          <a:prstGeom prst="rect">
+            <a:avLst/>
+          </a:prstGeom>
+          <a:noFill/>
+        </p:spPr>
+        <p:txBody>
+          <a:bodyPr wrap="square">
+            <a:spAutoFit/>
+          </a:bodyPr>
+          <a:lstStyle/>
+          <a:p>
+            <a:pPr algn="l"/>
+            <a:r>
+              <a:rPr sz="1300" b="1" i="0">
+                <a:solidFill>
+                  <a:srgbClr val="F2A541"/>
+                </a:solidFill>
+                <a:latin typeface="Calibri"/>
+              </a:rPr>
+              <a:t>SOTA EL CAPÓ</a:t>
+            </a:r>
+          </a:p>
+        </p:txBody>
+      </p:sp>
+      <p:sp>
+        <p:nvSpPr>
+          <p:cNvPr id="3" name="TextBox 2"/>
+          <p:cNvSpPr txBox="1"/>
+          <p:nvPr/>
+        </p:nvSpPr>
+        <p:spPr>
+          <a:xfrm>
+            <a:off x="548640" y="685800"/>
+            <a:ext cx="10972800" cy="822960"/>
+          </a:xfrm>
+          <a:prstGeom prst="rect">
+            <a:avLst/>
+          </a:prstGeom>
+          <a:noFill/>
+        </p:spPr>
+        <p:txBody>
+          <a:bodyPr wrap="square">
+            <a:spAutoFit/>
+          </a:bodyPr>
+          <a:lstStyle/>
+          <a:p>
+            <a:pPr algn="l"/>
+            <a:r>
+              <a:rPr sz="2800" b="1" i="0">
+                <a:solidFill>
+                  <a:srgbClr val="16242E"/>
+                </a:solidFill>
+                <a:latin typeface="Cambria"/>
+              </a:rPr>
+              <a:t>RAID 0 — Data striping</a:t>
+            </a:r>
+          </a:p>
+        </p:txBody>
+      </p:sp>
+      <p:pic>
+        <p:nvPicPr>
+          <p:cNvPr id="4" name="Picture 3" descr="raid0.png"/>
+          <p:cNvPicPr>
+            <a:picLocks noChangeAspect="1"/>
+          </p:cNvPicPr>
+          <p:nvPr/>
+        </p:nvPicPr>
+        <p:blipFill>
+          <a:blip r:embed="rId2"/>
+          <a:stretch>
+            <a:fillRect/>
+          </a:stretch>
+        </p:blipFill>
+        <p:spPr>
+          <a:xfrm>
+            <a:off x="4541271" y="1920240"/>
+            <a:ext cx="3109153" cy="4206240"/>
+          </a:xfrm>
+          <a:prstGeom prst="rect">
+            <a:avLst/>
+          </a:prstGeom>
+        </p:spPr>
+      </p:pic>
+      <p:sp>
+        <p:nvSpPr>
+          <p:cNvPr id="5" name="TextBox 4"/>
+          <p:cNvSpPr txBox="1"/>
+          <p:nvPr/>
+        </p:nvSpPr>
+        <p:spPr>
+          <a:xfrm>
+            <a:off x="548640" y="6263640"/>
+            <a:ext cx="11064240" cy="457200"/>
+          </a:xfrm>
+          <a:prstGeom prst="rect">
+            <a:avLst/>
+          </a:prstGeom>
+          <a:noFill/>
+        </p:spPr>
+        <p:txBody>
+          <a:bodyPr wrap="square">
+            <a:spAutoFit/>
+          </a:bodyPr>
+          <a:lstStyle/>
+          <a:p>
+            <a:pPr algn="ctr"/>
+            <a:r>
+              <a:rPr sz="1200" b="0" i="1">
+                <a:solidFill>
+                  <a:srgbClr val="5B6B77"/>
+                </a:solidFill>
+                <a:latin typeface="Calibri"/>
+              </a:rPr>
+              <a:t>RAID 0: la informació es distribueix entre els discos sense redundància.</a:t>
+            </a:r>
+          </a:p>
+        </p:txBody>
+      </p:sp>
+      <p:sp>
+        <p:nvSpPr>
+          <p:cNvPr id="6" name="TextBox 5"/>
+          <p:cNvSpPr txBox="1"/>
+          <p:nvPr/>
+        </p:nvSpPr>
+        <p:spPr>
+          <a:xfrm>
+            <a:off x="11548872" y="6446520"/>
+            <a:ext cx="365760" cy="274320"/>
+          </a:xfrm>
+          <a:prstGeom prst="rect">
+            <a:avLst/>
+          </a:prstGeom>
+          <a:noFill/>
+        </p:spPr>
+        <p:txBody>
+          <a:bodyPr wrap="none">
+            <a:spAutoFit/>
+          </a:bodyPr>
+          <a:lstStyle/>
+          <a:p>
+            <a:pPr algn="r"/>
+            <a:r>
+              <a:rPr sz="1000">
+                <a:solidFill>
+                  <a:srgbClr val="5B6B77"/>
+                </a:solidFill>
+              </a:rPr>
+              <a:t>7</a:t>
+            </a:r>
           </a:p>
         </p:txBody>
       </p:sp>
@@ -9103,7 +9343,7 @@
                 <a:ea typeface="Calibri" pitchFamily="34" charset="-122"/>
                 <a:cs typeface="Calibri" pitchFamily="34" charset="-120"/>
               </a:rPr>
-              <a:t>1</a:t>
+              <a:t>2</a:t>
             </a:r>
             <a:endParaRPr lang="en-US" sz="1100" dirty="0"/>
           </a:p>
@@ -9142,6 +9382,10 @@
             </a:outerShdw>
           </a:effectLst>
         </p:spPr>
+        <p:txBody>
+          <a:bodyPr/>
+          <a:p/>
+        </p:txBody>
       </p:sp>
       <p:sp>
         <p:nvSpPr>
@@ -9162,6 +9406,10 @@
           </a:solidFill>
           <a:ln/>
         </p:spPr>
+        <p:txBody>
+          <a:bodyPr/>
+          <a:p/>
+        </p:txBody>
       </p:sp>
       <p:pic>
         <p:nvPicPr>
@@ -9301,6 +9549,10 @@
             </a:outerShdw>
           </a:effectLst>
         </p:spPr>
+        <p:txBody>
+          <a:bodyPr/>
+          <a:p/>
+        </p:txBody>
       </p:sp>
       <p:sp>
         <p:nvSpPr>
@@ -9321,6 +9573,10 @@
           </a:solidFill>
           <a:ln/>
         </p:spPr>
+        <p:txBody>
+          <a:bodyPr/>
+          <a:p/>
+        </p:txBody>
       </p:sp>
       <p:pic>
         <p:nvPicPr>
@@ -9460,6 +9716,10 @@
             </a:outerShdw>
           </a:effectLst>
         </p:spPr>
+        <p:txBody>
+          <a:bodyPr/>
+          <a:p/>
+        </p:txBody>
       </p:sp>
       <p:sp>
         <p:nvSpPr>
@@ -9480,6 +9740,10 @@
           </a:solidFill>
           <a:ln/>
         </p:spPr>
+        <p:txBody>
+          <a:bodyPr/>
+          <a:p/>
+        </p:txBody>
       </p:sp>
       <p:pic>
         <p:nvPicPr>
@@ -9583,6 +9847,1258 @@
               <a:t>Les diferents maneres de centralitzar l'emmagatzematge a nivell d'empresa, del més senzill al més professional.</a:t>
             </a:r>
             <a:endParaRPr lang="en-US" sz="1250" dirty="0"/>
+          </a:p>
+        </p:txBody>
+      </p:sp>
+    </p:spTree>
+  </p:cSld>
+  <p:clrMapOvr>
+    <a:masterClrMapping/>
+  </p:clrMapOvr>
+</p:sld>
+</file>
+
+<file path=ppt/slides/slide20.xml><?xml version="1.0" encoding="utf-8"?>
+<p:sld xmlns:a="http://schemas.openxmlformats.org/drawingml/2006/main" xmlns:p="http://schemas.openxmlformats.org/presentationml/2006/main" xmlns:r="http://schemas.openxmlformats.org/officeDocument/2006/relationships">
+  <p:cSld>
+    <p:bg>
+      <p:bgPr>
+        <a:solidFill>
+          <a:srgbClr val="F4F7F9"/>
+        </a:solidFill>
+        <a:effectLst/>
+      </p:bgPr>
+    </p:bg>
+    <p:spTree>
+      <p:nvGrpSpPr>
+        <p:cNvPr id="1" name=""/>
+        <p:cNvGrpSpPr/>
+        <p:nvPr/>
+      </p:nvGrpSpPr>
+      <p:grpSpPr/>
+      <p:sp>
+        <p:nvSpPr>
+          <p:cNvPr id="2" name="TextBox 1"/>
+          <p:cNvSpPr txBox="1"/>
+          <p:nvPr/>
+        </p:nvSpPr>
+        <p:spPr>
+          <a:xfrm>
+            <a:off x="548640" y="411480"/>
+            <a:ext cx="10515600" cy="320040"/>
+          </a:xfrm>
+          <a:prstGeom prst="rect">
+            <a:avLst/>
+          </a:prstGeom>
+          <a:noFill/>
+        </p:spPr>
+        <p:txBody>
+          <a:bodyPr wrap="square">
+            <a:spAutoFit/>
+          </a:bodyPr>
+          <a:lstStyle/>
+          <a:p>
+            <a:pPr algn="l"/>
+            <a:r>
+              <a:rPr sz="1300" b="1" i="0">
+                <a:solidFill>
+                  <a:srgbClr val="F2A541"/>
+                </a:solidFill>
+                <a:latin typeface="Calibri"/>
+              </a:rPr>
+              <a:t>SOTA EL CAPÓ</a:t>
+            </a:r>
+          </a:p>
+        </p:txBody>
+      </p:sp>
+      <p:sp>
+        <p:nvSpPr>
+          <p:cNvPr id="3" name="TextBox 2"/>
+          <p:cNvSpPr txBox="1"/>
+          <p:nvPr/>
+        </p:nvSpPr>
+        <p:spPr>
+          <a:xfrm>
+            <a:off x="548640" y="685800"/>
+            <a:ext cx="10972800" cy="822960"/>
+          </a:xfrm>
+          <a:prstGeom prst="rect">
+            <a:avLst/>
+          </a:prstGeom>
+          <a:noFill/>
+        </p:spPr>
+        <p:txBody>
+          <a:bodyPr wrap="square">
+            <a:spAutoFit/>
+          </a:bodyPr>
+          <a:lstStyle/>
+          <a:p>
+            <a:pPr algn="l"/>
+            <a:r>
+              <a:rPr sz="2800" b="1" i="0">
+                <a:solidFill>
+                  <a:srgbClr val="16242E"/>
+                </a:solidFill>
+                <a:latin typeface="Cambria"/>
+              </a:rPr>
+              <a:t>RAID 1 — Mirror</a:t>
+            </a:r>
+          </a:p>
+        </p:txBody>
+      </p:sp>
+      <p:pic>
+        <p:nvPicPr>
+          <p:cNvPr id="4" name="Picture 3" descr="raid1.png"/>
+          <p:cNvPicPr>
+            <a:picLocks noChangeAspect="1"/>
+          </p:cNvPicPr>
+          <p:nvPr/>
+        </p:nvPicPr>
+        <p:blipFill>
+          <a:blip r:embed="rId2"/>
+          <a:stretch>
+            <a:fillRect/>
+          </a:stretch>
+        </p:blipFill>
+        <p:spPr>
+          <a:xfrm>
+            <a:off x="4541271" y="1920240"/>
+            <a:ext cx="3109153" cy="4206240"/>
+          </a:xfrm>
+          <a:prstGeom prst="rect">
+            <a:avLst/>
+          </a:prstGeom>
+        </p:spPr>
+      </p:pic>
+      <p:sp>
+        <p:nvSpPr>
+          <p:cNvPr id="5" name="TextBox 4"/>
+          <p:cNvSpPr txBox="1"/>
+          <p:nvPr/>
+        </p:nvSpPr>
+        <p:spPr>
+          <a:xfrm>
+            <a:off x="548640" y="6263640"/>
+            <a:ext cx="11064240" cy="457200"/>
+          </a:xfrm>
+          <a:prstGeom prst="rect">
+            <a:avLst/>
+          </a:prstGeom>
+          <a:noFill/>
+        </p:spPr>
+        <p:txBody>
+          <a:bodyPr wrap="square">
+            <a:spAutoFit/>
+          </a:bodyPr>
+          <a:lstStyle/>
+          <a:p>
+            <a:pPr algn="ctr"/>
+            <a:r>
+              <a:rPr sz="1200" b="0" i="1">
+                <a:solidFill>
+                  <a:srgbClr val="5B6B77"/>
+                </a:solidFill>
+                <a:latin typeface="Calibri"/>
+              </a:rPr>
+              <a:t>RAID 1: còpia exacta (mirall) de la informació entre dos discos.</a:t>
+            </a:r>
+          </a:p>
+        </p:txBody>
+      </p:sp>
+      <p:sp>
+        <p:nvSpPr>
+          <p:cNvPr id="6" name="TextBox 5"/>
+          <p:cNvSpPr txBox="1"/>
+          <p:nvPr/>
+        </p:nvSpPr>
+        <p:spPr>
+          <a:xfrm>
+            <a:off x="11548872" y="6446520"/>
+            <a:ext cx="365760" cy="274320"/>
+          </a:xfrm>
+          <a:prstGeom prst="rect">
+            <a:avLst/>
+          </a:prstGeom>
+          <a:noFill/>
+        </p:spPr>
+        <p:txBody>
+          <a:bodyPr wrap="none">
+            <a:spAutoFit/>
+          </a:bodyPr>
+          <a:lstStyle/>
+          <a:p>
+            <a:pPr algn="r"/>
+            <a:r>
+              <a:rPr sz="1000">
+                <a:solidFill>
+                  <a:srgbClr val="5B6B77"/>
+                </a:solidFill>
+              </a:rPr>
+              <a:t>9</a:t>
+            </a:r>
+          </a:p>
+        </p:txBody>
+      </p:sp>
+    </p:spTree>
+  </p:cSld>
+  <p:clrMapOvr>
+    <a:masterClrMapping/>
+  </p:clrMapOvr>
+</p:sld>
+</file>
+
+<file path=ppt/slides/slide21.xml><?xml version="1.0" encoding="utf-8"?>
+<p:sld xmlns:a="http://schemas.openxmlformats.org/drawingml/2006/main" xmlns:p="http://schemas.openxmlformats.org/presentationml/2006/main" xmlns:r="http://schemas.openxmlformats.org/officeDocument/2006/relationships">
+  <p:cSld>
+    <p:bg>
+      <p:bgPr>
+        <a:solidFill>
+          <a:srgbClr val="F4F7F9"/>
+        </a:solidFill>
+        <a:effectLst/>
+      </p:bgPr>
+    </p:bg>
+    <p:spTree>
+      <p:nvGrpSpPr>
+        <p:cNvPr id="1" name=""/>
+        <p:cNvGrpSpPr/>
+        <p:nvPr/>
+      </p:nvGrpSpPr>
+      <p:grpSpPr/>
+      <p:sp>
+        <p:nvSpPr>
+          <p:cNvPr id="2" name="TextBox 1"/>
+          <p:cNvSpPr txBox="1"/>
+          <p:nvPr/>
+        </p:nvSpPr>
+        <p:spPr>
+          <a:xfrm>
+            <a:off x="548640" y="411480"/>
+            <a:ext cx="10515600" cy="320040"/>
+          </a:xfrm>
+          <a:prstGeom prst="rect">
+            <a:avLst/>
+          </a:prstGeom>
+          <a:noFill/>
+        </p:spPr>
+        <p:txBody>
+          <a:bodyPr wrap="square">
+            <a:spAutoFit/>
+          </a:bodyPr>
+          <a:lstStyle/>
+          <a:p>
+            <a:pPr algn="l"/>
+            <a:r>
+              <a:rPr sz="1300" b="1" i="0">
+                <a:solidFill>
+                  <a:srgbClr val="F2A541"/>
+                </a:solidFill>
+                <a:latin typeface="Calibri"/>
+              </a:rPr>
+              <a:t>SOTA EL CAPÓ</a:t>
+            </a:r>
+          </a:p>
+        </p:txBody>
+      </p:sp>
+      <p:sp>
+        <p:nvSpPr>
+          <p:cNvPr id="3" name="TextBox 2"/>
+          <p:cNvSpPr txBox="1"/>
+          <p:nvPr/>
+        </p:nvSpPr>
+        <p:spPr>
+          <a:xfrm>
+            <a:off x="548640" y="685800"/>
+            <a:ext cx="10972800" cy="822960"/>
+          </a:xfrm>
+          <a:prstGeom prst="rect">
+            <a:avLst/>
+          </a:prstGeom>
+          <a:noFill/>
+        </p:spPr>
+        <p:txBody>
+          <a:bodyPr wrap="square">
+            <a:spAutoFit/>
+          </a:bodyPr>
+          <a:lstStyle/>
+          <a:p>
+            <a:pPr algn="l"/>
+            <a:r>
+              <a:rPr sz="2800" b="1" i="0">
+                <a:solidFill>
+                  <a:srgbClr val="16242E"/>
+                </a:solidFill>
+                <a:latin typeface="Cambria"/>
+              </a:rPr>
+              <a:t>RAID 5 i 6 — Paritat distribuïda</a:t>
+            </a:r>
+          </a:p>
+        </p:txBody>
+      </p:sp>
+      <p:pic>
+        <p:nvPicPr>
+          <p:cNvPr id="4" name="Picture 3" descr="raid5.png"/>
+          <p:cNvPicPr>
+            <a:picLocks noChangeAspect="1"/>
+          </p:cNvPicPr>
+          <p:nvPr/>
+        </p:nvPicPr>
+        <p:blipFill>
+          <a:blip r:embed="rId2"/>
+          <a:stretch>
+            <a:fillRect/>
+          </a:stretch>
+        </p:blipFill>
+        <p:spPr>
+          <a:xfrm>
+            <a:off x="1015173" y="1965960"/>
+            <a:ext cx="4385539" cy="3840480"/>
+          </a:xfrm>
+          <a:prstGeom prst="rect">
+            <a:avLst/>
+          </a:prstGeom>
+        </p:spPr>
+      </p:pic>
+      <p:sp>
+        <p:nvSpPr>
+          <p:cNvPr id="5" name="TextBox 4"/>
+          <p:cNvSpPr txBox="1"/>
+          <p:nvPr/>
+        </p:nvSpPr>
+        <p:spPr>
+          <a:xfrm>
+            <a:off x="548640" y="5943600"/>
+            <a:ext cx="5318607" cy="548640"/>
+          </a:xfrm>
+          <a:prstGeom prst="rect">
+            <a:avLst/>
+          </a:prstGeom>
+          <a:noFill/>
+        </p:spPr>
+        <p:txBody>
+          <a:bodyPr wrap="square">
+            <a:spAutoFit/>
+          </a:bodyPr>
+          <a:lstStyle/>
+          <a:p>
+            <a:pPr algn="ctr"/>
+            <a:r>
+              <a:rPr sz="1150" b="0" i="1">
+                <a:solidFill>
+                  <a:srgbClr val="5B6B77"/>
+                </a:solidFill>
+                <a:latin typeface="Calibri"/>
+              </a:rPr>
+              <a:t>RAID 5: paritat distribuïda (mínim 3 discos).</a:t>
+            </a:r>
+          </a:p>
+        </p:txBody>
+      </p:sp>
+      <p:pic>
+        <p:nvPicPr>
+          <p:cNvPr id="6" name="Picture 5" descr="raid6.png"/>
+          <p:cNvPicPr>
+            <a:picLocks noChangeAspect="1"/>
+          </p:cNvPicPr>
+          <p:nvPr/>
+        </p:nvPicPr>
+        <p:blipFill>
+          <a:blip r:embed="rId3"/>
+          <a:stretch>
+            <a:fillRect/>
+          </a:stretch>
+        </p:blipFill>
+        <p:spPr>
+          <a:xfrm>
+            <a:off x="6606311" y="1965960"/>
+            <a:ext cx="4754880" cy="3077086"/>
+          </a:xfrm>
+          <a:prstGeom prst="rect">
+            <a:avLst/>
+          </a:prstGeom>
+        </p:spPr>
+      </p:pic>
+      <p:sp>
+        <p:nvSpPr>
+          <p:cNvPr id="7" name="TextBox 6"/>
+          <p:cNvSpPr txBox="1"/>
+          <p:nvPr/>
+        </p:nvSpPr>
+        <p:spPr>
+          <a:xfrm>
+            <a:off x="6324447" y="5180206"/>
+            <a:ext cx="5318607" cy="548640"/>
+          </a:xfrm>
+          <a:prstGeom prst="rect">
+            <a:avLst/>
+          </a:prstGeom>
+          <a:noFill/>
+        </p:spPr>
+        <p:txBody>
+          <a:bodyPr wrap="square">
+            <a:spAutoFit/>
+          </a:bodyPr>
+          <a:lstStyle/>
+          <a:p>
+            <a:pPr algn="ctr"/>
+            <a:r>
+              <a:rPr sz="1150" b="0" i="1">
+                <a:solidFill>
+                  <a:srgbClr val="5B6B77"/>
+                </a:solidFill>
+                <a:latin typeface="Calibri"/>
+              </a:rPr>
+              <a:t>RAID 6: doble paritat (mínim 4 discos).</a:t>
+            </a:r>
+          </a:p>
+        </p:txBody>
+      </p:sp>
+      <p:sp>
+        <p:nvSpPr>
+          <p:cNvPr id="8" name="TextBox 7"/>
+          <p:cNvSpPr txBox="1"/>
+          <p:nvPr/>
+        </p:nvSpPr>
+        <p:spPr>
+          <a:xfrm>
+            <a:off x="11548872" y="6446520"/>
+            <a:ext cx="365760" cy="274320"/>
+          </a:xfrm>
+          <a:prstGeom prst="rect">
+            <a:avLst/>
+          </a:prstGeom>
+          <a:noFill/>
+        </p:spPr>
+        <p:txBody>
+          <a:bodyPr wrap="none">
+            <a:spAutoFit/>
+          </a:bodyPr>
+          <a:lstStyle/>
+          <a:p>
+            <a:pPr algn="r"/>
+            <a:r>
+              <a:rPr sz="1000">
+                <a:solidFill>
+                  <a:srgbClr val="5B6B77"/>
+                </a:solidFill>
+              </a:rPr>
+              <a:t>11</a:t>
+            </a:r>
+          </a:p>
+        </p:txBody>
+      </p:sp>
+    </p:spTree>
+  </p:cSld>
+  <p:clrMapOvr>
+    <a:masterClrMapping/>
+  </p:clrMapOvr>
+</p:sld>
+</file>
+
+<file path=ppt/slides/slide22.xml><?xml version="1.0" encoding="utf-8"?>
+<p:sld xmlns:a="http://schemas.openxmlformats.org/drawingml/2006/main" xmlns:p="http://schemas.openxmlformats.org/presentationml/2006/main" xmlns:r="http://schemas.openxmlformats.org/officeDocument/2006/relationships">
+  <p:cSld>
+    <p:bg>
+      <p:bgPr>
+        <a:solidFill>
+          <a:srgbClr val="F4F7F9"/>
+        </a:solidFill>
+        <a:effectLst/>
+      </p:bgPr>
+    </p:bg>
+    <p:spTree>
+      <p:nvGrpSpPr>
+        <p:cNvPr id="1" name=""/>
+        <p:cNvGrpSpPr/>
+        <p:nvPr/>
+      </p:nvGrpSpPr>
+      <p:grpSpPr/>
+      <p:sp>
+        <p:nvSpPr>
+          <p:cNvPr id="2" name="TextBox 1"/>
+          <p:cNvSpPr txBox="1"/>
+          <p:nvPr/>
+        </p:nvSpPr>
+        <p:spPr>
+          <a:xfrm>
+            <a:off x="548640" y="411480"/>
+            <a:ext cx="10515600" cy="320040"/>
+          </a:xfrm>
+          <a:prstGeom prst="rect">
+            <a:avLst/>
+          </a:prstGeom>
+          <a:noFill/>
+        </p:spPr>
+        <p:txBody>
+          <a:bodyPr wrap="square">
+            <a:spAutoFit/>
+          </a:bodyPr>
+          <a:lstStyle/>
+          <a:p>
+            <a:pPr algn="l"/>
+            <a:r>
+              <a:rPr sz="1300" b="1" i="0">
+                <a:solidFill>
+                  <a:srgbClr val="F2A541"/>
+                </a:solidFill>
+                <a:latin typeface="Calibri"/>
+              </a:rPr>
+              <a:t>SOTA EL CAPÓ</a:t>
+            </a:r>
+          </a:p>
+        </p:txBody>
+      </p:sp>
+      <p:sp>
+        <p:nvSpPr>
+          <p:cNvPr id="3" name="TextBox 2"/>
+          <p:cNvSpPr txBox="1"/>
+          <p:nvPr/>
+        </p:nvSpPr>
+        <p:spPr>
+          <a:xfrm>
+            <a:off x="548640" y="685800"/>
+            <a:ext cx="10972800" cy="822960"/>
+          </a:xfrm>
+          <a:prstGeom prst="rect">
+            <a:avLst/>
+          </a:prstGeom>
+          <a:noFill/>
+        </p:spPr>
+        <p:txBody>
+          <a:bodyPr wrap="square">
+            <a:spAutoFit/>
+          </a:bodyPr>
+          <a:lstStyle/>
+          <a:p>
+            <a:pPr algn="l"/>
+            <a:r>
+              <a:rPr sz="2800" b="1" i="0">
+                <a:solidFill>
+                  <a:srgbClr val="16242E"/>
+                </a:solidFill>
+                <a:latin typeface="Cambria"/>
+              </a:rPr>
+              <a:t>RAID 10 — El millor de dos mons</a:t>
+            </a:r>
+          </a:p>
+        </p:txBody>
+      </p:sp>
+      <p:pic>
+        <p:nvPicPr>
+          <p:cNvPr id="4" name="Picture 3" descr="raid10.png"/>
+          <p:cNvPicPr>
+            <a:picLocks noChangeAspect="1"/>
+          </p:cNvPicPr>
+          <p:nvPr/>
+        </p:nvPicPr>
+        <p:blipFill>
+          <a:blip r:embed="rId2"/>
+          <a:stretch>
+            <a:fillRect/>
+          </a:stretch>
+        </p:blipFill>
+        <p:spPr>
+          <a:xfrm>
+            <a:off x="3124047" y="1920240"/>
+            <a:ext cx="5943600" cy="3846358"/>
+          </a:xfrm>
+          <a:prstGeom prst="rect">
+            <a:avLst/>
+          </a:prstGeom>
+        </p:spPr>
+      </p:pic>
+      <p:sp>
+        <p:nvSpPr>
+          <p:cNvPr id="5" name="TextBox 4"/>
+          <p:cNvSpPr txBox="1"/>
+          <p:nvPr/>
+        </p:nvSpPr>
+        <p:spPr>
+          <a:xfrm>
+            <a:off x="548640" y="5903758"/>
+            <a:ext cx="11064240" cy="457200"/>
+          </a:xfrm>
+          <a:prstGeom prst="rect">
+            <a:avLst/>
+          </a:prstGeom>
+          <a:noFill/>
+        </p:spPr>
+        <p:txBody>
+          <a:bodyPr wrap="square">
+            <a:spAutoFit/>
+          </a:bodyPr>
+          <a:lstStyle/>
+          <a:p>
+            <a:pPr algn="ctr"/>
+            <a:r>
+              <a:rPr sz="1200" b="0" i="1">
+                <a:solidFill>
+                  <a:srgbClr val="5B6B77"/>
+                </a:solidFill>
+                <a:latin typeface="Calibri"/>
+              </a:rPr>
+              <a:t>RAID 10 combina mirall (RAID 1) i distribució (RAID 0).</a:t>
+            </a:r>
+          </a:p>
+        </p:txBody>
+      </p:sp>
+      <p:sp>
+        <p:nvSpPr>
+          <p:cNvPr id="6" name="TextBox 5"/>
+          <p:cNvSpPr txBox="1"/>
+          <p:nvPr/>
+        </p:nvSpPr>
+        <p:spPr>
+          <a:xfrm>
+            <a:off x="11548872" y="6446520"/>
+            <a:ext cx="365760" cy="274320"/>
+          </a:xfrm>
+          <a:prstGeom prst="rect">
+            <a:avLst/>
+          </a:prstGeom>
+          <a:noFill/>
+        </p:spPr>
+        <p:txBody>
+          <a:bodyPr wrap="none">
+            <a:spAutoFit/>
+          </a:bodyPr>
+          <a:lstStyle/>
+          <a:p>
+            <a:pPr algn="r"/>
+            <a:r>
+              <a:rPr sz="1000">
+                <a:solidFill>
+                  <a:srgbClr val="5B6B77"/>
+                </a:solidFill>
+              </a:rPr>
+              <a:t>13</a:t>
+            </a:r>
+          </a:p>
+        </p:txBody>
+      </p:sp>
+    </p:spTree>
+  </p:cSld>
+  <p:clrMapOvr>
+    <a:masterClrMapping/>
+  </p:clrMapOvr>
+</p:sld>
+</file>
+
+<file path=ppt/slides/slide23.xml><?xml version="1.0" encoding="utf-8"?>
+<p:sld xmlns:a="http://schemas.openxmlformats.org/drawingml/2006/main" xmlns:p="http://schemas.openxmlformats.org/presentationml/2006/main" xmlns:r="http://schemas.openxmlformats.org/officeDocument/2006/relationships">
+  <p:cSld>
+    <p:bg>
+      <p:bgPr>
+        <a:solidFill>
+          <a:srgbClr val="F4F7F9"/>
+        </a:solidFill>
+        <a:effectLst/>
+      </p:bgPr>
+    </p:bg>
+    <p:spTree>
+      <p:nvGrpSpPr>
+        <p:cNvPr id="1" name=""/>
+        <p:cNvGrpSpPr/>
+        <p:nvPr/>
+      </p:nvGrpSpPr>
+      <p:grpSpPr/>
+      <p:sp>
+        <p:nvSpPr>
+          <p:cNvPr id="2" name="TextBox 1"/>
+          <p:cNvSpPr txBox="1"/>
+          <p:nvPr/>
+        </p:nvSpPr>
+        <p:spPr>
+          <a:xfrm>
+            <a:off x="548640" y="411480"/>
+            <a:ext cx="10515600" cy="320040"/>
+          </a:xfrm>
+          <a:prstGeom prst="rect">
+            <a:avLst/>
+          </a:prstGeom>
+          <a:noFill/>
+        </p:spPr>
+        <p:txBody>
+          <a:bodyPr wrap="square">
+            <a:spAutoFit/>
+          </a:bodyPr>
+          <a:lstStyle/>
+          <a:p>
+            <a:pPr algn="l"/>
+            <a:r>
+              <a:rPr sz="1300" b="1" i="0">
+                <a:solidFill>
+                  <a:srgbClr val="F2A541"/>
+                </a:solidFill>
+                <a:latin typeface="Calibri"/>
+              </a:rPr>
+              <a:t>UN EXEMPLE REAL</a:t>
+            </a:r>
+          </a:p>
+        </p:txBody>
+      </p:sp>
+      <p:sp>
+        <p:nvSpPr>
+          <p:cNvPr id="3" name="TextBox 2"/>
+          <p:cNvSpPr txBox="1"/>
+          <p:nvPr/>
+        </p:nvSpPr>
+        <p:spPr>
+          <a:xfrm>
+            <a:off x="548640" y="685800"/>
+            <a:ext cx="10972800" cy="822960"/>
+          </a:xfrm>
+          <a:prstGeom prst="rect">
+            <a:avLst/>
+          </a:prstGeom>
+          <a:noFill/>
+        </p:spPr>
+        <p:txBody>
+          <a:bodyPr wrap="square">
+            <a:spAutoFit/>
+          </a:bodyPr>
+          <a:lstStyle/>
+          <a:p>
+            <a:pPr algn="l"/>
+            <a:r>
+              <a:rPr sz="2800" b="1" i="0">
+                <a:solidFill>
+                  <a:srgbClr val="16242E"/>
+                </a:solidFill>
+                <a:latin typeface="Cambria"/>
+              </a:rPr>
+              <a:t>DAS — Direct Attached Storage</a:t>
+            </a:r>
+          </a:p>
+        </p:txBody>
+      </p:sp>
+      <p:pic>
+        <p:nvPicPr>
+          <p:cNvPr id="4" name="Picture 3" descr="hp-proliant.jpg"/>
+          <p:cNvPicPr>
+            <a:picLocks noChangeAspect="1"/>
+          </p:cNvPicPr>
+          <p:nvPr/>
+        </p:nvPicPr>
+        <p:blipFill>
+          <a:blip r:embed="rId2"/>
+          <a:stretch>
+            <a:fillRect/>
+          </a:stretch>
+        </p:blipFill>
+        <p:spPr>
+          <a:xfrm>
+            <a:off x="830503" y="1965960"/>
+            <a:ext cx="4754880" cy="1882139"/>
+          </a:xfrm>
+          <a:prstGeom prst="rect">
+            <a:avLst/>
+          </a:prstGeom>
+        </p:spPr>
+      </p:pic>
+      <p:sp>
+        <p:nvSpPr>
+          <p:cNvPr id="5" name="TextBox 4"/>
+          <p:cNvSpPr txBox="1"/>
+          <p:nvPr/>
+        </p:nvSpPr>
+        <p:spPr>
+          <a:xfrm>
+            <a:off x="548640" y="3985260"/>
+            <a:ext cx="5318607" cy="548640"/>
+          </a:xfrm>
+          <a:prstGeom prst="rect">
+            <a:avLst/>
+          </a:prstGeom>
+          <a:noFill/>
+        </p:spPr>
+        <p:txBody>
+          <a:bodyPr wrap="square">
+            <a:spAutoFit/>
+          </a:bodyPr>
+          <a:lstStyle/>
+          <a:p>
+            <a:pPr algn="ctr"/>
+            <a:r>
+              <a:rPr sz="1150" b="0" i="1">
+                <a:solidFill>
+                  <a:srgbClr val="5B6B77"/>
+                </a:solidFill>
+                <a:latin typeface="Calibri"/>
+              </a:rPr>
+              <a:t>Servidor HP ProLiant DL380 Gen9, usat habitualment com a DAS.</a:t>
+            </a:r>
+          </a:p>
+        </p:txBody>
+      </p:sp>
+      <p:pic>
+        <p:nvPicPr>
+          <p:cNvPr id="6" name="Picture 5" descr="das.png"/>
+          <p:cNvPicPr>
+            <a:picLocks noChangeAspect="1"/>
+          </p:cNvPicPr>
+          <p:nvPr/>
+        </p:nvPicPr>
+        <p:blipFill>
+          <a:blip r:embed="rId3"/>
+          <a:stretch>
+            <a:fillRect/>
+          </a:stretch>
+        </p:blipFill>
+        <p:spPr>
+          <a:xfrm>
+            <a:off x="6606311" y="1965960"/>
+            <a:ext cx="4754880" cy="2960236"/>
+          </a:xfrm>
+          <a:prstGeom prst="rect">
+            <a:avLst/>
+          </a:prstGeom>
+        </p:spPr>
+      </p:pic>
+      <p:sp>
+        <p:nvSpPr>
+          <p:cNvPr id="7" name="TextBox 6"/>
+          <p:cNvSpPr txBox="1"/>
+          <p:nvPr/>
+        </p:nvSpPr>
+        <p:spPr>
+          <a:xfrm>
+            <a:off x="6324447" y="5063356"/>
+            <a:ext cx="5318607" cy="548640"/>
+          </a:xfrm>
+          <a:prstGeom prst="rect">
+            <a:avLst/>
+          </a:prstGeom>
+          <a:noFill/>
+        </p:spPr>
+        <p:txBody>
+          <a:bodyPr wrap="square">
+            <a:spAutoFit/>
+          </a:bodyPr>
+          <a:lstStyle/>
+          <a:p>
+            <a:pPr algn="ctr"/>
+            <a:r>
+              <a:rPr sz="1150" b="0" i="1">
+                <a:solidFill>
+                  <a:srgbClr val="5B6B77"/>
+                </a:solidFill>
+                <a:latin typeface="Calibri"/>
+              </a:rPr>
+              <a:t>Cada servidor exposa el seu propi emmagatzematge directament a la xarxa.</a:t>
+            </a:r>
+          </a:p>
+        </p:txBody>
+      </p:sp>
+      <p:sp>
+        <p:nvSpPr>
+          <p:cNvPr id="8" name="TextBox 7"/>
+          <p:cNvSpPr txBox="1"/>
+          <p:nvPr/>
+        </p:nvSpPr>
+        <p:spPr>
+          <a:xfrm>
+            <a:off x="11548872" y="6446520"/>
+            <a:ext cx="365760" cy="274320"/>
+          </a:xfrm>
+          <a:prstGeom prst="rect">
+            <a:avLst/>
+          </a:prstGeom>
+          <a:noFill/>
+        </p:spPr>
+        <p:txBody>
+          <a:bodyPr wrap="none">
+            <a:spAutoFit/>
+          </a:bodyPr>
+          <a:lstStyle/>
+          <a:p>
+            <a:pPr algn="r"/>
+            <a:r>
+              <a:rPr sz="1000">
+                <a:solidFill>
+                  <a:srgbClr val="5B6B77"/>
+                </a:solidFill>
+              </a:rPr>
+              <a:t>17</a:t>
+            </a:r>
+          </a:p>
+        </p:txBody>
+      </p:sp>
+    </p:spTree>
+  </p:cSld>
+  <p:clrMapOvr>
+    <a:masterClrMapping/>
+  </p:clrMapOvr>
+</p:sld>
+</file>
+
+<file path=ppt/slides/slide24.xml><?xml version="1.0" encoding="utf-8"?>
+<p:sld xmlns:a="http://schemas.openxmlformats.org/drawingml/2006/main" xmlns:p="http://schemas.openxmlformats.org/presentationml/2006/main" xmlns:r="http://schemas.openxmlformats.org/officeDocument/2006/relationships">
+  <p:cSld>
+    <p:bg>
+      <p:bgPr>
+        <a:solidFill>
+          <a:srgbClr val="F4F7F9"/>
+        </a:solidFill>
+        <a:effectLst/>
+      </p:bgPr>
+    </p:bg>
+    <p:spTree>
+      <p:nvGrpSpPr>
+        <p:cNvPr id="1" name=""/>
+        <p:cNvGrpSpPr/>
+        <p:nvPr/>
+      </p:nvGrpSpPr>
+      <p:grpSpPr/>
+      <p:sp>
+        <p:nvSpPr>
+          <p:cNvPr id="2" name="TextBox 1"/>
+          <p:cNvSpPr txBox="1"/>
+          <p:nvPr/>
+        </p:nvSpPr>
+        <p:spPr>
+          <a:xfrm>
+            <a:off x="548640" y="411480"/>
+            <a:ext cx="10515600" cy="320040"/>
+          </a:xfrm>
+          <a:prstGeom prst="rect">
+            <a:avLst/>
+          </a:prstGeom>
+          <a:noFill/>
+        </p:spPr>
+        <p:txBody>
+          <a:bodyPr wrap="square">
+            <a:spAutoFit/>
+          </a:bodyPr>
+          <a:lstStyle/>
+          <a:p>
+            <a:pPr algn="l"/>
+            <a:r>
+              <a:rPr sz="1300" b="1" i="0">
+                <a:solidFill>
+                  <a:srgbClr val="F2A541"/>
+                </a:solidFill>
+                <a:latin typeface="Calibri"/>
+              </a:rPr>
+              <a:t>UN EXEMPLE REAL</a:t>
+            </a:r>
+          </a:p>
+        </p:txBody>
+      </p:sp>
+      <p:sp>
+        <p:nvSpPr>
+          <p:cNvPr id="3" name="TextBox 2"/>
+          <p:cNvSpPr txBox="1"/>
+          <p:nvPr/>
+        </p:nvSpPr>
+        <p:spPr>
+          <a:xfrm>
+            <a:off x="548640" y="685800"/>
+            <a:ext cx="10972800" cy="822960"/>
+          </a:xfrm>
+          <a:prstGeom prst="rect">
+            <a:avLst/>
+          </a:prstGeom>
+          <a:noFill/>
+        </p:spPr>
+        <p:txBody>
+          <a:bodyPr wrap="square">
+            <a:spAutoFit/>
+          </a:bodyPr>
+          <a:lstStyle/>
+          <a:p>
+            <a:pPr algn="l"/>
+            <a:r>
+              <a:rPr sz="2800" b="1" i="0">
+                <a:solidFill>
+                  <a:srgbClr val="16242E"/>
+                </a:solidFill>
+                <a:latin typeface="Cambria"/>
+              </a:rPr>
+              <a:t>NAS — Network Attached Storage</a:t>
+            </a:r>
+          </a:p>
+        </p:txBody>
+      </p:sp>
+      <p:pic>
+        <p:nvPicPr>
+          <p:cNvPr id="4" name="Picture 3" descr="nas.png"/>
+          <p:cNvPicPr>
+            <a:picLocks noChangeAspect="1"/>
+          </p:cNvPicPr>
+          <p:nvPr/>
+        </p:nvPicPr>
+        <p:blipFill>
+          <a:blip r:embed="rId2"/>
+          <a:stretch>
+            <a:fillRect/>
+          </a:stretch>
+        </p:blipFill>
+        <p:spPr>
+          <a:xfrm>
+            <a:off x="2666847" y="1920240"/>
+            <a:ext cx="6858000" cy="2981325"/>
+          </a:xfrm>
+          <a:prstGeom prst="rect">
+            <a:avLst/>
+          </a:prstGeom>
+        </p:spPr>
+      </p:pic>
+      <p:sp>
+        <p:nvSpPr>
+          <p:cNvPr id="5" name="TextBox 4"/>
+          <p:cNvSpPr txBox="1"/>
+          <p:nvPr/>
+        </p:nvSpPr>
+        <p:spPr>
+          <a:xfrm>
+            <a:off x="548640" y="5038725"/>
+            <a:ext cx="11064240" cy="457200"/>
+          </a:xfrm>
+          <a:prstGeom prst="rect">
+            <a:avLst/>
+          </a:prstGeom>
+          <a:noFill/>
+        </p:spPr>
+        <p:txBody>
+          <a:bodyPr wrap="square">
+            <a:spAutoFit/>
+          </a:bodyPr>
+          <a:lstStyle/>
+          <a:p>
+            <a:pPr algn="ctr"/>
+            <a:r>
+              <a:rPr sz="1200" b="0" i="1">
+                <a:solidFill>
+                  <a:srgbClr val="5B6B77"/>
+                </a:solidFill>
+                <a:latin typeface="Calibri"/>
+              </a:rPr>
+              <a:t>Un NAS connecta diversos clients a través d'un switch; a la dreta, un dispositiu NAS real.</a:t>
+            </a:r>
+          </a:p>
+        </p:txBody>
+      </p:sp>
+      <p:sp>
+        <p:nvSpPr>
+          <p:cNvPr id="6" name="TextBox 5"/>
+          <p:cNvSpPr txBox="1"/>
+          <p:nvPr/>
+        </p:nvSpPr>
+        <p:spPr>
+          <a:xfrm>
+            <a:off x="11548872" y="6446520"/>
+            <a:ext cx="365760" cy="274320"/>
+          </a:xfrm>
+          <a:prstGeom prst="rect">
+            <a:avLst/>
+          </a:prstGeom>
+          <a:noFill/>
+        </p:spPr>
+        <p:txBody>
+          <a:bodyPr wrap="none">
+            <a:spAutoFit/>
+          </a:bodyPr>
+          <a:lstStyle/>
+          <a:p>
+            <a:pPr algn="r"/>
+            <a:r>
+              <a:rPr sz="1000">
+                <a:solidFill>
+                  <a:srgbClr val="5B6B77"/>
+                </a:solidFill>
+              </a:rPr>
+              <a:t>19</a:t>
+            </a:r>
+          </a:p>
+        </p:txBody>
+      </p:sp>
+    </p:spTree>
+  </p:cSld>
+  <p:clrMapOvr>
+    <a:masterClrMapping/>
+  </p:clrMapOvr>
+</p:sld>
+</file>
+
+<file path=ppt/slides/slide25.xml><?xml version="1.0" encoding="utf-8"?>
+<p:sld xmlns:a="http://schemas.openxmlformats.org/drawingml/2006/main" xmlns:p="http://schemas.openxmlformats.org/presentationml/2006/main" xmlns:r="http://schemas.openxmlformats.org/officeDocument/2006/relationships">
+  <p:cSld>
+    <p:bg>
+      <p:bgPr>
+        <a:solidFill>
+          <a:srgbClr val="F4F7F9"/>
+        </a:solidFill>
+        <a:effectLst/>
+      </p:bgPr>
+    </p:bg>
+    <p:spTree>
+      <p:nvGrpSpPr>
+        <p:cNvPr id="1" name=""/>
+        <p:cNvGrpSpPr/>
+        <p:nvPr/>
+      </p:nvGrpSpPr>
+      <p:grpSpPr/>
+      <p:sp>
+        <p:nvSpPr>
+          <p:cNvPr id="2" name="TextBox 1"/>
+          <p:cNvSpPr txBox="1"/>
+          <p:nvPr/>
+        </p:nvSpPr>
+        <p:spPr>
+          <a:xfrm>
+            <a:off x="548640" y="411480"/>
+            <a:ext cx="10515600" cy="320040"/>
+          </a:xfrm>
+          <a:prstGeom prst="rect">
+            <a:avLst/>
+          </a:prstGeom>
+          <a:noFill/>
+        </p:spPr>
+        <p:txBody>
+          <a:bodyPr wrap="square">
+            <a:spAutoFit/>
+          </a:bodyPr>
+          <a:lstStyle/>
+          <a:p>
+            <a:pPr algn="l"/>
+            <a:r>
+              <a:rPr sz="1300" b="1" i="0">
+                <a:solidFill>
+                  <a:srgbClr val="F2A541"/>
+                </a:solidFill>
+                <a:latin typeface="Calibri"/>
+              </a:rPr>
+              <a:t>UN EXEMPLE REAL</a:t>
+            </a:r>
+          </a:p>
+        </p:txBody>
+      </p:sp>
+      <p:sp>
+        <p:nvSpPr>
+          <p:cNvPr id="3" name="TextBox 2"/>
+          <p:cNvSpPr txBox="1"/>
+          <p:nvPr/>
+        </p:nvSpPr>
+        <p:spPr>
+          <a:xfrm>
+            <a:off x="548640" y="685800"/>
+            <a:ext cx="10972800" cy="822960"/>
+          </a:xfrm>
+          <a:prstGeom prst="rect">
+            <a:avLst/>
+          </a:prstGeom>
+          <a:noFill/>
+        </p:spPr>
+        <p:txBody>
+          <a:bodyPr wrap="square">
+            <a:spAutoFit/>
+          </a:bodyPr>
+          <a:lstStyle/>
+          <a:p>
+            <a:pPr algn="l"/>
+            <a:r>
+              <a:rPr sz="2800" b="1" i="0">
+                <a:solidFill>
+                  <a:srgbClr val="16242E"/>
+                </a:solidFill>
+                <a:latin typeface="Cambria"/>
+              </a:rPr>
+              <a:t>SAN — Storage Area Network</a:t>
+            </a:r>
+          </a:p>
+        </p:txBody>
+      </p:sp>
+      <p:pic>
+        <p:nvPicPr>
+          <p:cNvPr id="4" name="Picture 3" descr="cabina_de_discos.png"/>
+          <p:cNvPicPr>
+            <a:picLocks noChangeAspect="1"/>
+          </p:cNvPicPr>
+          <p:nvPr/>
+        </p:nvPicPr>
+        <p:blipFill>
+          <a:blip r:embed="rId2"/>
+          <a:stretch>
+            <a:fillRect/>
+          </a:stretch>
+        </p:blipFill>
+        <p:spPr>
+          <a:xfrm>
+            <a:off x="3352647" y="1920240"/>
+            <a:ext cx="5486400" cy="2948939"/>
+          </a:xfrm>
+          <a:prstGeom prst="rect">
+            <a:avLst/>
+          </a:prstGeom>
+        </p:spPr>
+      </p:pic>
+      <p:sp>
+        <p:nvSpPr>
+          <p:cNvPr id="5" name="TextBox 4"/>
+          <p:cNvSpPr txBox="1"/>
+          <p:nvPr/>
+        </p:nvSpPr>
+        <p:spPr>
+          <a:xfrm>
+            <a:off x="548640" y="5006340"/>
+            <a:ext cx="11064240" cy="457200"/>
+          </a:xfrm>
+          <a:prstGeom prst="rect">
+            <a:avLst/>
+          </a:prstGeom>
+          <a:noFill/>
+        </p:spPr>
+        <p:txBody>
+          <a:bodyPr wrap="square">
+            <a:spAutoFit/>
+          </a:bodyPr>
+          <a:lstStyle/>
+          <a:p>
+            <a:pPr algn="ctr"/>
+            <a:r>
+              <a:rPr sz="1200" b="0" i="1">
+                <a:solidFill>
+                  <a:srgbClr val="5B6B77"/>
+                </a:solidFill>
+                <a:latin typeface="Calibri"/>
+              </a:rPr>
+              <a:t>Cabines de discos dedicades, com les que s'utilitzen en un SAN.</a:t>
+            </a:r>
+          </a:p>
+        </p:txBody>
+      </p:sp>
+      <p:sp>
+        <p:nvSpPr>
+          <p:cNvPr id="6" name="TextBox 5"/>
+          <p:cNvSpPr txBox="1"/>
+          <p:nvPr/>
+        </p:nvSpPr>
+        <p:spPr>
+          <a:xfrm>
+            <a:off x="11548872" y="6446520"/>
+            <a:ext cx="365760" cy="274320"/>
+          </a:xfrm>
+          <a:prstGeom prst="rect">
+            <a:avLst/>
+          </a:prstGeom>
+          <a:noFill/>
+        </p:spPr>
+        <p:txBody>
+          <a:bodyPr wrap="none">
+            <a:spAutoFit/>
+          </a:bodyPr>
+          <a:lstStyle/>
+          <a:p>
+            <a:pPr algn="r"/>
+            <a:r>
+              <a:rPr sz="1000">
+                <a:solidFill>
+                  <a:srgbClr val="5B6B77"/>
+                </a:solidFill>
+              </a:rPr>
+              <a:t>21</a:t>
+            </a:r>
           </a:p>
         </p:txBody>
       </p:sp>
@@ -9729,7 +11245,7 @@
                 <a:ea typeface="Calibri" pitchFamily="34" charset="-122"/>
                 <a:cs typeface="Calibri" pitchFamily="34" charset="-120"/>
               </a:rPr>
-              <a:t>2</a:t>
+              <a:t>3</a:t>
             </a:r>
             <a:endParaRPr lang="en-US" sz="1100" dirty="0"/>
           </a:p>
@@ -9768,6 +11284,10 @@
             </a:outerShdw>
           </a:effectLst>
         </p:spPr>
+        <p:txBody>
+          <a:bodyPr/>
+          <a:p/>
+        </p:txBody>
       </p:sp>
       <p:sp>
         <p:nvSpPr>
@@ -9788,6 +11308,10 @@
           </a:solidFill>
           <a:ln/>
         </p:spPr>
+        <p:txBody>
+          <a:bodyPr/>
+          <a:p/>
+        </p:txBody>
       </p:sp>
       <p:pic>
         <p:nvPicPr>
@@ -9927,6 +11451,10 @@
             </a:outerShdw>
           </a:effectLst>
         </p:spPr>
+        <p:txBody>
+          <a:bodyPr/>
+          <a:p/>
+        </p:txBody>
       </p:sp>
       <p:sp>
         <p:nvSpPr>
@@ -9947,6 +11475,10 @@
           </a:solidFill>
           <a:ln/>
         </p:spPr>
+        <p:txBody>
+          <a:bodyPr/>
+          <a:p/>
+        </p:txBody>
       </p:sp>
       <p:pic>
         <p:nvPicPr>
@@ -10196,7 +11728,7 @@
                 <a:ea typeface="Calibri" pitchFamily="34" charset="-122"/>
                 <a:cs typeface="Calibri" pitchFamily="34" charset="-120"/>
               </a:rPr>
-              <a:t>3</a:t>
+              <a:t>4</a:t>
             </a:r>
             <a:endParaRPr lang="en-US" sz="1100" dirty="0"/>
           </a:p>
@@ -10281,6 +11813,10 @@
             </a:outerShdw>
           </a:effectLst>
         </p:spPr>
+        <p:txBody>
+          <a:bodyPr/>
+          <a:p/>
+        </p:txBody>
       </p:sp>
       <p:sp>
         <p:nvSpPr>
@@ -10301,6 +11837,10 @@
           </a:solidFill>
           <a:ln/>
         </p:spPr>
+        <p:txBody>
+          <a:bodyPr/>
+          <a:p/>
+        </p:txBody>
       </p:sp>
       <p:pic>
         <p:nvPicPr>
@@ -10440,6 +11980,10 @@
             </a:outerShdw>
           </a:effectLst>
         </p:spPr>
+        <p:txBody>
+          <a:bodyPr/>
+          <a:p/>
+        </p:txBody>
       </p:sp>
       <p:sp>
         <p:nvSpPr>
@@ -10460,6 +12004,10 @@
           </a:solidFill>
           <a:ln/>
         </p:spPr>
+        <p:txBody>
+          <a:bodyPr/>
+          <a:p/>
+        </p:txBody>
       </p:sp>
       <p:pic>
         <p:nvPicPr>
@@ -10599,6 +12147,10 @@
             </a:outerShdw>
           </a:effectLst>
         </p:spPr>
+        <p:txBody>
+          <a:bodyPr/>
+          <a:p/>
+        </p:txBody>
       </p:sp>
       <p:sp>
         <p:nvSpPr>
@@ -10619,6 +12171,10 @@
           </a:solidFill>
           <a:ln/>
         </p:spPr>
+        <p:txBody>
+          <a:bodyPr/>
+          <a:p/>
+        </p:txBody>
       </p:sp>
       <p:pic>
         <p:nvPicPr>
@@ -10868,7 +12424,7 @@
                 <a:ea typeface="Calibri" pitchFamily="34" charset="-122"/>
                 <a:cs typeface="Calibri" pitchFamily="34" charset="-120"/>
               </a:rPr>
-              <a:t>4</a:t>
+              <a:t>5</a:t>
             </a:r>
             <a:endParaRPr lang="en-US" sz="1100" dirty="0"/>
           </a:p>
@@ -10907,6 +12463,10 @@
             </a:outerShdw>
           </a:effectLst>
         </p:spPr>
+        <p:txBody>
+          <a:bodyPr/>
+          <a:p/>
+        </p:txBody>
       </p:sp>
       <p:sp>
         <p:nvSpPr>
@@ -10927,6 +12487,10 @@
           </a:solidFill>
           <a:ln/>
         </p:spPr>
+        <p:txBody>
+          <a:bodyPr/>
+          <a:p/>
+        </p:txBody>
       </p:sp>
       <p:pic>
         <p:nvPicPr>
@@ -11066,6 +12630,10 @@
             </a:outerShdw>
           </a:effectLst>
         </p:spPr>
+        <p:txBody>
+          <a:bodyPr/>
+          <a:p/>
+        </p:txBody>
       </p:sp>
       <p:sp>
         <p:nvSpPr>
@@ -11086,6 +12654,10 @@
           </a:solidFill>
           <a:ln/>
         </p:spPr>
+        <p:txBody>
+          <a:bodyPr/>
+          <a:p/>
+        </p:txBody>
       </p:sp>
       <p:pic>
         <p:nvPicPr>
@@ -11335,7 +12907,7 @@
                 <a:ea typeface="Calibri" pitchFamily="34" charset="-122"/>
                 <a:cs typeface="Calibri" pitchFamily="34" charset="-120"/>
               </a:rPr>
-              <a:t>5</a:t>
+              <a:t>6</a:t>
             </a:r>
             <a:endParaRPr lang="en-US" sz="1100" dirty="0"/>
           </a:p>
@@ -11374,6 +12946,10 @@
             </a:outerShdw>
           </a:effectLst>
         </p:spPr>
+        <p:txBody>
+          <a:bodyPr/>
+          <a:p/>
+        </p:txBody>
       </p:sp>
       <p:sp>
         <p:nvSpPr>
@@ -11394,6 +12970,10 @@
           </a:solidFill>
           <a:ln/>
         </p:spPr>
+        <p:txBody>
+          <a:bodyPr/>
+          <a:p/>
+        </p:txBody>
       </p:sp>
       <p:pic>
         <p:nvPicPr>
@@ -11533,6 +13113,10 @@
             </a:outerShdw>
           </a:effectLst>
         </p:spPr>
+        <p:txBody>
+          <a:bodyPr/>
+          <a:p/>
+        </p:txBody>
       </p:sp>
       <p:sp>
         <p:nvSpPr>
@@ -11553,6 +13137,10 @@
           </a:solidFill>
           <a:ln/>
         </p:spPr>
+        <p:txBody>
+          <a:bodyPr/>
+          <a:p/>
+        </p:txBody>
       </p:sp>
       <p:pic>
         <p:nvPicPr>
@@ -11802,7 +13390,7 @@
                 <a:ea typeface="Calibri" pitchFamily="34" charset="-122"/>
                 <a:cs typeface="Calibri" pitchFamily="34" charset="-120"/>
               </a:rPr>
-              <a:t>6</a:t>
+              <a:t>8</a:t>
             </a:r>
             <a:endParaRPr lang="en-US" sz="1100" dirty="0"/>
           </a:p>
@@ -11841,6 +13429,10 @@
             </a:outerShdw>
           </a:effectLst>
         </p:spPr>
+        <p:txBody>
+          <a:bodyPr/>
+          <a:p/>
+        </p:txBody>
       </p:sp>
       <p:sp>
         <p:nvSpPr>
@@ -11861,6 +13453,10 @@
           </a:solidFill>
           <a:ln/>
         </p:spPr>
+        <p:txBody>
+          <a:bodyPr/>
+          <a:p/>
+        </p:txBody>
       </p:sp>
       <p:pic>
         <p:nvPicPr>
@@ -12000,6 +13596,10 @@
             </a:outerShdw>
           </a:effectLst>
         </p:spPr>
+        <p:txBody>
+          <a:bodyPr/>
+          <a:p/>
+        </p:txBody>
       </p:sp>
       <p:sp>
         <p:nvSpPr>
@@ -12020,6 +13620,10 @@
           </a:solidFill>
           <a:ln/>
         </p:spPr>
+        <p:txBody>
+          <a:bodyPr/>
+          <a:p/>
+        </p:txBody>
       </p:sp>
       <p:pic>
         <p:nvPicPr>
@@ -12269,7 +13873,7 @@
                 <a:ea typeface="Calibri" pitchFamily="34" charset="-122"/>
                 <a:cs typeface="Calibri" pitchFamily="34" charset="-120"/>
               </a:rPr>
-              <a:t>7</a:t>
+              <a:t>10</a:t>
             </a:r>
             <a:endParaRPr lang="en-US" sz="1100" dirty="0"/>
           </a:p>
@@ -12308,6 +13912,10 @@
             </a:outerShdw>
           </a:effectLst>
         </p:spPr>
+        <p:txBody>
+          <a:bodyPr/>
+          <a:p/>
+        </p:txBody>
       </p:sp>
       <p:sp>
         <p:nvSpPr>
@@ -12328,6 +13936,10 @@
           </a:solidFill>
           <a:ln/>
         </p:spPr>
+        <p:txBody>
+          <a:bodyPr/>
+          <a:p/>
+        </p:txBody>
       </p:sp>
       <p:pic>
         <p:nvPicPr>
@@ -12467,6 +14079,10 @@
             </a:outerShdw>
           </a:effectLst>
         </p:spPr>
+        <p:txBody>
+          <a:bodyPr/>
+          <a:p/>
+        </p:txBody>
       </p:sp>
       <p:sp>
         <p:nvSpPr>
@@ -12487,6 +14103,10 @@
           </a:solidFill>
           <a:ln/>
         </p:spPr>
+        <p:txBody>
+          <a:bodyPr/>
+          <a:p/>
+        </p:txBody>
       </p:sp>
       <p:pic>
         <p:nvPicPr>
@@ -12736,7 +14356,7 @@
                 <a:ea typeface="Calibri" pitchFamily="34" charset="-122"/>
                 <a:cs typeface="Calibri" pitchFamily="34" charset="-120"/>
               </a:rPr>
-              <a:t>8</a:t>
+              <a:t>12</a:t>
             </a:r>
             <a:endParaRPr lang="en-US" sz="1100" dirty="0"/>
           </a:p>
@@ -12775,6 +14395,10 @@
             </a:outerShdw>
           </a:effectLst>
         </p:spPr>
+        <p:txBody>
+          <a:bodyPr/>
+          <a:p/>
+        </p:txBody>
       </p:sp>
       <p:sp>
         <p:nvSpPr>
@@ -12795,6 +14419,10 @@
           </a:solidFill>
           <a:ln/>
         </p:spPr>
+        <p:txBody>
+          <a:bodyPr/>
+          <a:p/>
+        </p:txBody>
       </p:sp>
       <p:pic>
         <p:nvPicPr>
@@ -12934,6 +14562,10 @@
             </a:outerShdw>
           </a:effectLst>
         </p:spPr>
+        <p:txBody>
+          <a:bodyPr/>
+          <a:p/>
+        </p:txBody>
       </p:sp>
       <p:sp>
         <p:nvSpPr>
@@ -12954,6 +14586,10 @@
           </a:solidFill>
           <a:ln/>
         </p:spPr>
+        <p:txBody>
+          <a:bodyPr/>
+          <a:p/>
+        </p:txBody>
       </p:sp>
       <p:pic>
         <p:nvPicPr>

--- a/RA2 - Emmagatzematge i copies de seguretat/AA2 - Sistemes demmagatzematge/RA2_AA2_Sistemes_emmagatzematge.pptx
+++ b/RA2 - Emmagatzematge i copies de seguretat/AA2 - Sistemes demmagatzematge/RA2_AA2_Sistemes_emmagatzematge.pptx
@@ -2695,6 +2695,1409 @@
 
 <file path=ppt/slides/slide10.xml><?xml version="1.0" encoding="utf-8"?>
 <p:sld xmlns:a="http://schemas.openxmlformats.org/drawingml/2006/main" xmlns:r="http://schemas.openxmlformats.org/officeDocument/2006/relationships" xmlns:p="http://schemas.openxmlformats.org/presentationml/2006/main">
+  <p:cSld name="Slide 8">
+    <p:bg>
+      <p:bgPr>
+        <a:solidFill>
+          <a:srgbClr val="F4F7F9"/>
+        </a:solidFill>
+      </p:bgPr>
+    </p:bg>
+    <p:spTree>
+      <p:nvGrpSpPr>
+        <p:cNvPr id="1" name=""/>
+        <p:cNvGrpSpPr/>
+        <p:nvPr/>
+      </p:nvGrpSpPr>
+      <p:grpSpPr>
+        <a:xfrm>
+          <a:off x="0" y="0"/>
+          <a:ext cx="0" cy="0"/>
+          <a:chOff x="0" y="0"/>
+          <a:chExt cx="0" cy="0"/>
+        </a:xfrm>
+      </p:grpSpPr>
+      <p:sp>
+        <p:nvSpPr>
+          <p:cNvPr id="2" name="Text 0"/>
+          <p:cNvSpPr txBox="1"/>
+          <p:nvPr/>
+        </p:nvSpPr>
+        <p:spPr>
+          <a:xfrm>
+            <a:off x="548640" y="457200"/>
+            <a:ext cx="9144000" cy="365760"/>
+          </a:xfrm>
+          <a:prstGeom prst="rect">
+            <a:avLst/>
+          </a:prstGeom>
+          <a:noFill/>
+          <a:ln/>
+        </p:spPr>
+        <p:txBody>
+          <a:bodyPr wrap="square" lIns="0" tIns="0" rIns="0" bIns="0" rtlCol="0" anchor="ctr"/>
+          <a:lstStyle/>
+          <a:p>
+            <a:pPr indent="0" marL="0">
+              <a:buNone/>
+            </a:pPr>
+            <a:r>
+              <a:rPr lang="en-US" sz="1300" b="1" spc="200" kern="0" dirty="0">
+                <a:solidFill>
+                  <a:srgbClr val="F2A541"/>
+                </a:solidFill>
+                <a:latin typeface="Calibri" pitchFamily="34" charset="0"/>
+                <a:ea typeface="Calibri" pitchFamily="34" charset="-122"/>
+                <a:cs typeface="Calibri" pitchFamily="34" charset="-120"/>
+              </a:rPr>
+              <a:t>RAID 5 I 6</a:t>
+            </a:r>
+            <a:endParaRPr lang="en-US" sz="1300" dirty="0"/>
+          </a:p>
+        </p:txBody>
+      </p:sp>
+      <p:sp>
+        <p:nvSpPr>
+          <p:cNvPr id="3" name="Text 1"/>
+          <p:cNvSpPr txBox="1"/>
+          <p:nvPr/>
+        </p:nvSpPr>
+        <p:spPr>
+          <a:xfrm>
+            <a:off x="548640" y="822960"/>
+            <a:ext cx="10789920" cy="640080"/>
+          </a:xfrm>
+          <a:prstGeom prst="rect">
+            <a:avLst/>
+          </a:prstGeom>
+          <a:noFill/>
+          <a:ln/>
+        </p:spPr>
+        <p:txBody>
+          <a:bodyPr wrap="square" lIns="0" tIns="0" rIns="0" bIns="0" rtlCol="0" anchor="ctr"/>
+          <a:lstStyle/>
+          <a:p>
+            <a:pPr indent="0" marL="0">
+              <a:buNone/>
+            </a:pPr>
+            <a:r>
+              <a:rPr lang="en-US" sz="2800" b="1" dirty="0">
+                <a:solidFill>
+                  <a:srgbClr val="16242E"/>
+                </a:solidFill>
+                <a:latin typeface="Cambria" pitchFamily="34" charset="0"/>
+                <a:ea typeface="Cambria" pitchFamily="34" charset="-122"/>
+                <a:cs typeface="Cambria" pitchFamily="34" charset="-120"/>
+              </a:rPr>
+              <a:t>Paritat distribuïda: redundància eficient</a:t>
+            </a:r>
+            <a:endParaRPr lang="en-US" sz="2800" dirty="0"/>
+          </a:p>
+        </p:txBody>
+      </p:sp>
+      <p:sp>
+        <p:nvSpPr>
+          <p:cNvPr id="4" name="Text 2"/>
+          <p:cNvSpPr txBox="1"/>
+          <p:nvPr/>
+        </p:nvSpPr>
+        <p:spPr>
+          <a:xfrm>
+            <a:off x="11551615" y="6446520"/>
+            <a:ext cx="457200" cy="274320"/>
+          </a:xfrm>
+          <a:prstGeom prst="rect">
+            <a:avLst/>
+          </a:prstGeom>
+          <a:noFill/>
+          <a:ln/>
+        </p:spPr>
+        <p:txBody>
+          <a:bodyPr wrap="square" lIns="0" tIns="0" rIns="0" bIns="0" rtlCol="0" anchor="ctr"/>
+          <a:lstStyle/>
+          <a:p>
+            <a:pPr algn="r" indent="0" marL="0">
+              <a:buNone/>
+            </a:pPr>
+            <a:r>
+              <a:rPr lang="en-US" sz="1100" dirty="0">
+                <a:solidFill>
+                  <a:srgbClr val="5B6B77"/>
+                </a:solidFill>
+                <a:latin typeface="Calibri" pitchFamily="34" charset="0"/>
+                <a:ea typeface="Calibri" pitchFamily="34" charset="-122"/>
+                <a:cs typeface="Calibri" pitchFamily="34" charset="-120"/>
+              </a:rPr>
+              <a:t>10</a:t>
+            </a:r>
+            <a:endParaRPr lang="en-US" sz="1100" dirty="0"/>
+          </a:p>
+        </p:txBody>
+      </p:sp>
+      <p:sp>
+        <p:nvSpPr>
+          <p:cNvPr id="5" name="Shape 3"/>
+          <p:cNvSpPr/>
+          <p:nvPr/>
+        </p:nvSpPr>
+        <p:spPr>
+          <a:xfrm>
+            <a:off x="655168" y="1737360"/>
+            <a:ext cx="5212080" cy="3931920"/>
+          </a:xfrm>
+          <a:prstGeom prst="roundRect">
+            <a:avLst>
+              <a:gd name="adj" fmla="val 2791"/>
+            </a:avLst>
+          </a:prstGeom>
+          <a:solidFill>
+            <a:srgbClr val="FFFFFF"/>
+          </a:solidFill>
+          <a:ln w="12700">
+            <a:solidFill>
+              <a:srgbClr val="E2E8ED"/>
+            </a:solidFill>
+            <a:prstDash val="solid"/>
+          </a:ln>
+          <a:effectLst>
+            <a:outerShdw sx="100000" sy="100000" kx="0" ky="0" algn="bl" rotWithShape="0" blurRad="101600" dist="38100" dir="5400000">
+              <a:srgbClr val="16242E">
+                <a:alpha val="12000"/>
+              </a:srgbClr>
+            </a:outerShdw>
+          </a:effectLst>
+        </p:spPr>
+        <p:txBody>
+          <a:bodyPr/>
+          <a:p/>
+        </p:txBody>
+      </p:sp>
+      <p:sp>
+        <p:nvSpPr>
+          <p:cNvPr id="6" name="Shape 4"/>
+          <p:cNvSpPr/>
+          <p:nvPr/>
+        </p:nvSpPr>
+        <p:spPr>
+          <a:xfrm>
+            <a:off x="1020928" y="2103120"/>
+            <a:ext cx="822960" cy="822960"/>
+          </a:xfrm>
+          <a:prstGeom prst="ellipse">
+            <a:avLst/>
+          </a:prstGeom>
+          <a:solidFill>
+            <a:srgbClr val="0B1B29"/>
+          </a:solidFill>
+          <a:ln/>
+        </p:spPr>
+        <p:txBody>
+          <a:bodyPr/>
+          <a:p/>
+        </p:txBody>
+      </p:sp>
+      <p:pic>
+        <p:nvPicPr>
+          <p:cNvPr id="7" name="Image 0" descr="/tmp/claude-0/-home-user-SMX-0226-Seguretat-Informatica/cec25c9b-7e93-584a-a64a-196540977a59/scratchpad/build/icons/layer_F2A541.png">    </p:cNvPr>
+          <p:cNvPicPr>
+            <a:picLocks noChangeAspect="1"/>
+          </p:cNvPicPr>
+          <p:nvPr/>
+        </p:nvPicPr>
+        <p:blipFill>
+          <a:blip r:embed="rId1"/>
+          <a:stretch>
+            <a:fillRect/>
+          </a:stretch>
+        </p:blipFill>
+        <p:spPr>
+          <a:xfrm>
+            <a:off x="1231240" y="2313432"/>
+            <a:ext cx="402336" cy="402336"/>
+          </a:xfrm>
+          <a:prstGeom prst="rect">
+            <a:avLst/>
+          </a:prstGeom>
+        </p:spPr>
+      </p:pic>
+      <p:sp>
+        <p:nvSpPr>
+          <p:cNvPr id="8" name="Text 5"/>
+          <p:cNvSpPr txBox="1"/>
+          <p:nvPr/>
+        </p:nvSpPr>
+        <p:spPr>
+          <a:xfrm>
+            <a:off x="1020928" y="3108960"/>
+            <a:ext cx="4480560" cy="457200"/>
+          </a:xfrm>
+          <a:prstGeom prst="rect">
+            <a:avLst/>
+          </a:prstGeom>
+          <a:noFill/>
+          <a:ln/>
+        </p:spPr>
+        <p:txBody>
+          <a:bodyPr wrap="square" lIns="0" tIns="0" rIns="0" bIns="0" rtlCol="0" anchor="ctr"/>
+          <a:lstStyle/>
+          <a:p>
+            <a:pPr indent="0" marL="0">
+              <a:buNone/>
+            </a:pPr>
+            <a:r>
+              <a:rPr lang="en-US" sz="1900" b="1" dirty="0">
+                <a:solidFill>
+                  <a:srgbClr val="16242E"/>
+                </a:solidFill>
+                <a:latin typeface="Cambria" pitchFamily="34" charset="0"/>
+                <a:ea typeface="Cambria" pitchFamily="34" charset="-122"/>
+                <a:cs typeface="Cambria" pitchFamily="34" charset="-120"/>
+              </a:rPr>
+              <a:t>RAID 5 (mínim 3 discos)</a:t>
+            </a:r>
+            <a:endParaRPr lang="en-US" sz="1900" dirty="0"/>
+          </a:p>
+        </p:txBody>
+      </p:sp>
+      <p:sp>
+        <p:nvSpPr>
+          <p:cNvPr id="9" name="Text 6"/>
+          <p:cNvSpPr txBox="1"/>
+          <p:nvPr/>
+        </p:nvSpPr>
+        <p:spPr>
+          <a:xfrm>
+            <a:off x="1020928" y="3611880"/>
+            <a:ext cx="4480560" cy="1920240"/>
+          </a:xfrm>
+          <a:prstGeom prst="rect">
+            <a:avLst/>
+          </a:prstGeom>
+          <a:noFill/>
+          <a:ln/>
+        </p:spPr>
+        <p:txBody>
+          <a:bodyPr wrap="square" lIns="0" tIns="0" rIns="0" bIns="0" rtlCol="0" anchor="t"/>
+          <a:lstStyle/>
+          <a:p>
+            <a:pPr indent="0" marL="0">
+              <a:lnSpc>
+                <a:spcPts val="1700"/>
+              </a:lnSpc>
+              <a:buNone/>
+            </a:pPr>
+            <a:r>
+              <a:rPr lang="en-US" sz="1350" dirty="0">
+                <a:solidFill>
+                  <a:srgbClr val="5B6B77"/>
+                </a:solidFill>
+                <a:latin typeface="Calibri" pitchFamily="34" charset="0"/>
+                <a:ea typeface="Calibri" pitchFamily="34" charset="-122"/>
+                <a:cs typeface="Calibri" pitchFamily="34" charset="-120"/>
+              </a:rPr>
+              <a:t>Divideix les dades a nivell de bloc i distribueix la informació de paritat entre TOTS els discos. Solució popular: redundància més econòmica que el mirall, encara que més lenta. Suporta la pèrdua d'UN disc.</a:t>
+            </a:r>
+            <a:endParaRPr lang="en-US" sz="1350" dirty="0"/>
+          </a:p>
+        </p:txBody>
+      </p:sp>
+      <p:sp>
+        <p:nvSpPr>
+          <p:cNvPr id="10" name="Shape 7"/>
+          <p:cNvSpPr/>
+          <p:nvPr/>
+        </p:nvSpPr>
+        <p:spPr>
+          <a:xfrm>
+            <a:off x="6324448" y="1737360"/>
+            <a:ext cx="5212080" cy="3931920"/>
+          </a:xfrm>
+          <a:prstGeom prst="roundRect">
+            <a:avLst>
+              <a:gd name="adj" fmla="val 2791"/>
+            </a:avLst>
+          </a:prstGeom>
+          <a:solidFill>
+            <a:srgbClr val="FFFFFF"/>
+          </a:solidFill>
+          <a:ln w="12700">
+            <a:solidFill>
+              <a:srgbClr val="E2E8ED"/>
+            </a:solidFill>
+            <a:prstDash val="solid"/>
+          </a:ln>
+          <a:effectLst>
+            <a:outerShdw sx="100000" sy="100000" kx="0" ky="0" algn="bl" rotWithShape="0" blurRad="101600" dist="38100" dir="5400000">
+              <a:srgbClr val="16242E">
+                <a:alpha val="12000"/>
+              </a:srgbClr>
+            </a:outerShdw>
+          </a:effectLst>
+        </p:spPr>
+        <p:txBody>
+          <a:bodyPr/>
+          <a:p/>
+        </p:txBody>
+      </p:sp>
+      <p:sp>
+        <p:nvSpPr>
+          <p:cNvPr id="11" name="Shape 8"/>
+          <p:cNvSpPr/>
+          <p:nvPr/>
+        </p:nvSpPr>
+        <p:spPr>
+          <a:xfrm>
+            <a:off x="6690208" y="2103120"/>
+            <a:ext cx="822960" cy="822960"/>
+          </a:xfrm>
+          <a:prstGeom prst="ellipse">
+            <a:avLst/>
+          </a:prstGeom>
+          <a:solidFill>
+            <a:srgbClr val="0B1B29"/>
+          </a:solidFill>
+          <a:ln/>
+        </p:spPr>
+        <p:txBody>
+          <a:bodyPr/>
+          <a:p/>
+        </p:txBody>
+      </p:sp>
+      <p:pic>
+        <p:nvPicPr>
+          <p:cNvPr id="12" name="Image 1" descr="/tmp/claude-0/-home-user-SMX-0226-Seguretat-Informatica/cec25c9b-7e93-584a-a64a-196540977a59/scratchpad/build/icons/shield_F2A541.png">    </p:cNvPr>
+          <p:cNvPicPr>
+            <a:picLocks noChangeAspect="1"/>
+          </p:cNvPicPr>
+          <p:nvPr/>
+        </p:nvPicPr>
+        <p:blipFill>
+          <a:blip r:embed="rId2"/>
+          <a:stretch>
+            <a:fillRect/>
+          </a:stretch>
+        </p:blipFill>
+        <p:spPr>
+          <a:xfrm>
+            <a:off x="6900520" y="2313432"/>
+            <a:ext cx="402336" cy="402336"/>
+          </a:xfrm>
+          <a:prstGeom prst="rect">
+            <a:avLst/>
+          </a:prstGeom>
+        </p:spPr>
+      </p:pic>
+      <p:sp>
+        <p:nvSpPr>
+          <p:cNvPr id="13" name="Text 9"/>
+          <p:cNvSpPr txBox="1"/>
+          <p:nvPr/>
+        </p:nvSpPr>
+        <p:spPr>
+          <a:xfrm>
+            <a:off x="6690208" y="3108960"/>
+            <a:ext cx="4480560" cy="457200"/>
+          </a:xfrm>
+          <a:prstGeom prst="rect">
+            <a:avLst/>
+          </a:prstGeom>
+          <a:noFill/>
+          <a:ln/>
+        </p:spPr>
+        <p:txBody>
+          <a:bodyPr wrap="square" lIns="0" tIns="0" rIns="0" bIns="0" rtlCol="0" anchor="ctr"/>
+          <a:lstStyle/>
+          <a:p>
+            <a:pPr indent="0" marL="0">
+              <a:buNone/>
+            </a:pPr>
+            <a:r>
+              <a:rPr lang="en-US" sz="1900" b="1" dirty="0">
+                <a:solidFill>
+                  <a:srgbClr val="16242E"/>
+                </a:solidFill>
+                <a:latin typeface="Cambria" pitchFamily="34" charset="0"/>
+                <a:ea typeface="Cambria" pitchFamily="34" charset="-122"/>
+                <a:cs typeface="Cambria" pitchFamily="34" charset="-120"/>
+              </a:rPr>
+              <a:t>RAID 6 (mínim 4 discos)</a:t>
+            </a:r>
+            <a:endParaRPr lang="en-US" sz="1900" dirty="0"/>
+          </a:p>
+        </p:txBody>
+      </p:sp>
+      <p:sp>
+        <p:nvSpPr>
+          <p:cNvPr id="14" name="Text 10"/>
+          <p:cNvSpPr txBox="1"/>
+          <p:nvPr/>
+        </p:nvSpPr>
+        <p:spPr>
+          <a:xfrm>
+            <a:off x="6690208" y="3611880"/>
+            <a:ext cx="4480560" cy="1920240"/>
+          </a:xfrm>
+          <a:prstGeom prst="rect">
+            <a:avLst/>
+          </a:prstGeom>
+          <a:noFill/>
+          <a:ln/>
+        </p:spPr>
+        <p:txBody>
+          <a:bodyPr wrap="square" lIns="0" tIns="0" rIns="0" bIns="0" rtlCol="0" anchor="t"/>
+          <a:lstStyle/>
+          <a:p>
+            <a:pPr indent="0" marL="0">
+              <a:lnSpc>
+                <a:spcPts val="1700"/>
+              </a:lnSpc>
+              <a:buNone/>
+            </a:pPr>
+            <a:r>
+              <a:rPr lang="en-US" sz="1350" dirty="0">
+                <a:solidFill>
+                  <a:srgbClr val="5B6B77"/>
+                </a:solidFill>
+                <a:latin typeface="Calibri" pitchFamily="34" charset="0"/>
+                <a:ea typeface="Calibri" pitchFamily="34" charset="-122"/>
+                <a:cs typeface="Calibri" pitchFamily="34" charset="-120"/>
+              </a:rPr>
+              <a:t>Igual que RAID 5, però amb una SEGONA banda de paritat. Suporta la pèrdua de DOS discos simultàniament, a canvi de perdre la capacitat equivalent a dos discos.</a:t>
+            </a:r>
+            <a:endParaRPr lang="en-US" sz="1350" dirty="0"/>
+          </a:p>
+        </p:txBody>
+      </p:sp>
+    </p:spTree>
+  </p:cSld>
+  <p:clrMapOvr>
+    <a:masterClrMapping/>
+  </p:clrMapOvr>
+</p:sld>
+</file>
+
+<file path=ppt/slides/slide11.xml><?xml version="1.0" encoding="utf-8"?>
+<p:sld xmlns:a="http://schemas.openxmlformats.org/drawingml/2006/main" xmlns:p="http://schemas.openxmlformats.org/presentationml/2006/main" xmlns:r="http://schemas.openxmlformats.org/officeDocument/2006/relationships">
+  <p:cSld>
+    <p:bg>
+      <p:bgPr>
+        <a:solidFill>
+          <a:srgbClr val="F4F7F9"/>
+        </a:solidFill>
+        <a:effectLst/>
+      </p:bgPr>
+    </p:bg>
+    <p:spTree>
+      <p:nvGrpSpPr>
+        <p:cNvPr id="1" name=""/>
+        <p:cNvGrpSpPr/>
+        <p:nvPr/>
+      </p:nvGrpSpPr>
+      <p:grpSpPr/>
+      <p:sp>
+        <p:nvSpPr>
+          <p:cNvPr id="2" name="TextBox 1"/>
+          <p:cNvSpPr txBox="1"/>
+          <p:nvPr/>
+        </p:nvSpPr>
+        <p:spPr>
+          <a:xfrm>
+            <a:off x="548640" y="411480"/>
+            <a:ext cx="10515600" cy="320040"/>
+          </a:xfrm>
+          <a:prstGeom prst="rect">
+            <a:avLst/>
+          </a:prstGeom>
+          <a:noFill/>
+        </p:spPr>
+        <p:txBody>
+          <a:bodyPr wrap="square">
+            <a:spAutoFit/>
+          </a:bodyPr>
+          <a:lstStyle/>
+          <a:p>
+            <a:pPr algn="l"/>
+            <a:r>
+              <a:rPr sz="1300" b="1" i="0">
+                <a:solidFill>
+                  <a:srgbClr val="F2A541"/>
+                </a:solidFill>
+                <a:latin typeface="Calibri"/>
+              </a:rPr>
+              <a:t>SOTA EL CAPÓ</a:t>
+            </a:r>
+          </a:p>
+        </p:txBody>
+      </p:sp>
+      <p:sp>
+        <p:nvSpPr>
+          <p:cNvPr id="3" name="TextBox 2"/>
+          <p:cNvSpPr txBox="1"/>
+          <p:nvPr/>
+        </p:nvSpPr>
+        <p:spPr>
+          <a:xfrm>
+            <a:off x="548640" y="685800"/>
+            <a:ext cx="10972800" cy="822960"/>
+          </a:xfrm>
+          <a:prstGeom prst="rect">
+            <a:avLst/>
+          </a:prstGeom>
+          <a:noFill/>
+        </p:spPr>
+        <p:txBody>
+          <a:bodyPr wrap="square">
+            <a:spAutoFit/>
+          </a:bodyPr>
+          <a:lstStyle/>
+          <a:p>
+            <a:pPr algn="l"/>
+            <a:r>
+              <a:rPr sz="2800" b="1" i="0">
+                <a:solidFill>
+                  <a:srgbClr val="16242E"/>
+                </a:solidFill>
+                <a:latin typeface="Cambria"/>
+              </a:rPr>
+              <a:t>RAID 5 i 6 — Paritat distribuïda</a:t>
+            </a:r>
+          </a:p>
+        </p:txBody>
+      </p:sp>
+      <p:pic>
+        <p:nvPicPr>
+          <p:cNvPr id="4" name="Picture 3" descr="raid5.png"/>
+          <p:cNvPicPr>
+            <a:picLocks noChangeAspect="1"/>
+          </p:cNvPicPr>
+          <p:nvPr/>
+        </p:nvPicPr>
+        <p:blipFill>
+          <a:blip r:embed="rId2"/>
+          <a:stretch>
+            <a:fillRect/>
+          </a:stretch>
+        </p:blipFill>
+        <p:spPr>
+          <a:xfrm>
+            <a:off x="1015173" y="1965960"/>
+            <a:ext cx="4385539" cy="3840480"/>
+          </a:xfrm>
+          <a:prstGeom prst="rect">
+            <a:avLst/>
+          </a:prstGeom>
+        </p:spPr>
+      </p:pic>
+      <p:sp>
+        <p:nvSpPr>
+          <p:cNvPr id="5" name="TextBox 4"/>
+          <p:cNvSpPr txBox="1"/>
+          <p:nvPr/>
+        </p:nvSpPr>
+        <p:spPr>
+          <a:xfrm>
+            <a:off x="548640" y="5943600"/>
+            <a:ext cx="5318607" cy="548640"/>
+          </a:xfrm>
+          <a:prstGeom prst="rect">
+            <a:avLst/>
+          </a:prstGeom>
+          <a:noFill/>
+        </p:spPr>
+        <p:txBody>
+          <a:bodyPr wrap="square">
+            <a:spAutoFit/>
+          </a:bodyPr>
+          <a:lstStyle/>
+          <a:p>
+            <a:pPr algn="ctr"/>
+            <a:r>
+              <a:rPr sz="1150" b="0" i="1">
+                <a:solidFill>
+                  <a:srgbClr val="5B6B77"/>
+                </a:solidFill>
+                <a:latin typeface="Calibri"/>
+              </a:rPr>
+              <a:t>RAID 5: paritat distribuïda (mínim 3 discos).</a:t>
+            </a:r>
+          </a:p>
+        </p:txBody>
+      </p:sp>
+      <p:pic>
+        <p:nvPicPr>
+          <p:cNvPr id="6" name="Picture 5" descr="raid6.png"/>
+          <p:cNvPicPr>
+            <a:picLocks noChangeAspect="1"/>
+          </p:cNvPicPr>
+          <p:nvPr/>
+        </p:nvPicPr>
+        <p:blipFill>
+          <a:blip r:embed="rId3"/>
+          <a:stretch>
+            <a:fillRect/>
+          </a:stretch>
+        </p:blipFill>
+        <p:spPr>
+          <a:xfrm>
+            <a:off x="6606311" y="1965960"/>
+            <a:ext cx="4754880" cy="3077086"/>
+          </a:xfrm>
+          <a:prstGeom prst="rect">
+            <a:avLst/>
+          </a:prstGeom>
+        </p:spPr>
+      </p:pic>
+      <p:sp>
+        <p:nvSpPr>
+          <p:cNvPr id="7" name="TextBox 6"/>
+          <p:cNvSpPr txBox="1"/>
+          <p:nvPr/>
+        </p:nvSpPr>
+        <p:spPr>
+          <a:xfrm>
+            <a:off x="6324447" y="5180206"/>
+            <a:ext cx="5318607" cy="548640"/>
+          </a:xfrm>
+          <a:prstGeom prst="rect">
+            <a:avLst/>
+          </a:prstGeom>
+          <a:noFill/>
+        </p:spPr>
+        <p:txBody>
+          <a:bodyPr wrap="square">
+            <a:spAutoFit/>
+          </a:bodyPr>
+          <a:lstStyle/>
+          <a:p>
+            <a:pPr algn="ctr"/>
+            <a:r>
+              <a:rPr sz="1150" b="0" i="1">
+                <a:solidFill>
+                  <a:srgbClr val="5B6B77"/>
+                </a:solidFill>
+                <a:latin typeface="Calibri"/>
+              </a:rPr>
+              <a:t>RAID 6: doble paritat (mínim 4 discos).</a:t>
+            </a:r>
+          </a:p>
+        </p:txBody>
+      </p:sp>
+      <p:sp>
+        <p:nvSpPr>
+          <p:cNvPr id="8" name="TextBox 7"/>
+          <p:cNvSpPr txBox="1"/>
+          <p:nvPr/>
+        </p:nvSpPr>
+        <p:spPr>
+          <a:xfrm>
+            <a:off x="11548872" y="6446520"/>
+            <a:ext cx="365760" cy="274320"/>
+          </a:xfrm>
+          <a:prstGeom prst="rect">
+            <a:avLst/>
+          </a:prstGeom>
+          <a:noFill/>
+        </p:spPr>
+        <p:txBody>
+          <a:bodyPr wrap="none">
+            <a:spAutoFit/>
+          </a:bodyPr>
+          <a:lstStyle/>
+          <a:p>
+            <a:pPr algn="r"/>
+            <a:r>
+              <a:rPr sz="1000">
+                <a:solidFill>
+                  <a:srgbClr val="5B6B77"/>
+                </a:solidFill>
+              </a:rPr>
+              <a:t>11</a:t>
+            </a:r>
+          </a:p>
+        </p:txBody>
+      </p:sp>
+    </p:spTree>
+  </p:cSld>
+  <p:clrMapOvr>
+    <a:masterClrMapping/>
+  </p:clrMapOvr>
+</p:sld>
+</file>
+
+<file path=ppt/slides/slide12.xml><?xml version="1.0" encoding="utf-8"?>
+<p:sld xmlns:a="http://schemas.openxmlformats.org/drawingml/2006/main" xmlns:r="http://schemas.openxmlformats.org/officeDocument/2006/relationships" xmlns:p="http://schemas.openxmlformats.org/presentationml/2006/main">
+  <p:cSld name="Slide 9">
+    <p:bg>
+      <p:bgPr>
+        <a:solidFill>
+          <a:srgbClr val="F4F7F9"/>
+        </a:solidFill>
+      </p:bgPr>
+    </p:bg>
+    <p:spTree>
+      <p:nvGrpSpPr>
+        <p:cNvPr id="1" name=""/>
+        <p:cNvGrpSpPr/>
+        <p:nvPr/>
+      </p:nvGrpSpPr>
+      <p:grpSpPr>
+        <a:xfrm>
+          <a:off x="0" y="0"/>
+          <a:ext cx="0" cy="0"/>
+          <a:chOff x="0" y="0"/>
+          <a:chExt cx="0" cy="0"/>
+        </a:xfrm>
+      </p:grpSpPr>
+      <p:sp>
+        <p:nvSpPr>
+          <p:cNvPr id="2" name="Text 0"/>
+          <p:cNvSpPr txBox="1"/>
+          <p:nvPr/>
+        </p:nvSpPr>
+        <p:spPr>
+          <a:xfrm>
+            <a:off x="548640" y="457200"/>
+            <a:ext cx="9144000" cy="365760"/>
+          </a:xfrm>
+          <a:prstGeom prst="rect">
+            <a:avLst/>
+          </a:prstGeom>
+          <a:noFill/>
+          <a:ln/>
+        </p:spPr>
+        <p:txBody>
+          <a:bodyPr wrap="square" lIns="0" tIns="0" rIns="0" bIns="0" rtlCol="0" anchor="ctr"/>
+          <a:lstStyle/>
+          <a:p>
+            <a:pPr indent="0" marL="0">
+              <a:buNone/>
+            </a:pPr>
+            <a:r>
+              <a:rPr lang="en-US" sz="1300" b="1" spc="200" kern="0" dirty="0">
+                <a:solidFill>
+                  <a:srgbClr val="F2A541"/>
+                </a:solidFill>
+                <a:latin typeface="Calibri" pitchFamily="34" charset="0"/>
+                <a:ea typeface="Calibri" pitchFamily="34" charset="-122"/>
+                <a:cs typeface="Calibri" pitchFamily="34" charset="-120"/>
+              </a:rPr>
+              <a:t>RAID ANIUAT</a:t>
+            </a:r>
+            <a:endParaRPr lang="en-US" sz="1300" dirty="0"/>
+          </a:p>
+        </p:txBody>
+      </p:sp>
+      <p:sp>
+        <p:nvSpPr>
+          <p:cNvPr id="3" name="Text 1"/>
+          <p:cNvSpPr txBox="1"/>
+          <p:nvPr/>
+        </p:nvSpPr>
+        <p:spPr>
+          <a:xfrm>
+            <a:off x="548640" y="822960"/>
+            <a:ext cx="10789920" cy="640080"/>
+          </a:xfrm>
+          <a:prstGeom prst="rect">
+            <a:avLst/>
+          </a:prstGeom>
+          <a:noFill/>
+          <a:ln/>
+        </p:spPr>
+        <p:txBody>
+          <a:bodyPr wrap="square" lIns="0" tIns="0" rIns="0" bIns="0" rtlCol="0" anchor="ctr"/>
+          <a:lstStyle/>
+          <a:p>
+            <a:pPr indent="0" marL="0">
+              <a:buNone/>
+            </a:pPr>
+            <a:r>
+              <a:rPr lang="en-US" sz="2800" b="1" dirty="0">
+                <a:solidFill>
+                  <a:srgbClr val="16242E"/>
+                </a:solidFill>
+                <a:latin typeface="Cambria" pitchFamily="34" charset="0"/>
+                <a:ea typeface="Cambria" pitchFamily="34" charset="-122"/>
+                <a:cs typeface="Cambria" pitchFamily="34" charset="-120"/>
+              </a:rPr>
+              <a:t>RAID 10: el millor de dos mons</a:t>
+            </a:r>
+            <a:endParaRPr lang="en-US" sz="2800" dirty="0"/>
+          </a:p>
+        </p:txBody>
+      </p:sp>
+      <p:sp>
+        <p:nvSpPr>
+          <p:cNvPr id="4" name="Text 2"/>
+          <p:cNvSpPr txBox="1"/>
+          <p:nvPr/>
+        </p:nvSpPr>
+        <p:spPr>
+          <a:xfrm>
+            <a:off x="11551615" y="6446520"/>
+            <a:ext cx="457200" cy="274320"/>
+          </a:xfrm>
+          <a:prstGeom prst="rect">
+            <a:avLst/>
+          </a:prstGeom>
+          <a:noFill/>
+          <a:ln/>
+        </p:spPr>
+        <p:txBody>
+          <a:bodyPr wrap="square" lIns="0" tIns="0" rIns="0" bIns="0" rtlCol="0" anchor="ctr"/>
+          <a:lstStyle/>
+          <a:p>
+            <a:pPr algn="r" indent="0" marL="0">
+              <a:buNone/>
+            </a:pPr>
+            <a:r>
+              <a:rPr lang="en-US" sz="1100" dirty="0">
+                <a:solidFill>
+                  <a:srgbClr val="5B6B77"/>
+                </a:solidFill>
+                <a:latin typeface="Calibri" pitchFamily="34" charset="0"/>
+                <a:ea typeface="Calibri" pitchFamily="34" charset="-122"/>
+                <a:cs typeface="Calibri" pitchFamily="34" charset="-120"/>
+              </a:rPr>
+              <a:t>12</a:t>
+            </a:r>
+            <a:endParaRPr lang="en-US" sz="1100" dirty="0"/>
+          </a:p>
+        </p:txBody>
+      </p:sp>
+      <p:sp>
+        <p:nvSpPr>
+          <p:cNvPr id="5" name="Shape 3"/>
+          <p:cNvSpPr/>
+          <p:nvPr/>
+        </p:nvSpPr>
+        <p:spPr>
+          <a:xfrm>
+            <a:off x="655168" y="1737360"/>
+            <a:ext cx="5212080" cy="3931920"/>
+          </a:xfrm>
+          <a:prstGeom prst="roundRect">
+            <a:avLst>
+              <a:gd name="adj" fmla="val 2791"/>
+            </a:avLst>
+          </a:prstGeom>
+          <a:solidFill>
+            <a:srgbClr val="FFFFFF"/>
+          </a:solidFill>
+          <a:ln w="12700">
+            <a:solidFill>
+              <a:srgbClr val="E2E8ED"/>
+            </a:solidFill>
+            <a:prstDash val="solid"/>
+          </a:ln>
+          <a:effectLst>
+            <a:outerShdw sx="100000" sy="100000" kx="0" ky="0" algn="bl" rotWithShape="0" blurRad="101600" dist="38100" dir="5400000">
+              <a:srgbClr val="16242E">
+                <a:alpha val="12000"/>
+              </a:srgbClr>
+            </a:outerShdw>
+          </a:effectLst>
+        </p:spPr>
+        <p:txBody>
+          <a:bodyPr/>
+          <a:p/>
+        </p:txBody>
+      </p:sp>
+      <p:sp>
+        <p:nvSpPr>
+          <p:cNvPr id="6" name="Shape 4"/>
+          <p:cNvSpPr/>
+          <p:nvPr/>
+        </p:nvSpPr>
+        <p:spPr>
+          <a:xfrm>
+            <a:off x="1020928" y="2103120"/>
+            <a:ext cx="822960" cy="822960"/>
+          </a:xfrm>
+          <a:prstGeom prst="ellipse">
+            <a:avLst/>
+          </a:prstGeom>
+          <a:solidFill>
+            <a:srgbClr val="0B1B29"/>
+          </a:solidFill>
+          <a:ln/>
+        </p:spPr>
+        <p:txBody>
+          <a:bodyPr/>
+          <a:p/>
+        </p:txBody>
+      </p:sp>
+      <p:pic>
+        <p:nvPicPr>
+          <p:cNvPr id="7" name="Image 0" descr="/tmp/claude-0/-home-user-SMX-0226-Seguretat-Informatica/cec25c9b-7e93-584a-a64a-196540977a59/scratchpad/build/icons/layer_F2A541.png">    </p:cNvPr>
+          <p:cNvPicPr>
+            <a:picLocks noChangeAspect="1"/>
+          </p:cNvPicPr>
+          <p:nvPr/>
+        </p:nvPicPr>
+        <p:blipFill>
+          <a:blip r:embed="rId1"/>
+          <a:stretch>
+            <a:fillRect/>
+          </a:stretch>
+        </p:blipFill>
+        <p:spPr>
+          <a:xfrm>
+            <a:off x="1231240" y="2313432"/>
+            <a:ext cx="402336" cy="402336"/>
+          </a:xfrm>
+          <a:prstGeom prst="rect">
+            <a:avLst/>
+          </a:prstGeom>
+        </p:spPr>
+      </p:pic>
+      <p:sp>
+        <p:nvSpPr>
+          <p:cNvPr id="8" name="Text 5"/>
+          <p:cNvSpPr txBox="1"/>
+          <p:nvPr/>
+        </p:nvSpPr>
+        <p:spPr>
+          <a:xfrm>
+            <a:off x="1020928" y="3108960"/>
+            <a:ext cx="4480560" cy="457200"/>
+          </a:xfrm>
+          <a:prstGeom prst="rect">
+            <a:avLst/>
+          </a:prstGeom>
+          <a:noFill/>
+          <a:ln/>
+        </p:spPr>
+        <p:txBody>
+          <a:bodyPr wrap="square" lIns="0" tIns="0" rIns="0" bIns="0" rtlCol="0" anchor="ctr"/>
+          <a:lstStyle/>
+          <a:p>
+            <a:pPr indent="0" marL="0">
+              <a:buNone/>
+            </a:pPr>
+            <a:r>
+              <a:rPr lang="en-US" sz="1900" b="1" dirty="0">
+                <a:solidFill>
+                  <a:srgbClr val="16242E"/>
+                </a:solidFill>
+                <a:latin typeface="Cambria" pitchFamily="34" charset="0"/>
+                <a:ea typeface="Cambria" pitchFamily="34" charset="-122"/>
+                <a:cs typeface="Cambria" pitchFamily="34" charset="-120"/>
+              </a:rPr>
+              <a:t>Com funciona</a:t>
+            </a:r>
+            <a:endParaRPr lang="en-US" sz="1900" dirty="0"/>
+          </a:p>
+        </p:txBody>
+      </p:sp>
+      <p:sp>
+        <p:nvSpPr>
+          <p:cNvPr id="9" name="Text 6"/>
+          <p:cNvSpPr txBox="1"/>
+          <p:nvPr/>
+        </p:nvSpPr>
+        <p:spPr>
+          <a:xfrm>
+            <a:off x="1020928" y="3611880"/>
+            <a:ext cx="4480560" cy="1920240"/>
+          </a:xfrm>
+          <a:prstGeom prst="rect">
+            <a:avLst/>
+          </a:prstGeom>
+          <a:noFill/>
+          <a:ln/>
+        </p:spPr>
+        <p:txBody>
+          <a:bodyPr wrap="square" lIns="0" tIns="0" rIns="0" bIns="0" rtlCol="0" anchor="t"/>
+          <a:lstStyle/>
+          <a:p>
+            <a:pPr indent="0" marL="0">
+              <a:lnSpc>
+                <a:spcPts val="1700"/>
+              </a:lnSpc>
+              <a:buNone/>
+            </a:pPr>
+            <a:r>
+              <a:rPr lang="en-US" sz="1350" dirty="0">
+                <a:solidFill>
+                  <a:srgbClr val="5B6B77"/>
+                </a:solidFill>
+                <a:latin typeface="Calibri" pitchFamily="34" charset="0"/>
+                <a:ea typeface="Calibri" pitchFamily="34" charset="-122"/>
+                <a:cs typeface="Calibri" pitchFamily="34" charset="-120"/>
+              </a:rPr>
+              <a:t>Combina RAID 1 i RAID 0 (mínim 4 discos): primer es formen parelles en mirall, i després es distribueix la informació entre les parelles.</a:t>
+            </a:r>
+            <a:endParaRPr lang="en-US" sz="1350" dirty="0"/>
+          </a:p>
+        </p:txBody>
+      </p:sp>
+      <p:sp>
+        <p:nvSpPr>
+          <p:cNvPr id="10" name="Shape 7"/>
+          <p:cNvSpPr/>
+          <p:nvPr/>
+        </p:nvSpPr>
+        <p:spPr>
+          <a:xfrm>
+            <a:off x="6324448" y="1737360"/>
+            <a:ext cx="5212080" cy="3931920"/>
+          </a:xfrm>
+          <a:prstGeom prst="roundRect">
+            <a:avLst>
+              <a:gd name="adj" fmla="val 2791"/>
+            </a:avLst>
+          </a:prstGeom>
+          <a:solidFill>
+            <a:srgbClr val="FFFFFF"/>
+          </a:solidFill>
+          <a:ln w="12700">
+            <a:solidFill>
+              <a:srgbClr val="E2E8ED"/>
+            </a:solidFill>
+            <a:prstDash val="solid"/>
+          </a:ln>
+          <a:effectLst>
+            <a:outerShdw sx="100000" sy="100000" kx="0" ky="0" algn="bl" rotWithShape="0" blurRad="101600" dist="38100" dir="5400000">
+              <a:srgbClr val="16242E">
+                <a:alpha val="12000"/>
+              </a:srgbClr>
+            </a:outerShdw>
+          </a:effectLst>
+        </p:spPr>
+        <p:txBody>
+          <a:bodyPr/>
+          <a:p/>
+        </p:txBody>
+      </p:sp>
+      <p:sp>
+        <p:nvSpPr>
+          <p:cNvPr id="11" name="Shape 8"/>
+          <p:cNvSpPr/>
+          <p:nvPr/>
+        </p:nvSpPr>
+        <p:spPr>
+          <a:xfrm>
+            <a:off x="6690208" y="2103120"/>
+            <a:ext cx="822960" cy="822960"/>
+          </a:xfrm>
+          <a:prstGeom prst="ellipse">
+            <a:avLst/>
+          </a:prstGeom>
+          <a:solidFill>
+            <a:srgbClr val="0B1B29"/>
+          </a:solidFill>
+          <a:ln/>
+        </p:spPr>
+        <p:txBody>
+          <a:bodyPr/>
+          <a:p/>
+        </p:txBody>
+      </p:sp>
+      <p:pic>
+        <p:nvPicPr>
+          <p:cNvPr id="12" name="Image 1" descr="/tmp/claude-0/-home-user-SMX-0226-Seguretat-Informatica/cec25c9b-7e93-584a-a64a-196540977a59/scratchpad/build/icons/bolt_F2A541.png">    </p:cNvPr>
+          <p:cNvPicPr>
+            <a:picLocks noChangeAspect="1"/>
+          </p:cNvPicPr>
+          <p:nvPr/>
+        </p:nvPicPr>
+        <p:blipFill>
+          <a:blip r:embed="rId2"/>
+          <a:stretch>
+            <a:fillRect/>
+          </a:stretch>
+        </p:blipFill>
+        <p:spPr>
+          <a:xfrm>
+            <a:off x="6900520" y="2313432"/>
+            <a:ext cx="402336" cy="402336"/>
+          </a:xfrm>
+          <a:prstGeom prst="rect">
+            <a:avLst/>
+          </a:prstGeom>
+        </p:spPr>
+      </p:pic>
+      <p:sp>
+        <p:nvSpPr>
+          <p:cNvPr id="13" name="Text 9"/>
+          <p:cNvSpPr txBox="1"/>
+          <p:nvPr/>
+        </p:nvSpPr>
+        <p:spPr>
+          <a:xfrm>
+            <a:off x="6690208" y="3108960"/>
+            <a:ext cx="4480560" cy="457200"/>
+          </a:xfrm>
+          <a:prstGeom prst="rect">
+            <a:avLst/>
+          </a:prstGeom>
+          <a:noFill/>
+          <a:ln/>
+        </p:spPr>
+        <p:txBody>
+          <a:bodyPr wrap="square" lIns="0" tIns="0" rIns="0" bIns="0" rtlCol="0" anchor="ctr"/>
+          <a:lstStyle/>
+          <a:p>
+            <a:pPr indent="0" marL="0">
+              <a:buNone/>
+            </a:pPr>
+            <a:r>
+              <a:rPr lang="en-US" sz="1900" b="1" dirty="0">
+                <a:solidFill>
+                  <a:srgbClr val="16242E"/>
+                </a:solidFill>
+                <a:latin typeface="Cambria" pitchFamily="34" charset="0"/>
+                <a:ea typeface="Cambria" pitchFamily="34" charset="-122"/>
+                <a:cs typeface="Cambria" pitchFamily="34" charset="-120"/>
+              </a:rPr>
+              <a:t>Per què és tan bo</a:t>
+            </a:r>
+            <a:endParaRPr lang="en-US" sz="1900" dirty="0"/>
+          </a:p>
+        </p:txBody>
+      </p:sp>
+      <p:sp>
+        <p:nvSpPr>
+          <p:cNvPr id="14" name="Text 10"/>
+          <p:cNvSpPr txBox="1"/>
+          <p:nvPr/>
+        </p:nvSpPr>
+        <p:spPr>
+          <a:xfrm>
+            <a:off x="6690208" y="3611880"/>
+            <a:ext cx="4480560" cy="1920240"/>
+          </a:xfrm>
+          <a:prstGeom prst="rect">
+            <a:avLst/>
+          </a:prstGeom>
+          <a:noFill/>
+          <a:ln/>
+        </p:spPr>
+        <p:txBody>
+          <a:bodyPr wrap="square" lIns="0" tIns="0" rIns="0" bIns="0" rtlCol="0" anchor="t"/>
+          <a:lstStyle/>
+          <a:p>
+            <a:pPr indent="0" marL="0">
+              <a:lnSpc>
+                <a:spcPts val="1700"/>
+              </a:lnSpc>
+              <a:buNone/>
+            </a:pPr>
+            <a:r>
+              <a:rPr lang="en-US" sz="1350" dirty="0">
+                <a:solidFill>
+                  <a:srgbClr val="5B6B77"/>
+                </a:solidFill>
+                <a:latin typeface="Calibri" pitchFamily="34" charset="0"/>
+                <a:ea typeface="Calibri" pitchFamily="34" charset="-122"/>
+                <a:cs typeface="Calibri" pitchFamily="34" charset="-120"/>
+              </a:rPr>
+              <a:t>Solució ràpida i segura, però cal tenir en compte: només es pot perdre un disc per cada conjunt en mirall (si fallen els dos d'una mateixa parella, es perd la informació).</a:t>
+            </a:r>
+            <a:endParaRPr lang="en-US" sz="1350" dirty="0"/>
+          </a:p>
+        </p:txBody>
+      </p:sp>
+    </p:spTree>
+  </p:cSld>
+  <p:clrMapOvr>
+    <a:masterClrMapping/>
+  </p:clrMapOvr>
+</p:sld>
+</file>
+
+<file path=ppt/slides/slide13.xml><?xml version="1.0" encoding="utf-8"?>
+<p:sld xmlns:a="http://schemas.openxmlformats.org/drawingml/2006/main" xmlns:p="http://schemas.openxmlformats.org/presentationml/2006/main" xmlns:r="http://schemas.openxmlformats.org/officeDocument/2006/relationships">
+  <p:cSld>
+    <p:bg>
+      <p:bgPr>
+        <a:solidFill>
+          <a:srgbClr val="F4F7F9"/>
+        </a:solidFill>
+        <a:effectLst/>
+      </p:bgPr>
+    </p:bg>
+    <p:spTree>
+      <p:nvGrpSpPr>
+        <p:cNvPr id="1" name=""/>
+        <p:cNvGrpSpPr/>
+        <p:nvPr/>
+      </p:nvGrpSpPr>
+      <p:grpSpPr/>
+      <p:sp>
+        <p:nvSpPr>
+          <p:cNvPr id="2" name="TextBox 1"/>
+          <p:cNvSpPr txBox="1"/>
+          <p:nvPr/>
+        </p:nvSpPr>
+        <p:spPr>
+          <a:xfrm>
+            <a:off x="548640" y="411480"/>
+            <a:ext cx="10515600" cy="320040"/>
+          </a:xfrm>
+          <a:prstGeom prst="rect">
+            <a:avLst/>
+          </a:prstGeom>
+          <a:noFill/>
+        </p:spPr>
+        <p:txBody>
+          <a:bodyPr wrap="square">
+            <a:spAutoFit/>
+          </a:bodyPr>
+          <a:lstStyle/>
+          <a:p>
+            <a:pPr algn="l"/>
+            <a:r>
+              <a:rPr sz="1300" b="1" i="0">
+                <a:solidFill>
+                  <a:srgbClr val="F2A541"/>
+                </a:solidFill>
+                <a:latin typeface="Calibri"/>
+              </a:rPr>
+              <a:t>SOTA EL CAPÓ</a:t>
+            </a:r>
+          </a:p>
+        </p:txBody>
+      </p:sp>
+      <p:sp>
+        <p:nvSpPr>
+          <p:cNvPr id="3" name="TextBox 2"/>
+          <p:cNvSpPr txBox="1"/>
+          <p:nvPr/>
+        </p:nvSpPr>
+        <p:spPr>
+          <a:xfrm>
+            <a:off x="548640" y="685800"/>
+            <a:ext cx="10972800" cy="822960"/>
+          </a:xfrm>
+          <a:prstGeom prst="rect">
+            <a:avLst/>
+          </a:prstGeom>
+          <a:noFill/>
+        </p:spPr>
+        <p:txBody>
+          <a:bodyPr wrap="square">
+            <a:spAutoFit/>
+          </a:bodyPr>
+          <a:lstStyle/>
+          <a:p>
+            <a:pPr algn="l"/>
+            <a:r>
+              <a:rPr sz="2800" b="1" i="0">
+                <a:solidFill>
+                  <a:srgbClr val="16242E"/>
+                </a:solidFill>
+                <a:latin typeface="Cambria"/>
+              </a:rPr>
+              <a:t>RAID 10 — El millor de dos mons</a:t>
+            </a:r>
+          </a:p>
+        </p:txBody>
+      </p:sp>
+      <p:pic>
+        <p:nvPicPr>
+          <p:cNvPr id="4" name="Picture 3" descr="raid10.png"/>
+          <p:cNvPicPr>
+            <a:picLocks noChangeAspect="1"/>
+          </p:cNvPicPr>
+          <p:nvPr/>
+        </p:nvPicPr>
+        <p:blipFill>
+          <a:blip r:embed="rId2"/>
+          <a:stretch>
+            <a:fillRect/>
+          </a:stretch>
+        </p:blipFill>
+        <p:spPr>
+          <a:xfrm>
+            <a:off x="3124047" y="1920240"/>
+            <a:ext cx="5943600" cy="3846358"/>
+          </a:xfrm>
+          <a:prstGeom prst="rect">
+            <a:avLst/>
+          </a:prstGeom>
+        </p:spPr>
+      </p:pic>
+      <p:sp>
+        <p:nvSpPr>
+          <p:cNvPr id="5" name="TextBox 4"/>
+          <p:cNvSpPr txBox="1"/>
+          <p:nvPr/>
+        </p:nvSpPr>
+        <p:spPr>
+          <a:xfrm>
+            <a:off x="548640" y="5903758"/>
+            <a:ext cx="11064240" cy="457200"/>
+          </a:xfrm>
+          <a:prstGeom prst="rect">
+            <a:avLst/>
+          </a:prstGeom>
+          <a:noFill/>
+        </p:spPr>
+        <p:txBody>
+          <a:bodyPr wrap="square">
+            <a:spAutoFit/>
+          </a:bodyPr>
+          <a:lstStyle/>
+          <a:p>
+            <a:pPr algn="ctr"/>
+            <a:r>
+              <a:rPr sz="1200" b="0" i="1">
+                <a:solidFill>
+                  <a:srgbClr val="5B6B77"/>
+                </a:solidFill>
+                <a:latin typeface="Calibri"/>
+              </a:rPr>
+              <a:t>RAID 10 combina mirall (RAID 1) i distribució (RAID 0).</a:t>
+            </a:r>
+          </a:p>
+        </p:txBody>
+      </p:sp>
+      <p:sp>
+        <p:nvSpPr>
+          <p:cNvPr id="6" name="TextBox 5"/>
+          <p:cNvSpPr txBox="1"/>
+          <p:nvPr/>
+        </p:nvSpPr>
+        <p:spPr>
+          <a:xfrm>
+            <a:off x="11548872" y="6446520"/>
+            <a:ext cx="365760" cy="274320"/>
+          </a:xfrm>
+          <a:prstGeom prst="rect">
+            <a:avLst/>
+          </a:prstGeom>
+          <a:noFill/>
+        </p:spPr>
+        <p:txBody>
+          <a:bodyPr wrap="none">
+            <a:spAutoFit/>
+          </a:bodyPr>
+          <a:lstStyle/>
+          <a:p>
+            <a:pPr algn="r"/>
+            <a:r>
+              <a:rPr sz="1000">
+                <a:solidFill>
+                  <a:srgbClr val="5B6B77"/>
+                </a:solidFill>
+              </a:rPr>
+              <a:t>13</a:t>
+            </a:r>
+          </a:p>
+        </p:txBody>
+      </p:sp>
+    </p:spTree>
+  </p:cSld>
+  <p:clrMapOvr>
+    <a:masterClrMapping/>
+  </p:clrMapOvr>
+</p:sld>
+</file>
+
+<file path=ppt/slides/slide14.xml><?xml version="1.0" encoding="utf-8"?>
+<p:sld xmlns:a="http://schemas.openxmlformats.org/drawingml/2006/main" xmlns:r="http://schemas.openxmlformats.org/officeDocument/2006/relationships" xmlns:p="http://schemas.openxmlformats.org/presentationml/2006/main">
   <p:cSld name="Slide 10">
     <p:bg>
       <p:bgPr>
@@ -5771,7 +7174,30 @@
                 <a:ea typeface="Calibri" pitchFamily="34" charset="-122"/>
                 <a:cs typeface="Calibri" pitchFamily="34" charset="-120"/>
               </a:rPr>
-              <a:t>Font: www.raid-calculator.com (taula de referència de tipus de RAID)</a:t>
+              <a:t>Font: </a:t>
+            </a:r>
+            <a:r>
+              <a:rPr lang="en-US" sz="1050" i="1" dirty="0">
+                <a:solidFill>
+                  <a:srgbClr val="5B6B77"/>
+                </a:solidFill>
+                <a:latin typeface="Calibri" pitchFamily="34" charset="0"/>
+                <a:ea typeface="Calibri" pitchFamily="34" charset="-122"/>
+                <a:cs typeface="Calibri" pitchFamily="34" charset="-120"/>
+                <a:hlinkClick r:id="rId3"/>
+              </a:rPr>
+              <a:t>www.raid-calculator.com</a:t>
+            </a:r>
+            <a:r>
+              <a:rPr lang="en-US" sz="1050" i="1" dirty="0">
+                <a:solidFill>
+                  <a:srgbClr val="5B6B77"/>
+                </a:solidFill>
+                <a:latin typeface="Calibri" pitchFamily="34" charset="0"/>
+                <a:ea typeface="Calibri" pitchFamily="34" charset="-122"/>
+                <a:cs typeface="Calibri" pitchFamily="34" charset="-120"/>
+              </a:rPr>
+              <a:t> (taula de referència de tipus de RAID)</a:t>
             </a:r>
             <a:endParaRPr lang="en-US" sz="1050" dirty="0"/>
           </a:p>
@@ -5785,7 +7211,7 @@
 </p:sld>
 </file>
 
-<file path=ppt/slides/slide11.xml><?xml version="1.0" encoding="utf-8"?>
+<file path=ppt/slides/slide15.xml><?xml version="1.0" encoding="utf-8"?>
 <p:sld xmlns:a="http://schemas.openxmlformats.org/drawingml/2006/main" xmlns:r="http://schemas.openxmlformats.org/officeDocument/2006/relationships" xmlns:p="http://schemas.openxmlformats.org/presentationml/2006/main">
   <p:cSld name="Slide 11">
     <p:bg>
@@ -6028,7 +7454,7 @@
 </p:sld>
 </file>
 
-<file path=ppt/slides/slide12.xml><?xml version="1.0" encoding="utf-8"?>
+<file path=ppt/slides/slide16.xml><?xml version="1.0" encoding="utf-8"?>
 <p:sld xmlns:a="http://schemas.openxmlformats.org/drawingml/2006/main" xmlns:r="http://schemas.openxmlformats.org/officeDocument/2006/relationships" xmlns:p="http://schemas.openxmlformats.org/presentationml/2006/main">
   <p:cSld name="Slide 12">
     <p:bg>
@@ -6511,7 +7937,265 @@
 </p:sld>
 </file>
 
-<file path=ppt/slides/slide13.xml><?xml version="1.0" encoding="utf-8"?>
+<file path=ppt/slides/slide17.xml><?xml version="1.0" encoding="utf-8"?>
+<p:sld xmlns:a="http://schemas.openxmlformats.org/drawingml/2006/main" xmlns:p="http://schemas.openxmlformats.org/presentationml/2006/main" xmlns:r="http://schemas.openxmlformats.org/officeDocument/2006/relationships">
+  <p:cSld>
+    <p:bg>
+      <p:bgPr>
+        <a:solidFill>
+          <a:srgbClr val="F4F7F9"/>
+        </a:solidFill>
+        <a:effectLst/>
+      </p:bgPr>
+    </p:bg>
+    <p:spTree>
+      <p:nvGrpSpPr>
+        <p:cNvPr id="1" name=""/>
+        <p:cNvGrpSpPr/>
+        <p:nvPr/>
+      </p:nvGrpSpPr>
+      <p:grpSpPr/>
+      <p:sp>
+        <p:nvSpPr>
+          <p:cNvPr id="2" name="TextBox 1"/>
+          <p:cNvSpPr txBox="1"/>
+          <p:nvPr/>
+        </p:nvSpPr>
+        <p:spPr>
+          <a:xfrm>
+            <a:off x="548640" y="411480"/>
+            <a:ext cx="10515600" cy="320040"/>
+          </a:xfrm>
+          <a:prstGeom prst="rect">
+            <a:avLst/>
+          </a:prstGeom>
+          <a:noFill/>
+        </p:spPr>
+        <p:txBody>
+          <a:bodyPr wrap="square">
+            <a:spAutoFit/>
+          </a:bodyPr>
+          <a:lstStyle/>
+          <a:p>
+            <a:pPr algn="l"/>
+            <a:r>
+              <a:rPr sz="1300" b="1" i="0">
+                <a:solidFill>
+                  <a:srgbClr val="F2A541"/>
+                </a:solidFill>
+                <a:latin typeface="Calibri"/>
+              </a:rPr>
+              <a:t>UN EXEMPLE REAL</a:t>
+            </a:r>
+          </a:p>
+        </p:txBody>
+      </p:sp>
+      <p:sp>
+        <p:nvSpPr>
+          <p:cNvPr id="3" name="TextBox 2"/>
+          <p:cNvSpPr txBox="1"/>
+          <p:nvPr/>
+        </p:nvSpPr>
+        <p:spPr>
+          <a:xfrm>
+            <a:off x="548640" y="685800"/>
+            <a:ext cx="10972800" cy="822960"/>
+          </a:xfrm>
+          <a:prstGeom prst="rect">
+            <a:avLst/>
+          </a:prstGeom>
+          <a:noFill/>
+        </p:spPr>
+        <p:txBody>
+          <a:bodyPr wrap="square">
+            <a:spAutoFit/>
+          </a:bodyPr>
+          <a:lstStyle/>
+          <a:p>
+            <a:pPr algn="l"/>
+            <a:r>
+              <a:rPr sz="2800" b="1" i="0">
+                <a:solidFill>
+                  <a:srgbClr val="16242E"/>
+                </a:solidFill>
+                <a:latin typeface="Cambria"/>
+              </a:rPr>
+              <a:t>DAS — Direct Attached Storage</a:t>
+            </a:r>
+          </a:p>
+        </p:txBody>
+      </p:sp>
+      <p:pic>
+        <p:nvPicPr>
+          <p:cNvPr id="4" name="Picture 3" descr="hp-proliant.jpg"/>
+          <p:cNvPicPr>
+            <a:picLocks noChangeAspect="1"/>
+          </p:cNvPicPr>
+          <p:nvPr/>
+        </p:nvPicPr>
+        <p:blipFill>
+          <a:blip r:embed="rId2"/>
+          <a:stretch>
+            <a:fillRect/>
+          </a:stretch>
+        </p:blipFill>
+        <p:spPr>
+          <a:xfrm>
+            <a:off x="830503" y="1965960"/>
+            <a:ext cx="4754880" cy="1882139"/>
+          </a:xfrm>
+          <a:prstGeom prst="rect">
+            <a:avLst/>
+          </a:prstGeom>
+        </p:spPr>
+      </p:pic>
+      <p:sp>
+        <p:nvSpPr>
+          <p:cNvPr id="5" name="TextBox 4"/>
+          <p:cNvSpPr txBox="1"/>
+          <p:nvPr/>
+        </p:nvSpPr>
+        <p:spPr>
+          <a:xfrm>
+            <a:off x="548640" y="3985260"/>
+            <a:ext cx="5318607" cy="548640"/>
+          </a:xfrm>
+          <a:prstGeom prst="rect">
+            <a:avLst/>
+          </a:prstGeom>
+          <a:noFill/>
+        </p:spPr>
+        <p:txBody>
+          <a:bodyPr wrap="square">
+            <a:spAutoFit/>
+          </a:bodyPr>
+          <a:lstStyle/>
+          <a:p>
+            <a:pPr algn="ctr"/>
+            <a:r>
+              <a:rPr sz="1150" b="0" i="1">
+                <a:solidFill>
+                  <a:srgbClr val="5B6B77"/>
+                </a:solidFill>
+                <a:latin typeface="Calibri"/>
+                <a:hlinkClick r:id="rId4"/>
+              </a:rPr>
+              <a:t>Servidor HP ProLiant DL380 Gen9</a:t>
+            </a:r>
+            <a:r>
+              <a:rPr sz="1150" b="0" i="1">
+                <a:solidFill>
+                  <a:srgbClr val="5B6B77"/>
+                </a:solidFill>
+                <a:latin typeface="Calibri"/>
+              </a:rPr>
+              <a:t>, usat habitualment com a DAS.</a:t>
+            </a:r>
+          </a:p>
+        </p:txBody>
+      </p:sp>
+      <p:pic>
+        <p:nvPicPr>
+          <p:cNvPr id="6" name="Picture 5" descr="das.png"/>
+          <p:cNvPicPr>
+            <a:picLocks noChangeAspect="1"/>
+          </p:cNvPicPr>
+          <p:nvPr/>
+        </p:nvPicPr>
+        <p:blipFill>
+          <a:blip r:embed="rId3"/>
+          <a:stretch>
+            <a:fillRect/>
+          </a:stretch>
+        </p:blipFill>
+        <p:spPr>
+          <a:xfrm>
+            <a:off x="6606311" y="1965960"/>
+            <a:ext cx="4754880" cy="2960236"/>
+          </a:xfrm>
+          <a:prstGeom prst="rect">
+            <a:avLst/>
+          </a:prstGeom>
+        </p:spPr>
+      </p:pic>
+      <p:sp>
+        <p:nvSpPr>
+          <p:cNvPr id="7" name="TextBox 6"/>
+          <p:cNvSpPr txBox="1"/>
+          <p:nvPr/>
+        </p:nvSpPr>
+        <p:spPr>
+          <a:xfrm>
+            <a:off x="6324447" y="5063356"/>
+            <a:ext cx="5318607" cy="548640"/>
+          </a:xfrm>
+          <a:prstGeom prst="rect">
+            <a:avLst/>
+          </a:prstGeom>
+          <a:noFill/>
+        </p:spPr>
+        <p:txBody>
+          <a:bodyPr wrap="square">
+            <a:spAutoFit/>
+          </a:bodyPr>
+          <a:lstStyle/>
+          <a:p>
+            <a:pPr algn="ctr"/>
+            <a:r>
+              <a:rPr sz="1150" b="0" i="1">
+                <a:solidFill>
+                  <a:srgbClr val="5B6B77"/>
+                </a:solidFill>
+                <a:latin typeface="Calibri"/>
+              </a:rPr>
+              <a:t>Cada servidor exposa el seu propi emmagatzematge directament a la xarxa.</a:t>
+            </a:r>
+          </a:p>
+        </p:txBody>
+      </p:sp>
+      <p:sp>
+        <p:nvSpPr>
+          <p:cNvPr id="8" name="TextBox 7"/>
+          <p:cNvSpPr txBox="1"/>
+          <p:nvPr/>
+        </p:nvSpPr>
+        <p:spPr>
+          <a:xfrm>
+            <a:off x="11548872" y="6446520"/>
+            <a:ext cx="365760" cy="274320"/>
+          </a:xfrm>
+          <a:prstGeom prst="rect">
+            <a:avLst/>
+          </a:prstGeom>
+          <a:noFill/>
+        </p:spPr>
+        <p:txBody>
+          <a:bodyPr wrap="none">
+            <a:spAutoFit/>
+          </a:bodyPr>
+          <a:lstStyle/>
+          <a:p>
+            <a:pPr algn="r"/>
+            <a:r>
+              <a:rPr sz="1000">
+                <a:solidFill>
+                  <a:srgbClr val="5B6B77"/>
+                </a:solidFill>
+              </a:rPr>
+              <a:t>17</a:t>
+            </a:r>
+          </a:p>
+        </p:txBody>
+      </p:sp>
+    </p:spTree>
+  </p:cSld>
+  <p:clrMapOvr>
+    <a:masterClrMapping/>
+  </p:clrMapOvr>
+</p:sld>
+</file>
+
+<file path=ppt/slides/slide18.xml><?xml version="1.0" encoding="utf-8"?>
 <p:sld xmlns:a="http://schemas.openxmlformats.org/drawingml/2006/main" xmlns:r="http://schemas.openxmlformats.org/officeDocument/2006/relationships" xmlns:p="http://schemas.openxmlformats.org/presentationml/2006/main">
   <p:cSld name="Slide 13">
     <p:bg>
@@ -6983,2031 +8667,6 @@
               <a:t>Fàcil de configurar i utilitzar. Limitacions de rendiment (CPU i RAM limitades) i la connexió de xarxa pot ser un coll d'ampolla si molts clients hi accedeixen a la vegada.</a:t>
             </a:r>
             <a:endParaRPr lang="en-US" sz="1350" dirty="0"/>
-          </a:p>
-        </p:txBody>
-      </p:sp>
-    </p:spTree>
-  </p:cSld>
-  <p:clrMapOvr>
-    <a:masterClrMapping/>
-  </p:clrMapOvr>
-</p:sld>
-</file>
-
-<file path=ppt/slides/slide14.xml><?xml version="1.0" encoding="utf-8"?>
-<p:sld xmlns:a="http://schemas.openxmlformats.org/drawingml/2006/main" xmlns:r="http://schemas.openxmlformats.org/officeDocument/2006/relationships" xmlns:p="http://schemas.openxmlformats.org/presentationml/2006/main">
-  <p:cSld name="Slide 14">
-    <p:bg>
-      <p:bgPr>
-        <a:solidFill>
-          <a:srgbClr val="F4F7F9"/>
-        </a:solidFill>
-      </p:bgPr>
-    </p:bg>
-    <p:spTree>
-      <p:nvGrpSpPr>
-        <p:cNvPr id="1" name=""/>
-        <p:cNvGrpSpPr/>
-        <p:nvPr/>
-      </p:nvGrpSpPr>
-      <p:grpSpPr>
-        <a:xfrm>
-          <a:off x="0" y="0"/>
-          <a:ext cx="0" cy="0"/>
-          <a:chOff x="0" y="0"/>
-          <a:chExt cx="0" cy="0"/>
-        </a:xfrm>
-      </p:grpSpPr>
-      <p:sp>
-        <p:nvSpPr>
-          <p:cNvPr id="2" name="Text 0"/>
-          <p:cNvSpPr txBox="1"/>
-          <p:nvPr/>
-        </p:nvSpPr>
-        <p:spPr>
-          <a:xfrm>
-            <a:off x="548640" y="457200"/>
-            <a:ext cx="9144000" cy="365760"/>
-          </a:xfrm>
-          <a:prstGeom prst="rect">
-            <a:avLst/>
-          </a:prstGeom>
-          <a:noFill/>
-          <a:ln/>
-        </p:spPr>
-        <p:txBody>
-          <a:bodyPr wrap="square" lIns="0" tIns="0" rIns="0" bIns="0" rtlCol="0" anchor="ctr"/>
-          <a:lstStyle/>
-          <a:p>
-            <a:pPr indent="0" marL="0">
-              <a:buNone/>
-            </a:pPr>
-            <a:r>
-              <a:rPr lang="en-US" sz="1300" b="1" spc="200" kern="0" dirty="0">
-                <a:solidFill>
-                  <a:srgbClr val="F2A541"/>
-                </a:solidFill>
-                <a:latin typeface="Calibri" pitchFamily="34" charset="0"/>
-                <a:ea typeface="Calibri" pitchFamily="34" charset="-122"/>
-                <a:cs typeface="Calibri" pitchFamily="34" charset="-120"/>
-              </a:rPr>
-              <a:t>SISTEMES EN XARXA</a:t>
-            </a:r>
-            <a:endParaRPr lang="en-US" sz="1300" dirty="0"/>
-          </a:p>
-        </p:txBody>
-      </p:sp>
-      <p:sp>
-        <p:nvSpPr>
-          <p:cNvPr id="3" name="Text 1"/>
-          <p:cNvSpPr txBox="1"/>
-          <p:nvPr/>
-        </p:nvSpPr>
-        <p:spPr>
-          <a:xfrm>
-            <a:off x="548640" y="822960"/>
-            <a:ext cx="10789920" cy="640080"/>
-          </a:xfrm>
-          <a:prstGeom prst="rect">
-            <a:avLst/>
-          </a:prstGeom>
-          <a:noFill/>
-          <a:ln/>
-        </p:spPr>
-        <p:txBody>
-          <a:bodyPr wrap="square" lIns="0" tIns="0" rIns="0" bIns="0" rtlCol="0" anchor="ctr"/>
-          <a:lstStyle/>
-          <a:p>
-            <a:pPr indent="0" marL="0">
-              <a:buNone/>
-            </a:pPr>
-            <a:r>
-              <a:rPr lang="en-US" sz="2800" b="1" dirty="0">
-                <a:solidFill>
-                  <a:srgbClr val="16242E"/>
-                </a:solidFill>
-                <a:latin typeface="Cambria" pitchFamily="34" charset="0"/>
-                <a:ea typeface="Cambria" pitchFamily="34" charset="-122"/>
-                <a:cs typeface="Cambria" pitchFamily="34" charset="-120"/>
-              </a:rPr>
-              <a:t>SAN · Storage Area Network</a:t>
-            </a:r>
-            <a:endParaRPr lang="en-US" sz="2800" dirty="0"/>
-          </a:p>
-        </p:txBody>
-      </p:sp>
-      <p:sp>
-        <p:nvSpPr>
-          <p:cNvPr id="4" name="Text 2"/>
-          <p:cNvSpPr txBox="1"/>
-          <p:nvPr/>
-        </p:nvSpPr>
-        <p:spPr>
-          <a:xfrm>
-            <a:off x="11551615" y="6446520"/>
-            <a:ext cx="457200" cy="274320"/>
-          </a:xfrm>
-          <a:prstGeom prst="rect">
-            <a:avLst/>
-          </a:prstGeom>
-          <a:noFill/>
-          <a:ln/>
-        </p:spPr>
-        <p:txBody>
-          <a:bodyPr wrap="square" lIns="0" tIns="0" rIns="0" bIns="0" rtlCol="0" anchor="ctr"/>
-          <a:lstStyle/>
-          <a:p>
-            <a:pPr algn="r" indent="0" marL="0">
-              <a:buNone/>
-            </a:pPr>
-            <a:r>
-              <a:rPr lang="en-US" sz="1100" dirty="0">
-                <a:solidFill>
-                  <a:srgbClr val="5B6B77"/>
-                </a:solidFill>
-                <a:latin typeface="Calibri" pitchFamily="34" charset="0"/>
-                <a:ea typeface="Calibri" pitchFamily="34" charset="-122"/>
-                <a:cs typeface="Calibri" pitchFamily="34" charset="-120"/>
-              </a:rPr>
-              <a:t>20</a:t>
-            </a:r>
-            <a:endParaRPr lang="en-US" sz="1100" dirty="0"/>
-          </a:p>
-        </p:txBody>
-      </p:sp>
-      <p:sp>
-        <p:nvSpPr>
-          <p:cNvPr id="5" name="Text 3"/>
-          <p:cNvSpPr txBox="1"/>
-          <p:nvPr/>
-        </p:nvSpPr>
-        <p:spPr>
-          <a:xfrm>
-            <a:off x="640080" y="1737360"/>
-            <a:ext cx="10789920" cy="2377440"/>
-          </a:xfrm>
-          <a:prstGeom prst="rect">
-            <a:avLst/>
-          </a:prstGeom>
-          <a:noFill/>
-          <a:ln/>
-        </p:spPr>
-        <p:txBody>
-          <a:bodyPr wrap="square" lIns="0" tIns="0" rIns="0" bIns="0" rtlCol="0" anchor="t"/>
-          <a:lstStyle/>
-          <a:p>
-            <a:pPr marL="342900" indent="-342900">
-              <a:lnSpc>
-                <a:spcPts val="2000"/>
-              </a:lnSpc>
-              <a:spcAft>
-                <a:spcPts val="1000"/>
-              </a:spcAft>
-              <a:buSzPct val="100000"/>
-              <a:buChar char="▪"/>
-            </a:pPr>
-            <a:r>
-              <a:rPr lang="en-US" sz="1500" dirty="0">
-                <a:solidFill>
-                  <a:srgbClr val="16242E"/>
-                </a:solidFill>
-                <a:latin typeface="Calibri" pitchFamily="34" charset="0"/>
-                <a:ea typeface="Calibri" pitchFamily="34" charset="-122"/>
-                <a:cs typeface="Calibri" pitchFamily="34" charset="-120"/>
-              </a:rPr>
-              <a:t>Xarxa dedicada exclusivament a l'emmagatzematge, molt més complexa i costosa que un NAS, però amb un rendiment molt superior.</a:t>
-            </a:r>
-            <a:endParaRPr lang="en-US" sz="1500" dirty="0"/>
-          </a:p>
-          <a:p>
-            <a:pPr marL="342900" indent="-342900">
-              <a:lnSpc>
-                <a:spcPts val="2000"/>
-              </a:lnSpc>
-              <a:spcAft>
-                <a:spcPts val="1000"/>
-              </a:spcAft>
-              <a:buSzPct val="100000"/>
-              <a:buChar char="▪"/>
-            </a:pPr>
-            <a:r>
-              <a:rPr lang="en-US" sz="1500" dirty="0">
-                <a:solidFill>
-                  <a:srgbClr val="16242E"/>
-                </a:solidFill>
-                <a:latin typeface="Calibri" pitchFamily="34" charset="0"/>
-                <a:ea typeface="Calibri" pitchFamily="34" charset="-122"/>
-                <a:cs typeface="Calibri" pitchFamily="34" charset="-120"/>
-              </a:rPr>
-              <a:t>Usa protocols optimitzats per a la transferència de fitxers (Fibre Channel, iSCSI, FCoE), diferents dels protocols habituals de la LAN (TCP/IP): calen switches i targetes de xarxa específics, a més de les de la LAN convencional.</a:t>
-            </a:r>
-            <a:endParaRPr lang="en-US" sz="1500" dirty="0"/>
-          </a:p>
-          <a:p>
-            <a:pPr marL="342900" indent="-342900">
-              <a:lnSpc>
-                <a:spcPts val="2000"/>
-              </a:lnSpc>
-              <a:spcAft>
-                <a:spcPts val="1000"/>
-              </a:spcAft>
-              <a:buSzPct val="100000"/>
-              <a:buChar char="▪"/>
-            </a:pPr>
-            <a:r>
-              <a:rPr lang="en-US" sz="1500" dirty="0">
-                <a:solidFill>
-                  <a:srgbClr val="16242E"/>
-                </a:solidFill>
-                <a:latin typeface="Calibri" pitchFamily="34" charset="0"/>
-                <a:ea typeface="Calibri" pitchFamily="34" charset="-122"/>
-                <a:cs typeface="Calibri" pitchFamily="34" charset="-120"/>
-              </a:rPr>
-              <a:t>Els servidors s'organitzen en clústers: redundància no només a nivell de disc (RAID), sinó també a nivell de servidor complet.</a:t>
-            </a:r>
-            <a:endParaRPr lang="en-US" sz="1500" dirty="0"/>
-          </a:p>
-        </p:txBody>
-      </p:sp>
-      <p:sp>
-        <p:nvSpPr>
-          <p:cNvPr id="6" name="Shape 4"/>
-          <p:cNvSpPr/>
-          <p:nvPr/>
-        </p:nvSpPr>
-        <p:spPr>
-          <a:xfrm>
-            <a:off x="640080" y="4343400"/>
-            <a:ext cx="10789920" cy="1280160"/>
-          </a:xfrm>
-          <a:prstGeom prst="roundRect">
-            <a:avLst>
-              <a:gd name="adj" fmla="val 7143"/>
-            </a:avLst>
-          </a:prstGeom>
-          <a:solidFill>
-            <a:srgbClr val="13293D"/>
-          </a:solidFill>
-          <a:ln/>
-        </p:spPr>
-        <p:txBody>
-          <a:bodyPr/>
-          <a:p/>
-        </p:txBody>
-      </p:sp>
-      <p:pic>
-        <p:nvPicPr>
-          <p:cNvPr id="7" name="Image 0" descr="/tmp/claude-0/-home-user-SMX-0226-Seguretat-Informatica/cec25c9b-7e93-584a-a64a-196540977a59/scratchpad/build/icons/bulb_F2A541.png">    </p:cNvPr>
-          <p:cNvPicPr>
-            <a:picLocks noChangeAspect="1"/>
-          </p:cNvPicPr>
-          <p:nvPr/>
-        </p:nvPicPr>
-        <p:blipFill>
-          <a:blip r:embed="rId1"/>
-          <a:stretch>
-            <a:fillRect/>
-          </a:stretch>
-        </p:blipFill>
-        <p:spPr>
-          <a:xfrm>
-            <a:off x="914400" y="4754880"/>
-            <a:ext cx="457200" cy="457200"/>
-          </a:xfrm>
-          <a:prstGeom prst="rect">
-            <a:avLst/>
-          </a:prstGeom>
-        </p:spPr>
-      </p:pic>
-      <p:sp>
-        <p:nvSpPr>
-          <p:cNvPr id="8" name="Text 5"/>
-          <p:cNvSpPr txBox="1"/>
-          <p:nvPr/>
-        </p:nvSpPr>
-        <p:spPr>
-          <a:xfrm>
-            <a:off x="1554480" y="4480560"/>
-            <a:ext cx="9601200" cy="1005840"/>
-          </a:xfrm>
-          <a:prstGeom prst="rect">
-            <a:avLst/>
-          </a:prstGeom>
-          <a:noFill/>
-          <a:ln/>
-        </p:spPr>
-        <p:txBody>
-          <a:bodyPr wrap="square" lIns="0" tIns="0" rIns="0" bIns="0" rtlCol="0" anchor="ctr"/>
-          <a:lstStyle/>
-          <a:p>
-            <a:pPr indent="0" marL="0">
-              <a:lnSpc>
-                <a:spcPts val="1800"/>
-              </a:lnSpc>
-              <a:buNone/>
-            </a:pPr>
-            <a:r>
-              <a:rPr lang="en-US" sz="1350" i="1" dirty="0">
-                <a:solidFill>
-                  <a:srgbClr val="FFFFFF"/>
-                </a:solidFill>
-                <a:latin typeface="Calibri" pitchFamily="34" charset="0"/>
-                <a:ea typeface="Calibri" pitchFamily="34" charset="-122"/>
-                <a:cs typeface="Calibri" pitchFamily="34" charset="-120"/>
-              </a:rPr>
-              <a:t>A escala més petita, es pot muntar un clúster d'emmagatzematge amb servidors normals de la LAN (DAS) usant tecnologies com Windows Server DFS o GlusterFS (Linux), sense necessitat d'una SAN completa.</a:t>
-            </a:r>
-            <a:endParaRPr lang="en-US" sz="1350" dirty="0"/>
-          </a:p>
-        </p:txBody>
-      </p:sp>
-    </p:spTree>
-  </p:cSld>
-  <p:clrMapOvr>
-    <a:masterClrMapping/>
-  </p:clrMapOvr>
-</p:sld>
-</file>
-
-<file path=ppt/slides/slide15.xml><?xml version="1.0" encoding="utf-8"?>
-<p:sld xmlns:a="http://schemas.openxmlformats.org/drawingml/2006/main" xmlns:r="http://schemas.openxmlformats.org/officeDocument/2006/relationships" xmlns:p="http://schemas.openxmlformats.org/presentationml/2006/main">
-  <p:cSld name="Slide 15">
-    <p:bg>
-      <p:bgPr>
-        <a:solidFill>
-          <a:srgbClr val="F4F7F9"/>
-        </a:solidFill>
-      </p:bgPr>
-    </p:bg>
-    <p:spTree>
-      <p:nvGrpSpPr>
-        <p:cNvPr id="1" name=""/>
-        <p:cNvGrpSpPr/>
-        <p:nvPr/>
-      </p:nvGrpSpPr>
-      <p:grpSpPr>
-        <a:xfrm>
-          <a:off x="0" y="0"/>
-          <a:ext cx="0" cy="0"/>
-          <a:chOff x="0" y="0"/>
-          <a:chExt cx="0" cy="0"/>
-        </a:xfrm>
-      </p:grpSpPr>
-      <p:sp>
-        <p:nvSpPr>
-          <p:cNvPr id="2" name="Text 0"/>
-          <p:cNvSpPr txBox="1"/>
-          <p:nvPr/>
-        </p:nvSpPr>
-        <p:spPr>
-          <a:xfrm>
-            <a:off x="548640" y="457200"/>
-            <a:ext cx="9144000" cy="365760"/>
-          </a:xfrm>
-          <a:prstGeom prst="rect">
-            <a:avLst/>
-          </a:prstGeom>
-          <a:noFill/>
-          <a:ln/>
-        </p:spPr>
-        <p:txBody>
-          <a:bodyPr wrap="square" lIns="0" tIns="0" rIns="0" bIns="0" rtlCol="0" anchor="ctr"/>
-          <a:lstStyle/>
-          <a:p>
-            <a:pPr indent="0" marL="0">
-              <a:buNone/>
-            </a:pPr>
-            <a:r>
-              <a:rPr lang="en-US" sz="1300" b="1" spc="200" kern="0" dirty="0">
-                <a:solidFill>
-                  <a:srgbClr val="F2A541"/>
-                </a:solidFill>
-                <a:latin typeface="Calibri" pitchFamily="34" charset="0"/>
-                <a:ea typeface="Calibri" pitchFamily="34" charset="-122"/>
-                <a:cs typeface="Calibri" pitchFamily="34" charset="-120"/>
-              </a:rPr>
-              <a:t>UNA ALTERNATIVA MODERNA</a:t>
-            </a:r>
-            <a:endParaRPr lang="en-US" sz="1300" dirty="0"/>
-          </a:p>
-        </p:txBody>
-      </p:sp>
-      <p:sp>
-        <p:nvSpPr>
-          <p:cNvPr id="3" name="Text 1"/>
-          <p:cNvSpPr txBox="1"/>
-          <p:nvPr/>
-        </p:nvSpPr>
-        <p:spPr>
-          <a:xfrm>
-            <a:off x="548640" y="822960"/>
-            <a:ext cx="10789920" cy="640080"/>
-          </a:xfrm>
-          <a:prstGeom prst="rect">
-            <a:avLst/>
-          </a:prstGeom>
-          <a:noFill/>
-          <a:ln/>
-        </p:spPr>
-        <p:txBody>
-          <a:bodyPr wrap="square" lIns="0" tIns="0" rIns="0" bIns="0" rtlCol="0" anchor="ctr"/>
-          <a:lstStyle/>
-          <a:p>
-            <a:pPr indent="0" marL="0">
-              <a:buNone/>
-            </a:pPr>
-            <a:r>
-              <a:rPr lang="en-US" sz="2800" b="1" dirty="0">
-                <a:solidFill>
-                  <a:srgbClr val="16242E"/>
-                </a:solidFill>
-                <a:latin typeface="Cambria" pitchFamily="34" charset="0"/>
-                <a:ea typeface="Cambria" pitchFamily="34" charset="-122"/>
-                <a:cs typeface="Cambria" pitchFamily="34" charset="-120"/>
-              </a:rPr>
-              <a:t>Serveis de núvol</a:t>
-            </a:r>
-            <a:endParaRPr lang="en-US" sz="2800" dirty="0"/>
-          </a:p>
-        </p:txBody>
-      </p:sp>
-      <p:sp>
-        <p:nvSpPr>
-          <p:cNvPr id="4" name="Text 2"/>
-          <p:cNvSpPr txBox="1"/>
-          <p:nvPr/>
-        </p:nvSpPr>
-        <p:spPr>
-          <a:xfrm>
-            <a:off x="11551615" y="6446520"/>
-            <a:ext cx="457200" cy="274320"/>
-          </a:xfrm>
-          <a:prstGeom prst="rect">
-            <a:avLst/>
-          </a:prstGeom>
-          <a:noFill/>
-          <a:ln/>
-        </p:spPr>
-        <p:txBody>
-          <a:bodyPr wrap="square" lIns="0" tIns="0" rIns="0" bIns="0" rtlCol="0" anchor="ctr"/>
-          <a:lstStyle/>
-          <a:p>
-            <a:pPr algn="r" indent="0" marL="0">
-              <a:buNone/>
-            </a:pPr>
-            <a:r>
-              <a:rPr lang="en-US" sz="1100" dirty="0">
-                <a:solidFill>
-                  <a:srgbClr val="5B6B77"/>
-                </a:solidFill>
-                <a:latin typeface="Calibri" pitchFamily="34" charset="0"/>
-                <a:ea typeface="Calibri" pitchFamily="34" charset="-122"/>
-                <a:cs typeface="Calibri" pitchFamily="34" charset="-120"/>
-              </a:rPr>
-              <a:t>22</a:t>
-            </a:r>
-            <a:endParaRPr lang="en-US" sz="1100" dirty="0"/>
-          </a:p>
-        </p:txBody>
-      </p:sp>
-      <p:sp>
-        <p:nvSpPr>
-          <p:cNvPr id="5" name="Text 3"/>
-          <p:cNvSpPr txBox="1"/>
-          <p:nvPr/>
-        </p:nvSpPr>
-        <p:spPr>
-          <a:xfrm>
-            <a:off x="640080" y="1737360"/>
-            <a:ext cx="10789920" cy="2103120"/>
-          </a:xfrm>
-          <a:prstGeom prst="rect">
-            <a:avLst/>
-          </a:prstGeom>
-          <a:noFill/>
-          <a:ln/>
-        </p:spPr>
-        <p:txBody>
-          <a:bodyPr wrap="square" lIns="0" tIns="0" rIns="0" bIns="0" rtlCol="0" anchor="t"/>
-          <a:lstStyle/>
-          <a:p>
-            <a:pPr marL="342900" indent="-342900">
-              <a:lnSpc>
-                <a:spcPts val="2000"/>
-              </a:lnSpc>
-              <a:spcAft>
-                <a:spcPts val="1000"/>
-              </a:spcAft>
-              <a:buSzPct val="100000"/>
-              <a:buChar char="▪"/>
-            </a:pPr>
-            <a:r>
-              <a:rPr lang="en-US" sz="1550" dirty="0">
-                <a:solidFill>
-                  <a:srgbClr val="16242E"/>
-                </a:solidFill>
-                <a:latin typeface="Calibri" pitchFamily="34" charset="0"/>
-                <a:ea typeface="Calibri" pitchFamily="34" charset="-122"/>
-                <a:cs typeface="Calibri" pitchFamily="34" charset="-120"/>
-              </a:rPr>
-              <a:t>Pagament per ús en lloc d'infraestructura pròpia. Fins i tot en entorn domèstic hi ha plans gratuïts (Google Drive ofereix 15 GB a qualsevol compte de Gmail).</a:t>
-            </a:r>
-            <a:endParaRPr lang="en-US" sz="1550" dirty="0"/>
-          </a:p>
-          <a:p>
-            <a:pPr marL="342900" indent="-342900">
-              <a:lnSpc>
-                <a:spcPts val="2000"/>
-              </a:lnSpc>
-              <a:spcAft>
-                <a:spcPts val="1000"/>
-              </a:spcAft>
-              <a:buSzPct val="100000"/>
-              <a:buChar char="▪"/>
-            </a:pPr>
-            <a:r>
-              <a:rPr lang="en-US" sz="1550" dirty="0">
-                <a:solidFill>
-                  <a:srgbClr val="16242E"/>
-                </a:solidFill>
-                <a:latin typeface="Calibri" pitchFamily="34" charset="0"/>
-                <a:ea typeface="Calibri" pitchFamily="34" charset="-122"/>
-                <a:cs typeface="Calibri" pitchFamily="34" charset="-120"/>
-              </a:rPr>
-              <a:t>Permeten accedir a la informació des de qualsevol lloc i moment, amb una disponibilitat molt alta i un cost inicial baix.</a:t>
-            </a:r>
-            <a:endParaRPr lang="en-US" sz="1550" dirty="0"/>
-          </a:p>
-        </p:txBody>
-      </p:sp>
-      <p:sp>
-        <p:nvSpPr>
-          <p:cNvPr id="6" name="Shape 4"/>
-          <p:cNvSpPr/>
-          <p:nvPr/>
-        </p:nvSpPr>
-        <p:spPr>
-          <a:xfrm>
-            <a:off x="640080" y="4114800"/>
-            <a:ext cx="10789920" cy="1463040"/>
-          </a:xfrm>
-          <a:prstGeom prst="roundRect">
-            <a:avLst>
-              <a:gd name="adj" fmla="val 6250"/>
-            </a:avLst>
-          </a:prstGeom>
-          <a:solidFill>
-            <a:srgbClr val="13293D"/>
-          </a:solidFill>
-          <a:ln/>
-        </p:spPr>
-      </p:sp>
-      <p:pic>
-        <p:nvPicPr>
-          <p:cNvPr id="7" name="Image 0" descr="/tmp/claude-0/-home-user-SMX-0226-Seguretat-Informatica/cec25c9b-7e93-584a-a64a-196540977a59/scratchpad/build/icons/warning_F2A541.png">    </p:cNvPr>
-          <p:cNvPicPr>
-            <a:picLocks noChangeAspect="1"/>
-          </p:cNvPicPr>
-          <p:nvPr/>
-        </p:nvPicPr>
-        <p:blipFill>
-          <a:blip r:embed="rId1"/>
-          <a:stretch>
-            <a:fillRect/>
-          </a:stretch>
-        </p:blipFill>
-        <p:spPr>
-          <a:xfrm>
-            <a:off x="914400" y="4617720"/>
-            <a:ext cx="457200" cy="457200"/>
-          </a:xfrm>
-          <a:prstGeom prst="rect">
-            <a:avLst/>
-          </a:prstGeom>
-        </p:spPr>
-      </p:pic>
-      <p:sp>
-        <p:nvSpPr>
-          <p:cNvPr id="8" name="Text 5"/>
-          <p:cNvSpPr txBox="1"/>
-          <p:nvPr/>
-        </p:nvSpPr>
-        <p:spPr>
-          <a:xfrm>
-            <a:off x="1554480" y="4251960"/>
-            <a:ext cx="9601200" cy="1188720"/>
-          </a:xfrm>
-          <a:prstGeom prst="rect">
-            <a:avLst/>
-          </a:prstGeom>
-          <a:noFill/>
-          <a:ln/>
-        </p:spPr>
-        <p:txBody>
-          <a:bodyPr wrap="square" lIns="0" tIns="0" rIns="0" bIns="0" rtlCol="0" anchor="ctr"/>
-          <a:lstStyle/>
-          <a:p>
-            <a:pPr indent="0" marL="0">
-              <a:lnSpc>
-                <a:spcPts val="1800"/>
-              </a:lnSpc>
-              <a:buNone/>
-            </a:pPr>
-            <a:r>
-              <a:rPr lang="en-US" sz="1350" i="1" dirty="0">
-                <a:solidFill>
-                  <a:srgbClr val="FFFFFF"/>
-                </a:solidFill>
-                <a:latin typeface="Calibri" pitchFamily="34" charset="0"/>
-                <a:ea typeface="Calibri" pitchFamily="34" charset="-122"/>
-                <a:cs typeface="Calibri" pitchFamily="34" charset="-120"/>
-              </a:rPr>
-              <a:t>Però compte: la sincronització pot ser lenta amb fitxers grans; es perd el control complet de les dades (seguretat, continuïtat del proveïdor); i cal complir la normativa legal (RGPD) si hi ha dades de caràcter personal.</a:t>
-            </a:r>
-            <a:endParaRPr lang="en-US" sz="1350" dirty="0"/>
-          </a:p>
-        </p:txBody>
-      </p:sp>
-    </p:spTree>
-  </p:cSld>
-  <p:clrMapOvr>
-    <a:masterClrMapping/>
-  </p:clrMapOvr>
-</p:sld>
-</file>
-
-<file path=ppt/slides/slide16.xml><?xml version="1.0" encoding="utf-8"?>
-<p:sld xmlns:a="http://schemas.openxmlformats.org/drawingml/2006/main" xmlns:r="http://schemas.openxmlformats.org/officeDocument/2006/relationships" xmlns:p="http://schemas.openxmlformats.org/presentationml/2006/main">
-  <p:cSld name="Slide 16">
-    <p:bg>
-      <p:bgPr>
-        <a:solidFill>
-          <a:srgbClr val="F4F7F9"/>
-        </a:solidFill>
-      </p:bgPr>
-    </p:bg>
-    <p:spTree>
-      <p:nvGrpSpPr>
-        <p:cNvPr id="1" name=""/>
-        <p:cNvGrpSpPr/>
-        <p:nvPr/>
-      </p:nvGrpSpPr>
-      <p:grpSpPr>
-        <a:xfrm>
-          <a:off x="0" y="0"/>
-          <a:ext cx="0" cy="0"/>
-          <a:chOff x="0" y="0"/>
-          <a:chExt cx="0" cy="0"/>
-        </a:xfrm>
-      </p:grpSpPr>
-      <p:sp>
-        <p:nvSpPr>
-          <p:cNvPr id="2" name="Text 0"/>
-          <p:cNvSpPr txBox="1"/>
-          <p:nvPr/>
-        </p:nvSpPr>
-        <p:spPr>
-          <a:xfrm>
-            <a:off x="548640" y="457200"/>
-            <a:ext cx="9144000" cy="365760"/>
-          </a:xfrm>
-          <a:prstGeom prst="rect">
-            <a:avLst/>
-          </a:prstGeom>
-          <a:noFill/>
-          <a:ln/>
-        </p:spPr>
-        <p:txBody>
-          <a:bodyPr wrap="square" lIns="0" tIns="0" rIns="0" bIns="0" rtlCol="0" anchor="ctr"/>
-          <a:lstStyle/>
-          <a:p>
-            <a:pPr indent="0" marL="0">
-              <a:buNone/>
-            </a:pPr>
-            <a:r>
-              <a:rPr lang="en-US" sz="1300" b="1" spc="200" kern="0" dirty="0">
-                <a:solidFill>
-                  <a:srgbClr val="F2A541"/>
-                </a:solidFill>
-                <a:latin typeface="Calibri" pitchFamily="34" charset="0"/>
-                <a:ea typeface="Calibri" pitchFamily="34" charset="-122"/>
-                <a:cs typeface="Calibri" pitchFamily="34" charset="-120"/>
-              </a:rPr>
-              <a:t>PER ACABAR</a:t>
-            </a:r>
-            <a:endParaRPr lang="en-US" sz="1300" dirty="0"/>
-          </a:p>
-        </p:txBody>
-      </p:sp>
-      <p:sp>
-        <p:nvSpPr>
-          <p:cNvPr id="3" name="Text 1"/>
-          <p:cNvSpPr txBox="1"/>
-          <p:nvPr/>
-        </p:nvSpPr>
-        <p:spPr>
-          <a:xfrm>
-            <a:off x="548640" y="822960"/>
-            <a:ext cx="10789920" cy="640080"/>
-          </a:xfrm>
-          <a:prstGeom prst="rect">
-            <a:avLst/>
-          </a:prstGeom>
-          <a:noFill/>
-          <a:ln/>
-        </p:spPr>
-        <p:txBody>
-          <a:bodyPr wrap="square" lIns="0" tIns="0" rIns="0" bIns="0" rtlCol="0" anchor="ctr"/>
-          <a:lstStyle/>
-          <a:p>
-            <a:pPr indent="0" marL="0">
-              <a:buNone/>
-            </a:pPr>
-            <a:r>
-              <a:rPr lang="en-US" sz="2800" b="1" dirty="0">
-                <a:solidFill>
-                  <a:srgbClr val="16242E"/>
-                </a:solidFill>
-                <a:latin typeface="Cambria" pitchFamily="34" charset="0"/>
-                <a:ea typeface="Cambria" pitchFamily="34" charset="-122"/>
-                <a:cs typeface="Cambria" pitchFamily="34" charset="-120"/>
-              </a:rPr>
-              <a:t>Idees clau d'avui</a:t>
-            </a:r>
-            <a:endParaRPr lang="en-US" sz="2800" dirty="0"/>
-          </a:p>
-        </p:txBody>
-      </p:sp>
-      <p:sp>
-        <p:nvSpPr>
-          <p:cNvPr id="4" name="Text 2"/>
-          <p:cNvSpPr txBox="1"/>
-          <p:nvPr/>
-        </p:nvSpPr>
-        <p:spPr>
-          <a:xfrm>
-            <a:off x="11551615" y="6446520"/>
-            <a:ext cx="457200" cy="274320"/>
-          </a:xfrm>
-          <a:prstGeom prst="rect">
-            <a:avLst/>
-          </a:prstGeom>
-          <a:noFill/>
-          <a:ln/>
-        </p:spPr>
-        <p:txBody>
-          <a:bodyPr wrap="square" lIns="0" tIns="0" rIns="0" bIns="0" rtlCol="0" anchor="ctr"/>
-          <a:lstStyle/>
-          <a:p>
-            <a:pPr algn="r" indent="0" marL="0">
-              <a:buNone/>
-            </a:pPr>
-            <a:r>
-              <a:rPr lang="en-US" sz="1100" dirty="0">
-                <a:solidFill>
-                  <a:srgbClr val="5B6B77"/>
-                </a:solidFill>
-                <a:latin typeface="Calibri" pitchFamily="34" charset="0"/>
-                <a:ea typeface="Calibri" pitchFamily="34" charset="-122"/>
-                <a:cs typeface="Calibri" pitchFamily="34" charset="-120"/>
-              </a:rPr>
-              <a:t>23</a:t>
-            </a:r>
-            <a:endParaRPr lang="en-US" sz="1100" dirty="0"/>
-          </a:p>
-        </p:txBody>
-      </p:sp>
-      <p:sp>
-        <p:nvSpPr>
-          <p:cNvPr id="5" name="Shape 3"/>
-          <p:cNvSpPr/>
-          <p:nvPr/>
-        </p:nvSpPr>
-        <p:spPr>
-          <a:xfrm>
-            <a:off x="632308" y="1737360"/>
-            <a:ext cx="3429000" cy="3840480"/>
-          </a:xfrm>
-          <a:prstGeom prst="roundRect">
-            <a:avLst>
-              <a:gd name="adj" fmla="val 3200"/>
-            </a:avLst>
-          </a:prstGeom>
-          <a:solidFill>
-            <a:srgbClr val="FFFFFF"/>
-          </a:solidFill>
-          <a:ln w="12700">
-            <a:solidFill>
-              <a:srgbClr val="E2E8ED"/>
-            </a:solidFill>
-            <a:prstDash val="solid"/>
-          </a:ln>
-          <a:effectLst>
-            <a:outerShdw sx="100000" sy="100000" kx="0" ky="0" algn="bl" rotWithShape="0" blurRad="101600" dist="38100" dir="5400000">
-              <a:srgbClr val="16242E">
-                <a:alpha val="12000"/>
-              </a:srgbClr>
-            </a:outerShdw>
-          </a:effectLst>
-        </p:spPr>
-      </p:sp>
-      <p:sp>
-        <p:nvSpPr>
-          <p:cNvPr id="6" name="Shape 4"/>
-          <p:cNvSpPr/>
-          <p:nvPr/>
-        </p:nvSpPr>
-        <p:spPr>
-          <a:xfrm>
-            <a:off x="952348" y="2057400"/>
-            <a:ext cx="731520" cy="731520"/>
-          </a:xfrm>
-          <a:prstGeom prst="ellipse">
-            <a:avLst/>
-          </a:prstGeom>
-          <a:solidFill>
-            <a:srgbClr val="0B1B29"/>
-          </a:solidFill>
-          <a:ln/>
-        </p:spPr>
-      </p:sp>
-      <p:pic>
-        <p:nvPicPr>
-          <p:cNvPr id="7" name="Image 0" descr="/tmp/claude-0/-home-user-SMX-0226-Seguretat-Informatica/cec25c9b-7e93-584a-a64a-196540977a59/scratchpad/build/icons/layer_F2A541.png">    </p:cNvPr>
-          <p:cNvPicPr>
-            <a:picLocks noChangeAspect="1"/>
-          </p:cNvPicPr>
-          <p:nvPr/>
-        </p:nvPicPr>
-        <p:blipFill>
-          <a:blip r:embed="rId1"/>
-          <a:stretch>
-            <a:fillRect/>
-          </a:stretch>
-        </p:blipFill>
-        <p:spPr>
-          <a:xfrm>
-            <a:off x="1135228" y="2240280"/>
-            <a:ext cx="365760" cy="365760"/>
-          </a:xfrm>
-          <a:prstGeom prst="rect">
-            <a:avLst/>
-          </a:prstGeom>
-        </p:spPr>
-      </p:pic>
-      <p:sp>
-        <p:nvSpPr>
-          <p:cNvPr id="8" name="Text 5"/>
-          <p:cNvSpPr txBox="1"/>
-          <p:nvPr/>
-        </p:nvSpPr>
-        <p:spPr>
-          <a:xfrm>
-            <a:off x="906628" y="2971800"/>
-            <a:ext cx="2880360" cy="731520"/>
-          </a:xfrm>
-          <a:prstGeom prst="rect">
-            <a:avLst/>
-          </a:prstGeom>
-          <a:noFill/>
-          <a:ln/>
-        </p:spPr>
-        <p:txBody>
-          <a:bodyPr wrap="square" lIns="0" tIns="0" rIns="0" bIns="0" rtlCol="0" anchor="ctr"/>
-          <a:lstStyle/>
-          <a:p>
-            <a:pPr indent="0" marL="0">
-              <a:buNone/>
-            </a:pPr>
-            <a:r>
-              <a:rPr lang="en-US" sz="1700" b="1" dirty="0">
-                <a:solidFill>
-                  <a:srgbClr val="16242E"/>
-                </a:solidFill>
-                <a:latin typeface="Cambria" pitchFamily="34" charset="0"/>
-                <a:ea typeface="Cambria" pitchFamily="34" charset="-122"/>
-                <a:cs typeface="Cambria" pitchFamily="34" charset="-120"/>
-              </a:rPr>
-              <a:t>5 nivells de RAID</a:t>
-            </a:r>
-            <a:endParaRPr lang="en-US" sz="1700" dirty="0"/>
-          </a:p>
-        </p:txBody>
-      </p:sp>
-      <p:sp>
-        <p:nvSpPr>
-          <p:cNvPr id="9" name="Text 6"/>
-          <p:cNvSpPr txBox="1"/>
-          <p:nvPr/>
-        </p:nvSpPr>
-        <p:spPr>
-          <a:xfrm>
-            <a:off x="906628" y="3611880"/>
-            <a:ext cx="2880360" cy="1828800"/>
-          </a:xfrm>
-          <a:prstGeom prst="rect">
-            <a:avLst/>
-          </a:prstGeom>
-          <a:noFill/>
-          <a:ln/>
-        </p:spPr>
-        <p:txBody>
-          <a:bodyPr wrap="square" lIns="0" tIns="0" rIns="0" bIns="0" rtlCol="0" anchor="t"/>
-          <a:lstStyle/>
-          <a:p>
-            <a:pPr indent="0" marL="0">
-              <a:lnSpc>
-                <a:spcPts val="1600"/>
-              </a:lnSpc>
-              <a:buNone/>
-            </a:pPr>
-            <a:r>
-              <a:rPr lang="en-US" sz="1250" dirty="0">
-                <a:solidFill>
-                  <a:srgbClr val="5B6B77"/>
-                </a:solidFill>
-                <a:latin typeface="Calibri" pitchFamily="34" charset="0"/>
-                <a:ea typeface="Calibri" pitchFamily="34" charset="-122"/>
-                <a:cs typeface="Calibri" pitchFamily="34" charset="-120"/>
-              </a:rPr>
-              <a:t>0 (velocitat), 1 (mirall), 5 i 6 (paritat), 10 (mirall+distribució): cadascun amb el seu compromís.</a:t>
-            </a:r>
-            <a:endParaRPr lang="en-US" sz="1250" dirty="0"/>
-          </a:p>
-        </p:txBody>
-      </p:sp>
-      <p:sp>
-        <p:nvSpPr>
-          <p:cNvPr id="10" name="Shape 7"/>
-          <p:cNvSpPr/>
-          <p:nvPr/>
-        </p:nvSpPr>
-        <p:spPr>
-          <a:xfrm>
-            <a:off x="4381348" y="1737360"/>
-            <a:ext cx="3429000" cy="3840480"/>
-          </a:xfrm>
-          <a:prstGeom prst="roundRect">
-            <a:avLst>
-              <a:gd name="adj" fmla="val 3200"/>
-            </a:avLst>
-          </a:prstGeom>
-          <a:solidFill>
-            <a:srgbClr val="FFFFFF"/>
-          </a:solidFill>
-          <a:ln w="12700">
-            <a:solidFill>
-              <a:srgbClr val="E2E8ED"/>
-            </a:solidFill>
-            <a:prstDash val="solid"/>
-          </a:ln>
-          <a:effectLst>
-            <a:outerShdw sx="100000" sy="100000" kx="0" ky="0" algn="bl" rotWithShape="0" blurRad="101600" dist="38100" dir="5400000">
-              <a:srgbClr val="16242E">
-                <a:alpha val="12000"/>
-              </a:srgbClr>
-            </a:outerShdw>
-          </a:effectLst>
-        </p:spPr>
-      </p:sp>
-      <p:sp>
-        <p:nvSpPr>
-          <p:cNvPr id="11" name="Shape 8"/>
-          <p:cNvSpPr/>
-          <p:nvPr/>
-        </p:nvSpPr>
-        <p:spPr>
-          <a:xfrm>
-            <a:off x="4701388" y="2057400"/>
-            <a:ext cx="731520" cy="731520"/>
-          </a:xfrm>
-          <a:prstGeom prst="ellipse">
-            <a:avLst/>
-          </a:prstGeom>
-          <a:solidFill>
-            <a:srgbClr val="0B1B29"/>
-          </a:solidFill>
-          <a:ln/>
-        </p:spPr>
-      </p:sp>
-      <p:pic>
-        <p:nvPicPr>
-          <p:cNvPr id="12" name="Image 1" descr="/tmp/claude-0/-home-user-SMX-0226-Seguretat-Informatica/cec25c9b-7e93-584a-a64a-196540977a59/scratchpad/build/icons/network_F2A541.png">    </p:cNvPr>
-          <p:cNvPicPr>
-            <a:picLocks noChangeAspect="1"/>
-          </p:cNvPicPr>
-          <p:nvPr/>
-        </p:nvPicPr>
-        <p:blipFill>
-          <a:blip r:embed="rId2"/>
-          <a:stretch>
-            <a:fillRect/>
-          </a:stretch>
-        </p:blipFill>
-        <p:spPr>
-          <a:xfrm>
-            <a:off x="4884268" y="2240280"/>
-            <a:ext cx="365760" cy="365760"/>
-          </a:xfrm>
-          <a:prstGeom prst="rect">
-            <a:avLst/>
-          </a:prstGeom>
-        </p:spPr>
-      </p:pic>
-      <p:sp>
-        <p:nvSpPr>
-          <p:cNvPr id="13" name="Text 9"/>
-          <p:cNvSpPr txBox="1"/>
-          <p:nvPr/>
-        </p:nvSpPr>
-        <p:spPr>
-          <a:xfrm>
-            <a:off x="4655668" y="2971800"/>
-            <a:ext cx="2880360" cy="731520"/>
-          </a:xfrm>
-          <a:prstGeom prst="rect">
-            <a:avLst/>
-          </a:prstGeom>
-          <a:noFill/>
-          <a:ln/>
-        </p:spPr>
-        <p:txBody>
-          <a:bodyPr wrap="square" lIns="0" tIns="0" rIns="0" bIns="0" rtlCol="0" anchor="ctr"/>
-          <a:lstStyle/>
-          <a:p>
-            <a:pPr indent="0" marL="0">
-              <a:buNone/>
-            </a:pPr>
-            <a:r>
-              <a:rPr lang="en-US" sz="1700" b="1" dirty="0">
-                <a:solidFill>
-                  <a:srgbClr val="16242E"/>
-                </a:solidFill>
-                <a:latin typeface="Cambria" pitchFamily="34" charset="0"/>
-                <a:ea typeface="Cambria" pitchFamily="34" charset="-122"/>
-                <a:cs typeface="Cambria" pitchFamily="34" charset="-120"/>
-              </a:rPr>
-              <a:t>DAS &lt; NAS &lt; SAN</a:t>
-            </a:r>
-            <a:endParaRPr lang="en-US" sz="1700" dirty="0"/>
-          </a:p>
-        </p:txBody>
-      </p:sp>
-      <p:sp>
-        <p:nvSpPr>
-          <p:cNvPr id="14" name="Text 10"/>
-          <p:cNvSpPr txBox="1"/>
-          <p:nvPr/>
-        </p:nvSpPr>
-        <p:spPr>
-          <a:xfrm>
-            <a:off x="4655668" y="3611880"/>
-            <a:ext cx="2880360" cy="1828800"/>
-          </a:xfrm>
-          <a:prstGeom prst="rect">
-            <a:avLst/>
-          </a:prstGeom>
-          <a:noFill/>
-          <a:ln/>
-        </p:spPr>
-        <p:txBody>
-          <a:bodyPr wrap="square" lIns="0" tIns="0" rIns="0" bIns="0" rtlCol="0" anchor="t"/>
-          <a:lstStyle/>
-          <a:p>
-            <a:pPr indent="0" marL="0">
-              <a:lnSpc>
-                <a:spcPts val="1600"/>
-              </a:lnSpc>
-              <a:buNone/>
-            </a:pPr>
-            <a:r>
-              <a:rPr lang="en-US" sz="1250" dirty="0">
-                <a:solidFill>
-                  <a:srgbClr val="5B6B77"/>
-                </a:solidFill>
-                <a:latin typeface="Calibri" pitchFamily="34" charset="0"/>
-                <a:ea typeface="Calibri" pitchFamily="34" charset="-122"/>
-                <a:cs typeface="Calibri" pitchFamily="34" charset="-120"/>
-              </a:rPr>
-              <a:t>Complexitat i cost creixents, a canvi de més rendiment, disponibilitat i escalabilitat.</a:t>
-            </a:r>
-            <a:endParaRPr lang="en-US" sz="1250" dirty="0"/>
-          </a:p>
-        </p:txBody>
-      </p:sp>
-      <p:sp>
-        <p:nvSpPr>
-          <p:cNvPr id="15" name="Shape 11"/>
-          <p:cNvSpPr/>
-          <p:nvPr/>
-        </p:nvSpPr>
-        <p:spPr>
-          <a:xfrm>
-            <a:off x="8130388" y="1737360"/>
-            <a:ext cx="3429000" cy="3840480"/>
-          </a:xfrm>
-          <a:prstGeom prst="roundRect">
-            <a:avLst>
-              <a:gd name="adj" fmla="val 3200"/>
-            </a:avLst>
-          </a:prstGeom>
-          <a:solidFill>
-            <a:srgbClr val="FFFFFF"/>
-          </a:solidFill>
-          <a:ln w="12700">
-            <a:solidFill>
-              <a:srgbClr val="E2E8ED"/>
-            </a:solidFill>
-            <a:prstDash val="solid"/>
-          </a:ln>
-          <a:effectLst>
-            <a:outerShdw sx="100000" sy="100000" kx="0" ky="0" algn="bl" rotWithShape="0" blurRad="101600" dist="38100" dir="5400000">
-              <a:srgbClr val="16242E">
-                <a:alpha val="12000"/>
-              </a:srgbClr>
-            </a:outerShdw>
-          </a:effectLst>
-        </p:spPr>
-      </p:sp>
-      <p:sp>
-        <p:nvSpPr>
-          <p:cNvPr id="16" name="Shape 12"/>
-          <p:cNvSpPr/>
-          <p:nvPr/>
-        </p:nvSpPr>
-        <p:spPr>
-          <a:xfrm>
-            <a:off x="8450428" y="2057400"/>
-            <a:ext cx="731520" cy="731520"/>
-          </a:xfrm>
-          <a:prstGeom prst="ellipse">
-            <a:avLst/>
-          </a:prstGeom>
-          <a:solidFill>
-            <a:srgbClr val="0B1B29"/>
-          </a:solidFill>
-          <a:ln/>
-        </p:spPr>
-      </p:sp>
-      <p:pic>
-        <p:nvPicPr>
-          <p:cNvPr id="17" name="Image 2" descr="/tmp/claude-0/-home-user-SMX-0226-Seguretat-Informatica/cec25c9b-7e93-584a-a64a-196540977a59/scratchpad/build/icons/cloud_F2A541.png">    </p:cNvPr>
-          <p:cNvPicPr>
-            <a:picLocks noChangeAspect="1"/>
-          </p:cNvPicPr>
-          <p:nvPr/>
-        </p:nvPicPr>
-        <p:blipFill>
-          <a:blip r:embed="rId3"/>
-          <a:stretch>
-            <a:fillRect/>
-          </a:stretch>
-        </p:blipFill>
-        <p:spPr>
-          <a:xfrm>
-            <a:off x="8633308" y="2240280"/>
-            <a:ext cx="365760" cy="365760"/>
-          </a:xfrm>
-          <a:prstGeom prst="rect">
-            <a:avLst/>
-          </a:prstGeom>
-        </p:spPr>
-      </p:pic>
-      <p:sp>
-        <p:nvSpPr>
-          <p:cNvPr id="18" name="Text 13"/>
-          <p:cNvSpPr txBox="1"/>
-          <p:nvPr/>
-        </p:nvSpPr>
-        <p:spPr>
-          <a:xfrm>
-            <a:off x="8404708" y="2971800"/>
-            <a:ext cx="2880360" cy="731520"/>
-          </a:xfrm>
-          <a:prstGeom prst="rect">
-            <a:avLst/>
-          </a:prstGeom>
-          <a:noFill/>
-          <a:ln/>
-        </p:spPr>
-        <p:txBody>
-          <a:bodyPr wrap="square" lIns="0" tIns="0" rIns="0" bIns="0" rtlCol="0" anchor="ctr"/>
-          <a:lstStyle/>
-          <a:p>
-            <a:pPr indent="0" marL="0">
-              <a:buNone/>
-            </a:pPr>
-            <a:r>
-              <a:rPr lang="en-US" sz="1700" b="1" dirty="0">
-                <a:solidFill>
-                  <a:srgbClr val="16242E"/>
-                </a:solidFill>
-                <a:latin typeface="Cambria" pitchFamily="34" charset="0"/>
-                <a:ea typeface="Cambria" pitchFamily="34" charset="-122"/>
-                <a:cs typeface="Cambria" pitchFamily="34" charset="-120"/>
-              </a:rPr>
-              <a:t>El núvol no és gratis</a:t>
-            </a:r>
-            <a:endParaRPr lang="en-US" sz="1700" dirty="0"/>
-          </a:p>
-        </p:txBody>
-      </p:sp>
-      <p:sp>
-        <p:nvSpPr>
-          <p:cNvPr id="19" name="Text 14"/>
-          <p:cNvSpPr txBox="1"/>
-          <p:nvPr/>
-        </p:nvSpPr>
-        <p:spPr>
-          <a:xfrm>
-            <a:off x="8404708" y="3611880"/>
-            <a:ext cx="2880360" cy="1828800"/>
-          </a:xfrm>
-          <a:prstGeom prst="rect">
-            <a:avLst/>
-          </a:prstGeom>
-          <a:noFill/>
-          <a:ln/>
-        </p:spPr>
-        <p:txBody>
-          <a:bodyPr wrap="square" lIns="0" tIns="0" rIns="0" bIns="0" rtlCol="0" anchor="t"/>
-          <a:lstStyle/>
-          <a:p>
-            <a:pPr indent="0" marL="0">
-              <a:lnSpc>
-                <a:spcPts val="1600"/>
-              </a:lnSpc>
-              <a:buNone/>
-            </a:pPr>
-            <a:r>
-              <a:rPr lang="en-US" sz="1250" dirty="0">
-                <a:solidFill>
-                  <a:srgbClr val="5B6B77"/>
-                </a:solidFill>
-                <a:latin typeface="Calibri" pitchFamily="34" charset="0"/>
-                <a:ea typeface="Calibri" pitchFamily="34" charset="-122"/>
-                <a:cs typeface="Calibri" pitchFamily="34" charset="-120"/>
-              </a:rPr>
-              <a:t>Còmode i barat, però amb consideracions legals, de velocitat i de control que cal valorar.</a:t>
-            </a:r>
-            <a:endParaRPr lang="en-US" sz="1250" dirty="0"/>
-          </a:p>
-        </p:txBody>
-      </p:sp>
-    </p:spTree>
-  </p:cSld>
-  <p:clrMapOvr>
-    <a:masterClrMapping/>
-  </p:clrMapOvr>
-</p:sld>
-</file>
-
-<file path=ppt/slides/slide17.xml><?xml version="1.0" encoding="utf-8"?>
-<p:sld xmlns:a="http://schemas.openxmlformats.org/drawingml/2006/main" xmlns:r="http://schemas.openxmlformats.org/officeDocument/2006/relationships" xmlns:p="http://schemas.openxmlformats.org/presentationml/2006/main">
-  <p:cSld name="Slide 17">
-    <p:bg>
-      <p:bgPr>
-        <a:solidFill>
-          <a:srgbClr val="0B1B29"/>
-        </a:solidFill>
-      </p:bgPr>
-    </p:bg>
-    <p:spTree>
-      <p:nvGrpSpPr>
-        <p:cNvPr id="1" name=""/>
-        <p:cNvGrpSpPr/>
-        <p:nvPr/>
-      </p:nvGrpSpPr>
-      <p:grpSpPr>
-        <a:xfrm>
-          <a:off x="0" y="0"/>
-          <a:ext cx="0" cy="0"/>
-          <a:chOff x="0" y="0"/>
-          <a:chExt cx="0" cy="0"/>
-        </a:xfrm>
-      </p:grpSpPr>
-      <p:sp>
-        <p:nvSpPr>
-          <p:cNvPr id="2" name="Text 0"/>
-          <p:cNvSpPr txBox="1"/>
-          <p:nvPr/>
-        </p:nvSpPr>
-        <p:spPr>
-          <a:xfrm>
-            <a:off x="822960" y="1188720"/>
-            <a:ext cx="9144000" cy="365760"/>
-          </a:xfrm>
-          <a:prstGeom prst="rect">
-            <a:avLst/>
-          </a:prstGeom>
-          <a:noFill/>
-          <a:ln/>
-        </p:spPr>
-        <p:txBody>
-          <a:bodyPr wrap="square" lIns="0" tIns="0" rIns="0" bIns="0" rtlCol="0" anchor="ctr"/>
-          <a:lstStyle/>
-          <a:p>
-            <a:pPr indent="0" marL="0">
-              <a:buNone/>
-            </a:pPr>
-            <a:r>
-              <a:rPr lang="en-US" sz="1400" b="1" spc="200" kern="0" dirty="0">
-                <a:solidFill>
-                  <a:srgbClr val="F2A541"/>
-                </a:solidFill>
-                <a:latin typeface="Calibri" pitchFamily="34" charset="0"/>
-                <a:ea typeface="Calibri" pitchFamily="34" charset="-122"/>
-                <a:cs typeface="Calibri" pitchFamily="34" charset="-120"/>
-              </a:rPr>
-              <a:t>ARA ÉS EL TORN VOSTRE</a:t>
-            </a:r>
-            <a:endParaRPr lang="en-US" sz="1400" dirty="0"/>
-          </a:p>
-        </p:txBody>
-      </p:sp>
-      <p:pic>
-        <p:nvPicPr>
-          <p:cNvPr id="3" name="Image 0" descr="/tmp/claude-0/-home-user-SMX-0226-Seguretat-Informatica/cec25c9b-7e93-584a-a64a-196540977a59/scratchpad/build/icons/question_F2A541.png">    </p:cNvPr>
-          <p:cNvPicPr>
-            <a:picLocks noChangeAspect="1"/>
-          </p:cNvPicPr>
-          <p:nvPr/>
-        </p:nvPicPr>
-        <p:blipFill>
-          <a:blip r:embed="rId1"/>
-          <a:stretch>
-            <a:fillRect/>
-          </a:stretch>
-        </p:blipFill>
-        <p:spPr>
-          <a:xfrm>
-            <a:off x="9875520" y="1097280"/>
-            <a:ext cx="731520" cy="731520"/>
-          </a:xfrm>
-          <a:prstGeom prst="rect">
-            <a:avLst/>
-          </a:prstGeom>
-        </p:spPr>
-      </p:pic>
-      <p:sp>
-        <p:nvSpPr>
-          <p:cNvPr id="4" name="Text 1"/>
-          <p:cNvSpPr txBox="1"/>
-          <p:nvPr/>
-        </p:nvSpPr>
-        <p:spPr>
-          <a:xfrm>
-            <a:off x="822960" y="1737360"/>
-            <a:ext cx="10332720" cy="1463040"/>
-          </a:xfrm>
-          <a:prstGeom prst="rect">
-            <a:avLst/>
-          </a:prstGeom>
-          <a:noFill/>
-          <a:ln/>
-        </p:spPr>
-        <p:txBody>
-          <a:bodyPr wrap="square" lIns="0" tIns="0" rIns="0" bIns="0" rtlCol="0" anchor="ctr"/>
-          <a:lstStyle/>
-          <a:p>
-            <a:pPr indent="0" marL="0">
-              <a:buNone/>
-            </a:pPr>
-            <a:r>
-              <a:rPr lang="en-US" sz="2600" b="1" dirty="0">
-                <a:solidFill>
-                  <a:srgbClr val="FFFFFF"/>
-                </a:solidFill>
-                <a:latin typeface="Cambria" pitchFamily="34" charset="0"/>
-                <a:ea typeface="Cambria" pitchFamily="34" charset="-122"/>
-                <a:cs typeface="Cambria" pitchFamily="34" charset="-120"/>
-              </a:rPr>
-              <a:t>Un petit despatx d'advocats (5 persones) vol centralitzar els seus documents.</a:t>
-            </a:r>
-            <a:endParaRPr lang="en-US" sz="2600" dirty="0"/>
-          </a:p>
-        </p:txBody>
-      </p:sp>
-      <p:sp>
-        <p:nvSpPr>
-          <p:cNvPr id="5" name="Text 2"/>
-          <p:cNvSpPr txBox="1"/>
-          <p:nvPr/>
-        </p:nvSpPr>
-        <p:spPr>
-          <a:xfrm>
-            <a:off x="822960" y="3291840"/>
-            <a:ext cx="9875520" cy="1463040"/>
-          </a:xfrm>
-          <a:prstGeom prst="rect">
-            <a:avLst/>
-          </a:prstGeom>
-          <a:noFill/>
-          <a:ln/>
-        </p:spPr>
-        <p:txBody>
-          <a:bodyPr wrap="square" lIns="0" tIns="0" rIns="0" bIns="0" rtlCol="0" anchor="ctr"/>
-          <a:lstStyle/>
-          <a:p>
-            <a:pPr indent="0" marL="0">
-              <a:lnSpc>
-                <a:spcPts val="2000"/>
-              </a:lnSpc>
-              <a:buNone/>
-            </a:pPr>
-            <a:r>
-              <a:rPr lang="en-US" sz="1500" dirty="0">
-                <a:solidFill>
-                  <a:srgbClr val="CADCE8"/>
-                </a:solidFill>
-                <a:latin typeface="Calibri" pitchFamily="34" charset="0"/>
-                <a:ea typeface="Calibri" pitchFamily="34" charset="-122"/>
-                <a:cs typeface="Calibri" pitchFamily="34" charset="-120"/>
-              </a:rPr>
-              <a:t>En grups de 3: decidiu si recomanaríeu un DAS, un NAS o un servei de núvol, tenint en compte que gestionen dades de clients (confidencials) i tenen un pressupost limitat. Justifiqueu quin nivell de RAID hi aplicaríeu internament.</a:t>
-            </a:r>
-            <a:endParaRPr lang="en-US" sz="1500" dirty="0"/>
-          </a:p>
-        </p:txBody>
-      </p:sp>
-      <p:sp>
-        <p:nvSpPr>
-          <p:cNvPr id="6" name="Text 3"/>
-          <p:cNvSpPr txBox="1"/>
-          <p:nvPr/>
-        </p:nvSpPr>
-        <p:spPr>
-          <a:xfrm>
-            <a:off x="822960" y="6035040"/>
-            <a:ext cx="9144000" cy="365760"/>
-          </a:xfrm>
-          <a:prstGeom prst="rect">
-            <a:avLst/>
-          </a:prstGeom>
-          <a:noFill/>
-          <a:ln/>
-        </p:spPr>
-        <p:txBody>
-          <a:bodyPr wrap="square" lIns="0" tIns="0" rIns="0" bIns="0" rtlCol="0" anchor="ctr"/>
-          <a:lstStyle/>
-          <a:p>
-            <a:pPr indent="0" marL="0">
-              <a:buNone/>
-            </a:pPr>
-            <a:r>
-              <a:rPr lang="en-US" sz="1300" i="1" dirty="0">
-                <a:solidFill>
-                  <a:srgbClr val="8FA6B8"/>
-                </a:solidFill>
-                <a:latin typeface="Calibri" pitchFamily="34" charset="0"/>
-                <a:ea typeface="Calibri" pitchFamily="34" charset="-122"/>
-                <a:cs typeface="Calibri" pitchFamily="34" charset="-120"/>
-              </a:rPr>
-              <a:t>10 minuts en grup + posada en comú</a:t>
-            </a:r>
-            <a:endParaRPr lang="en-US" sz="1300" dirty="0"/>
-          </a:p>
-        </p:txBody>
-      </p:sp>
-      <p:sp>
-        <p:nvSpPr>
-          <p:cNvPr id="7" name="Text 4"/>
-          <p:cNvSpPr txBox="1"/>
-          <p:nvPr/>
-        </p:nvSpPr>
-        <p:spPr>
-          <a:xfrm>
-            <a:off x="11551615" y="6446520"/>
-            <a:ext cx="457200" cy="274320"/>
-          </a:xfrm>
-          <a:prstGeom prst="rect">
-            <a:avLst/>
-          </a:prstGeom>
-          <a:noFill/>
-          <a:ln/>
-        </p:spPr>
-        <p:txBody>
-          <a:bodyPr wrap="square" lIns="0" tIns="0" rIns="0" bIns="0" rtlCol="0" anchor="ctr"/>
-          <a:lstStyle/>
-          <a:p>
-            <a:pPr algn="r" indent="0" marL="0">
-              <a:buNone/>
-            </a:pPr>
-            <a:r>
-              <a:rPr lang="en-US" sz="1100" dirty="0">
-                <a:solidFill>
-                  <a:srgbClr val="5B6B77"/>
-                </a:solidFill>
-                <a:latin typeface="Calibri" pitchFamily="34" charset="0"/>
-                <a:ea typeface="Calibri" pitchFamily="34" charset="-122"/>
-                <a:cs typeface="Calibri" pitchFamily="34" charset="-120"/>
-              </a:rPr>
-              <a:t>24</a:t>
-            </a:r>
-            <a:endParaRPr lang="en-US" sz="1100" dirty="0"/>
-          </a:p>
-        </p:txBody>
-      </p:sp>
-    </p:spTree>
-  </p:cSld>
-  <p:clrMapOvr>
-    <a:masterClrMapping/>
-  </p:clrMapOvr>
-</p:sld>
-</file>
-
-<file path=ppt/slides/slide18.xml><?xml version="1.0" encoding="utf-8"?>
-<p:sld xmlns:a="http://schemas.openxmlformats.org/drawingml/2006/main" xmlns:r="http://schemas.openxmlformats.org/officeDocument/2006/relationships" xmlns:p="http://schemas.openxmlformats.org/presentationml/2006/main">
-  <p:cSld name="Slide 18">
-    <p:bg>
-      <p:bgPr>
-        <a:solidFill>
-          <a:srgbClr val="F4F7F9"/>
-        </a:solidFill>
-      </p:bgPr>
-    </p:bg>
-    <p:spTree>
-      <p:nvGrpSpPr>
-        <p:cNvPr id="1" name=""/>
-        <p:cNvGrpSpPr/>
-        <p:nvPr/>
-      </p:nvGrpSpPr>
-      <p:grpSpPr>
-        <a:xfrm>
-          <a:off x="0" y="0"/>
-          <a:ext cx="0" cy="0"/>
-          <a:chOff x="0" y="0"/>
-          <a:chExt cx="0" cy="0"/>
-        </a:xfrm>
-      </p:grpSpPr>
-      <p:sp>
-        <p:nvSpPr>
-          <p:cNvPr id="2" name="Text 0"/>
-          <p:cNvSpPr txBox="1"/>
-          <p:nvPr/>
-        </p:nvSpPr>
-        <p:spPr>
-          <a:xfrm>
-            <a:off x="548640" y="457200"/>
-            <a:ext cx="9144000" cy="365760"/>
-          </a:xfrm>
-          <a:prstGeom prst="rect">
-            <a:avLst/>
-          </a:prstGeom>
-          <a:noFill/>
-          <a:ln/>
-        </p:spPr>
-        <p:txBody>
-          <a:bodyPr wrap="square" lIns="0" tIns="0" rIns="0" bIns="0" rtlCol="0" anchor="ctr"/>
-          <a:lstStyle/>
-          <a:p>
-            <a:pPr indent="0" marL="0">
-              <a:buNone/>
-            </a:pPr>
-            <a:r>
-              <a:rPr lang="en-US" sz="1300" b="1" spc="200" kern="0" dirty="0">
-                <a:solidFill>
-                  <a:srgbClr val="F2A541"/>
-                </a:solidFill>
-                <a:latin typeface="Calibri" pitchFamily="34" charset="0"/>
-                <a:ea typeface="Calibri" pitchFamily="34" charset="-122"/>
-                <a:cs typeface="Calibri" pitchFamily="34" charset="-120"/>
-              </a:rPr>
-              <a:t>FONTS DEL MATERIAL</a:t>
-            </a:r>
-            <a:endParaRPr lang="en-US" sz="1300" dirty="0"/>
-          </a:p>
-        </p:txBody>
-      </p:sp>
-      <p:sp>
-        <p:nvSpPr>
-          <p:cNvPr id="3" name="Text 1"/>
-          <p:cNvSpPr txBox="1"/>
-          <p:nvPr/>
-        </p:nvSpPr>
-        <p:spPr>
-          <a:xfrm>
-            <a:off x="548640" y="822960"/>
-            <a:ext cx="10789920" cy="640080"/>
-          </a:xfrm>
-          <a:prstGeom prst="rect">
-            <a:avLst/>
-          </a:prstGeom>
-          <a:noFill/>
-          <a:ln/>
-        </p:spPr>
-        <p:txBody>
-          <a:bodyPr wrap="square" lIns="0" tIns="0" rIns="0" bIns="0" rtlCol="0" anchor="ctr"/>
-          <a:lstStyle/>
-          <a:p>
-            <a:pPr indent="0" marL="0">
-              <a:buNone/>
-            </a:pPr>
-            <a:r>
-              <a:rPr lang="en-US" sz="2800" b="1" dirty="0">
-                <a:solidFill>
-                  <a:srgbClr val="16242E"/>
-                </a:solidFill>
-                <a:latin typeface="Cambria" pitchFamily="34" charset="0"/>
-                <a:ea typeface="Cambria" pitchFamily="34" charset="-122"/>
-                <a:cs typeface="Cambria" pitchFamily="34" charset="-120"/>
-              </a:rPr>
-              <a:t>Webgrafia</a:t>
-            </a:r>
-            <a:endParaRPr lang="en-US" sz="2800" dirty="0"/>
-          </a:p>
-        </p:txBody>
-      </p:sp>
-      <p:pic>
-        <p:nvPicPr>
-          <p:cNvPr id="4" name="Image 0" descr="/tmp/claude-0/-home-user-SMX-0226-Seguretat-Informatica/cec25c9b-7e93-584a-a64a-196540977a59/scratchpad/build/icons/globe_3E6680.png">    </p:cNvPr>
-          <p:cNvPicPr>
-            <a:picLocks noChangeAspect="1"/>
-          </p:cNvPicPr>
-          <p:nvPr/>
-        </p:nvPicPr>
-        <p:blipFill>
-          <a:blip r:embed="rId1"/>
-          <a:stretch>
-            <a:fillRect/>
-          </a:stretch>
-        </p:blipFill>
-        <p:spPr>
-          <a:xfrm>
-            <a:off x="640080" y="1874520"/>
-            <a:ext cx="320040" cy="320040"/>
-          </a:xfrm>
-          <a:prstGeom prst="rect">
-            <a:avLst/>
-          </a:prstGeom>
-        </p:spPr>
-      </p:pic>
-      <p:sp>
-        <p:nvSpPr>
-          <p:cNvPr id="5" name="Text 2"/>
-          <p:cNvSpPr txBox="1"/>
-          <p:nvPr/>
-        </p:nvSpPr>
-        <p:spPr>
-          <a:xfrm>
-            <a:off x="1143000" y="1828800"/>
-            <a:ext cx="10058400" cy="320040"/>
-          </a:xfrm>
-          <a:prstGeom prst="rect">
-            <a:avLst/>
-          </a:prstGeom>
-          <a:noFill/>
-          <a:ln/>
-        </p:spPr>
-        <p:txBody>
-          <a:bodyPr wrap="square" lIns="0" tIns="0" rIns="0" bIns="0" rtlCol="0" anchor="ctr"/>
-          <a:lstStyle/>
-          <a:p>
-            <a:pPr indent="0" marL="0">
-              <a:buNone/>
-            </a:pPr>
-            <a:r>
-              <a:rPr lang="en-US" sz="1500" b="1" dirty="0">
-                <a:solidFill>
-                  <a:srgbClr val="16242E"/>
-                </a:solidFill>
-                <a:latin typeface="Cambria" pitchFamily="34" charset="0"/>
-                <a:ea typeface="Cambria" pitchFamily="34" charset="-122"/>
-                <a:cs typeface="Cambria" pitchFamily="34" charset="-120"/>
-              </a:rPr>
-              <a:t>NF2-AA2: Sistemes d'emmagatzematge</a:t>
-            </a:r>
-            <a:endParaRPr lang="en-US" sz="1500" dirty="0"/>
-          </a:p>
-        </p:txBody>
-      </p:sp>
-      <p:sp>
-        <p:nvSpPr>
-          <p:cNvPr id="6" name="Text 3"/>
-          <p:cNvSpPr txBox="1"/>
-          <p:nvPr/>
-        </p:nvSpPr>
-        <p:spPr>
-          <a:xfrm>
-            <a:off x="1143000" y="2176272"/>
-            <a:ext cx="10058400" cy="548640"/>
-          </a:xfrm>
-          <a:prstGeom prst="rect">
-            <a:avLst/>
-          </a:prstGeom>
-          <a:noFill/>
-          <a:ln/>
-        </p:spPr>
-        <p:txBody>
-          <a:bodyPr wrap="square" lIns="0" tIns="0" rIns="0" bIns="0" rtlCol="0" anchor="ctr"/>
-          <a:lstStyle/>
-          <a:p>
-            <a:pPr indent="0" marL="0">
-              <a:lnSpc>
-                <a:spcPts val="1500"/>
-              </a:lnSpc>
-              <a:buNone/>
-            </a:pPr>
-            <a:r>
-              <a:rPr lang="en-US" sz="1150" dirty="0">
-                <a:solidFill>
-                  <a:srgbClr val="5B6B77"/>
-                </a:solidFill>
-                <a:latin typeface="Calibri" pitchFamily="34" charset="0"/>
-                <a:ea typeface="Calibri" pitchFamily="34" charset="-122"/>
-                <a:cs typeface="Calibri" pitchFamily="34" charset="-120"/>
-              </a:rPr>
-              <a:t>Repositori "Materials" (GitHub, SMX-0226SI) · Carlos Alonso Martínez, Escola Pia de Mataró · Llicència CC-BY-SA-4.0 — github.com/SMX-0226SI/Materials/blob/main/NF2/AA2-SistemesEmmagatzematge.md</a:t>
-            </a:r>
-            <a:endParaRPr lang="en-US" sz="1150" dirty="0"/>
-          </a:p>
-        </p:txBody>
-      </p:sp>
-      <p:pic>
-        <p:nvPicPr>
-          <p:cNvPr id="7" name="Image 1" descr="/tmp/claude-0/-home-user-SMX-0226-Seguretat-Informatica/cec25c9b-7e93-584a-a64a-196540977a59/scratchpad/build/icons/globe_3E6680.png">    </p:cNvPr>
-          <p:cNvPicPr>
-            <a:picLocks noChangeAspect="1"/>
-          </p:cNvPicPr>
-          <p:nvPr/>
-        </p:nvPicPr>
-        <p:blipFill>
-          <a:blip r:embed="rId2"/>
-          <a:stretch>
-            <a:fillRect/>
-          </a:stretch>
-        </p:blipFill>
-        <p:spPr>
-          <a:xfrm>
-            <a:off x="640080" y="2926080"/>
-            <a:ext cx="320040" cy="320040"/>
-          </a:xfrm>
-          <a:prstGeom prst="rect">
-            <a:avLst/>
-          </a:prstGeom>
-        </p:spPr>
-      </p:pic>
-      <p:sp>
-        <p:nvSpPr>
-          <p:cNvPr id="8" name="Text 4"/>
-          <p:cNvSpPr txBox="1"/>
-          <p:nvPr/>
-        </p:nvSpPr>
-        <p:spPr>
-          <a:xfrm>
-            <a:off x="1143000" y="2880360"/>
-            <a:ext cx="10058400" cy="320040"/>
-          </a:xfrm>
-          <a:prstGeom prst="rect">
-            <a:avLst/>
-          </a:prstGeom>
-          <a:noFill/>
-          <a:ln/>
-        </p:spPr>
-        <p:txBody>
-          <a:bodyPr wrap="square" lIns="0" tIns="0" rIns="0" bIns="0" rtlCol="0" anchor="ctr"/>
-          <a:lstStyle/>
-          <a:p>
-            <a:pPr indent="0" marL="0">
-              <a:buNone/>
-            </a:pPr>
-            <a:r>
-              <a:rPr lang="en-US" sz="1500" b="1" dirty="0">
-                <a:solidFill>
-                  <a:srgbClr val="16242E"/>
-                </a:solidFill>
-                <a:latin typeface="Cambria" pitchFamily="34" charset="0"/>
-                <a:ea typeface="Cambria" pitchFamily="34" charset="-122"/>
-                <a:cs typeface="Cambria" pitchFamily="34" charset="-120"/>
-              </a:rPr>
-              <a:t>Taula de referència de tipus de RAID</a:t>
-            </a:r>
-            <a:endParaRPr lang="en-US" sz="1500" dirty="0"/>
-          </a:p>
-        </p:txBody>
-      </p:sp>
-      <p:sp>
-        <p:nvSpPr>
-          <p:cNvPr id="9" name="Text 5"/>
-          <p:cNvSpPr txBox="1"/>
-          <p:nvPr/>
-        </p:nvSpPr>
-        <p:spPr>
-          <a:xfrm>
-            <a:off x="1143000" y="3227832"/>
-            <a:ext cx="10058400" cy="548640"/>
-          </a:xfrm>
-          <a:prstGeom prst="rect">
-            <a:avLst/>
-          </a:prstGeom>
-          <a:noFill/>
-          <a:ln/>
-        </p:spPr>
-        <p:txBody>
-          <a:bodyPr wrap="square" lIns="0" tIns="0" rIns="0" bIns="0" rtlCol="0" anchor="ctr"/>
-          <a:lstStyle/>
-          <a:p>
-            <a:pPr indent="0" marL="0">
-              <a:lnSpc>
-                <a:spcPts val="1500"/>
-              </a:lnSpc>
-              <a:buNone/>
-            </a:pPr>
-            <a:r>
-              <a:rPr lang="en-US" sz="1150" dirty="0">
-                <a:solidFill>
-                  <a:srgbClr val="5B6B77"/>
-                </a:solidFill>
-                <a:latin typeface="Calibri" pitchFamily="34" charset="0"/>
-                <a:ea typeface="Calibri" pitchFamily="34" charset="-122"/>
-                <a:cs typeface="Calibri" pitchFamily="34" charset="-120"/>
-              </a:rPr>
-              <a:t>raid-calculator.com — "RAID Types Reference"</a:t>
-            </a:r>
-            <a:endParaRPr lang="en-US" sz="1150" dirty="0"/>
-          </a:p>
-        </p:txBody>
-      </p:sp>
-      <p:pic>
-        <p:nvPicPr>
-          <p:cNvPr id="10" name="Image 2" descr="/tmp/claude-0/-home-user-SMX-0226-Seguretat-Informatica/cec25c9b-7e93-584a-a64a-196540977a59/scratchpad/build/icons/globe_3E6680.png">    </p:cNvPr>
-          <p:cNvPicPr>
-            <a:picLocks noChangeAspect="1"/>
-          </p:cNvPicPr>
-          <p:nvPr/>
-        </p:nvPicPr>
-        <p:blipFill>
-          <a:blip r:embed="rId3"/>
-          <a:stretch>
-            <a:fillRect/>
-          </a:stretch>
-        </p:blipFill>
-        <p:spPr>
-          <a:xfrm>
-            <a:off x="640080" y="3977640"/>
-            <a:ext cx="320040" cy="320040"/>
-          </a:xfrm>
-          <a:prstGeom prst="rect">
-            <a:avLst/>
-          </a:prstGeom>
-        </p:spPr>
-      </p:pic>
-      <p:sp>
-        <p:nvSpPr>
-          <p:cNvPr id="11" name="Text 6"/>
-          <p:cNvSpPr txBox="1"/>
-          <p:nvPr/>
-        </p:nvSpPr>
-        <p:spPr>
-          <a:xfrm>
-            <a:off x="1143000" y="3931920"/>
-            <a:ext cx="10058400" cy="320040"/>
-          </a:xfrm>
-          <a:prstGeom prst="rect">
-            <a:avLst/>
-          </a:prstGeom>
-          <a:noFill/>
-          <a:ln/>
-        </p:spPr>
-        <p:txBody>
-          <a:bodyPr wrap="square" lIns="0" tIns="0" rIns="0" bIns="0" rtlCol="0" anchor="ctr"/>
-          <a:lstStyle/>
-          <a:p>
-            <a:pPr indent="0" marL="0">
-              <a:buNone/>
-            </a:pPr>
-            <a:r>
-              <a:rPr lang="en-US" sz="1500" b="1" dirty="0">
-                <a:solidFill>
-                  <a:srgbClr val="16242E"/>
-                </a:solidFill>
-                <a:latin typeface="Cambria" pitchFamily="34" charset="0"/>
-                <a:ea typeface="Cambria" pitchFamily="34" charset="-122"/>
-                <a:cs typeface="Cambria" pitchFamily="34" charset="-120"/>
-              </a:rPr>
-              <a:t>Vídeos de referència</a:t>
-            </a:r>
-            <a:endParaRPr lang="en-US" sz="1500" dirty="0"/>
-          </a:p>
-        </p:txBody>
-      </p:sp>
-      <p:sp>
-        <p:nvSpPr>
-          <p:cNvPr id="12" name="Text 7"/>
-          <p:cNvSpPr txBox="1"/>
-          <p:nvPr/>
-        </p:nvSpPr>
-        <p:spPr>
-          <a:xfrm>
-            <a:off x="1143000" y="4279392"/>
-            <a:ext cx="10058400" cy="548640"/>
-          </a:xfrm>
-          <a:prstGeom prst="rect">
-            <a:avLst/>
-          </a:prstGeom>
-          <a:noFill/>
-          <a:ln/>
-        </p:spPr>
-        <p:txBody>
-          <a:bodyPr wrap="square" lIns="0" tIns="0" rIns="0" bIns="0" rtlCol="0" anchor="ctr"/>
-          <a:lstStyle/>
-          <a:p>
-            <a:pPr indent="0" marL="0">
-              <a:lnSpc>
-                <a:spcPts val="1500"/>
-              </a:lnSpc>
-              <a:buNone/>
-            </a:pPr>
-            <a:r>
-              <a:rPr lang="en-US" sz="1150" dirty="0">
-                <a:solidFill>
-                  <a:srgbClr val="5B6B77"/>
-                </a:solidFill>
-                <a:latin typeface="Calibri" pitchFamily="34" charset="0"/>
-                <a:ea typeface="Calibri" pitchFamily="34" charset="-122"/>
-                <a:cs typeface="Calibri" pitchFamily="34" charset="-120"/>
-              </a:rPr>
-              <a:t>NASEROS (YouTube) — "Tipos de RAID"; Pau Tomé (YouTube) — "RAID en Windows Server"; IBM — "What is a storage area network (SAN)?"</a:t>
-            </a:r>
-            <a:endParaRPr lang="en-US" sz="1150" dirty="0"/>
-          </a:p>
-        </p:txBody>
-      </p:sp>
-      <p:sp>
-        <p:nvSpPr>
-          <p:cNvPr id="13" name="Text 8"/>
-          <p:cNvSpPr txBox="1"/>
-          <p:nvPr/>
-        </p:nvSpPr>
-        <p:spPr>
-          <a:xfrm>
-            <a:off x="640080" y="6217920"/>
-            <a:ext cx="10058400" cy="365760"/>
-          </a:xfrm>
-          <a:prstGeom prst="rect">
-            <a:avLst/>
-          </a:prstGeom>
-          <a:noFill/>
-          <a:ln/>
-        </p:spPr>
-        <p:txBody>
-          <a:bodyPr wrap="square" lIns="0" tIns="0" rIns="0" bIns="0" rtlCol="0" anchor="ctr"/>
-          <a:lstStyle/>
-          <a:p>
-            <a:pPr indent="0" marL="0">
-              <a:buNone/>
-            </a:pPr>
-            <a:r>
-              <a:rPr lang="en-US" sz="1050" i="1" dirty="0">
-                <a:solidFill>
-                  <a:srgbClr val="5B6B77"/>
-                </a:solidFill>
-                <a:latin typeface="Calibri" pitchFamily="34" charset="0"/>
-                <a:ea typeface="Calibri" pitchFamily="34" charset="-122"/>
-                <a:cs typeface="Calibri" pitchFamily="34" charset="-120"/>
-              </a:rPr>
-              <a:t>Llicència Creative Commons BY-NC-SA · Institut Obert de Catalunya, 2011 (materials adaptats i ampliats)</a:t>
-            </a:r>
-            <a:endParaRPr lang="en-US" sz="1050" dirty="0"/>
-          </a:p>
-        </p:txBody>
-      </p:sp>
-      <p:sp>
-        <p:nvSpPr>
-          <p:cNvPr id="14" name="Text 9"/>
-          <p:cNvSpPr txBox="1"/>
-          <p:nvPr/>
-        </p:nvSpPr>
-        <p:spPr>
-          <a:xfrm>
-            <a:off x="11551615" y="6446520"/>
-            <a:ext cx="457200" cy="274320"/>
-          </a:xfrm>
-          <a:prstGeom prst="rect">
-            <a:avLst/>
-          </a:prstGeom>
-          <a:noFill/>
-          <a:ln/>
-        </p:spPr>
-        <p:txBody>
-          <a:bodyPr wrap="square" lIns="0" tIns="0" rIns="0" bIns="0" rtlCol="0" anchor="ctr"/>
-          <a:lstStyle/>
-          <a:p>
-            <a:pPr algn="r" indent="0" marL="0">
-              <a:buNone/>
-            </a:pPr>
-            <a:r>
-              <a:rPr lang="en-US" sz="1100" dirty="0">
-                <a:solidFill>
-                  <a:srgbClr val="5B6B77"/>
-                </a:solidFill>
-                <a:latin typeface="Calibri" pitchFamily="34" charset="0"/>
-                <a:ea typeface="Calibri" pitchFamily="34" charset="-122"/>
-                <a:cs typeface="Calibri" pitchFamily="34" charset="-120"/>
-              </a:rPr>
-              <a:t>25</a:t>
-            </a:r>
-            <a:endParaRPr lang="en-US" sz="1100" dirty="0"/>
           </a:p>
         </p:txBody>
       </p:sp>
@@ -9067,7 +8726,7 @@
                 </a:solidFill>
                 <a:latin typeface="Calibri"/>
               </a:rPr>
-              <a:t>SOTA EL CAPÓ</a:t>
+              <a:t>UN EXEMPLE REAL</a:t>
             </a:r>
           </a:p>
         </p:txBody>
@@ -9102,14 +8761,14 @@
                 </a:solidFill>
                 <a:latin typeface="Cambria"/>
               </a:rPr>
-              <a:t>RAID 0 — Data striping</a:t>
+              <a:t>NAS — Network Attached Storage</a:t>
             </a:r>
           </a:p>
         </p:txBody>
       </p:sp>
       <p:pic>
         <p:nvPicPr>
-          <p:cNvPr id="4" name="Picture 3" descr="raid0.png"/>
+          <p:cNvPr id="4" name="Picture 3" descr="nas.png"/>
           <p:cNvPicPr>
             <a:picLocks noChangeAspect="1"/>
           </p:cNvPicPr>
@@ -9123,8 +8782,8 @@
         </p:blipFill>
         <p:spPr>
           <a:xfrm>
-            <a:off x="4541271" y="1920240"/>
-            <a:ext cx="3109153" cy="4206240"/>
+            <a:off x="2666847" y="1920240"/>
+            <a:ext cx="6858000" cy="2981325"/>
           </a:xfrm>
           <a:prstGeom prst="rect">
             <a:avLst/>
@@ -9139,7 +8798,7 @@
         </p:nvSpPr>
         <p:spPr>
           <a:xfrm>
-            <a:off x="548640" y="6263640"/>
+            <a:off x="548640" y="5038725"/>
             <a:ext cx="11064240" cy="457200"/>
           </a:xfrm>
           <a:prstGeom prst="rect">
@@ -9161,7 +8820,7 @@
                 </a:solidFill>
                 <a:latin typeface="Calibri"/>
               </a:rPr>
-              <a:t>RAID 0: la informació es distribueix entre els discos sense redundància.</a:t>
+              <a:t>Un NAS connecta diversos clients a través d'un switch; a la dreta, un dispositiu NAS real.</a:t>
             </a:r>
           </a:p>
         </p:txBody>
@@ -9195,7 +8854,7 @@
                   <a:srgbClr val="5B6B77"/>
                 </a:solidFill>
               </a:rPr>
-              <a:t>7</a:t>
+              <a:t>19</a:t>
             </a:r>
           </a:p>
         </p:txBody>
@@ -9859,14 +9518,13 @@
 </file>
 
 <file path=ppt/slides/slide20.xml><?xml version="1.0" encoding="utf-8"?>
-<p:sld xmlns:a="http://schemas.openxmlformats.org/drawingml/2006/main" xmlns:p="http://schemas.openxmlformats.org/presentationml/2006/main" xmlns:r="http://schemas.openxmlformats.org/officeDocument/2006/relationships">
-  <p:cSld>
+<p:sld xmlns:a="http://schemas.openxmlformats.org/drawingml/2006/main" xmlns:r="http://schemas.openxmlformats.org/officeDocument/2006/relationships" xmlns:p="http://schemas.openxmlformats.org/presentationml/2006/main">
+  <p:cSld name="Slide 14">
     <p:bg>
       <p:bgPr>
         <a:solidFill>
           <a:srgbClr val="F4F7F9"/>
         </a:solidFill>
-        <a:effectLst/>
       </p:bgPr>
     </p:bg>
     <p:spTree>
@@ -9875,95 +9533,269 @@
         <p:cNvGrpSpPr/>
         <p:nvPr/>
       </p:nvGrpSpPr>
-      <p:grpSpPr/>
-      <p:sp>
-        <p:nvSpPr>
-          <p:cNvPr id="2" name="TextBox 1"/>
+      <p:grpSpPr>
+        <a:xfrm>
+          <a:off x="0" y="0"/>
+          <a:ext cx="0" cy="0"/>
+          <a:chOff x="0" y="0"/>
+          <a:chExt cx="0" cy="0"/>
+        </a:xfrm>
+      </p:grpSpPr>
+      <p:sp>
+        <p:nvSpPr>
+          <p:cNvPr id="2" name="Text 0"/>
           <p:cNvSpPr txBox="1"/>
           <p:nvPr/>
         </p:nvSpPr>
         <p:spPr>
           <a:xfrm>
-            <a:off x="548640" y="411480"/>
-            <a:ext cx="10515600" cy="320040"/>
-          </a:xfrm>
-          <a:prstGeom prst="rect">
-            <a:avLst/>
-          </a:prstGeom>
-          <a:noFill/>
-        </p:spPr>
-        <p:txBody>
-          <a:bodyPr wrap="square">
-            <a:spAutoFit/>
-          </a:bodyPr>
-          <a:lstStyle/>
-          <a:p>
-            <a:pPr algn="l"/>
-            <a:r>
-              <a:rPr sz="1300" b="1" i="0">
+            <a:off x="548640" y="457200"/>
+            <a:ext cx="9144000" cy="365760"/>
+          </a:xfrm>
+          <a:prstGeom prst="rect">
+            <a:avLst/>
+          </a:prstGeom>
+          <a:noFill/>
+          <a:ln/>
+        </p:spPr>
+        <p:txBody>
+          <a:bodyPr wrap="square" lIns="0" tIns="0" rIns="0" bIns="0" rtlCol="0" anchor="ctr"/>
+          <a:lstStyle/>
+          <a:p>
+            <a:pPr indent="0" marL="0">
+              <a:buNone/>
+            </a:pPr>
+            <a:r>
+              <a:rPr lang="en-US" sz="1300" b="1" spc="200" kern="0" dirty="0">
                 <a:solidFill>
                   <a:srgbClr val="F2A541"/>
                 </a:solidFill>
-                <a:latin typeface="Calibri"/>
-              </a:rPr>
-              <a:t>SOTA EL CAPÓ</a:t>
-            </a:r>
-          </a:p>
-        </p:txBody>
-      </p:sp>
-      <p:sp>
-        <p:nvSpPr>
-          <p:cNvPr id="3" name="TextBox 2"/>
+                <a:latin typeface="Calibri" pitchFamily="34" charset="0"/>
+                <a:ea typeface="Calibri" pitchFamily="34" charset="-122"/>
+                <a:cs typeface="Calibri" pitchFamily="34" charset="-120"/>
+              </a:rPr>
+              <a:t>SISTEMES EN XARXA</a:t>
+            </a:r>
+            <a:endParaRPr lang="en-US" sz="1300" dirty="0"/>
+          </a:p>
+        </p:txBody>
+      </p:sp>
+      <p:sp>
+        <p:nvSpPr>
+          <p:cNvPr id="3" name="Text 1"/>
           <p:cNvSpPr txBox="1"/>
           <p:nvPr/>
         </p:nvSpPr>
         <p:spPr>
           <a:xfrm>
-            <a:off x="548640" y="685800"/>
-            <a:ext cx="10972800" cy="822960"/>
-          </a:xfrm>
-          <a:prstGeom prst="rect">
-            <a:avLst/>
-          </a:prstGeom>
-          <a:noFill/>
-        </p:spPr>
-        <p:txBody>
-          <a:bodyPr wrap="square">
-            <a:spAutoFit/>
-          </a:bodyPr>
-          <a:lstStyle/>
-          <a:p>
-            <a:pPr algn="l"/>
-            <a:r>
-              <a:rPr sz="2800" b="1" i="0">
+            <a:off x="548640" y="822960"/>
+            <a:ext cx="10789920" cy="640080"/>
+          </a:xfrm>
+          <a:prstGeom prst="rect">
+            <a:avLst/>
+          </a:prstGeom>
+          <a:noFill/>
+          <a:ln/>
+        </p:spPr>
+        <p:txBody>
+          <a:bodyPr wrap="square" lIns="0" tIns="0" rIns="0" bIns="0" rtlCol="0" anchor="ctr"/>
+          <a:lstStyle/>
+          <a:p>
+            <a:pPr indent="0" marL="0">
+              <a:buNone/>
+            </a:pPr>
+            <a:r>
+              <a:rPr lang="en-US" sz="2800" b="1" dirty="0">
                 <a:solidFill>
                   <a:srgbClr val="16242E"/>
                 </a:solidFill>
-                <a:latin typeface="Cambria"/>
-              </a:rPr>
-              <a:t>RAID 1 — Mirror</a:t>
-            </a:r>
-          </a:p>
+                <a:latin typeface="Cambria" pitchFamily="34" charset="0"/>
+                <a:ea typeface="Cambria" pitchFamily="34" charset="-122"/>
+                <a:cs typeface="Cambria" pitchFamily="34" charset="-120"/>
+              </a:rPr>
+              <a:t>SAN · Storage Area Network</a:t>
+            </a:r>
+            <a:endParaRPr lang="en-US" sz="2800" dirty="0"/>
+          </a:p>
+        </p:txBody>
+      </p:sp>
+      <p:sp>
+        <p:nvSpPr>
+          <p:cNvPr id="4" name="Text 2"/>
+          <p:cNvSpPr txBox="1"/>
+          <p:nvPr/>
+        </p:nvSpPr>
+        <p:spPr>
+          <a:xfrm>
+            <a:off x="11551615" y="6446520"/>
+            <a:ext cx="457200" cy="274320"/>
+          </a:xfrm>
+          <a:prstGeom prst="rect">
+            <a:avLst/>
+          </a:prstGeom>
+          <a:noFill/>
+          <a:ln/>
+        </p:spPr>
+        <p:txBody>
+          <a:bodyPr wrap="square" lIns="0" tIns="0" rIns="0" bIns="0" rtlCol="0" anchor="ctr"/>
+          <a:lstStyle/>
+          <a:p>
+            <a:pPr algn="r" indent="0" marL="0">
+              <a:buNone/>
+            </a:pPr>
+            <a:r>
+              <a:rPr lang="en-US" sz="1100" dirty="0">
+                <a:solidFill>
+                  <a:srgbClr val="5B6B77"/>
+                </a:solidFill>
+                <a:latin typeface="Calibri" pitchFamily="34" charset="0"/>
+                <a:ea typeface="Calibri" pitchFamily="34" charset="-122"/>
+                <a:cs typeface="Calibri" pitchFamily="34" charset="-120"/>
+              </a:rPr>
+              <a:t>20</a:t>
+            </a:r>
+            <a:endParaRPr lang="en-US" sz="1100" dirty="0"/>
+          </a:p>
+        </p:txBody>
+      </p:sp>
+      <p:sp>
+        <p:nvSpPr>
+          <p:cNvPr id="5" name="Text 3"/>
+          <p:cNvSpPr txBox="1"/>
+          <p:nvPr/>
+        </p:nvSpPr>
+        <p:spPr>
+          <a:xfrm>
+            <a:off x="640080" y="1737360"/>
+            <a:ext cx="10789920" cy="2377440"/>
+          </a:xfrm>
+          <a:prstGeom prst="rect">
+            <a:avLst/>
+          </a:prstGeom>
+          <a:noFill/>
+          <a:ln/>
+        </p:spPr>
+        <p:txBody>
+          <a:bodyPr wrap="square" lIns="0" tIns="0" rIns="0" bIns="0" rtlCol="0" anchor="t"/>
+          <a:lstStyle/>
+          <a:p>
+            <a:pPr marL="342900" indent="-342900">
+              <a:lnSpc>
+                <a:spcPts val="2000"/>
+              </a:lnSpc>
+              <a:spcAft>
+                <a:spcPts val="1000"/>
+              </a:spcAft>
+              <a:buSzPct val="100000"/>
+              <a:buChar char="▪"/>
+            </a:pPr>
+            <a:r>
+              <a:rPr lang="en-US" sz="1500" dirty="0">
+                <a:solidFill>
+                  <a:srgbClr val="16242E"/>
+                </a:solidFill>
+                <a:latin typeface="Calibri" pitchFamily="34" charset="0"/>
+                <a:ea typeface="Calibri" pitchFamily="34" charset="-122"/>
+                <a:cs typeface="Calibri" pitchFamily="34" charset="-120"/>
+              </a:rPr>
+              <a:t>Xarxa dedicada exclusivament a l'emmagatzematge, molt més complexa i costosa que un NAS, però amb un rendiment molt superior.</a:t>
+            </a:r>
+            <a:endParaRPr lang="en-US" sz="1500" dirty="0"/>
+          </a:p>
+          <a:p>
+            <a:pPr marL="342900" indent="-342900">
+              <a:lnSpc>
+                <a:spcPts val="2000"/>
+              </a:lnSpc>
+              <a:spcAft>
+                <a:spcPts val="1000"/>
+              </a:spcAft>
+              <a:buSzPct val="100000"/>
+              <a:buChar char="▪"/>
+            </a:pPr>
+            <a:r>
+              <a:rPr lang="en-US" sz="1500" dirty="0">
+                <a:solidFill>
+                  <a:srgbClr val="16242E"/>
+                </a:solidFill>
+                <a:latin typeface="Calibri" pitchFamily="34" charset="0"/>
+                <a:ea typeface="Calibri" pitchFamily="34" charset="-122"/>
+                <a:cs typeface="Calibri" pitchFamily="34" charset="-120"/>
+              </a:rPr>
+              <a:t>Usa protocols optimitzats per a la transferència de fitxers (Fibre Channel, iSCSI, FCoE), diferents dels protocols habituals de la LAN (TCP/IP): calen switches i targetes de xarxa específics, a més de les de la LAN convencional.</a:t>
+            </a:r>
+            <a:endParaRPr lang="en-US" sz="1500" dirty="0"/>
+          </a:p>
+          <a:p>
+            <a:pPr marL="342900" indent="-342900">
+              <a:lnSpc>
+                <a:spcPts val="2000"/>
+              </a:lnSpc>
+              <a:spcAft>
+                <a:spcPts val="1000"/>
+              </a:spcAft>
+              <a:buSzPct val="100000"/>
+              <a:buChar char="▪"/>
+            </a:pPr>
+            <a:r>
+              <a:rPr lang="en-US" sz="1500" dirty="0">
+                <a:solidFill>
+                  <a:srgbClr val="16242E"/>
+                </a:solidFill>
+                <a:latin typeface="Calibri" pitchFamily="34" charset="0"/>
+                <a:ea typeface="Calibri" pitchFamily="34" charset="-122"/>
+                <a:cs typeface="Calibri" pitchFamily="34" charset="-120"/>
+              </a:rPr>
+              <a:t>Els servidors s'organitzen en clústers: redundància no només a nivell de disc (RAID), sinó també a nivell de servidor complet.</a:t>
+            </a:r>
+            <a:endParaRPr lang="en-US" sz="1500" dirty="0"/>
+          </a:p>
+        </p:txBody>
+      </p:sp>
+      <p:sp>
+        <p:nvSpPr>
+          <p:cNvPr id="6" name="Shape 4"/>
+          <p:cNvSpPr/>
+          <p:nvPr/>
+        </p:nvSpPr>
+        <p:spPr>
+          <a:xfrm>
+            <a:off x="640080" y="4343400"/>
+            <a:ext cx="10789920" cy="1280160"/>
+          </a:xfrm>
+          <a:prstGeom prst="roundRect">
+            <a:avLst>
+              <a:gd name="adj" fmla="val 7143"/>
+            </a:avLst>
+          </a:prstGeom>
+          <a:solidFill>
+            <a:srgbClr val="13293D"/>
+          </a:solidFill>
+          <a:ln/>
+        </p:spPr>
+        <p:txBody>
+          <a:bodyPr/>
+          <a:p/>
         </p:txBody>
       </p:sp>
       <p:pic>
         <p:nvPicPr>
-          <p:cNvPr id="4" name="Picture 3" descr="raid1.png"/>
+          <p:cNvPr id="7" name="Image 0" descr="/tmp/claude-0/-home-user-SMX-0226-Seguretat-Informatica/cec25c9b-7e93-584a-a64a-196540977a59/scratchpad/build/icons/bulb_F2A541.png">    </p:cNvPr>
           <p:cNvPicPr>
             <a:picLocks noChangeAspect="1"/>
           </p:cNvPicPr>
           <p:nvPr/>
         </p:nvPicPr>
         <p:blipFill>
-          <a:blip r:embed="rId2"/>
+          <a:blip r:embed="rId1"/>
           <a:stretch>
             <a:fillRect/>
           </a:stretch>
         </p:blipFill>
         <p:spPr>
           <a:xfrm>
-            <a:off x="4541271" y="1920240"/>
-            <a:ext cx="3109153" cy="4206240"/>
+            <a:off x="914400" y="4754880"/>
+            <a:ext cx="457200" cy="457200"/>
           </a:xfrm>
           <a:prstGeom prst="rect">
             <a:avLst/>
@@ -9972,70 +9804,43 @@
       </p:pic>
       <p:sp>
         <p:nvSpPr>
-          <p:cNvPr id="5" name="TextBox 4"/>
+          <p:cNvPr id="8" name="Text 5"/>
           <p:cNvSpPr txBox="1"/>
           <p:nvPr/>
         </p:nvSpPr>
         <p:spPr>
           <a:xfrm>
-            <a:off x="548640" y="6263640"/>
-            <a:ext cx="11064240" cy="457200"/>
-          </a:xfrm>
-          <a:prstGeom prst="rect">
-            <a:avLst/>
-          </a:prstGeom>
-          <a:noFill/>
-        </p:spPr>
-        <p:txBody>
-          <a:bodyPr wrap="square">
-            <a:spAutoFit/>
-          </a:bodyPr>
-          <a:lstStyle/>
-          <a:p>
-            <a:pPr algn="ctr"/>
-            <a:r>
-              <a:rPr sz="1200" b="0" i="1">
-                <a:solidFill>
-                  <a:srgbClr val="5B6B77"/>
-                </a:solidFill>
-                <a:latin typeface="Calibri"/>
-              </a:rPr>
-              <a:t>RAID 1: còpia exacta (mirall) de la informació entre dos discos.</a:t>
-            </a:r>
-          </a:p>
-        </p:txBody>
-      </p:sp>
-      <p:sp>
-        <p:nvSpPr>
-          <p:cNvPr id="6" name="TextBox 5"/>
-          <p:cNvSpPr txBox="1"/>
-          <p:nvPr/>
-        </p:nvSpPr>
-        <p:spPr>
-          <a:xfrm>
-            <a:off x="11548872" y="6446520"/>
-            <a:ext cx="365760" cy="274320"/>
-          </a:xfrm>
-          <a:prstGeom prst="rect">
-            <a:avLst/>
-          </a:prstGeom>
-          <a:noFill/>
-        </p:spPr>
-        <p:txBody>
-          <a:bodyPr wrap="none">
-            <a:spAutoFit/>
-          </a:bodyPr>
-          <a:lstStyle/>
-          <a:p>
-            <a:pPr algn="r"/>
-            <a:r>
-              <a:rPr sz="1000">
-                <a:solidFill>
-                  <a:srgbClr val="5B6B77"/>
-                </a:solidFill>
-              </a:rPr>
-              <a:t>9</a:t>
-            </a:r>
+            <a:off x="1554480" y="4480560"/>
+            <a:ext cx="9601200" cy="1005840"/>
+          </a:xfrm>
+          <a:prstGeom prst="rect">
+            <a:avLst/>
+          </a:prstGeom>
+          <a:noFill/>
+          <a:ln/>
+        </p:spPr>
+        <p:txBody>
+          <a:bodyPr wrap="square" lIns="0" tIns="0" rIns="0" bIns="0" rtlCol="0" anchor="ctr"/>
+          <a:lstStyle/>
+          <a:p>
+            <a:pPr indent="0" marL="0">
+              <a:lnSpc>
+                <a:spcPts val="1800"/>
+              </a:lnSpc>
+              <a:buNone/>
+            </a:pPr>
+            <a:r>
+              <a:rPr lang="en-US" sz="1350" i="1" dirty="0">
+                <a:solidFill>
+                  <a:srgbClr val="FFFFFF"/>
+                </a:solidFill>
+                <a:latin typeface="Calibri" pitchFamily="34" charset="0"/>
+                <a:ea typeface="Calibri" pitchFamily="34" charset="-122"/>
+                <a:cs typeface="Calibri" pitchFamily="34" charset="-120"/>
+              </a:rPr>
+              <a:t>A escala més petita, es pot muntar un clúster d'emmagatzematge amb servidors normals de la LAN (DAS) usant tecnologies com Windows Server DFS o GlusterFS (Linux), sense necessitat d'una SAN completa.</a:t>
+            </a:r>
+            <a:endParaRPr lang="en-US" sz="1350" dirty="0"/>
           </a:p>
         </p:txBody>
       </p:sp>
@@ -10095,7 +9900,7 @@
                 </a:solidFill>
                 <a:latin typeface="Calibri"/>
               </a:rPr>
-              <a:t>SOTA EL CAPÓ</a:t>
+              <a:t>UN EXEMPLE REAL</a:t>
             </a:r>
           </a:p>
         </p:txBody>
@@ -10130,14 +9935,14 @@
                 </a:solidFill>
                 <a:latin typeface="Cambria"/>
               </a:rPr>
-              <a:t>RAID 5 i 6 — Paritat distribuïda</a:t>
+              <a:t>SAN — Storage Area Network</a:t>
             </a:r>
           </a:p>
         </p:txBody>
       </p:sp>
       <p:pic>
         <p:nvPicPr>
-          <p:cNvPr id="4" name="Picture 3" descr="raid5.png"/>
+          <p:cNvPr id="4" name="Picture 3" descr="cabina_de_discos.png"/>
           <p:cNvPicPr>
             <a:picLocks noChangeAspect="1"/>
           </p:cNvPicPr>
@@ -10151,8 +9956,8 @@
         </p:blipFill>
         <p:spPr>
           <a:xfrm>
-            <a:off x="1015173" y="1965960"/>
-            <a:ext cx="4385539" cy="3840480"/>
+            <a:off x="3352647" y="1920240"/>
+            <a:ext cx="5486400" cy="2948939"/>
           </a:xfrm>
           <a:prstGeom prst="rect">
             <a:avLst/>
@@ -10167,8 +9972,8 @@
         </p:nvSpPr>
         <p:spPr>
           <a:xfrm>
-            <a:off x="548640" y="5943600"/>
-            <a:ext cx="5318607" cy="548640"/>
+            <a:off x="548640" y="5006340"/>
+            <a:ext cx="11064240" cy="457200"/>
           </a:xfrm>
           <a:prstGeom prst="rect">
             <a:avLst/>
@@ -10183,79 +9988,30 @@
           <a:p>
             <a:pPr algn="ctr"/>
             <a:r>
-              <a:rPr sz="1150" b="0" i="1">
+              <a:rPr sz="1200" b="0" i="1">
                 <a:solidFill>
                   <a:srgbClr val="5B6B77"/>
                 </a:solidFill>
                 <a:latin typeface="Calibri"/>
-              </a:rPr>
-              <a:t>RAID 5: paritat distribuïda (mínim 3 discos).</a:t>
-            </a:r>
-          </a:p>
-        </p:txBody>
-      </p:sp>
-      <p:pic>
-        <p:nvPicPr>
-          <p:cNvPr id="6" name="Picture 5" descr="raid6.png"/>
-          <p:cNvPicPr>
-            <a:picLocks noChangeAspect="1"/>
-          </p:cNvPicPr>
-          <p:nvPr/>
-        </p:nvPicPr>
-        <p:blipFill>
-          <a:blip r:embed="rId3"/>
-          <a:stretch>
-            <a:fillRect/>
-          </a:stretch>
-        </p:blipFill>
-        <p:spPr>
-          <a:xfrm>
-            <a:off x="6606311" y="1965960"/>
-            <a:ext cx="4754880" cy="3077086"/>
-          </a:xfrm>
-          <a:prstGeom prst="rect">
-            <a:avLst/>
-          </a:prstGeom>
-        </p:spPr>
-      </p:pic>
-      <p:sp>
-        <p:nvSpPr>
-          <p:cNvPr id="7" name="TextBox 6"/>
-          <p:cNvSpPr txBox="1"/>
-          <p:nvPr/>
-        </p:nvSpPr>
-        <p:spPr>
-          <a:xfrm>
-            <a:off x="6324447" y="5180206"/>
-            <a:ext cx="5318607" cy="548640"/>
-          </a:xfrm>
-          <a:prstGeom prst="rect">
-            <a:avLst/>
-          </a:prstGeom>
-          <a:noFill/>
-        </p:spPr>
-        <p:txBody>
-          <a:bodyPr wrap="square">
-            <a:spAutoFit/>
-          </a:bodyPr>
-          <a:lstStyle/>
-          <a:p>
-            <a:pPr algn="ctr"/>
-            <a:r>
-              <a:rPr sz="1150" b="0" i="1">
+                <a:hlinkClick r:id="rId3"/>
+              </a:rPr>
+              <a:t>Cabines de discos dedicades</a:t>
+            </a:r>
+            <a:r>
+              <a:rPr sz="1200" b="0" i="1">
                 <a:solidFill>
                   <a:srgbClr val="5B6B77"/>
                 </a:solidFill>
                 <a:latin typeface="Calibri"/>
               </a:rPr>
-              <a:t>RAID 6: doble paritat (mínim 4 discos).</a:t>
-            </a:r>
-          </a:p>
-        </p:txBody>
-      </p:sp>
-      <p:sp>
-        <p:nvSpPr>
-          <p:cNvPr id="8" name="TextBox 7"/>
+              <a:t>, com les que s'utilitzen en un SAN.</a:t>
+            </a:r>
+          </a:p>
+        </p:txBody>
+      </p:sp>
+      <p:sp>
+        <p:nvSpPr>
+          <p:cNvPr id="6" name="TextBox 5"/>
           <p:cNvSpPr txBox="1"/>
           <p:nvPr/>
         </p:nvSpPr>
@@ -10282,7 +10038,7 @@
                   <a:srgbClr val="5B6B77"/>
                 </a:solidFill>
               </a:rPr>
-              <a:t>11</a:t>
+              <a:t>21</a:t>
             </a:r>
           </a:p>
         </p:txBody>
@@ -10296,14 +10052,13 @@
 </file>
 
 <file path=ppt/slides/slide22.xml><?xml version="1.0" encoding="utf-8"?>
-<p:sld xmlns:a="http://schemas.openxmlformats.org/drawingml/2006/main" xmlns:p="http://schemas.openxmlformats.org/presentationml/2006/main" xmlns:r="http://schemas.openxmlformats.org/officeDocument/2006/relationships">
-  <p:cSld>
+<p:sld xmlns:a="http://schemas.openxmlformats.org/drawingml/2006/main" xmlns:r="http://schemas.openxmlformats.org/officeDocument/2006/relationships" xmlns:p="http://schemas.openxmlformats.org/presentationml/2006/main">
+  <p:cSld name="Slide 15">
     <p:bg>
       <p:bgPr>
         <a:solidFill>
           <a:srgbClr val="F4F7F9"/>
         </a:solidFill>
-        <a:effectLst/>
       </p:bgPr>
     </p:bg>
     <p:spTree>
@@ -10312,95 +10067,245 @@
         <p:cNvGrpSpPr/>
         <p:nvPr/>
       </p:nvGrpSpPr>
-      <p:grpSpPr/>
-      <p:sp>
-        <p:nvSpPr>
-          <p:cNvPr id="2" name="TextBox 1"/>
+      <p:grpSpPr>
+        <a:xfrm>
+          <a:off x="0" y="0"/>
+          <a:ext cx="0" cy="0"/>
+          <a:chOff x="0" y="0"/>
+          <a:chExt cx="0" cy="0"/>
+        </a:xfrm>
+      </p:grpSpPr>
+      <p:sp>
+        <p:nvSpPr>
+          <p:cNvPr id="2" name="Text 0"/>
           <p:cNvSpPr txBox="1"/>
           <p:nvPr/>
         </p:nvSpPr>
         <p:spPr>
           <a:xfrm>
-            <a:off x="548640" y="411480"/>
-            <a:ext cx="10515600" cy="320040"/>
-          </a:xfrm>
-          <a:prstGeom prst="rect">
-            <a:avLst/>
-          </a:prstGeom>
-          <a:noFill/>
-        </p:spPr>
-        <p:txBody>
-          <a:bodyPr wrap="square">
-            <a:spAutoFit/>
-          </a:bodyPr>
-          <a:lstStyle/>
-          <a:p>
-            <a:pPr algn="l"/>
-            <a:r>
-              <a:rPr sz="1300" b="1" i="0">
+            <a:off x="548640" y="457200"/>
+            <a:ext cx="9144000" cy="365760"/>
+          </a:xfrm>
+          <a:prstGeom prst="rect">
+            <a:avLst/>
+          </a:prstGeom>
+          <a:noFill/>
+          <a:ln/>
+        </p:spPr>
+        <p:txBody>
+          <a:bodyPr wrap="square" lIns="0" tIns="0" rIns="0" bIns="0" rtlCol="0" anchor="ctr"/>
+          <a:lstStyle/>
+          <a:p>
+            <a:pPr indent="0" marL="0">
+              <a:buNone/>
+            </a:pPr>
+            <a:r>
+              <a:rPr lang="en-US" sz="1300" b="1" spc="200" kern="0" dirty="0">
                 <a:solidFill>
                   <a:srgbClr val="F2A541"/>
                 </a:solidFill>
-                <a:latin typeface="Calibri"/>
-              </a:rPr>
-              <a:t>SOTA EL CAPÓ</a:t>
-            </a:r>
-          </a:p>
-        </p:txBody>
-      </p:sp>
-      <p:sp>
-        <p:nvSpPr>
-          <p:cNvPr id="3" name="TextBox 2"/>
+                <a:latin typeface="Calibri" pitchFamily="34" charset="0"/>
+                <a:ea typeface="Calibri" pitchFamily="34" charset="-122"/>
+                <a:cs typeface="Calibri" pitchFamily="34" charset="-120"/>
+              </a:rPr>
+              <a:t>UNA ALTERNATIVA MODERNA</a:t>
+            </a:r>
+            <a:endParaRPr lang="en-US" sz="1300" dirty="0"/>
+          </a:p>
+        </p:txBody>
+      </p:sp>
+      <p:sp>
+        <p:nvSpPr>
+          <p:cNvPr id="3" name="Text 1"/>
           <p:cNvSpPr txBox="1"/>
           <p:nvPr/>
         </p:nvSpPr>
         <p:spPr>
           <a:xfrm>
-            <a:off x="548640" y="685800"/>
-            <a:ext cx="10972800" cy="822960"/>
-          </a:xfrm>
-          <a:prstGeom prst="rect">
-            <a:avLst/>
-          </a:prstGeom>
-          <a:noFill/>
-        </p:spPr>
-        <p:txBody>
-          <a:bodyPr wrap="square">
-            <a:spAutoFit/>
-          </a:bodyPr>
-          <a:lstStyle/>
-          <a:p>
-            <a:pPr algn="l"/>
-            <a:r>
-              <a:rPr sz="2800" b="1" i="0">
+            <a:off x="548640" y="822960"/>
+            <a:ext cx="10789920" cy="640080"/>
+          </a:xfrm>
+          <a:prstGeom prst="rect">
+            <a:avLst/>
+          </a:prstGeom>
+          <a:noFill/>
+          <a:ln/>
+        </p:spPr>
+        <p:txBody>
+          <a:bodyPr wrap="square" lIns="0" tIns="0" rIns="0" bIns="0" rtlCol="0" anchor="ctr"/>
+          <a:lstStyle/>
+          <a:p>
+            <a:pPr indent="0" marL="0">
+              <a:buNone/>
+            </a:pPr>
+            <a:r>
+              <a:rPr lang="en-US" sz="2800" b="1" dirty="0">
                 <a:solidFill>
                   <a:srgbClr val="16242E"/>
                 </a:solidFill>
-                <a:latin typeface="Cambria"/>
-              </a:rPr>
-              <a:t>RAID 10 — El millor de dos mons</a:t>
-            </a:r>
-          </a:p>
+                <a:latin typeface="Cambria" pitchFamily="34" charset="0"/>
+                <a:ea typeface="Cambria" pitchFamily="34" charset="-122"/>
+                <a:cs typeface="Cambria" pitchFamily="34" charset="-120"/>
+              </a:rPr>
+              <a:t>Serveis de núvol</a:t>
+            </a:r>
+            <a:endParaRPr lang="en-US" sz="2800" dirty="0"/>
+          </a:p>
+        </p:txBody>
+      </p:sp>
+      <p:sp>
+        <p:nvSpPr>
+          <p:cNvPr id="4" name="Text 2"/>
+          <p:cNvSpPr txBox="1"/>
+          <p:nvPr/>
+        </p:nvSpPr>
+        <p:spPr>
+          <a:xfrm>
+            <a:off x="11551615" y="6446520"/>
+            <a:ext cx="457200" cy="274320"/>
+          </a:xfrm>
+          <a:prstGeom prst="rect">
+            <a:avLst/>
+          </a:prstGeom>
+          <a:noFill/>
+          <a:ln/>
+        </p:spPr>
+        <p:txBody>
+          <a:bodyPr wrap="square" lIns="0" tIns="0" rIns="0" bIns="0" rtlCol="0" anchor="ctr"/>
+          <a:lstStyle/>
+          <a:p>
+            <a:pPr algn="r" indent="0" marL="0">
+              <a:buNone/>
+            </a:pPr>
+            <a:r>
+              <a:rPr lang="en-US" sz="1100" dirty="0">
+                <a:solidFill>
+                  <a:srgbClr val="5B6B77"/>
+                </a:solidFill>
+                <a:latin typeface="Calibri" pitchFamily="34" charset="0"/>
+                <a:ea typeface="Calibri" pitchFamily="34" charset="-122"/>
+                <a:cs typeface="Calibri" pitchFamily="34" charset="-120"/>
+              </a:rPr>
+              <a:t>22</a:t>
+            </a:r>
+            <a:endParaRPr lang="en-US" sz="1100" dirty="0"/>
+          </a:p>
+        </p:txBody>
+      </p:sp>
+      <p:sp>
+        <p:nvSpPr>
+          <p:cNvPr id="5" name="Text 3"/>
+          <p:cNvSpPr txBox="1"/>
+          <p:nvPr/>
+        </p:nvSpPr>
+        <p:spPr>
+          <a:xfrm>
+            <a:off x="640080" y="1737360"/>
+            <a:ext cx="10789920" cy="2103120"/>
+          </a:xfrm>
+          <a:prstGeom prst="rect">
+            <a:avLst/>
+          </a:prstGeom>
+          <a:noFill/>
+          <a:ln/>
+        </p:spPr>
+        <p:txBody>
+          <a:bodyPr wrap="square" lIns="0" tIns="0" rIns="0" bIns="0" rtlCol="0" anchor="t"/>
+          <a:lstStyle/>
+          <a:p>
+            <a:pPr marL="342900" indent="-342900">
+              <a:lnSpc>
+                <a:spcPts val="2000"/>
+              </a:lnSpc>
+              <a:spcAft>
+                <a:spcPts val="1000"/>
+              </a:spcAft>
+              <a:buSzPct val="100000"/>
+              <a:buChar char="▪"/>
+            </a:pPr>
+            <a:r>
+              <a:rPr lang="en-US" sz="1550" dirty="0">
+                <a:solidFill>
+                  <a:srgbClr val="16242E"/>
+                </a:solidFill>
+                <a:latin typeface="Calibri" pitchFamily="34" charset="0"/>
+                <a:ea typeface="Calibri" pitchFamily="34" charset="-122"/>
+                <a:cs typeface="Calibri" pitchFamily="34" charset="-120"/>
+              </a:rPr>
+              <a:t>Pagament per ús en lloc d'infraestructura pròpia. Fins i tot en entorn domèstic hi ha plans gratuïts (Google Drive ofereix 15 GB a qualsevol compte de Gmail).</a:t>
+            </a:r>
+            <a:endParaRPr lang="en-US" sz="1550" dirty="0"/>
+          </a:p>
+          <a:p>
+            <a:pPr marL="342900" indent="-342900">
+              <a:lnSpc>
+                <a:spcPts val="2000"/>
+              </a:lnSpc>
+              <a:spcAft>
+                <a:spcPts val="1000"/>
+              </a:spcAft>
+              <a:buSzPct val="100000"/>
+              <a:buChar char="▪"/>
+            </a:pPr>
+            <a:r>
+              <a:rPr lang="en-US" sz="1550" dirty="0">
+                <a:solidFill>
+                  <a:srgbClr val="16242E"/>
+                </a:solidFill>
+                <a:latin typeface="Calibri" pitchFamily="34" charset="0"/>
+                <a:ea typeface="Calibri" pitchFamily="34" charset="-122"/>
+                <a:cs typeface="Calibri" pitchFamily="34" charset="-120"/>
+              </a:rPr>
+              <a:t>Permeten accedir a la informació des de qualsevol lloc i moment, amb una disponibilitat molt alta i un cost inicial baix.</a:t>
+            </a:r>
+            <a:endParaRPr lang="en-US" sz="1550" dirty="0"/>
+          </a:p>
+        </p:txBody>
+      </p:sp>
+      <p:sp>
+        <p:nvSpPr>
+          <p:cNvPr id="6" name="Shape 4"/>
+          <p:cNvSpPr/>
+          <p:nvPr/>
+        </p:nvSpPr>
+        <p:spPr>
+          <a:xfrm>
+            <a:off x="640080" y="4114800"/>
+            <a:ext cx="10789920" cy="1463040"/>
+          </a:xfrm>
+          <a:prstGeom prst="roundRect">
+            <a:avLst>
+              <a:gd name="adj" fmla="val 6250"/>
+            </a:avLst>
+          </a:prstGeom>
+          <a:solidFill>
+            <a:srgbClr val="13293D"/>
+          </a:solidFill>
+          <a:ln/>
+        </p:spPr>
+        <p:txBody>
+          <a:bodyPr/>
+          <a:p/>
         </p:txBody>
       </p:sp>
       <p:pic>
         <p:nvPicPr>
-          <p:cNvPr id="4" name="Picture 3" descr="raid10.png"/>
+          <p:cNvPr id="7" name="Image 0" descr="/tmp/claude-0/-home-user-SMX-0226-Seguretat-Informatica/cec25c9b-7e93-584a-a64a-196540977a59/scratchpad/build/icons/warning_F2A541.png">    </p:cNvPr>
           <p:cNvPicPr>
             <a:picLocks noChangeAspect="1"/>
           </p:cNvPicPr>
           <p:nvPr/>
         </p:nvPicPr>
         <p:blipFill>
-          <a:blip r:embed="rId2"/>
+          <a:blip r:embed="rId1"/>
           <a:stretch>
             <a:fillRect/>
           </a:stretch>
         </p:blipFill>
         <p:spPr>
           <a:xfrm>
-            <a:off x="3124047" y="1920240"/>
-            <a:ext cx="5943600" cy="3846358"/>
+            <a:off x="914400" y="4617720"/>
+            <a:ext cx="457200" cy="457200"/>
           </a:xfrm>
           <a:prstGeom prst="rect">
             <a:avLst/>
@@ -10409,70 +10314,43 @@
       </p:pic>
       <p:sp>
         <p:nvSpPr>
-          <p:cNvPr id="5" name="TextBox 4"/>
+          <p:cNvPr id="8" name="Text 5"/>
           <p:cNvSpPr txBox="1"/>
           <p:nvPr/>
         </p:nvSpPr>
         <p:spPr>
           <a:xfrm>
-            <a:off x="548640" y="5903758"/>
-            <a:ext cx="11064240" cy="457200"/>
-          </a:xfrm>
-          <a:prstGeom prst="rect">
-            <a:avLst/>
-          </a:prstGeom>
-          <a:noFill/>
-        </p:spPr>
-        <p:txBody>
-          <a:bodyPr wrap="square">
-            <a:spAutoFit/>
-          </a:bodyPr>
-          <a:lstStyle/>
-          <a:p>
-            <a:pPr algn="ctr"/>
-            <a:r>
-              <a:rPr sz="1200" b="0" i="1">
-                <a:solidFill>
-                  <a:srgbClr val="5B6B77"/>
-                </a:solidFill>
-                <a:latin typeface="Calibri"/>
-              </a:rPr>
-              <a:t>RAID 10 combina mirall (RAID 1) i distribució (RAID 0).</a:t>
-            </a:r>
-          </a:p>
-        </p:txBody>
-      </p:sp>
-      <p:sp>
-        <p:nvSpPr>
-          <p:cNvPr id="6" name="TextBox 5"/>
-          <p:cNvSpPr txBox="1"/>
-          <p:nvPr/>
-        </p:nvSpPr>
-        <p:spPr>
-          <a:xfrm>
-            <a:off x="11548872" y="6446520"/>
-            <a:ext cx="365760" cy="274320"/>
-          </a:xfrm>
-          <a:prstGeom prst="rect">
-            <a:avLst/>
-          </a:prstGeom>
-          <a:noFill/>
-        </p:spPr>
-        <p:txBody>
-          <a:bodyPr wrap="none">
-            <a:spAutoFit/>
-          </a:bodyPr>
-          <a:lstStyle/>
-          <a:p>
-            <a:pPr algn="r"/>
-            <a:r>
-              <a:rPr sz="1000">
-                <a:solidFill>
-                  <a:srgbClr val="5B6B77"/>
-                </a:solidFill>
-              </a:rPr>
-              <a:t>13</a:t>
-            </a:r>
+            <a:off x="1554480" y="4251960"/>
+            <a:ext cx="9601200" cy="1188720"/>
+          </a:xfrm>
+          <a:prstGeom prst="rect">
+            <a:avLst/>
+          </a:prstGeom>
+          <a:noFill/>
+          <a:ln/>
+        </p:spPr>
+        <p:txBody>
+          <a:bodyPr wrap="square" lIns="0" tIns="0" rIns="0" bIns="0" rtlCol="0" anchor="ctr"/>
+          <a:lstStyle/>
+          <a:p>
+            <a:pPr indent="0" marL="0">
+              <a:lnSpc>
+                <a:spcPts val="1800"/>
+              </a:lnSpc>
+              <a:buNone/>
+            </a:pPr>
+            <a:r>
+              <a:rPr lang="en-US" sz="1350" i="1" dirty="0">
+                <a:solidFill>
+                  <a:srgbClr val="FFFFFF"/>
+                </a:solidFill>
+                <a:latin typeface="Calibri" pitchFamily="34" charset="0"/>
+                <a:ea typeface="Calibri" pitchFamily="34" charset="-122"/>
+                <a:cs typeface="Calibri" pitchFamily="34" charset="-120"/>
+              </a:rPr>
+              <a:t>Però compte: la sincronització pot ser lenta amb fitxers grans; es perd el control complet de les dades (seguretat, continuïtat del proveïdor); i cal complir la normativa legal (RGPD) si hi ha dades de caràcter personal.</a:t>
+            </a:r>
+            <a:endParaRPr lang="en-US" sz="1350" dirty="0"/>
           </a:p>
         </p:txBody>
       </p:sp>
@@ -10485,14 +10363,13 @@
 </file>
 
 <file path=ppt/slides/slide23.xml><?xml version="1.0" encoding="utf-8"?>
-<p:sld xmlns:a="http://schemas.openxmlformats.org/drawingml/2006/main" xmlns:p="http://schemas.openxmlformats.org/presentationml/2006/main" xmlns:r="http://schemas.openxmlformats.org/officeDocument/2006/relationships">
-  <p:cSld>
+<p:sld xmlns:a="http://schemas.openxmlformats.org/drawingml/2006/main" xmlns:r="http://schemas.openxmlformats.org/officeDocument/2006/relationships" xmlns:p="http://schemas.openxmlformats.org/presentationml/2006/main">
+  <p:cSld name="Slide 16">
     <p:bg>
       <p:bgPr>
         <a:solidFill>
           <a:srgbClr val="F4F7F9"/>
         </a:solidFill>
-        <a:effectLst/>
       </p:bgPr>
     </p:bg>
     <p:spTree>
@@ -10501,80 +10378,363 @@
         <p:cNvGrpSpPr/>
         <p:nvPr/>
       </p:nvGrpSpPr>
-      <p:grpSpPr/>
-      <p:sp>
-        <p:nvSpPr>
-          <p:cNvPr id="2" name="TextBox 1"/>
+      <p:grpSpPr>
+        <a:xfrm>
+          <a:off x="0" y="0"/>
+          <a:ext cx="0" cy="0"/>
+          <a:chOff x="0" y="0"/>
+          <a:chExt cx="0" cy="0"/>
+        </a:xfrm>
+      </p:grpSpPr>
+      <p:sp>
+        <p:nvSpPr>
+          <p:cNvPr id="2" name="Text 0"/>
           <p:cNvSpPr txBox="1"/>
           <p:nvPr/>
         </p:nvSpPr>
         <p:spPr>
           <a:xfrm>
-            <a:off x="548640" y="411480"/>
-            <a:ext cx="10515600" cy="320040"/>
-          </a:xfrm>
-          <a:prstGeom prst="rect">
-            <a:avLst/>
-          </a:prstGeom>
-          <a:noFill/>
-        </p:spPr>
-        <p:txBody>
-          <a:bodyPr wrap="square">
-            <a:spAutoFit/>
-          </a:bodyPr>
-          <a:lstStyle/>
-          <a:p>
-            <a:pPr algn="l"/>
-            <a:r>
-              <a:rPr sz="1300" b="1" i="0">
+            <a:off x="548640" y="457200"/>
+            <a:ext cx="9144000" cy="365760"/>
+          </a:xfrm>
+          <a:prstGeom prst="rect">
+            <a:avLst/>
+          </a:prstGeom>
+          <a:noFill/>
+          <a:ln/>
+        </p:spPr>
+        <p:txBody>
+          <a:bodyPr wrap="square" lIns="0" tIns="0" rIns="0" bIns="0" rtlCol="0" anchor="ctr"/>
+          <a:lstStyle/>
+          <a:p>
+            <a:pPr indent="0" marL="0">
+              <a:buNone/>
+            </a:pPr>
+            <a:r>
+              <a:rPr lang="en-US" sz="1300" b="1" spc="200" kern="0" dirty="0">
                 <a:solidFill>
                   <a:srgbClr val="F2A541"/>
                 </a:solidFill>
-                <a:latin typeface="Calibri"/>
-              </a:rPr>
-              <a:t>UN EXEMPLE REAL</a:t>
-            </a:r>
-          </a:p>
-        </p:txBody>
-      </p:sp>
-      <p:sp>
-        <p:nvSpPr>
-          <p:cNvPr id="3" name="TextBox 2"/>
+                <a:latin typeface="Calibri" pitchFamily="34" charset="0"/>
+                <a:ea typeface="Calibri" pitchFamily="34" charset="-122"/>
+                <a:cs typeface="Calibri" pitchFamily="34" charset="-120"/>
+              </a:rPr>
+              <a:t>PER ACABAR</a:t>
+            </a:r>
+            <a:endParaRPr lang="en-US" sz="1300" dirty="0"/>
+          </a:p>
+        </p:txBody>
+      </p:sp>
+      <p:sp>
+        <p:nvSpPr>
+          <p:cNvPr id="3" name="Text 1"/>
           <p:cNvSpPr txBox="1"/>
           <p:nvPr/>
         </p:nvSpPr>
         <p:spPr>
           <a:xfrm>
-            <a:off x="548640" y="685800"/>
-            <a:ext cx="10972800" cy="822960"/>
-          </a:xfrm>
-          <a:prstGeom prst="rect">
-            <a:avLst/>
-          </a:prstGeom>
-          <a:noFill/>
-        </p:spPr>
-        <p:txBody>
-          <a:bodyPr wrap="square">
-            <a:spAutoFit/>
-          </a:bodyPr>
-          <a:lstStyle/>
-          <a:p>
-            <a:pPr algn="l"/>
-            <a:r>
-              <a:rPr sz="2800" b="1" i="0">
+            <a:off x="548640" y="822960"/>
+            <a:ext cx="10789920" cy="640080"/>
+          </a:xfrm>
+          <a:prstGeom prst="rect">
+            <a:avLst/>
+          </a:prstGeom>
+          <a:noFill/>
+          <a:ln/>
+        </p:spPr>
+        <p:txBody>
+          <a:bodyPr wrap="square" lIns="0" tIns="0" rIns="0" bIns="0" rtlCol="0" anchor="ctr"/>
+          <a:lstStyle/>
+          <a:p>
+            <a:pPr indent="0" marL="0">
+              <a:buNone/>
+            </a:pPr>
+            <a:r>
+              <a:rPr lang="en-US" sz="2800" b="1" dirty="0">
                 <a:solidFill>
                   <a:srgbClr val="16242E"/>
                 </a:solidFill>
-                <a:latin typeface="Cambria"/>
-              </a:rPr>
-              <a:t>DAS — Direct Attached Storage</a:t>
-            </a:r>
-          </a:p>
+                <a:latin typeface="Cambria" pitchFamily="34" charset="0"/>
+                <a:ea typeface="Cambria" pitchFamily="34" charset="-122"/>
+                <a:cs typeface="Cambria" pitchFamily="34" charset="-120"/>
+              </a:rPr>
+              <a:t>Idees clau d'avui</a:t>
+            </a:r>
+            <a:endParaRPr lang="en-US" sz="2800" dirty="0"/>
+          </a:p>
+        </p:txBody>
+      </p:sp>
+      <p:sp>
+        <p:nvSpPr>
+          <p:cNvPr id="4" name="Text 2"/>
+          <p:cNvSpPr txBox="1"/>
+          <p:nvPr/>
+        </p:nvSpPr>
+        <p:spPr>
+          <a:xfrm>
+            <a:off x="11551615" y="6446520"/>
+            <a:ext cx="457200" cy="274320"/>
+          </a:xfrm>
+          <a:prstGeom prst="rect">
+            <a:avLst/>
+          </a:prstGeom>
+          <a:noFill/>
+          <a:ln/>
+        </p:spPr>
+        <p:txBody>
+          <a:bodyPr wrap="square" lIns="0" tIns="0" rIns="0" bIns="0" rtlCol="0" anchor="ctr"/>
+          <a:lstStyle/>
+          <a:p>
+            <a:pPr algn="r" indent="0" marL="0">
+              <a:buNone/>
+            </a:pPr>
+            <a:r>
+              <a:rPr lang="en-US" sz="1100" dirty="0">
+                <a:solidFill>
+                  <a:srgbClr val="5B6B77"/>
+                </a:solidFill>
+                <a:latin typeface="Calibri" pitchFamily="34" charset="0"/>
+                <a:ea typeface="Calibri" pitchFamily="34" charset="-122"/>
+                <a:cs typeface="Calibri" pitchFamily="34" charset="-120"/>
+              </a:rPr>
+              <a:t>23</a:t>
+            </a:r>
+            <a:endParaRPr lang="en-US" sz="1100" dirty="0"/>
+          </a:p>
+        </p:txBody>
+      </p:sp>
+      <p:sp>
+        <p:nvSpPr>
+          <p:cNvPr id="5" name="Shape 3"/>
+          <p:cNvSpPr/>
+          <p:nvPr/>
+        </p:nvSpPr>
+        <p:spPr>
+          <a:xfrm>
+            <a:off x="632308" y="1737360"/>
+            <a:ext cx="3429000" cy="3840480"/>
+          </a:xfrm>
+          <a:prstGeom prst="roundRect">
+            <a:avLst>
+              <a:gd name="adj" fmla="val 3200"/>
+            </a:avLst>
+          </a:prstGeom>
+          <a:solidFill>
+            <a:srgbClr val="FFFFFF"/>
+          </a:solidFill>
+          <a:ln w="12700">
+            <a:solidFill>
+              <a:srgbClr val="E2E8ED"/>
+            </a:solidFill>
+            <a:prstDash val="solid"/>
+          </a:ln>
+          <a:effectLst>
+            <a:outerShdw sx="100000" sy="100000" kx="0" ky="0" algn="bl" rotWithShape="0" blurRad="101600" dist="38100" dir="5400000">
+              <a:srgbClr val="16242E">
+                <a:alpha val="12000"/>
+              </a:srgbClr>
+            </a:outerShdw>
+          </a:effectLst>
+        </p:spPr>
+        <p:txBody>
+          <a:bodyPr/>
+          <a:p/>
+        </p:txBody>
+      </p:sp>
+      <p:sp>
+        <p:nvSpPr>
+          <p:cNvPr id="6" name="Shape 4"/>
+          <p:cNvSpPr/>
+          <p:nvPr/>
+        </p:nvSpPr>
+        <p:spPr>
+          <a:xfrm>
+            <a:off x="952348" y="2057400"/>
+            <a:ext cx="731520" cy="731520"/>
+          </a:xfrm>
+          <a:prstGeom prst="ellipse">
+            <a:avLst/>
+          </a:prstGeom>
+          <a:solidFill>
+            <a:srgbClr val="0B1B29"/>
+          </a:solidFill>
+          <a:ln/>
+        </p:spPr>
+        <p:txBody>
+          <a:bodyPr/>
+          <a:p/>
         </p:txBody>
       </p:sp>
       <p:pic>
         <p:nvPicPr>
-          <p:cNvPr id="4" name="Picture 3" descr="hp-proliant.jpg"/>
+          <p:cNvPr id="7" name="Image 0" descr="/tmp/claude-0/-home-user-SMX-0226-Seguretat-Informatica/cec25c9b-7e93-584a-a64a-196540977a59/scratchpad/build/icons/layer_F2A541.png">    </p:cNvPr>
+          <p:cNvPicPr>
+            <a:picLocks noChangeAspect="1"/>
+          </p:cNvPicPr>
+          <p:nvPr/>
+        </p:nvPicPr>
+        <p:blipFill>
+          <a:blip r:embed="rId1"/>
+          <a:stretch>
+            <a:fillRect/>
+          </a:stretch>
+        </p:blipFill>
+        <p:spPr>
+          <a:xfrm>
+            <a:off x="1135228" y="2240280"/>
+            <a:ext cx="365760" cy="365760"/>
+          </a:xfrm>
+          <a:prstGeom prst="rect">
+            <a:avLst/>
+          </a:prstGeom>
+        </p:spPr>
+      </p:pic>
+      <p:sp>
+        <p:nvSpPr>
+          <p:cNvPr id="8" name="Text 5"/>
+          <p:cNvSpPr txBox="1"/>
+          <p:nvPr/>
+        </p:nvSpPr>
+        <p:spPr>
+          <a:xfrm>
+            <a:off x="906628" y="2971800"/>
+            <a:ext cx="2880360" cy="731520"/>
+          </a:xfrm>
+          <a:prstGeom prst="rect">
+            <a:avLst/>
+          </a:prstGeom>
+          <a:noFill/>
+          <a:ln/>
+        </p:spPr>
+        <p:txBody>
+          <a:bodyPr wrap="square" lIns="0" tIns="0" rIns="0" bIns="0" rtlCol="0" anchor="ctr"/>
+          <a:lstStyle/>
+          <a:p>
+            <a:pPr indent="0" marL="0">
+              <a:buNone/>
+            </a:pPr>
+            <a:r>
+              <a:rPr lang="en-US" sz="1700" b="1" dirty="0">
+                <a:solidFill>
+                  <a:srgbClr val="16242E"/>
+                </a:solidFill>
+                <a:latin typeface="Cambria" pitchFamily="34" charset="0"/>
+                <a:ea typeface="Cambria" pitchFamily="34" charset="-122"/>
+                <a:cs typeface="Cambria" pitchFamily="34" charset="-120"/>
+              </a:rPr>
+              <a:t>5 nivells de RAID</a:t>
+            </a:r>
+            <a:endParaRPr lang="en-US" sz="1700" dirty="0"/>
+          </a:p>
+        </p:txBody>
+      </p:sp>
+      <p:sp>
+        <p:nvSpPr>
+          <p:cNvPr id="9" name="Text 6"/>
+          <p:cNvSpPr txBox="1"/>
+          <p:nvPr/>
+        </p:nvSpPr>
+        <p:spPr>
+          <a:xfrm>
+            <a:off x="906628" y="3611880"/>
+            <a:ext cx="2880360" cy="1828800"/>
+          </a:xfrm>
+          <a:prstGeom prst="rect">
+            <a:avLst/>
+          </a:prstGeom>
+          <a:noFill/>
+          <a:ln/>
+        </p:spPr>
+        <p:txBody>
+          <a:bodyPr wrap="square" lIns="0" tIns="0" rIns="0" bIns="0" rtlCol="0" anchor="t"/>
+          <a:lstStyle/>
+          <a:p>
+            <a:pPr indent="0" marL="0">
+              <a:lnSpc>
+                <a:spcPts val="1600"/>
+              </a:lnSpc>
+              <a:buNone/>
+            </a:pPr>
+            <a:r>
+              <a:rPr lang="en-US" sz="1250" dirty="0">
+                <a:solidFill>
+                  <a:srgbClr val="5B6B77"/>
+                </a:solidFill>
+                <a:latin typeface="Calibri" pitchFamily="34" charset="0"/>
+                <a:ea typeface="Calibri" pitchFamily="34" charset="-122"/>
+                <a:cs typeface="Calibri" pitchFamily="34" charset="-120"/>
+              </a:rPr>
+              <a:t>0 (velocitat), 1 (mirall), 5 i 6 (paritat), 10 (mirall+distribució): cadascun amb el seu compromís.</a:t>
+            </a:r>
+            <a:endParaRPr lang="en-US" sz="1250" dirty="0"/>
+          </a:p>
+        </p:txBody>
+      </p:sp>
+      <p:sp>
+        <p:nvSpPr>
+          <p:cNvPr id="10" name="Shape 7"/>
+          <p:cNvSpPr/>
+          <p:nvPr/>
+        </p:nvSpPr>
+        <p:spPr>
+          <a:xfrm>
+            <a:off x="4381348" y="1737360"/>
+            <a:ext cx="3429000" cy="3840480"/>
+          </a:xfrm>
+          <a:prstGeom prst="roundRect">
+            <a:avLst>
+              <a:gd name="adj" fmla="val 3200"/>
+            </a:avLst>
+          </a:prstGeom>
+          <a:solidFill>
+            <a:srgbClr val="FFFFFF"/>
+          </a:solidFill>
+          <a:ln w="12700">
+            <a:solidFill>
+              <a:srgbClr val="E2E8ED"/>
+            </a:solidFill>
+            <a:prstDash val="solid"/>
+          </a:ln>
+          <a:effectLst>
+            <a:outerShdw sx="100000" sy="100000" kx="0" ky="0" algn="bl" rotWithShape="0" blurRad="101600" dist="38100" dir="5400000">
+              <a:srgbClr val="16242E">
+                <a:alpha val="12000"/>
+              </a:srgbClr>
+            </a:outerShdw>
+          </a:effectLst>
+        </p:spPr>
+        <p:txBody>
+          <a:bodyPr/>
+          <a:p/>
+        </p:txBody>
+      </p:sp>
+      <p:sp>
+        <p:nvSpPr>
+          <p:cNvPr id="11" name="Shape 8"/>
+          <p:cNvSpPr/>
+          <p:nvPr/>
+        </p:nvSpPr>
+        <p:spPr>
+          <a:xfrm>
+            <a:off x="4701388" y="2057400"/>
+            <a:ext cx="731520" cy="731520"/>
+          </a:xfrm>
+          <a:prstGeom prst="ellipse">
+            <a:avLst/>
+          </a:prstGeom>
+          <a:solidFill>
+            <a:srgbClr val="0B1B29"/>
+          </a:solidFill>
+          <a:ln/>
+        </p:spPr>
+        <p:txBody>
+          <a:bodyPr/>
+          <a:p/>
+        </p:txBody>
+      </p:sp>
+      <p:pic>
+        <p:nvPicPr>
+          <p:cNvPr id="12" name="Image 1" descr="/tmp/claude-0/-home-user-SMX-0226-Seguretat-Informatica/cec25c9b-7e93-584a-a64a-196540977a59/scratchpad/build/icons/network_F2A541.png">    </p:cNvPr>
           <p:cNvPicPr>
             <a:picLocks noChangeAspect="1"/>
           </p:cNvPicPr>
@@ -10588,8 +10748,8 @@
         </p:blipFill>
         <p:spPr>
           <a:xfrm>
-            <a:off x="830503" y="1965960"/>
-            <a:ext cx="4754880" cy="1882139"/>
+            <a:off x="4884268" y="2240280"/>
+            <a:ext cx="365760" cy="365760"/>
           </a:xfrm>
           <a:prstGeom prst="rect">
             <a:avLst/>
@@ -10598,42 +10758,150 @@
       </p:pic>
       <p:sp>
         <p:nvSpPr>
-          <p:cNvPr id="5" name="TextBox 4"/>
+          <p:cNvPr id="13" name="Text 9"/>
           <p:cNvSpPr txBox="1"/>
           <p:nvPr/>
         </p:nvSpPr>
         <p:spPr>
           <a:xfrm>
-            <a:off x="548640" y="3985260"/>
-            <a:ext cx="5318607" cy="548640"/>
-          </a:xfrm>
-          <a:prstGeom prst="rect">
-            <a:avLst/>
-          </a:prstGeom>
-          <a:noFill/>
-        </p:spPr>
-        <p:txBody>
-          <a:bodyPr wrap="square">
-            <a:spAutoFit/>
-          </a:bodyPr>
-          <a:lstStyle/>
-          <a:p>
-            <a:pPr algn="ctr"/>
-            <a:r>
-              <a:rPr sz="1150" b="0" i="1">
+            <a:off x="4655668" y="2971800"/>
+            <a:ext cx="2880360" cy="731520"/>
+          </a:xfrm>
+          <a:prstGeom prst="rect">
+            <a:avLst/>
+          </a:prstGeom>
+          <a:noFill/>
+          <a:ln/>
+        </p:spPr>
+        <p:txBody>
+          <a:bodyPr wrap="square" lIns="0" tIns="0" rIns="0" bIns="0" rtlCol="0" anchor="ctr"/>
+          <a:lstStyle/>
+          <a:p>
+            <a:pPr indent="0" marL="0">
+              <a:buNone/>
+            </a:pPr>
+            <a:r>
+              <a:rPr lang="en-US" sz="1700" b="1" dirty="0">
+                <a:solidFill>
+                  <a:srgbClr val="16242E"/>
+                </a:solidFill>
+                <a:latin typeface="Cambria" pitchFamily="34" charset="0"/>
+                <a:ea typeface="Cambria" pitchFamily="34" charset="-122"/>
+                <a:cs typeface="Cambria" pitchFamily="34" charset="-120"/>
+              </a:rPr>
+              <a:t>DAS &lt; NAS &lt; SAN</a:t>
+            </a:r>
+            <a:endParaRPr lang="en-US" sz="1700" dirty="0"/>
+          </a:p>
+        </p:txBody>
+      </p:sp>
+      <p:sp>
+        <p:nvSpPr>
+          <p:cNvPr id="14" name="Text 10"/>
+          <p:cNvSpPr txBox="1"/>
+          <p:nvPr/>
+        </p:nvSpPr>
+        <p:spPr>
+          <a:xfrm>
+            <a:off x="4655668" y="3611880"/>
+            <a:ext cx="2880360" cy="1828800"/>
+          </a:xfrm>
+          <a:prstGeom prst="rect">
+            <a:avLst/>
+          </a:prstGeom>
+          <a:noFill/>
+          <a:ln/>
+        </p:spPr>
+        <p:txBody>
+          <a:bodyPr wrap="square" lIns="0" tIns="0" rIns="0" bIns="0" rtlCol="0" anchor="t"/>
+          <a:lstStyle/>
+          <a:p>
+            <a:pPr indent="0" marL="0">
+              <a:lnSpc>
+                <a:spcPts val="1600"/>
+              </a:lnSpc>
+              <a:buNone/>
+            </a:pPr>
+            <a:r>
+              <a:rPr lang="en-US" sz="1250" dirty="0">
                 <a:solidFill>
                   <a:srgbClr val="5B6B77"/>
                 </a:solidFill>
-                <a:latin typeface="Calibri"/>
-              </a:rPr>
-              <a:t>Servidor HP ProLiant DL380 Gen9, usat habitualment com a DAS.</a:t>
-            </a:r>
-          </a:p>
+                <a:latin typeface="Calibri" pitchFamily="34" charset="0"/>
+                <a:ea typeface="Calibri" pitchFamily="34" charset="-122"/>
+                <a:cs typeface="Calibri" pitchFamily="34" charset="-120"/>
+              </a:rPr>
+              <a:t>Complexitat i cost creixents, a canvi de més rendiment, disponibilitat i escalabilitat.</a:t>
+            </a:r>
+            <a:endParaRPr lang="en-US" sz="1250" dirty="0"/>
+          </a:p>
+        </p:txBody>
+      </p:sp>
+      <p:sp>
+        <p:nvSpPr>
+          <p:cNvPr id="15" name="Shape 11"/>
+          <p:cNvSpPr/>
+          <p:nvPr/>
+        </p:nvSpPr>
+        <p:spPr>
+          <a:xfrm>
+            <a:off x="8130388" y="1737360"/>
+            <a:ext cx="3429000" cy="3840480"/>
+          </a:xfrm>
+          <a:prstGeom prst="roundRect">
+            <a:avLst>
+              <a:gd name="adj" fmla="val 3200"/>
+            </a:avLst>
+          </a:prstGeom>
+          <a:solidFill>
+            <a:srgbClr val="FFFFFF"/>
+          </a:solidFill>
+          <a:ln w="12700">
+            <a:solidFill>
+              <a:srgbClr val="E2E8ED"/>
+            </a:solidFill>
+            <a:prstDash val="solid"/>
+          </a:ln>
+          <a:effectLst>
+            <a:outerShdw sx="100000" sy="100000" kx="0" ky="0" algn="bl" rotWithShape="0" blurRad="101600" dist="38100" dir="5400000">
+              <a:srgbClr val="16242E">
+                <a:alpha val="12000"/>
+              </a:srgbClr>
+            </a:outerShdw>
+          </a:effectLst>
+        </p:spPr>
+        <p:txBody>
+          <a:bodyPr/>
+          <a:p/>
+        </p:txBody>
+      </p:sp>
+      <p:sp>
+        <p:nvSpPr>
+          <p:cNvPr id="16" name="Shape 12"/>
+          <p:cNvSpPr/>
+          <p:nvPr/>
+        </p:nvSpPr>
+        <p:spPr>
+          <a:xfrm>
+            <a:off x="8450428" y="2057400"/>
+            <a:ext cx="731520" cy="731520"/>
+          </a:xfrm>
+          <a:prstGeom prst="ellipse">
+            <a:avLst/>
+          </a:prstGeom>
+          <a:solidFill>
+            <a:srgbClr val="0B1B29"/>
+          </a:solidFill>
+          <a:ln/>
+        </p:spPr>
+        <p:txBody>
+          <a:bodyPr/>
+          <a:p/>
         </p:txBody>
       </p:sp>
       <p:pic>
         <p:nvPicPr>
-          <p:cNvPr id="6" name="Picture 5" descr="das.png"/>
+          <p:cNvPr id="17" name="Image 2" descr="/tmp/claude-0/-home-user-SMX-0226-Seguretat-Informatica/cec25c9b-7e93-584a-a64a-196540977a59/scratchpad/build/icons/cloud_F2A541.png">    </p:cNvPr>
           <p:cNvPicPr>
             <a:picLocks noChangeAspect="1"/>
           </p:cNvPicPr>
@@ -10647,8 +10915,8 @@
         </p:blipFill>
         <p:spPr>
           <a:xfrm>
-            <a:off x="6606311" y="1965960"/>
-            <a:ext cx="4754880" cy="2960236"/>
+            <a:off x="8633308" y="2240280"/>
+            <a:ext cx="365760" cy="365760"/>
           </a:xfrm>
           <a:prstGeom prst="rect">
             <a:avLst/>
@@ -10657,70 +10925,82 @@
       </p:pic>
       <p:sp>
         <p:nvSpPr>
-          <p:cNvPr id="7" name="TextBox 6"/>
+          <p:cNvPr id="18" name="Text 13"/>
           <p:cNvSpPr txBox="1"/>
           <p:nvPr/>
         </p:nvSpPr>
         <p:spPr>
           <a:xfrm>
-            <a:off x="6324447" y="5063356"/>
-            <a:ext cx="5318607" cy="548640"/>
-          </a:xfrm>
-          <a:prstGeom prst="rect">
-            <a:avLst/>
-          </a:prstGeom>
-          <a:noFill/>
-        </p:spPr>
-        <p:txBody>
-          <a:bodyPr wrap="square">
-            <a:spAutoFit/>
-          </a:bodyPr>
-          <a:lstStyle/>
-          <a:p>
-            <a:pPr algn="ctr"/>
-            <a:r>
-              <a:rPr sz="1150" b="0" i="1">
+            <a:off x="8404708" y="2971800"/>
+            <a:ext cx="2880360" cy="731520"/>
+          </a:xfrm>
+          <a:prstGeom prst="rect">
+            <a:avLst/>
+          </a:prstGeom>
+          <a:noFill/>
+          <a:ln/>
+        </p:spPr>
+        <p:txBody>
+          <a:bodyPr wrap="square" lIns="0" tIns="0" rIns="0" bIns="0" rtlCol="0" anchor="ctr"/>
+          <a:lstStyle/>
+          <a:p>
+            <a:pPr indent="0" marL="0">
+              <a:buNone/>
+            </a:pPr>
+            <a:r>
+              <a:rPr lang="en-US" sz="1700" b="1" dirty="0">
+                <a:solidFill>
+                  <a:srgbClr val="16242E"/>
+                </a:solidFill>
+                <a:latin typeface="Cambria" pitchFamily="34" charset="0"/>
+                <a:ea typeface="Cambria" pitchFamily="34" charset="-122"/>
+                <a:cs typeface="Cambria" pitchFamily="34" charset="-120"/>
+              </a:rPr>
+              <a:t>El núvol no és gratis</a:t>
+            </a:r>
+            <a:endParaRPr lang="en-US" sz="1700" dirty="0"/>
+          </a:p>
+        </p:txBody>
+      </p:sp>
+      <p:sp>
+        <p:nvSpPr>
+          <p:cNvPr id="19" name="Text 14"/>
+          <p:cNvSpPr txBox="1"/>
+          <p:nvPr/>
+        </p:nvSpPr>
+        <p:spPr>
+          <a:xfrm>
+            <a:off x="8404708" y="3611880"/>
+            <a:ext cx="2880360" cy="1828800"/>
+          </a:xfrm>
+          <a:prstGeom prst="rect">
+            <a:avLst/>
+          </a:prstGeom>
+          <a:noFill/>
+          <a:ln/>
+        </p:spPr>
+        <p:txBody>
+          <a:bodyPr wrap="square" lIns="0" tIns="0" rIns="0" bIns="0" rtlCol="0" anchor="t"/>
+          <a:lstStyle/>
+          <a:p>
+            <a:pPr indent="0" marL="0">
+              <a:lnSpc>
+                <a:spcPts val="1600"/>
+              </a:lnSpc>
+              <a:buNone/>
+            </a:pPr>
+            <a:r>
+              <a:rPr lang="en-US" sz="1250" dirty="0">
                 <a:solidFill>
                   <a:srgbClr val="5B6B77"/>
                 </a:solidFill>
-                <a:latin typeface="Calibri"/>
-              </a:rPr>
-              <a:t>Cada servidor exposa el seu propi emmagatzematge directament a la xarxa.</a:t>
-            </a:r>
-          </a:p>
-        </p:txBody>
-      </p:sp>
-      <p:sp>
-        <p:nvSpPr>
-          <p:cNvPr id="8" name="TextBox 7"/>
-          <p:cNvSpPr txBox="1"/>
-          <p:nvPr/>
-        </p:nvSpPr>
-        <p:spPr>
-          <a:xfrm>
-            <a:off x="11548872" y="6446520"/>
-            <a:ext cx="365760" cy="274320"/>
-          </a:xfrm>
-          <a:prstGeom prst="rect">
-            <a:avLst/>
-          </a:prstGeom>
-          <a:noFill/>
-        </p:spPr>
-        <p:txBody>
-          <a:bodyPr wrap="none">
-            <a:spAutoFit/>
-          </a:bodyPr>
-          <a:lstStyle/>
-          <a:p>
-            <a:pPr algn="r"/>
-            <a:r>
-              <a:rPr sz="1000">
-                <a:solidFill>
-                  <a:srgbClr val="5B6B77"/>
-                </a:solidFill>
-              </a:rPr>
-              <a:t>17</a:t>
-            </a:r>
+                <a:latin typeface="Calibri" pitchFamily="34" charset="0"/>
+                <a:ea typeface="Calibri" pitchFamily="34" charset="-122"/>
+                <a:cs typeface="Calibri" pitchFamily="34" charset="-120"/>
+              </a:rPr>
+              <a:t>Còmode i barat, però amb consideracions legals, de velocitat i de control que cal valorar.</a:t>
+            </a:r>
+            <a:endParaRPr lang="en-US" sz="1250" dirty="0"/>
           </a:p>
         </p:txBody>
       </p:sp>
@@ -10733,14 +11013,13 @@
 </file>
 
 <file path=ppt/slides/slide24.xml><?xml version="1.0" encoding="utf-8"?>
-<p:sld xmlns:a="http://schemas.openxmlformats.org/drawingml/2006/main" xmlns:p="http://schemas.openxmlformats.org/presentationml/2006/main" xmlns:r="http://schemas.openxmlformats.org/officeDocument/2006/relationships">
-  <p:cSld>
+<p:sld xmlns:a="http://schemas.openxmlformats.org/drawingml/2006/main" xmlns:r="http://schemas.openxmlformats.org/officeDocument/2006/relationships" xmlns:p="http://schemas.openxmlformats.org/presentationml/2006/main">
+  <p:cSld name="Slide 17">
     <p:bg>
       <p:bgPr>
         <a:solidFill>
-          <a:srgbClr val="F4F7F9"/>
+          <a:srgbClr val="0B1B29"/>
         </a:solidFill>
-        <a:effectLst/>
       </p:bgPr>
     </p:bg>
     <p:spTree>
@@ -10749,95 +11028,71 @@
         <p:cNvGrpSpPr/>
         <p:nvPr/>
       </p:nvGrpSpPr>
-      <p:grpSpPr/>
-      <p:sp>
-        <p:nvSpPr>
-          <p:cNvPr id="2" name="TextBox 1"/>
+      <p:grpSpPr>
+        <a:xfrm>
+          <a:off x="0" y="0"/>
+          <a:ext cx="0" cy="0"/>
+          <a:chOff x="0" y="0"/>
+          <a:chExt cx="0" cy="0"/>
+        </a:xfrm>
+      </p:grpSpPr>
+      <p:sp>
+        <p:nvSpPr>
+          <p:cNvPr id="2" name="Text 0"/>
           <p:cNvSpPr txBox="1"/>
           <p:nvPr/>
         </p:nvSpPr>
         <p:spPr>
           <a:xfrm>
-            <a:off x="548640" y="411480"/>
-            <a:ext cx="10515600" cy="320040"/>
-          </a:xfrm>
-          <a:prstGeom prst="rect">
-            <a:avLst/>
-          </a:prstGeom>
-          <a:noFill/>
-        </p:spPr>
-        <p:txBody>
-          <a:bodyPr wrap="square">
-            <a:spAutoFit/>
-          </a:bodyPr>
-          <a:lstStyle/>
-          <a:p>
-            <a:pPr algn="l"/>
-            <a:r>
-              <a:rPr sz="1300" b="1" i="0">
+            <a:off x="822960" y="1188720"/>
+            <a:ext cx="9144000" cy="365760"/>
+          </a:xfrm>
+          <a:prstGeom prst="rect">
+            <a:avLst/>
+          </a:prstGeom>
+          <a:noFill/>
+          <a:ln/>
+        </p:spPr>
+        <p:txBody>
+          <a:bodyPr wrap="square" lIns="0" tIns="0" rIns="0" bIns="0" rtlCol="0" anchor="ctr"/>
+          <a:lstStyle/>
+          <a:p>
+            <a:pPr indent="0" marL="0">
+              <a:buNone/>
+            </a:pPr>
+            <a:r>
+              <a:rPr lang="en-US" sz="1400" b="1" spc="200" kern="0" dirty="0">
                 <a:solidFill>
                   <a:srgbClr val="F2A541"/>
                 </a:solidFill>
-                <a:latin typeface="Calibri"/>
-              </a:rPr>
-              <a:t>UN EXEMPLE REAL</a:t>
-            </a:r>
-          </a:p>
-        </p:txBody>
-      </p:sp>
-      <p:sp>
-        <p:nvSpPr>
-          <p:cNvPr id="3" name="TextBox 2"/>
-          <p:cNvSpPr txBox="1"/>
-          <p:nvPr/>
-        </p:nvSpPr>
-        <p:spPr>
-          <a:xfrm>
-            <a:off x="548640" y="685800"/>
-            <a:ext cx="10972800" cy="822960"/>
-          </a:xfrm>
-          <a:prstGeom prst="rect">
-            <a:avLst/>
-          </a:prstGeom>
-          <a:noFill/>
-        </p:spPr>
-        <p:txBody>
-          <a:bodyPr wrap="square">
-            <a:spAutoFit/>
-          </a:bodyPr>
-          <a:lstStyle/>
-          <a:p>
-            <a:pPr algn="l"/>
-            <a:r>
-              <a:rPr sz="2800" b="1" i="0">
-                <a:solidFill>
-                  <a:srgbClr val="16242E"/>
-                </a:solidFill>
-                <a:latin typeface="Cambria"/>
-              </a:rPr>
-              <a:t>NAS — Network Attached Storage</a:t>
-            </a:r>
+                <a:latin typeface="Calibri" pitchFamily="34" charset="0"/>
+                <a:ea typeface="Calibri" pitchFamily="34" charset="-122"/>
+                <a:cs typeface="Calibri" pitchFamily="34" charset="-120"/>
+              </a:rPr>
+              <a:t>ARA ÉS EL TORN VOSTRE</a:t>
+            </a:r>
+            <a:endParaRPr lang="en-US" sz="1400" dirty="0"/>
           </a:p>
         </p:txBody>
       </p:sp>
       <p:pic>
         <p:nvPicPr>
-          <p:cNvPr id="4" name="Picture 3" descr="nas.png"/>
+          <p:cNvPr id="3" name="Image 0" descr="/tmp/claude-0/-home-user-SMX-0226-Seguretat-Informatica/cec25c9b-7e93-584a-a64a-196540977a59/scratchpad/build/icons/question_F2A541.png">    </p:cNvPr>
           <p:cNvPicPr>
             <a:picLocks noChangeAspect="1"/>
           </p:cNvPicPr>
           <p:nvPr/>
         </p:nvPicPr>
         <p:blipFill>
-          <a:blip r:embed="rId2"/>
+          <a:blip r:embed="rId1"/>
           <a:stretch>
             <a:fillRect/>
           </a:stretch>
         </p:blipFill>
         <p:spPr>
           <a:xfrm>
-            <a:off x="2666847" y="1920240"/>
-            <a:ext cx="6858000" cy="2981325"/>
+            <a:off x="9875520" y="1097280"/>
+            <a:ext cx="731520" cy="731520"/>
           </a:xfrm>
           <a:prstGeom prst="rect">
             <a:avLst/>
@@ -10846,70 +11101,160 @@
       </p:pic>
       <p:sp>
         <p:nvSpPr>
-          <p:cNvPr id="5" name="TextBox 4"/>
+          <p:cNvPr id="4" name="Text 1"/>
           <p:cNvSpPr txBox="1"/>
           <p:nvPr/>
         </p:nvSpPr>
         <p:spPr>
           <a:xfrm>
-            <a:off x="548640" y="5038725"/>
-            <a:ext cx="11064240" cy="457200"/>
-          </a:xfrm>
-          <a:prstGeom prst="rect">
-            <a:avLst/>
-          </a:prstGeom>
-          <a:noFill/>
-        </p:spPr>
-        <p:txBody>
-          <a:bodyPr wrap="square">
-            <a:spAutoFit/>
-          </a:bodyPr>
-          <a:lstStyle/>
-          <a:p>
-            <a:pPr algn="ctr"/>
-            <a:r>
-              <a:rPr sz="1200" b="0" i="1">
+            <a:off x="822960" y="1737360"/>
+            <a:ext cx="10332720" cy="1463040"/>
+          </a:xfrm>
+          <a:prstGeom prst="rect">
+            <a:avLst/>
+          </a:prstGeom>
+          <a:noFill/>
+          <a:ln/>
+        </p:spPr>
+        <p:txBody>
+          <a:bodyPr wrap="square" lIns="0" tIns="0" rIns="0" bIns="0" rtlCol="0" anchor="ctr"/>
+          <a:lstStyle/>
+          <a:p>
+            <a:pPr indent="0" marL="0">
+              <a:buNone/>
+            </a:pPr>
+            <a:r>
+              <a:rPr lang="en-US" sz="2600" b="1" dirty="0">
+                <a:solidFill>
+                  <a:srgbClr val="FFFFFF"/>
+                </a:solidFill>
+                <a:latin typeface="Cambria" pitchFamily="34" charset="0"/>
+                <a:ea typeface="Cambria" pitchFamily="34" charset="-122"/>
+                <a:cs typeface="Cambria" pitchFamily="34" charset="-120"/>
+              </a:rPr>
+              <a:t>Un petit despatx d'advocats (5 persones) vol centralitzar els seus documents.</a:t>
+            </a:r>
+            <a:endParaRPr lang="en-US" sz="2600" dirty="0"/>
+          </a:p>
+        </p:txBody>
+      </p:sp>
+      <p:sp>
+        <p:nvSpPr>
+          <p:cNvPr id="5" name="Text 2"/>
+          <p:cNvSpPr txBox="1"/>
+          <p:nvPr/>
+        </p:nvSpPr>
+        <p:spPr>
+          <a:xfrm>
+            <a:off x="822960" y="3291840"/>
+            <a:ext cx="9875520" cy="1463040"/>
+          </a:xfrm>
+          <a:prstGeom prst="rect">
+            <a:avLst/>
+          </a:prstGeom>
+          <a:noFill/>
+          <a:ln/>
+        </p:spPr>
+        <p:txBody>
+          <a:bodyPr wrap="square" lIns="0" tIns="0" rIns="0" bIns="0" rtlCol="0" anchor="ctr"/>
+          <a:lstStyle/>
+          <a:p>
+            <a:pPr indent="0" marL="0">
+              <a:lnSpc>
+                <a:spcPts val="2000"/>
+              </a:lnSpc>
+              <a:buNone/>
+            </a:pPr>
+            <a:r>
+              <a:rPr lang="en-US" sz="1500" dirty="0">
+                <a:solidFill>
+                  <a:srgbClr val="CADCE8"/>
+                </a:solidFill>
+                <a:latin typeface="Calibri" pitchFamily="34" charset="0"/>
+                <a:ea typeface="Calibri" pitchFamily="34" charset="-122"/>
+                <a:cs typeface="Calibri" pitchFamily="34" charset="-120"/>
+              </a:rPr>
+              <a:t>En grups de 3: decidiu si recomanaríeu un DAS, un NAS o un servei de núvol, tenint en compte que gestionen dades de clients (confidencials) i tenen un pressupost limitat. Justifiqueu quin nivell de RAID hi aplicaríeu internament.</a:t>
+            </a:r>
+            <a:endParaRPr lang="en-US" sz="1500" dirty="0"/>
+          </a:p>
+        </p:txBody>
+      </p:sp>
+      <p:sp>
+        <p:nvSpPr>
+          <p:cNvPr id="6" name="Text 3"/>
+          <p:cNvSpPr txBox="1"/>
+          <p:nvPr/>
+        </p:nvSpPr>
+        <p:spPr>
+          <a:xfrm>
+            <a:off x="822960" y="6035040"/>
+            <a:ext cx="9144000" cy="365760"/>
+          </a:xfrm>
+          <a:prstGeom prst="rect">
+            <a:avLst/>
+          </a:prstGeom>
+          <a:noFill/>
+          <a:ln/>
+        </p:spPr>
+        <p:txBody>
+          <a:bodyPr wrap="square" lIns="0" tIns="0" rIns="0" bIns="0" rtlCol="0" anchor="ctr"/>
+          <a:lstStyle/>
+          <a:p>
+            <a:pPr indent="0" marL="0">
+              <a:buNone/>
+            </a:pPr>
+            <a:r>
+              <a:rPr lang="en-US" sz="1300" i="1" dirty="0">
+                <a:solidFill>
+                  <a:srgbClr val="8FA6B8"/>
+                </a:solidFill>
+                <a:latin typeface="Calibri" pitchFamily="34" charset="0"/>
+                <a:ea typeface="Calibri" pitchFamily="34" charset="-122"/>
+                <a:cs typeface="Calibri" pitchFamily="34" charset="-120"/>
+              </a:rPr>
+              <a:t>10 minuts en grup + posada en comú</a:t>
+            </a:r>
+            <a:endParaRPr lang="en-US" sz="1300" dirty="0"/>
+          </a:p>
+        </p:txBody>
+      </p:sp>
+      <p:sp>
+        <p:nvSpPr>
+          <p:cNvPr id="7" name="Text 4"/>
+          <p:cNvSpPr txBox="1"/>
+          <p:nvPr/>
+        </p:nvSpPr>
+        <p:spPr>
+          <a:xfrm>
+            <a:off x="11551615" y="6446520"/>
+            <a:ext cx="457200" cy="274320"/>
+          </a:xfrm>
+          <a:prstGeom prst="rect">
+            <a:avLst/>
+          </a:prstGeom>
+          <a:noFill/>
+          <a:ln/>
+        </p:spPr>
+        <p:txBody>
+          <a:bodyPr wrap="square" lIns="0" tIns="0" rIns="0" bIns="0" rtlCol="0" anchor="ctr"/>
+          <a:lstStyle/>
+          <a:p>
+            <a:pPr algn="r" indent="0" marL="0">
+              <a:buNone/>
+            </a:pPr>
+            <a:r>
+              <a:rPr lang="en-US" sz="1100" dirty="0">
                 <a:solidFill>
                   <a:srgbClr val="5B6B77"/>
                 </a:solidFill>
-                <a:latin typeface="Calibri"/>
-              </a:rPr>
-              <a:t>Un NAS connecta diversos clients a través d'un switch; a la dreta, un dispositiu NAS real.</a:t>
-            </a:r>
-          </a:p>
-        </p:txBody>
-      </p:sp>
-      <p:sp>
-        <p:nvSpPr>
-          <p:cNvPr id="6" name="TextBox 5"/>
-          <p:cNvSpPr txBox="1"/>
-          <p:nvPr/>
-        </p:nvSpPr>
-        <p:spPr>
-          <a:xfrm>
-            <a:off x="11548872" y="6446520"/>
-            <a:ext cx="365760" cy="274320"/>
-          </a:xfrm>
-          <a:prstGeom prst="rect">
-            <a:avLst/>
-          </a:prstGeom>
-          <a:noFill/>
-        </p:spPr>
-        <p:txBody>
-          <a:bodyPr wrap="none">
-            <a:spAutoFit/>
-          </a:bodyPr>
-          <a:lstStyle/>
-          <a:p>
-            <a:pPr algn="r"/>
-            <a:r>
-              <a:rPr sz="1000">
-                <a:solidFill>
-                  <a:srgbClr val="5B6B77"/>
-                </a:solidFill>
-              </a:rPr>
-              <a:t>19</a:t>
-            </a:r>
+                <a:latin typeface="Calibri" pitchFamily="34" charset="0"/>
+                <a:ea typeface="Calibri" pitchFamily="34" charset="-122"/>
+                <a:cs typeface="Calibri" pitchFamily="34" charset="-120"/>
+              </a:rPr>
+              <a:t>24</a:t>
+            </a:r>
+            <a:endParaRPr lang="en-US" sz="1100" dirty="0"/>
           </a:p>
         </p:txBody>
       </p:sp>
@@ -10922,14 +11267,13 @@
 </file>
 
 <file path=ppt/slides/slide25.xml><?xml version="1.0" encoding="utf-8"?>
-<p:sld xmlns:a="http://schemas.openxmlformats.org/drawingml/2006/main" xmlns:p="http://schemas.openxmlformats.org/presentationml/2006/main" xmlns:r="http://schemas.openxmlformats.org/officeDocument/2006/relationships">
-  <p:cSld>
+<p:sld xmlns:a="http://schemas.openxmlformats.org/drawingml/2006/main" xmlns:r="http://schemas.openxmlformats.org/officeDocument/2006/relationships" xmlns:p="http://schemas.openxmlformats.org/presentationml/2006/main">
+  <p:cSld name="Slide 18">
     <p:bg>
       <p:bgPr>
         <a:solidFill>
           <a:srgbClr val="F4F7F9"/>
         </a:solidFill>
-        <a:effectLst/>
       </p:bgPr>
     </p:bg>
     <p:spTree>
@@ -10938,80 +11282,212 @@
         <p:cNvGrpSpPr/>
         <p:nvPr/>
       </p:nvGrpSpPr>
-      <p:grpSpPr/>
-      <p:sp>
-        <p:nvSpPr>
-          <p:cNvPr id="2" name="TextBox 1"/>
+      <p:grpSpPr>
+        <a:xfrm>
+          <a:off x="0" y="0"/>
+          <a:ext cx="0" cy="0"/>
+          <a:chOff x="0" y="0"/>
+          <a:chExt cx="0" cy="0"/>
+        </a:xfrm>
+      </p:grpSpPr>
+      <p:sp>
+        <p:nvSpPr>
+          <p:cNvPr id="2" name="Text 0"/>
           <p:cNvSpPr txBox="1"/>
           <p:nvPr/>
         </p:nvSpPr>
         <p:spPr>
           <a:xfrm>
-            <a:off x="548640" y="411480"/>
-            <a:ext cx="10515600" cy="320040"/>
-          </a:xfrm>
-          <a:prstGeom prst="rect">
-            <a:avLst/>
-          </a:prstGeom>
-          <a:noFill/>
-        </p:spPr>
-        <p:txBody>
-          <a:bodyPr wrap="square">
-            <a:spAutoFit/>
-          </a:bodyPr>
-          <a:lstStyle/>
-          <a:p>
-            <a:pPr algn="l"/>
-            <a:r>
-              <a:rPr sz="1300" b="1" i="0">
+            <a:off x="548640" y="457200"/>
+            <a:ext cx="9144000" cy="365760"/>
+          </a:xfrm>
+          <a:prstGeom prst="rect">
+            <a:avLst/>
+          </a:prstGeom>
+          <a:noFill/>
+          <a:ln/>
+        </p:spPr>
+        <p:txBody>
+          <a:bodyPr wrap="square" lIns="0" tIns="0" rIns="0" bIns="0" rtlCol="0" anchor="ctr"/>
+          <a:lstStyle/>
+          <a:p>
+            <a:pPr indent="0" marL="0">
+              <a:buNone/>
+            </a:pPr>
+            <a:r>
+              <a:rPr lang="en-US" sz="1300" b="1" spc="200" kern="0" dirty="0">
                 <a:solidFill>
                   <a:srgbClr val="F2A541"/>
                 </a:solidFill>
-                <a:latin typeface="Calibri"/>
-              </a:rPr>
-              <a:t>UN EXEMPLE REAL</a:t>
-            </a:r>
-          </a:p>
-        </p:txBody>
-      </p:sp>
-      <p:sp>
-        <p:nvSpPr>
-          <p:cNvPr id="3" name="TextBox 2"/>
+                <a:latin typeface="Calibri" pitchFamily="34" charset="0"/>
+                <a:ea typeface="Calibri" pitchFamily="34" charset="-122"/>
+                <a:cs typeface="Calibri" pitchFamily="34" charset="-120"/>
+              </a:rPr>
+              <a:t>FONTS DEL MATERIAL</a:t>
+            </a:r>
+            <a:endParaRPr lang="en-US" sz="1300" dirty="0"/>
+          </a:p>
+        </p:txBody>
+      </p:sp>
+      <p:sp>
+        <p:nvSpPr>
+          <p:cNvPr id="3" name="Text 1"/>
           <p:cNvSpPr txBox="1"/>
           <p:nvPr/>
         </p:nvSpPr>
         <p:spPr>
           <a:xfrm>
-            <a:off x="548640" y="685800"/>
-            <a:ext cx="10972800" cy="822960"/>
-          </a:xfrm>
-          <a:prstGeom prst="rect">
-            <a:avLst/>
-          </a:prstGeom>
-          <a:noFill/>
-        </p:spPr>
-        <p:txBody>
-          <a:bodyPr wrap="square">
-            <a:spAutoFit/>
-          </a:bodyPr>
-          <a:lstStyle/>
-          <a:p>
-            <a:pPr algn="l"/>
-            <a:r>
-              <a:rPr sz="2800" b="1" i="0">
+            <a:off x="548640" y="822960"/>
+            <a:ext cx="10789920" cy="640080"/>
+          </a:xfrm>
+          <a:prstGeom prst="rect">
+            <a:avLst/>
+          </a:prstGeom>
+          <a:noFill/>
+          <a:ln/>
+        </p:spPr>
+        <p:txBody>
+          <a:bodyPr wrap="square" lIns="0" tIns="0" rIns="0" bIns="0" rtlCol="0" anchor="ctr"/>
+          <a:lstStyle/>
+          <a:p>
+            <a:pPr indent="0" marL="0">
+              <a:buNone/>
+            </a:pPr>
+            <a:r>
+              <a:rPr lang="en-US" sz="2800" b="1" dirty="0">
                 <a:solidFill>
                   <a:srgbClr val="16242E"/>
                 </a:solidFill>
-                <a:latin typeface="Cambria"/>
-              </a:rPr>
-              <a:t>SAN — Storage Area Network</a:t>
-            </a:r>
+                <a:latin typeface="Cambria" pitchFamily="34" charset="0"/>
+                <a:ea typeface="Cambria" pitchFamily="34" charset="-122"/>
+                <a:cs typeface="Cambria" pitchFamily="34" charset="-120"/>
+              </a:rPr>
+              <a:t>Webgrafia</a:t>
+            </a:r>
+            <a:endParaRPr lang="en-US" sz="2800" dirty="0"/>
           </a:p>
         </p:txBody>
       </p:sp>
       <p:pic>
         <p:nvPicPr>
-          <p:cNvPr id="4" name="Picture 3" descr="cabina_de_discos.png"/>
+          <p:cNvPr id="4" name="Image 0" descr="/tmp/claude-0/-home-user-SMX-0226-Seguretat-Informatica/cec25c9b-7e93-584a-a64a-196540977a59/scratchpad/build/icons/globe_3E6680.png">    </p:cNvPr>
+          <p:cNvPicPr>
+            <a:picLocks noChangeAspect="1"/>
+          </p:cNvPicPr>
+          <p:nvPr/>
+        </p:nvPicPr>
+        <p:blipFill>
+          <a:blip r:embed="rId1"/>
+          <a:stretch>
+            <a:fillRect/>
+          </a:stretch>
+        </p:blipFill>
+        <p:spPr>
+          <a:xfrm>
+            <a:off x="640080" y="1874520"/>
+            <a:ext cx="320040" cy="320040"/>
+          </a:xfrm>
+          <a:prstGeom prst="rect">
+            <a:avLst/>
+          </a:prstGeom>
+        </p:spPr>
+      </p:pic>
+      <p:sp>
+        <p:nvSpPr>
+          <p:cNvPr id="5" name="Text 2"/>
+          <p:cNvSpPr txBox="1"/>
+          <p:nvPr/>
+        </p:nvSpPr>
+        <p:spPr>
+          <a:xfrm>
+            <a:off x="1143000" y="1828800"/>
+            <a:ext cx="10058400" cy="320040"/>
+          </a:xfrm>
+          <a:prstGeom prst="rect">
+            <a:avLst/>
+          </a:prstGeom>
+          <a:noFill/>
+          <a:ln/>
+        </p:spPr>
+        <p:txBody>
+          <a:bodyPr wrap="square" lIns="0" tIns="0" rIns="0" bIns="0" rtlCol="0" anchor="ctr"/>
+          <a:lstStyle/>
+          <a:p>
+            <a:pPr indent="0" marL="0">
+              <a:buNone/>
+            </a:pPr>
+            <a:r>
+              <a:rPr lang="en-US" sz="1500" b="1" dirty="0">
+                <a:solidFill>
+                  <a:srgbClr val="16242E"/>
+                </a:solidFill>
+                <a:latin typeface="Cambria" pitchFamily="34" charset="0"/>
+                <a:ea typeface="Cambria" pitchFamily="34" charset="-122"/>
+                <a:cs typeface="Cambria" pitchFamily="34" charset="-120"/>
+              </a:rPr>
+              <a:t>NF2-AA2: Sistemes d'emmagatzematge</a:t>
+            </a:r>
+            <a:endParaRPr lang="en-US" sz="1500" dirty="0"/>
+          </a:p>
+        </p:txBody>
+      </p:sp>
+      <p:sp>
+        <p:nvSpPr>
+          <p:cNvPr id="6" name="Text 3"/>
+          <p:cNvSpPr txBox="1"/>
+          <p:nvPr/>
+        </p:nvSpPr>
+        <p:spPr>
+          <a:xfrm>
+            <a:off x="1143000" y="2176272"/>
+            <a:ext cx="10058400" cy="548640"/>
+          </a:xfrm>
+          <a:prstGeom prst="rect">
+            <a:avLst/>
+          </a:prstGeom>
+          <a:noFill/>
+          <a:ln/>
+        </p:spPr>
+        <p:txBody>
+          <a:bodyPr wrap="square" lIns="0" tIns="0" rIns="0" bIns="0" rtlCol="0" anchor="ctr"/>
+          <a:lstStyle/>
+          <a:p>
+            <a:pPr indent="0" marL="0">
+              <a:lnSpc>
+                <a:spcPts val="1500"/>
+              </a:lnSpc>
+              <a:buNone/>
+            </a:pPr>
+            <a:r>
+              <a:rPr lang="en-US" sz="1150" dirty="0">
+                <a:solidFill>
+                  <a:srgbClr val="5B6B77"/>
+                </a:solidFill>
+                <a:latin typeface="Calibri" pitchFamily="34" charset="0"/>
+                <a:ea typeface="Calibri" pitchFamily="34" charset="-122"/>
+                <a:cs typeface="Calibri" pitchFamily="34" charset="-120"/>
+              </a:rPr>
+              <a:t>Repositori "Materials" (GitHub, SMX-0226SI) · Carlos Alonso Martínez, Escola Pia de Mataró · Llicència CC-BY-SA-4.0 — </a:t>
+            </a:r>
+            <a:r>
+              <a:rPr lang="en-US" sz="1150" dirty="0">
+                <a:solidFill>
+                  <a:srgbClr val="5B6B77"/>
+                </a:solidFill>
+                <a:latin typeface="Calibri" pitchFamily="34" charset="0"/>
+                <a:ea typeface="Calibri" pitchFamily="34" charset="-122"/>
+                <a:cs typeface="Calibri" pitchFamily="34" charset="-120"/>
+                <a:hlinkClick r:id="rId6"/>
+              </a:rPr>
+              <a:t>github.com/SMX-0226SI/Materials/blob/main/NF2/AA2-SistemesEmmagatzematge.md</a:t>
+            </a:r>
+            <a:endParaRPr lang="en-US" sz="1150" dirty="0"/>
+          </a:p>
+        </p:txBody>
+      </p:sp>
+      <p:pic>
+        <p:nvPicPr>
+          <p:cNvPr id="7" name="Image 1" descr="/tmp/claude-0/-home-user-SMX-0226-Seguretat-Informatica/cec25c9b-7e93-584a-a64a-196540977a59/scratchpad/build/icons/globe_3E6680.png">    </p:cNvPr>
           <p:cNvPicPr>
             <a:picLocks noChangeAspect="1"/>
           </p:cNvPicPr>
@@ -11025,8 +11501,8 @@
         </p:blipFill>
         <p:spPr>
           <a:xfrm>
-            <a:off x="3352647" y="1920240"/>
-            <a:ext cx="5486400" cy="2948939"/>
+            <a:off x="640080" y="2926080"/>
+            <a:ext cx="320040" cy="320040"/>
           </a:xfrm>
           <a:prstGeom prst="rect">
             <a:avLst/>
@@ -11035,70 +11511,335 @@
       </p:pic>
       <p:sp>
         <p:nvSpPr>
-          <p:cNvPr id="5" name="TextBox 4"/>
+          <p:cNvPr id="8" name="Text 4"/>
           <p:cNvSpPr txBox="1"/>
           <p:nvPr/>
         </p:nvSpPr>
         <p:spPr>
           <a:xfrm>
-            <a:off x="548640" y="5006340"/>
-            <a:ext cx="11064240" cy="457200"/>
-          </a:xfrm>
-          <a:prstGeom prst="rect">
-            <a:avLst/>
-          </a:prstGeom>
-          <a:noFill/>
-        </p:spPr>
-        <p:txBody>
-          <a:bodyPr wrap="square">
-            <a:spAutoFit/>
-          </a:bodyPr>
-          <a:lstStyle/>
-          <a:p>
-            <a:pPr algn="ctr"/>
-            <a:r>
-              <a:rPr sz="1200" b="0" i="1">
+            <a:off x="1143000" y="2880360"/>
+            <a:ext cx="10058400" cy="320040"/>
+          </a:xfrm>
+          <a:prstGeom prst="rect">
+            <a:avLst/>
+          </a:prstGeom>
+          <a:noFill/>
+          <a:ln/>
+        </p:spPr>
+        <p:txBody>
+          <a:bodyPr wrap="square" lIns="0" tIns="0" rIns="0" bIns="0" rtlCol="0" anchor="ctr"/>
+          <a:lstStyle/>
+          <a:p>
+            <a:pPr indent="0" marL="0">
+              <a:buNone/>
+            </a:pPr>
+            <a:r>
+              <a:rPr lang="en-US" sz="1500" b="1" dirty="0">
+                <a:solidFill>
+                  <a:srgbClr val="16242E"/>
+                </a:solidFill>
+                <a:latin typeface="Cambria" pitchFamily="34" charset="0"/>
+                <a:ea typeface="Cambria" pitchFamily="34" charset="-122"/>
+                <a:cs typeface="Cambria" pitchFamily="34" charset="-120"/>
+              </a:rPr>
+              <a:t>Taula de referència de tipus de RAID</a:t>
+            </a:r>
+            <a:endParaRPr lang="en-US" sz="1500" dirty="0"/>
+          </a:p>
+        </p:txBody>
+      </p:sp>
+      <p:sp>
+        <p:nvSpPr>
+          <p:cNvPr id="9" name="Text 5"/>
+          <p:cNvSpPr txBox="1"/>
+          <p:nvPr/>
+        </p:nvSpPr>
+        <p:spPr>
+          <a:xfrm>
+            <a:off x="1143000" y="3227832"/>
+            <a:ext cx="10058400" cy="548640"/>
+          </a:xfrm>
+          <a:prstGeom prst="rect">
+            <a:avLst/>
+          </a:prstGeom>
+          <a:noFill/>
+          <a:ln/>
+        </p:spPr>
+        <p:txBody>
+          <a:bodyPr wrap="square" lIns="0" tIns="0" rIns="0" bIns="0" rtlCol="0" anchor="ctr"/>
+          <a:lstStyle/>
+          <a:p>
+            <a:pPr indent="0" marL="0">
+              <a:lnSpc>
+                <a:spcPts val="1500"/>
+              </a:lnSpc>
+              <a:buNone/>
+            </a:pPr>
+            <a:r>
+              <a:rPr lang="en-US" sz="1150" dirty="0">
                 <a:solidFill>
                   <a:srgbClr val="5B6B77"/>
                 </a:solidFill>
-                <a:latin typeface="Calibri"/>
-              </a:rPr>
-              <a:t>Cabines de discos dedicades, com les que s'utilitzen en un SAN.</a:t>
-            </a:r>
-          </a:p>
-        </p:txBody>
-      </p:sp>
-      <p:sp>
-        <p:nvSpPr>
-          <p:cNvPr id="6" name="TextBox 5"/>
+                <a:latin typeface="Calibri" pitchFamily="34" charset="0"/>
+                <a:ea typeface="Calibri" pitchFamily="34" charset="-122"/>
+                <a:cs typeface="Calibri" pitchFamily="34" charset="-120"/>
+                <a:hlinkClick r:id="rId7"/>
+              </a:rPr>
+              <a:t>raid-calculator.com</a:t>
+            </a:r>
+            <a:r>
+              <a:rPr lang="en-US" sz="1150" dirty="0">
+                <a:solidFill>
+                  <a:srgbClr val="5B6B77"/>
+                </a:solidFill>
+                <a:latin typeface="Calibri" pitchFamily="34" charset="0"/>
+                <a:ea typeface="Calibri" pitchFamily="34" charset="-122"/>
+                <a:cs typeface="Calibri" pitchFamily="34" charset="-120"/>
+              </a:rPr>
+              <a:t> — "RAID Types Reference"</a:t>
+            </a:r>
+            <a:endParaRPr lang="en-US" sz="1150" dirty="0"/>
+          </a:p>
+        </p:txBody>
+      </p:sp>
+      <p:pic>
+        <p:nvPicPr>
+          <p:cNvPr id="10" name="Image 2" descr="/tmp/claude-0/-home-user-SMX-0226-Seguretat-Informatica/cec25c9b-7e93-584a-a64a-196540977a59/scratchpad/build/icons/globe_3E6680.png">    </p:cNvPr>
+          <p:cNvPicPr>
+            <a:picLocks noChangeAspect="1"/>
+          </p:cNvPicPr>
+          <p:nvPr/>
+        </p:nvPicPr>
+        <p:blipFill>
+          <a:blip r:embed="rId3"/>
+          <a:stretch>
+            <a:fillRect/>
+          </a:stretch>
+        </p:blipFill>
+        <p:spPr>
+          <a:xfrm>
+            <a:off x="640080" y="3977640"/>
+            <a:ext cx="320040" cy="320040"/>
+          </a:xfrm>
+          <a:prstGeom prst="rect">
+            <a:avLst/>
+          </a:prstGeom>
+        </p:spPr>
+      </p:pic>
+      <p:sp>
+        <p:nvSpPr>
+          <p:cNvPr id="11" name="Text 6"/>
           <p:cNvSpPr txBox="1"/>
           <p:nvPr/>
         </p:nvSpPr>
         <p:spPr>
           <a:xfrm>
-            <a:off x="11548872" y="6446520"/>
-            <a:ext cx="365760" cy="274320"/>
-          </a:xfrm>
-          <a:prstGeom prst="rect">
-            <a:avLst/>
-          </a:prstGeom>
-          <a:noFill/>
-        </p:spPr>
-        <p:txBody>
-          <a:bodyPr wrap="none">
-            <a:spAutoFit/>
-          </a:bodyPr>
-          <a:lstStyle/>
-          <a:p>
-            <a:pPr algn="r"/>
-            <a:r>
-              <a:rPr sz="1000">
+            <a:off x="1143000" y="3931920"/>
+            <a:ext cx="10058400" cy="320040"/>
+          </a:xfrm>
+          <a:prstGeom prst="rect">
+            <a:avLst/>
+          </a:prstGeom>
+          <a:noFill/>
+          <a:ln/>
+        </p:spPr>
+        <p:txBody>
+          <a:bodyPr wrap="square" lIns="0" tIns="0" rIns="0" bIns="0" rtlCol="0" anchor="ctr"/>
+          <a:lstStyle/>
+          <a:p>
+            <a:pPr indent="0" marL="0">
+              <a:buNone/>
+            </a:pPr>
+            <a:r>
+              <a:rPr lang="en-US" sz="1500" b="1" dirty="0">
+                <a:solidFill>
+                  <a:srgbClr val="16242E"/>
+                </a:solidFill>
+                <a:latin typeface="Cambria" pitchFamily="34" charset="0"/>
+                <a:ea typeface="Cambria" pitchFamily="34" charset="-122"/>
+                <a:cs typeface="Cambria" pitchFamily="34" charset="-120"/>
+              </a:rPr>
+              <a:t>Vídeos de referència</a:t>
+            </a:r>
+            <a:endParaRPr lang="en-US" sz="1500" dirty="0"/>
+          </a:p>
+        </p:txBody>
+      </p:sp>
+      <p:sp>
+        <p:nvSpPr>
+          <p:cNvPr id="12" name="Text 7"/>
+          <p:cNvSpPr txBox="1"/>
+          <p:nvPr/>
+        </p:nvSpPr>
+        <p:spPr>
+          <a:xfrm>
+            <a:off x="1143000" y="4279392"/>
+            <a:ext cx="10058400" cy="548640"/>
+          </a:xfrm>
+          <a:prstGeom prst="rect">
+            <a:avLst/>
+          </a:prstGeom>
+          <a:noFill/>
+          <a:ln/>
+        </p:spPr>
+        <p:txBody>
+          <a:bodyPr wrap="square" lIns="0" tIns="0" rIns="0" bIns="0" rtlCol="0" anchor="ctr"/>
+          <a:lstStyle/>
+          <a:p>
+            <a:pPr indent="0" marL="0">
+              <a:lnSpc>
+                <a:spcPts val="1500"/>
+              </a:lnSpc>
+              <a:buNone/>
+            </a:pPr>
+            <a:r>
+              <a:rPr lang="en-US" sz="1150" dirty="0">
                 <a:solidFill>
                   <a:srgbClr val="5B6B77"/>
                 </a:solidFill>
-              </a:rPr>
-              <a:t>21</a:t>
-            </a:r>
+                <a:latin typeface="Calibri" pitchFamily="34" charset="0"/>
+                <a:ea typeface="Calibri" pitchFamily="34" charset="-122"/>
+                <a:cs typeface="Calibri" pitchFamily="34" charset="-120"/>
+              </a:rPr>
+              <a:t>NASEROS (YouTube) — </a:t>
+            </a:r>
+            <a:r>
+              <a:rPr lang="en-US" sz="1150" dirty="0">
+                <a:solidFill>
+                  <a:srgbClr val="5B6B77"/>
+                </a:solidFill>
+                <a:latin typeface="Calibri" pitchFamily="34" charset="0"/>
+                <a:ea typeface="Calibri" pitchFamily="34" charset="-122"/>
+                <a:cs typeface="Calibri" pitchFamily="34" charset="-120"/>
+                <a:hlinkClick r:id="rId8"/>
+              </a:rPr>
+              <a:t>"Tipos de RAID"</a:t>
+            </a:r>
+            <a:r>
+              <a:rPr lang="en-US" sz="1150" dirty="0">
+                <a:solidFill>
+                  <a:srgbClr val="5B6B77"/>
+                </a:solidFill>
+                <a:latin typeface="Calibri" pitchFamily="34" charset="0"/>
+                <a:ea typeface="Calibri" pitchFamily="34" charset="-122"/>
+                <a:cs typeface="Calibri" pitchFamily="34" charset="-120"/>
+              </a:rPr>
+              <a:t>; Pau Tomé (YouTube) — </a:t>
+            </a:r>
+            <a:r>
+              <a:rPr lang="en-US" sz="1150" dirty="0">
+                <a:solidFill>
+                  <a:srgbClr val="5B6B77"/>
+                </a:solidFill>
+                <a:latin typeface="Calibri" pitchFamily="34" charset="0"/>
+                <a:ea typeface="Calibri" pitchFamily="34" charset="-122"/>
+                <a:cs typeface="Calibri" pitchFamily="34" charset="-120"/>
+                <a:hlinkClick r:id="rId9"/>
+              </a:rPr>
+              <a:t>"RAID en Windows Server"</a:t>
+            </a:r>
+            <a:r>
+              <a:rPr lang="en-US" sz="1150" dirty="0">
+                <a:solidFill>
+                  <a:srgbClr val="5B6B77"/>
+                </a:solidFill>
+                <a:latin typeface="Calibri" pitchFamily="34" charset="0"/>
+                <a:ea typeface="Calibri" pitchFamily="34" charset="-122"/>
+                <a:cs typeface="Calibri" pitchFamily="34" charset="-120"/>
+              </a:rPr>
+              <a:t>; IBM — </a:t>
+            </a:r>
+            <a:r>
+              <a:rPr lang="en-US" sz="1150" dirty="0">
+                <a:solidFill>
+                  <a:srgbClr val="5B6B77"/>
+                </a:solidFill>
+                <a:latin typeface="Calibri" pitchFamily="34" charset="0"/>
+                <a:ea typeface="Calibri" pitchFamily="34" charset="-122"/>
+                <a:cs typeface="Calibri" pitchFamily="34" charset="-120"/>
+                <a:hlinkClick r:id="rId10"/>
+              </a:rPr>
+              <a:t>"What is a storage area network (SAN)?"</a:t>
+            </a:r>
+            <a:endParaRPr lang="en-US" sz="1150" dirty="0"/>
+          </a:p>
+        </p:txBody>
+      </p:sp>
+      <p:sp>
+        <p:nvSpPr>
+          <p:cNvPr id="13" name="Text 8"/>
+          <p:cNvSpPr txBox="1"/>
+          <p:nvPr/>
+        </p:nvSpPr>
+        <p:spPr>
+          <a:xfrm>
+            <a:off x="640080" y="6217920"/>
+            <a:ext cx="10058400" cy="365760"/>
+          </a:xfrm>
+          <a:prstGeom prst="rect">
+            <a:avLst/>
+          </a:prstGeom>
+          <a:noFill/>
+          <a:ln/>
+        </p:spPr>
+        <p:txBody>
+          <a:bodyPr wrap="square" lIns="0" tIns="0" rIns="0" bIns="0" rtlCol="0" anchor="ctr"/>
+          <a:lstStyle/>
+          <a:p>
+            <a:pPr indent="0" marL="0">
+              <a:buNone/>
+            </a:pPr>
+            <a:r>
+              <a:rPr lang="en-US" sz="1050" i="1" dirty="0">
+                <a:solidFill>
+                  <a:srgbClr val="5B6B77"/>
+                </a:solidFill>
+                <a:latin typeface="Calibri" pitchFamily="34" charset="0"/>
+                <a:ea typeface="Calibri" pitchFamily="34" charset="-122"/>
+                <a:cs typeface="Calibri" pitchFamily="34" charset="-120"/>
+              </a:rPr>
+              <a:t>Llicència Creative Commons BY-NC-SA · Institut Obert de Catalunya, 2011 (materials adaptats i ampliats)</a:t>
+            </a:r>
+            <a:endParaRPr lang="en-US" sz="1050" dirty="0"/>
+          </a:p>
+        </p:txBody>
+      </p:sp>
+      <p:sp>
+        <p:nvSpPr>
+          <p:cNvPr id="14" name="Text 9"/>
+          <p:cNvSpPr txBox="1"/>
+          <p:nvPr/>
+        </p:nvSpPr>
+        <p:spPr>
+          <a:xfrm>
+            <a:off x="11551615" y="6446520"/>
+            <a:ext cx="457200" cy="274320"/>
+          </a:xfrm>
+          <a:prstGeom prst="rect">
+            <a:avLst/>
+          </a:prstGeom>
+          <a:noFill/>
+          <a:ln/>
+        </p:spPr>
+        <p:txBody>
+          <a:bodyPr wrap="square" lIns="0" tIns="0" rIns="0" bIns="0" rtlCol="0" anchor="ctr"/>
+          <a:lstStyle/>
+          <a:p>
+            <a:pPr algn="r" indent="0" marL="0">
+              <a:buNone/>
+            </a:pPr>
+            <a:r>
+              <a:rPr lang="en-US" sz="1100" dirty="0">
+                <a:solidFill>
+                  <a:srgbClr val="5B6B77"/>
+                </a:solidFill>
+                <a:latin typeface="Calibri" pitchFamily="34" charset="0"/>
+                <a:ea typeface="Calibri" pitchFamily="34" charset="-122"/>
+                <a:cs typeface="Calibri" pitchFamily="34" charset="-120"/>
+              </a:rPr>
+              <a:t>25</a:t>
+            </a:r>
+            <a:endParaRPr lang="en-US" sz="1100" dirty="0"/>
           </a:p>
         </p:txBody>
       </p:sp>
@@ -13256,6 +13997,195 @@
 </file>
 
 <file path=ppt/slides/slide7.xml><?xml version="1.0" encoding="utf-8"?>
+<p:sld xmlns:a="http://schemas.openxmlformats.org/drawingml/2006/main" xmlns:p="http://schemas.openxmlformats.org/presentationml/2006/main" xmlns:r="http://schemas.openxmlformats.org/officeDocument/2006/relationships">
+  <p:cSld>
+    <p:bg>
+      <p:bgPr>
+        <a:solidFill>
+          <a:srgbClr val="F4F7F9"/>
+        </a:solidFill>
+        <a:effectLst/>
+      </p:bgPr>
+    </p:bg>
+    <p:spTree>
+      <p:nvGrpSpPr>
+        <p:cNvPr id="1" name=""/>
+        <p:cNvGrpSpPr/>
+        <p:nvPr/>
+      </p:nvGrpSpPr>
+      <p:grpSpPr/>
+      <p:sp>
+        <p:nvSpPr>
+          <p:cNvPr id="2" name="TextBox 1"/>
+          <p:cNvSpPr txBox="1"/>
+          <p:nvPr/>
+        </p:nvSpPr>
+        <p:spPr>
+          <a:xfrm>
+            <a:off x="548640" y="411480"/>
+            <a:ext cx="10515600" cy="320040"/>
+          </a:xfrm>
+          <a:prstGeom prst="rect">
+            <a:avLst/>
+          </a:prstGeom>
+          <a:noFill/>
+        </p:spPr>
+        <p:txBody>
+          <a:bodyPr wrap="square">
+            <a:spAutoFit/>
+          </a:bodyPr>
+          <a:lstStyle/>
+          <a:p>
+            <a:pPr algn="l"/>
+            <a:r>
+              <a:rPr sz="1300" b="1" i="0">
+                <a:solidFill>
+                  <a:srgbClr val="F2A541"/>
+                </a:solidFill>
+                <a:latin typeface="Calibri"/>
+              </a:rPr>
+              <a:t>SOTA EL CAPÓ</a:t>
+            </a:r>
+          </a:p>
+        </p:txBody>
+      </p:sp>
+      <p:sp>
+        <p:nvSpPr>
+          <p:cNvPr id="3" name="TextBox 2"/>
+          <p:cNvSpPr txBox="1"/>
+          <p:nvPr/>
+        </p:nvSpPr>
+        <p:spPr>
+          <a:xfrm>
+            <a:off x="548640" y="685800"/>
+            <a:ext cx="10972800" cy="822960"/>
+          </a:xfrm>
+          <a:prstGeom prst="rect">
+            <a:avLst/>
+          </a:prstGeom>
+          <a:noFill/>
+        </p:spPr>
+        <p:txBody>
+          <a:bodyPr wrap="square">
+            <a:spAutoFit/>
+          </a:bodyPr>
+          <a:lstStyle/>
+          <a:p>
+            <a:pPr algn="l"/>
+            <a:r>
+              <a:rPr sz="2800" b="1" i="0">
+                <a:solidFill>
+                  <a:srgbClr val="16242E"/>
+                </a:solidFill>
+                <a:latin typeface="Cambria"/>
+              </a:rPr>
+              <a:t>RAID 0 — Data striping</a:t>
+            </a:r>
+          </a:p>
+        </p:txBody>
+      </p:sp>
+      <p:pic>
+        <p:nvPicPr>
+          <p:cNvPr id="4" name="Picture 3" descr="raid0.png"/>
+          <p:cNvPicPr>
+            <a:picLocks noChangeAspect="1"/>
+          </p:cNvPicPr>
+          <p:nvPr/>
+        </p:nvPicPr>
+        <p:blipFill>
+          <a:blip r:embed="rId2"/>
+          <a:stretch>
+            <a:fillRect/>
+          </a:stretch>
+        </p:blipFill>
+        <p:spPr>
+          <a:xfrm>
+            <a:off x="4541271" y="1920240"/>
+            <a:ext cx="3109153" cy="4206240"/>
+          </a:xfrm>
+          <a:prstGeom prst="rect">
+            <a:avLst/>
+          </a:prstGeom>
+        </p:spPr>
+      </p:pic>
+      <p:sp>
+        <p:nvSpPr>
+          <p:cNvPr id="5" name="TextBox 4"/>
+          <p:cNvSpPr txBox="1"/>
+          <p:nvPr/>
+        </p:nvSpPr>
+        <p:spPr>
+          <a:xfrm>
+            <a:off x="548640" y="6263640"/>
+            <a:ext cx="11064240" cy="457200"/>
+          </a:xfrm>
+          <a:prstGeom prst="rect">
+            <a:avLst/>
+          </a:prstGeom>
+          <a:noFill/>
+        </p:spPr>
+        <p:txBody>
+          <a:bodyPr wrap="square">
+            <a:spAutoFit/>
+          </a:bodyPr>
+          <a:lstStyle/>
+          <a:p>
+            <a:pPr algn="ctr"/>
+            <a:r>
+              <a:rPr sz="1200" b="0" i="1">
+                <a:solidFill>
+                  <a:srgbClr val="5B6B77"/>
+                </a:solidFill>
+                <a:latin typeface="Calibri"/>
+              </a:rPr>
+              <a:t>RAID 0: la informació es distribueix entre els discos sense redundància.</a:t>
+            </a:r>
+          </a:p>
+        </p:txBody>
+      </p:sp>
+      <p:sp>
+        <p:nvSpPr>
+          <p:cNvPr id="6" name="TextBox 5"/>
+          <p:cNvSpPr txBox="1"/>
+          <p:nvPr/>
+        </p:nvSpPr>
+        <p:spPr>
+          <a:xfrm>
+            <a:off x="11548872" y="6446520"/>
+            <a:ext cx="365760" cy="274320"/>
+          </a:xfrm>
+          <a:prstGeom prst="rect">
+            <a:avLst/>
+          </a:prstGeom>
+          <a:noFill/>
+        </p:spPr>
+        <p:txBody>
+          <a:bodyPr wrap="none">
+            <a:spAutoFit/>
+          </a:bodyPr>
+          <a:lstStyle/>
+          <a:p>
+            <a:pPr algn="r"/>
+            <a:r>
+              <a:rPr sz="1000">
+                <a:solidFill>
+                  <a:srgbClr val="5B6B77"/>
+                </a:solidFill>
+              </a:rPr>
+              <a:t>7</a:t>
+            </a:r>
+          </a:p>
+        </p:txBody>
+      </p:sp>
+    </p:spTree>
+  </p:cSld>
+  <p:clrMapOvr>
+    <a:masterClrMapping/>
+  </p:clrMapOvr>
+</p:sld>
+</file>
+
+<file path=ppt/slides/slide8.xml><?xml version="1.0" encoding="utf-8"?>
 <p:sld xmlns:a="http://schemas.openxmlformats.org/drawingml/2006/main" xmlns:r="http://schemas.openxmlformats.org/officeDocument/2006/relationships" xmlns:p="http://schemas.openxmlformats.org/presentationml/2006/main">
   <p:cSld name="Slide 7">
     <p:bg>
@@ -13738,14 +14668,15 @@
 </p:sld>
 </file>
 
-<file path=ppt/slides/slide8.xml><?xml version="1.0" encoding="utf-8"?>
-<p:sld xmlns:a="http://schemas.openxmlformats.org/drawingml/2006/main" xmlns:r="http://schemas.openxmlformats.org/officeDocument/2006/relationships" xmlns:p="http://schemas.openxmlformats.org/presentationml/2006/main">
-  <p:cSld name="Slide 8">
+<file path=ppt/slides/slide9.xml><?xml version="1.0" encoding="utf-8"?>
+<p:sld xmlns:a="http://schemas.openxmlformats.org/drawingml/2006/main" xmlns:p="http://schemas.openxmlformats.org/presentationml/2006/main" xmlns:r="http://schemas.openxmlformats.org/officeDocument/2006/relationships">
+  <p:cSld>
     <p:bg>
       <p:bgPr>
         <a:solidFill>
           <a:srgbClr val="F4F7F9"/>
         </a:solidFill>
+        <a:effectLst/>
       </p:bgPr>
     </p:bg>
     <p:spTree>
@@ -13754,363 +14685,80 @@
         <p:cNvGrpSpPr/>
         <p:nvPr/>
       </p:nvGrpSpPr>
-      <p:grpSpPr>
-        <a:xfrm>
-          <a:off x="0" y="0"/>
-          <a:ext cx="0" cy="0"/>
-          <a:chOff x="0" y="0"/>
-          <a:chExt cx="0" cy="0"/>
-        </a:xfrm>
-      </p:grpSpPr>
-      <p:sp>
-        <p:nvSpPr>
-          <p:cNvPr id="2" name="Text 0"/>
+      <p:grpSpPr/>
+      <p:sp>
+        <p:nvSpPr>
+          <p:cNvPr id="2" name="TextBox 1"/>
           <p:cNvSpPr txBox="1"/>
           <p:nvPr/>
         </p:nvSpPr>
         <p:spPr>
           <a:xfrm>
-            <a:off x="548640" y="457200"/>
-            <a:ext cx="9144000" cy="365760"/>
-          </a:xfrm>
-          <a:prstGeom prst="rect">
-            <a:avLst/>
-          </a:prstGeom>
-          <a:noFill/>
-          <a:ln/>
-        </p:spPr>
-        <p:txBody>
-          <a:bodyPr wrap="square" lIns="0" tIns="0" rIns="0" bIns="0" rtlCol="0" anchor="ctr"/>
-          <a:lstStyle/>
-          <a:p>
-            <a:pPr indent="0" marL="0">
-              <a:buNone/>
-            </a:pPr>
-            <a:r>
-              <a:rPr lang="en-US" sz="1300" b="1" spc="200" kern="0" dirty="0">
+            <a:off x="548640" y="411480"/>
+            <a:ext cx="10515600" cy="320040"/>
+          </a:xfrm>
+          <a:prstGeom prst="rect">
+            <a:avLst/>
+          </a:prstGeom>
+          <a:noFill/>
+        </p:spPr>
+        <p:txBody>
+          <a:bodyPr wrap="square">
+            <a:spAutoFit/>
+          </a:bodyPr>
+          <a:lstStyle/>
+          <a:p>
+            <a:pPr algn="l"/>
+            <a:r>
+              <a:rPr sz="1300" b="1" i="0">
                 <a:solidFill>
                   <a:srgbClr val="F2A541"/>
                 </a:solidFill>
-                <a:latin typeface="Calibri" pitchFamily="34" charset="0"/>
-                <a:ea typeface="Calibri" pitchFamily="34" charset="-122"/>
-                <a:cs typeface="Calibri" pitchFamily="34" charset="-120"/>
-              </a:rPr>
-              <a:t>RAID 5 I 6</a:t>
-            </a:r>
-            <a:endParaRPr lang="en-US" sz="1300" dirty="0"/>
-          </a:p>
-        </p:txBody>
-      </p:sp>
-      <p:sp>
-        <p:nvSpPr>
-          <p:cNvPr id="3" name="Text 1"/>
+                <a:latin typeface="Calibri"/>
+              </a:rPr>
+              <a:t>SOTA EL CAPÓ</a:t>
+            </a:r>
+          </a:p>
+        </p:txBody>
+      </p:sp>
+      <p:sp>
+        <p:nvSpPr>
+          <p:cNvPr id="3" name="TextBox 2"/>
           <p:cNvSpPr txBox="1"/>
           <p:nvPr/>
         </p:nvSpPr>
         <p:spPr>
           <a:xfrm>
-            <a:off x="548640" y="822960"/>
-            <a:ext cx="10789920" cy="640080"/>
-          </a:xfrm>
-          <a:prstGeom prst="rect">
-            <a:avLst/>
-          </a:prstGeom>
-          <a:noFill/>
-          <a:ln/>
-        </p:spPr>
-        <p:txBody>
-          <a:bodyPr wrap="square" lIns="0" tIns="0" rIns="0" bIns="0" rtlCol="0" anchor="ctr"/>
-          <a:lstStyle/>
-          <a:p>
-            <a:pPr indent="0" marL="0">
-              <a:buNone/>
-            </a:pPr>
-            <a:r>
-              <a:rPr lang="en-US" sz="2800" b="1" dirty="0">
+            <a:off x="548640" y="685800"/>
+            <a:ext cx="10972800" cy="822960"/>
+          </a:xfrm>
+          <a:prstGeom prst="rect">
+            <a:avLst/>
+          </a:prstGeom>
+          <a:noFill/>
+        </p:spPr>
+        <p:txBody>
+          <a:bodyPr wrap="square">
+            <a:spAutoFit/>
+          </a:bodyPr>
+          <a:lstStyle/>
+          <a:p>
+            <a:pPr algn="l"/>
+            <a:r>
+              <a:rPr sz="2800" b="1" i="0">
                 <a:solidFill>
                   <a:srgbClr val="16242E"/>
                 </a:solidFill>
-                <a:latin typeface="Cambria" pitchFamily="34" charset="0"/>
-                <a:ea typeface="Cambria" pitchFamily="34" charset="-122"/>
-                <a:cs typeface="Cambria" pitchFamily="34" charset="-120"/>
-              </a:rPr>
-              <a:t>Paritat distribuïda: redundància eficient</a:t>
-            </a:r>
-            <a:endParaRPr lang="en-US" sz="2800" dirty="0"/>
-          </a:p>
-        </p:txBody>
-      </p:sp>
-      <p:sp>
-        <p:nvSpPr>
-          <p:cNvPr id="4" name="Text 2"/>
-          <p:cNvSpPr txBox="1"/>
-          <p:nvPr/>
-        </p:nvSpPr>
-        <p:spPr>
-          <a:xfrm>
-            <a:off x="11551615" y="6446520"/>
-            <a:ext cx="457200" cy="274320"/>
-          </a:xfrm>
-          <a:prstGeom prst="rect">
-            <a:avLst/>
-          </a:prstGeom>
-          <a:noFill/>
-          <a:ln/>
-        </p:spPr>
-        <p:txBody>
-          <a:bodyPr wrap="square" lIns="0" tIns="0" rIns="0" bIns="0" rtlCol="0" anchor="ctr"/>
-          <a:lstStyle/>
-          <a:p>
-            <a:pPr algn="r" indent="0" marL="0">
-              <a:buNone/>
-            </a:pPr>
-            <a:r>
-              <a:rPr lang="en-US" sz="1100" dirty="0">
-                <a:solidFill>
-                  <a:srgbClr val="5B6B77"/>
-                </a:solidFill>
-                <a:latin typeface="Calibri" pitchFamily="34" charset="0"/>
-                <a:ea typeface="Calibri" pitchFamily="34" charset="-122"/>
-                <a:cs typeface="Calibri" pitchFamily="34" charset="-120"/>
-              </a:rPr>
-              <a:t>10</a:t>
-            </a:r>
-            <a:endParaRPr lang="en-US" sz="1100" dirty="0"/>
-          </a:p>
-        </p:txBody>
-      </p:sp>
-      <p:sp>
-        <p:nvSpPr>
-          <p:cNvPr id="5" name="Shape 3"/>
-          <p:cNvSpPr/>
-          <p:nvPr/>
-        </p:nvSpPr>
-        <p:spPr>
-          <a:xfrm>
-            <a:off x="655168" y="1737360"/>
-            <a:ext cx="5212080" cy="3931920"/>
-          </a:xfrm>
-          <a:prstGeom prst="roundRect">
-            <a:avLst>
-              <a:gd name="adj" fmla="val 2791"/>
-            </a:avLst>
-          </a:prstGeom>
-          <a:solidFill>
-            <a:srgbClr val="FFFFFF"/>
-          </a:solidFill>
-          <a:ln w="12700">
-            <a:solidFill>
-              <a:srgbClr val="E2E8ED"/>
-            </a:solidFill>
-            <a:prstDash val="solid"/>
-          </a:ln>
-          <a:effectLst>
-            <a:outerShdw sx="100000" sy="100000" kx="0" ky="0" algn="bl" rotWithShape="0" blurRad="101600" dist="38100" dir="5400000">
-              <a:srgbClr val="16242E">
-                <a:alpha val="12000"/>
-              </a:srgbClr>
-            </a:outerShdw>
-          </a:effectLst>
-        </p:spPr>
-        <p:txBody>
-          <a:bodyPr/>
-          <a:p/>
-        </p:txBody>
-      </p:sp>
-      <p:sp>
-        <p:nvSpPr>
-          <p:cNvPr id="6" name="Shape 4"/>
-          <p:cNvSpPr/>
-          <p:nvPr/>
-        </p:nvSpPr>
-        <p:spPr>
-          <a:xfrm>
-            <a:off x="1020928" y="2103120"/>
-            <a:ext cx="822960" cy="822960"/>
-          </a:xfrm>
-          <a:prstGeom prst="ellipse">
-            <a:avLst/>
-          </a:prstGeom>
-          <a:solidFill>
-            <a:srgbClr val="0B1B29"/>
-          </a:solidFill>
-          <a:ln/>
-        </p:spPr>
-        <p:txBody>
-          <a:bodyPr/>
-          <a:p/>
+                <a:latin typeface="Cambria"/>
+              </a:rPr>
+              <a:t>RAID 1 — Mirror</a:t>
+            </a:r>
+          </a:p>
         </p:txBody>
       </p:sp>
       <p:pic>
         <p:nvPicPr>
-          <p:cNvPr id="7" name="Image 0" descr="/tmp/claude-0/-home-user-SMX-0226-Seguretat-Informatica/cec25c9b-7e93-584a-a64a-196540977a59/scratchpad/build/icons/layer_F2A541.png">    </p:cNvPr>
-          <p:cNvPicPr>
-            <a:picLocks noChangeAspect="1"/>
-          </p:cNvPicPr>
-          <p:nvPr/>
-        </p:nvPicPr>
-        <p:blipFill>
-          <a:blip r:embed="rId1"/>
-          <a:stretch>
-            <a:fillRect/>
-          </a:stretch>
-        </p:blipFill>
-        <p:spPr>
-          <a:xfrm>
-            <a:off x="1231240" y="2313432"/>
-            <a:ext cx="402336" cy="402336"/>
-          </a:xfrm>
-          <a:prstGeom prst="rect">
-            <a:avLst/>
-          </a:prstGeom>
-        </p:spPr>
-      </p:pic>
-      <p:sp>
-        <p:nvSpPr>
-          <p:cNvPr id="8" name="Text 5"/>
-          <p:cNvSpPr txBox="1"/>
-          <p:nvPr/>
-        </p:nvSpPr>
-        <p:spPr>
-          <a:xfrm>
-            <a:off x="1020928" y="3108960"/>
-            <a:ext cx="4480560" cy="457200"/>
-          </a:xfrm>
-          <a:prstGeom prst="rect">
-            <a:avLst/>
-          </a:prstGeom>
-          <a:noFill/>
-          <a:ln/>
-        </p:spPr>
-        <p:txBody>
-          <a:bodyPr wrap="square" lIns="0" tIns="0" rIns="0" bIns="0" rtlCol="0" anchor="ctr"/>
-          <a:lstStyle/>
-          <a:p>
-            <a:pPr indent="0" marL="0">
-              <a:buNone/>
-            </a:pPr>
-            <a:r>
-              <a:rPr lang="en-US" sz="1900" b="1" dirty="0">
-                <a:solidFill>
-                  <a:srgbClr val="16242E"/>
-                </a:solidFill>
-                <a:latin typeface="Cambria" pitchFamily="34" charset="0"/>
-                <a:ea typeface="Cambria" pitchFamily="34" charset="-122"/>
-                <a:cs typeface="Cambria" pitchFamily="34" charset="-120"/>
-              </a:rPr>
-              <a:t>RAID 5 (mínim 3 discos)</a:t>
-            </a:r>
-            <a:endParaRPr lang="en-US" sz="1900" dirty="0"/>
-          </a:p>
-        </p:txBody>
-      </p:sp>
-      <p:sp>
-        <p:nvSpPr>
-          <p:cNvPr id="9" name="Text 6"/>
-          <p:cNvSpPr txBox="1"/>
-          <p:nvPr/>
-        </p:nvSpPr>
-        <p:spPr>
-          <a:xfrm>
-            <a:off x="1020928" y="3611880"/>
-            <a:ext cx="4480560" cy="1920240"/>
-          </a:xfrm>
-          <a:prstGeom prst="rect">
-            <a:avLst/>
-          </a:prstGeom>
-          <a:noFill/>
-          <a:ln/>
-        </p:spPr>
-        <p:txBody>
-          <a:bodyPr wrap="square" lIns="0" tIns="0" rIns="0" bIns="0" rtlCol="0" anchor="t"/>
-          <a:lstStyle/>
-          <a:p>
-            <a:pPr indent="0" marL="0">
-              <a:lnSpc>
-                <a:spcPts val="1700"/>
-              </a:lnSpc>
-              <a:buNone/>
-            </a:pPr>
-            <a:r>
-              <a:rPr lang="en-US" sz="1350" dirty="0">
-                <a:solidFill>
-                  <a:srgbClr val="5B6B77"/>
-                </a:solidFill>
-                <a:latin typeface="Calibri" pitchFamily="34" charset="0"/>
-                <a:ea typeface="Calibri" pitchFamily="34" charset="-122"/>
-                <a:cs typeface="Calibri" pitchFamily="34" charset="-120"/>
-              </a:rPr>
-              <a:t>Divideix les dades a nivell de bloc i distribueix la informació de paritat entre TOTS els discos. Solució popular: redundància més econòmica que el mirall, encara que més lenta. Suporta la pèrdua d'UN disc.</a:t>
-            </a:r>
-            <a:endParaRPr lang="en-US" sz="1350" dirty="0"/>
-          </a:p>
-        </p:txBody>
-      </p:sp>
-      <p:sp>
-        <p:nvSpPr>
-          <p:cNvPr id="10" name="Shape 7"/>
-          <p:cNvSpPr/>
-          <p:nvPr/>
-        </p:nvSpPr>
-        <p:spPr>
-          <a:xfrm>
-            <a:off x="6324448" y="1737360"/>
-            <a:ext cx="5212080" cy="3931920"/>
-          </a:xfrm>
-          <a:prstGeom prst="roundRect">
-            <a:avLst>
-              <a:gd name="adj" fmla="val 2791"/>
-            </a:avLst>
-          </a:prstGeom>
-          <a:solidFill>
-            <a:srgbClr val="FFFFFF"/>
-          </a:solidFill>
-          <a:ln w="12700">
-            <a:solidFill>
-              <a:srgbClr val="E2E8ED"/>
-            </a:solidFill>
-            <a:prstDash val="solid"/>
-          </a:ln>
-          <a:effectLst>
-            <a:outerShdw sx="100000" sy="100000" kx="0" ky="0" algn="bl" rotWithShape="0" blurRad="101600" dist="38100" dir="5400000">
-              <a:srgbClr val="16242E">
-                <a:alpha val="12000"/>
-              </a:srgbClr>
-            </a:outerShdw>
-          </a:effectLst>
-        </p:spPr>
-        <p:txBody>
-          <a:bodyPr/>
-          <a:p/>
-        </p:txBody>
-      </p:sp>
-      <p:sp>
-        <p:nvSpPr>
-          <p:cNvPr id="11" name="Shape 8"/>
-          <p:cNvSpPr/>
-          <p:nvPr/>
-        </p:nvSpPr>
-        <p:spPr>
-          <a:xfrm>
-            <a:off x="6690208" y="2103120"/>
-            <a:ext cx="822960" cy="822960"/>
-          </a:xfrm>
-          <a:prstGeom prst="ellipse">
-            <a:avLst/>
-          </a:prstGeom>
-          <a:solidFill>
-            <a:srgbClr val="0B1B29"/>
-          </a:solidFill>
-          <a:ln/>
-        </p:spPr>
-        <p:txBody>
-          <a:bodyPr/>
-          <a:p/>
-        </p:txBody>
-      </p:sp>
-      <p:pic>
-        <p:nvPicPr>
-          <p:cNvPr id="12" name="Image 1" descr="/tmp/claude-0/-home-user-SMX-0226-Seguretat-Informatica/cec25c9b-7e93-584a-a64a-196540977a59/scratchpad/build/icons/shield_F2A541.png">    </p:cNvPr>
+          <p:cNvPr id="4" name="Picture 3" descr="raid1.png"/>
           <p:cNvPicPr>
             <a:picLocks noChangeAspect="1"/>
           </p:cNvPicPr>
@@ -14124,8 +14772,8 @@
         </p:blipFill>
         <p:spPr>
           <a:xfrm>
-            <a:off x="6900520" y="2313432"/>
-            <a:ext cx="402336" cy="402336"/>
+            <a:off x="4541271" y="1920240"/>
+            <a:ext cx="3109153" cy="4206240"/>
           </a:xfrm>
           <a:prstGeom prst="rect">
             <a:avLst/>
@@ -14134,565 +14782,70 @@
       </p:pic>
       <p:sp>
         <p:nvSpPr>
-          <p:cNvPr id="13" name="Text 9"/>
+          <p:cNvPr id="5" name="TextBox 4"/>
           <p:cNvSpPr txBox="1"/>
           <p:nvPr/>
         </p:nvSpPr>
         <p:spPr>
           <a:xfrm>
-            <a:off x="6690208" y="3108960"/>
-            <a:ext cx="4480560" cy="457200"/>
-          </a:xfrm>
-          <a:prstGeom prst="rect">
-            <a:avLst/>
-          </a:prstGeom>
-          <a:noFill/>
-          <a:ln/>
-        </p:spPr>
-        <p:txBody>
-          <a:bodyPr wrap="square" lIns="0" tIns="0" rIns="0" bIns="0" rtlCol="0" anchor="ctr"/>
-          <a:lstStyle/>
-          <a:p>
-            <a:pPr indent="0" marL="0">
-              <a:buNone/>
-            </a:pPr>
-            <a:r>
-              <a:rPr lang="en-US" sz="1900" b="1" dirty="0">
-                <a:solidFill>
-                  <a:srgbClr val="16242E"/>
-                </a:solidFill>
-                <a:latin typeface="Cambria" pitchFamily="34" charset="0"/>
-                <a:ea typeface="Cambria" pitchFamily="34" charset="-122"/>
-                <a:cs typeface="Cambria" pitchFamily="34" charset="-120"/>
-              </a:rPr>
-              <a:t>RAID 6 (mínim 4 discos)</a:t>
-            </a:r>
-            <a:endParaRPr lang="en-US" sz="1900" dirty="0"/>
-          </a:p>
-        </p:txBody>
-      </p:sp>
-      <p:sp>
-        <p:nvSpPr>
-          <p:cNvPr id="14" name="Text 10"/>
+            <a:off x="548640" y="6263640"/>
+            <a:ext cx="11064240" cy="457200"/>
+          </a:xfrm>
+          <a:prstGeom prst="rect">
+            <a:avLst/>
+          </a:prstGeom>
+          <a:noFill/>
+        </p:spPr>
+        <p:txBody>
+          <a:bodyPr wrap="square">
+            <a:spAutoFit/>
+          </a:bodyPr>
+          <a:lstStyle/>
+          <a:p>
+            <a:pPr algn="ctr"/>
+            <a:r>
+              <a:rPr sz="1200" b="0" i="1">
+                <a:solidFill>
+                  <a:srgbClr val="5B6B77"/>
+                </a:solidFill>
+                <a:latin typeface="Calibri"/>
+              </a:rPr>
+              <a:t>RAID 1: còpia exacta (mirall) de la informació entre dos discos.</a:t>
+            </a:r>
+          </a:p>
+        </p:txBody>
+      </p:sp>
+      <p:sp>
+        <p:nvSpPr>
+          <p:cNvPr id="6" name="TextBox 5"/>
           <p:cNvSpPr txBox="1"/>
           <p:nvPr/>
         </p:nvSpPr>
         <p:spPr>
           <a:xfrm>
-            <a:off x="6690208" y="3611880"/>
-            <a:ext cx="4480560" cy="1920240"/>
-          </a:xfrm>
-          <a:prstGeom prst="rect">
-            <a:avLst/>
-          </a:prstGeom>
-          <a:noFill/>
-          <a:ln/>
-        </p:spPr>
-        <p:txBody>
-          <a:bodyPr wrap="square" lIns="0" tIns="0" rIns="0" bIns="0" rtlCol="0" anchor="t"/>
-          <a:lstStyle/>
-          <a:p>
-            <a:pPr indent="0" marL="0">
-              <a:lnSpc>
-                <a:spcPts val="1700"/>
-              </a:lnSpc>
-              <a:buNone/>
-            </a:pPr>
-            <a:r>
-              <a:rPr lang="en-US" sz="1350" dirty="0">
+            <a:off x="11548872" y="6446520"/>
+            <a:ext cx="365760" cy="274320"/>
+          </a:xfrm>
+          <a:prstGeom prst="rect">
+            <a:avLst/>
+          </a:prstGeom>
+          <a:noFill/>
+        </p:spPr>
+        <p:txBody>
+          <a:bodyPr wrap="none">
+            <a:spAutoFit/>
+          </a:bodyPr>
+          <a:lstStyle/>
+          <a:p>
+            <a:pPr algn="r"/>
+            <a:r>
+              <a:rPr sz="1000">
                 <a:solidFill>
                   <a:srgbClr val="5B6B77"/>
                 </a:solidFill>
-                <a:latin typeface="Calibri" pitchFamily="34" charset="0"/>
-                <a:ea typeface="Calibri" pitchFamily="34" charset="-122"/>
-                <a:cs typeface="Calibri" pitchFamily="34" charset="-120"/>
-              </a:rPr>
-              <a:t>Igual que RAID 5, però amb una SEGONA banda de paritat. Suporta la pèrdua de DOS discos simultàniament, a canvi de perdre la capacitat equivalent a dos discos.</a:t>
-            </a:r>
-            <a:endParaRPr lang="en-US" sz="1350" dirty="0"/>
-          </a:p>
-        </p:txBody>
-      </p:sp>
-    </p:spTree>
-  </p:cSld>
-  <p:clrMapOvr>
-    <a:masterClrMapping/>
-  </p:clrMapOvr>
-</p:sld>
-</file>
-
-<file path=ppt/slides/slide9.xml><?xml version="1.0" encoding="utf-8"?>
-<p:sld xmlns:a="http://schemas.openxmlformats.org/drawingml/2006/main" xmlns:r="http://schemas.openxmlformats.org/officeDocument/2006/relationships" xmlns:p="http://schemas.openxmlformats.org/presentationml/2006/main">
-  <p:cSld name="Slide 9">
-    <p:bg>
-      <p:bgPr>
-        <a:solidFill>
-          <a:srgbClr val="F4F7F9"/>
-        </a:solidFill>
-      </p:bgPr>
-    </p:bg>
-    <p:spTree>
-      <p:nvGrpSpPr>
-        <p:cNvPr id="1" name=""/>
-        <p:cNvGrpSpPr/>
-        <p:nvPr/>
-      </p:nvGrpSpPr>
-      <p:grpSpPr>
-        <a:xfrm>
-          <a:off x="0" y="0"/>
-          <a:ext cx="0" cy="0"/>
-          <a:chOff x="0" y="0"/>
-          <a:chExt cx="0" cy="0"/>
-        </a:xfrm>
-      </p:grpSpPr>
-      <p:sp>
-        <p:nvSpPr>
-          <p:cNvPr id="2" name="Text 0"/>
-          <p:cNvSpPr txBox="1"/>
-          <p:nvPr/>
-        </p:nvSpPr>
-        <p:spPr>
-          <a:xfrm>
-            <a:off x="548640" y="457200"/>
-            <a:ext cx="9144000" cy="365760"/>
-          </a:xfrm>
-          <a:prstGeom prst="rect">
-            <a:avLst/>
-          </a:prstGeom>
-          <a:noFill/>
-          <a:ln/>
-        </p:spPr>
-        <p:txBody>
-          <a:bodyPr wrap="square" lIns="0" tIns="0" rIns="0" bIns="0" rtlCol="0" anchor="ctr"/>
-          <a:lstStyle/>
-          <a:p>
-            <a:pPr indent="0" marL="0">
-              <a:buNone/>
-            </a:pPr>
-            <a:r>
-              <a:rPr lang="en-US" sz="1300" b="1" spc="200" kern="0" dirty="0">
-                <a:solidFill>
-                  <a:srgbClr val="F2A541"/>
-                </a:solidFill>
-                <a:latin typeface="Calibri" pitchFamily="34" charset="0"/>
-                <a:ea typeface="Calibri" pitchFamily="34" charset="-122"/>
-                <a:cs typeface="Calibri" pitchFamily="34" charset="-120"/>
-              </a:rPr>
-              <a:t>RAID ANIUAT</a:t>
-            </a:r>
-            <a:endParaRPr lang="en-US" sz="1300" dirty="0"/>
-          </a:p>
-        </p:txBody>
-      </p:sp>
-      <p:sp>
-        <p:nvSpPr>
-          <p:cNvPr id="3" name="Text 1"/>
-          <p:cNvSpPr txBox="1"/>
-          <p:nvPr/>
-        </p:nvSpPr>
-        <p:spPr>
-          <a:xfrm>
-            <a:off x="548640" y="822960"/>
-            <a:ext cx="10789920" cy="640080"/>
-          </a:xfrm>
-          <a:prstGeom prst="rect">
-            <a:avLst/>
-          </a:prstGeom>
-          <a:noFill/>
-          <a:ln/>
-        </p:spPr>
-        <p:txBody>
-          <a:bodyPr wrap="square" lIns="0" tIns="0" rIns="0" bIns="0" rtlCol="0" anchor="ctr"/>
-          <a:lstStyle/>
-          <a:p>
-            <a:pPr indent="0" marL="0">
-              <a:buNone/>
-            </a:pPr>
-            <a:r>
-              <a:rPr lang="en-US" sz="2800" b="1" dirty="0">
-                <a:solidFill>
-                  <a:srgbClr val="16242E"/>
-                </a:solidFill>
-                <a:latin typeface="Cambria" pitchFamily="34" charset="0"/>
-                <a:ea typeface="Cambria" pitchFamily="34" charset="-122"/>
-                <a:cs typeface="Cambria" pitchFamily="34" charset="-120"/>
-              </a:rPr>
-              <a:t>RAID 10: el millor de dos mons</a:t>
-            </a:r>
-            <a:endParaRPr lang="en-US" sz="2800" dirty="0"/>
-          </a:p>
-        </p:txBody>
-      </p:sp>
-      <p:sp>
-        <p:nvSpPr>
-          <p:cNvPr id="4" name="Text 2"/>
-          <p:cNvSpPr txBox="1"/>
-          <p:nvPr/>
-        </p:nvSpPr>
-        <p:spPr>
-          <a:xfrm>
-            <a:off x="11551615" y="6446520"/>
-            <a:ext cx="457200" cy="274320"/>
-          </a:xfrm>
-          <a:prstGeom prst="rect">
-            <a:avLst/>
-          </a:prstGeom>
-          <a:noFill/>
-          <a:ln/>
-        </p:spPr>
-        <p:txBody>
-          <a:bodyPr wrap="square" lIns="0" tIns="0" rIns="0" bIns="0" rtlCol="0" anchor="ctr"/>
-          <a:lstStyle/>
-          <a:p>
-            <a:pPr algn="r" indent="0" marL="0">
-              <a:buNone/>
-            </a:pPr>
-            <a:r>
-              <a:rPr lang="en-US" sz="1100" dirty="0">
-                <a:solidFill>
-                  <a:srgbClr val="5B6B77"/>
-                </a:solidFill>
-                <a:latin typeface="Calibri" pitchFamily="34" charset="0"/>
-                <a:ea typeface="Calibri" pitchFamily="34" charset="-122"/>
-                <a:cs typeface="Calibri" pitchFamily="34" charset="-120"/>
-              </a:rPr>
-              <a:t>12</a:t>
-            </a:r>
-            <a:endParaRPr lang="en-US" sz="1100" dirty="0"/>
-          </a:p>
-        </p:txBody>
-      </p:sp>
-      <p:sp>
-        <p:nvSpPr>
-          <p:cNvPr id="5" name="Shape 3"/>
-          <p:cNvSpPr/>
-          <p:nvPr/>
-        </p:nvSpPr>
-        <p:spPr>
-          <a:xfrm>
-            <a:off x="655168" y="1737360"/>
-            <a:ext cx="5212080" cy="3931920"/>
-          </a:xfrm>
-          <a:prstGeom prst="roundRect">
-            <a:avLst>
-              <a:gd name="adj" fmla="val 2791"/>
-            </a:avLst>
-          </a:prstGeom>
-          <a:solidFill>
-            <a:srgbClr val="FFFFFF"/>
-          </a:solidFill>
-          <a:ln w="12700">
-            <a:solidFill>
-              <a:srgbClr val="E2E8ED"/>
-            </a:solidFill>
-            <a:prstDash val="solid"/>
-          </a:ln>
-          <a:effectLst>
-            <a:outerShdw sx="100000" sy="100000" kx="0" ky="0" algn="bl" rotWithShape="0" blurRad="101600" dist="38100" dir="5400000">
-              <a:srgbClr val="16242E">
-                <a:alpha val="12000"/>
-              </a:srgbClr>
-            </a:outerShdw>
-          </a:effectLst>
-        </p:spPr>
-        <p:txBody>
-          <a:bodyPr/>
-          <a:p/>
-        </p:txBody>
-      </p:sp>
-      <p:sp>
-        <p:nvSpPr>
-          <p:cNvPr id="6" name="Shape 4"/>
-          <p:cNvSpPr/>
-          <p:nvPr/>
-        </p:nvSpPr>
-        <p:spPr>
-          <a:xfrm>
-            <a:off x="1020928" y="2103120"/>
-            <a:ext cx="822960" cy="822960"/>
-          </a:xfrm>
-          <a:prstGeom prst="ellipse">
-            <a:avLst/>
-          </a:prstGeom>
-          <a:solidFill>
-            <a:srgbClr val="0B1B29"/>
-          </a:solidFill>
-          <a:ln/>
-        </p:spPr>
-        <p:txBody>
-          <a:bodyPr/>
-          <a:p/>
-        </p:txBody>
-      </p:sp>
-      <p:pic>
-        <p:nvPicPr>
-          <p:cNvPr id="7" name="Image 0" descr="/tmp/claude-0/-home-user-SMX-0226-Seguretat-Informatica/cec25c9b-7e93-584a-a64a-196540977a59/scratchpad/build/icons/layer_F2A541.png">    </p:cNvPr>
-          <p:cNvPicPr>
-            <a:picLocks noChangeAspect="1"/>
-          </p:cNvPicPr>
-          <p:nvPr/>
-        </p:nvPicPr>
-        <p:blipFill>
-          <a:blip r:embed="rId1"/>
-          <a:stretch>
-            <a:fillRect/>
-          </a:stretch>
-        </p:blipFill>
-        <p:spPr>
-          <a:xfrm>
-            <a:off x="1231240" y="2313432"/>
-            <a:ext cx="402336" cy="402336"/>
-          </a:xfrm>
-          <a:prstGeom prst="rect">
-            <a:avLst/>
-          </a:prstGeom>
-        </p:spPr>
-      </p:pic>
-      <p:sp>
-        <p:nvSpPr>
-          <p:cNvPr id="8" name="Text 5"/>
-          <p:cNvSpPr txBox="1"/>
-          <p:nvPr/>
-        </p:nvSpPr>
-        <p:spPr>
-          <a:xfrm>
-            <a:off x="1020928" y="3108960"/>
-            <a:ext cx="4480560" cy="457200"/>
-          </a:xfrm>
-          <a:prstGeom prst="rect">
-            <a:avLst/>
-          </a:prstGeom>
-          <a:noFill/>
-          <a:ln/>
-        </p:spPr>
-        <p:txBody>
-          <a:bodyPr wrap="square" lIns="0" tIns="0" rIns="0" bIns="0" rtlCol="0" anchor="ctr"/>
-          <a:lstStyle/>
-          <a:p>
-            <a:pPr indent="0" marL="0">
-              <a:buNone/>
-            </a:pPr>
-            <a:r>
-              <a:rPr lang="en-US" sz="1900" b="1" dirty="0">
-                <a:solidFill>
-                  <a:srgbClr val="16242E"/>
-                </a:solidFill>
-                <a:latin typeface="Cambria" pitchFamily="34" charset="0"/>
-                <a:ea typeface="Cambria" pitchFamily="34" charset="-122"/>
-                <a:cs typeface="Cambria" pitchFamily="34" charset="-120"/>
-              </a:rPr>
-              <a:t>Com funciona</a:t>
-            </a:r>
-            <a:endParaRPr lang="en-US" sz="1900" dirty="0"/>
-          </a:p>
-        </p:txBody>
-      </p:sp>
-      <p:sp>
-        <p:nvSpPr>
-          <p:cNvPr id="9" name="Text 6"/>
-          <p:cNvSpPr txBox="1"/>
-          <p:nvPr/>
-        </p:nvSpPr>
-        <p:spPr>
-          <a:xfrm>
-            <a:off x="1020928" y="3611880"/>
-            <a:ext cx="4480560" cy="1920240"/>
-          </a:xfrm>
-          <a:prstGeom prst="rect">
-            <a:avLst/>
-          </a:prstGeom>
-          <a:noFill/>
-          <a:ln/>
-        </p:spPr>
-        <p:txBody>
-          <a:bodyPr wrap="square" lIns="0" tIns="0" rIns="0" bIns="0" rtlCol="0" anchor="t"/>
-          <a:lstStyle/>
-          <a:p>
-            <a:pPr indent="0" marL="0">
-              <a:lnSpc>
-                <a:spcPts val="1700"/>
-              </a:lnSpc>
-              <a:buNone/>
-            </a:pPr>
-            <a:r>
-              <a:rPr lang="en-US" sz="1350" dirty="0">
-                <a:solidFill>
-                  <a:srgbClr val="5B6B77"/>
-                </a:solidFill>
-                <a:latin typeface="Calibri" pitchFamily="34" charset="0"/>
-                <a:ea typeface="Calibri" pitchFamily="34" charset="-122"/>
-                <a:cs typeface="Calibri" pitchFamily="34" charset="-120"/>
-              </a:rPr>
-              <a:t>Combina RAID 1 i RAID 0 (mínim 4 discos): primer es formen parelles en mirall, i després es distribueix la informació entre les parelles.</a:t>
-            </a:r>
-            <a:endParaRPr lang="en-US" sz="1350" dirty="0"/>
-          </a:p>
-        </p:txBody>
-      </p:sp>
-      <p:sp>
-        <p:nvSpPr>
-          <p:cNvPr id="10" name="Shape 7"/>
-          <p:cNvSpPr/>
-          <p:nvPr/>
-        </p:nvSpPr>
-        <p:spPr>
-          <a:xfrm>
-            <a:off x="6324448" y="1737360"/>
-            <a:ext cx="5212080" cy="3931920"/>
-          </a:xfrm>
-          <a:prstGeom prst="roundRect">
-            <a:avLst>
-              <a:gd name="adj" fmla="val 2791"/>
-            </a:avLst>
-          </a:prstGeom>
-          <a:solidFill>
-            <a:srgbClr val="FFFFFF"/>
-          </a:solidFill>
-          <a:ln w="12700">
-            <a:solidFill>
-              <a:srgbClr val="E2E8ED"/>
-            </a:solidFill>
-            <a:prstDash val="solid"/>
-          </a:ln>
-          <a:effectLst>
-            <a:outerShdw sx="100000" sy="100000" kx="0" ky="0" algn="bl" rotWithShape="0" blurRad="101600" dist="38100" dir="5400000">
-              <a:srgbClr val="16242E">
-                <a:alpha val="12000"/>
-              </a:srgbClr>
-            </a:outerShdw>
-          </a:effectLst>
-        </p:spPr>
-        <p:txBody>
-          <a:bodyPr/>
-          <a:p/>
-        </p:txBody>
-      </p:sp>
-      <p:sp>
-        <p:nvSpPr>
-          <p:cNvPr id="11" name="Shape 8"/>
-          <p:cNvSpPr/>
-          <p:nvPr/>
-        </p:nvSpPr>
-        <p:spPr>
-          <a:xfrm>
-            <a:off x="6690208" y="2103120"/>
-            <a:ext cx="822960" cy="822960"/>
-          </a:xfrm>
-          <a:prstGeom prst="ellipse">
-            <a:avLst/>
-          </a:prstGeom>
-          <a:solidFill>
-            <a:srgbClr val="0B1B29"/>
-          </a:solidFill>
-          <a:ln/>
-        </p:spPr>
-        <p:txBody>
-          <a:bodyPr/>
-          <a:p/>
-        </p:txBody>
-      </p:sp>
-      <p:pic>
-        <p:nvPicPr>
-          <p:cNvPr id="12" name="Image 1" descr="/tmp/claude-0/-home-user-SMX-0226-Seguretat-Informatica/cec25c9b-7e93-584a-a64a-196540977a59/scratchpad/build/icons/bolt_F2A541.png">    </p:cNvPr>
-          <p:cNvPicPr>
-            <a:picLocks noChangeAspect="1"/>
-          </p:cNvPicPr>
-          <p:nvPr/>
-        </p:nvPicPr>
-        <p:blipFill>
-          <a:blip r:embed="rId2"/>
-          <a:stretch>
-            <a:fillRect/>
-          </a:stretch>
-        </p:blipFill>
-        <p:spPr>
-          <a:xfrm>
-            <a:off x="6900520" y="2313432"/>
-            <a:ext cx="402336" cy="402336"/>
-          </a:xfrm>
-          <a:prstGeom prst="rect">
-            <a:avLst/>
-          </a:prstGeom>
-        </p:spPr>
-      </p:pic>
-      <p:sp>
-        <p:nvSpPr>
-          <p:cNvPr id="13" name="Text 9"/>
-          <p:cNvSpPr txBox="1"/>
-          <p:nvPr/>
-        </p:nvSpPr>
-        <p:spPr>
-          <a:xfrm>
-            <a:off x="6690208" y="3108960"/>
-            <a:ext cx="4480560" cy="457200"/>
-          </a:xfrm>
-          <a:prstGeom prst="rect">
-            <a:avLst/>
-          </a:prstGeom>
-          <a:noFill/>
-          <a:ln/>
-        </p:spPr>
-        <p:txBody>
-          <a:bodyPr wrap="square" lIns="0" tIns="0" rIns="0" bIns="0" rtlCol="0" anchor="ctr"/>
-          <a:lstStyle/>
-          <a:p>
-            <a:pPr indent="0" marL="0">
-              <a:buNone/>
-            </a:pPr>
-            <a:r>
-              <a:rPr lang="en-US" sz="1900" b="1" dirty="0">
-                <a:solidFill>
-                  <a:srgbClr val="16242E"/>
-                </a:solidFill>
-                <a:latin typeface="Cambria" pitchFamily="34" charset="0"/>
-                <a:ea typeface="Cambria" pitchFamily="34" charset="-122"/>
-                <a:cs typeface="Cambria" pitchFamily="34" charset="-120"/>
-              </a:rPr>
-              <a:t>Per què és tan bo</a:t>
-            </a:r>
-            <a:endParaRPr lang="en-US" sz="1900" dirty="0"/>
-          </a:p>
-        </p:txBody>
-      </p:sp>
-      <p:sp>
-        <p:nvSpPr>
-          <p:cNvPr id="14" name="Text 10"/>
-          <p:cNvSpPr txBox="1"/>
-          <p:nvPr/>
-        </p:nvSpPr>
-        <p:spPr>
-          <a:xfrm>
-            <a:off x="6690208" y="3611880"/>
-            <a:ext cx="4480560" cy="1920240"/>
-          </a:xfrm>
-          <a:prstGeom prst="rect">
-            <a:avLst/>
-          </a:prstGeom>
-          <a:noFill/>
-          <a:ln/>
-        </p:spPr>
-        <p:txBody>
-          <a:bodyPr wrap="square" lIns="0" tIns="0" rIns="0" bIns="0" rtlCol="0" anchor="t"/>
-          <a:lstStyle/>
-          <a:p>
-            <a:pPr indent="0" marL="0">
-              <a:lnSpc>
-                <a:spcPts val="1700"/>
-              </a:lnSpc>
-              <a:buNone/>
-            </a:pPr>
-            <a:r>
-              <a:rPr lang="en-US" sz="1350" dirty="0">
-                <a:solidFill>
-                  <a:srgbClr val="5B6B77"/>
-                </a:solidFill>
-                <a:latin typeface="Calibri" pitchFamily="34" charset="0"/>
-                <a:ea typeface="Calibri" pitchFamily="34" charset="-122"/>
-                <a:cs typeface="Calibri" pitchFamily="34" charset="-120"/>
-              </a:rPr>
-              <a:t>Solució ràpida i segura, però cal tenir en compte: només es pot perdre un disc per cada conjunt en mirall (si fallen els dos d'una mateixa parella, es perd la informació).</a:t>
-            </a:r>
-            <a:endParaRPr lang="en-US" sz="1350" dirty="0"/>
+              </a:rPr>
+              <a:t>9</a:t>
+            </a:r>
           </a:p>
         </p:txBody>
       </p:sp>

--- a/RA2 - Emmagatzematge i copies de seguretat/AA2 - Sistemes demmagatzematge/RA2_AA2_Sistemes_emmagatzematge.pptx
+++ b/RA2 - Emmagatzematge i copies de seguretat/AA2 - Sistemes demmagatzematge/RA2_AA2_Sistemes_emmagatzematge.pptx
@@ -11798,7 +11798,7 @@
                 <a:ea typeface="Calibri" pitchFamily="34" charset="-122"/>
                 <a:cs typeface="Calibri" pitchFamily="34" charset="-120"/>
               </a:rPr>
-              <a:t>Llicència Creative Commons BY-NC-SA · Institut Obert de Catalunya, 2011 (materials adaptats i ampliats)</a:t>
+              <a:t>Llicència CC BY-SA 4.0 · Adaptat de "Materials" (SMX-0226SI), Carlos Alonso Martínez, Escola Pia de Mataró</a:t>
             </a:r>
             <a:endParaRPr lang="en-US" sz="1050" dirty="0"/>
           </a:p>

--- a/RA2 - Emmagatzematge i copies de seguretat/AA2 - Sistemes demmagatzematge/RA2_AA2_Sistemes_emmagatzematge.pptx
+++ b/RA2 - Emmagatzematge i copies de seguretat/AA2 - Sistemes demmagatzematge/RA2_AA2_Sistemes_emmagatzematge.pptx
@@ -20,6 +20,7 @@
     <p:sldId id="275" r:id="rId26"/>
     <p:sldId id="263" r:id="rId9"/>
     <p:sldId id="276" r:id="rId27"/>
+    <p:sldId id="286" r:id="rId37"/>
     <p:sldId id="264" r:id="rId10"/>
     <p:sldId id="277" r:id="rId28"/>
     <p:sldId id="265" r:id="rId11"/>
@@ -4908,7 +4909,7 @@
                 <a:ea typeface="Calibri" pitchFamily="34" charset="-122"/>
                 <a:cs typeface="Calibri" pitchFamily="34" charset="-120"/>
               </a:rPr>
-              <a:t>16</a:t>
+              <a:t>17</a:t>
             </a:r>
             <a:endParaRPr lang="en-US" sz="1100" dirty="0"/>
           </a:p>
@@ -5432,7 +5433,7 @@
                   <a:srgbClr val="5B6B77"/>
                 </a:solidFill>
               </a:rPr>
-              <a:t>17</a:t>
+              <a:t>18</a:t>
             </a:r>
           </a:p>
         </p:txBody>
@@ -5580,7 +5581,7 @@
                 <a:ea typeface="Calibri" pitchFamily="34" charset="-122"/>
                 <a:cs typeface="Calibri" pitchFamily="34" charset="-120"/>
               </a:rPr>
-              <a:t>18</a:t>
+              <a:t>19</a:t>
             </a:r>
             <a:endParaRPr lang="en-US" sz="1100" dirty="0"/>
           </a:p>
@@ -8695,7 +8696,7 @@
                 <a:ea typeface="Calibri" pitchFamily="34" charset="-122"/>
                 <a:cs typeface="Calibri" pitchFamily="34" charset="-120"/>
               </a:rPr>
-              <a:t>19</a:t>
+              <a:t>20</a:t>
             </a:r>
             <a:endParaRPr lang="en-US" sz="1100" dirty="0"/>
           </a:p>
@@ -9755,7 +9756,7 @@
                 <a:ea typeface="Calibri" pitchFamily="34" charset="-122"/>
                 <a:cs typeface="Calibri" pitchFamily="34" charset="-120"/>
               </a:rPr>
-              <a:t>20</a:t>
+              <a:t>21</a:t>
             </a:r>
             <a:endParaRPr lang="en-US" sz="1100" dirty="0"/>
           </a:p>
@@ -10348,7 +10349,7 @@
                   <a:srgbClr val="5B6B77"/>
                 </a:solidFill>
               </a:rPr>
-              <a:t>21</a:t>
+              <a:t>22</a:t>
             </a:r>
           </a:p>
         </p:txBody>
@@ -10496,7 +10497,7 @@
                 <a:ea typeface="Calibri" pitchFamily="34" charset="-122"/>
                 <a:cs typeface="Calibri" pitchFamily="34" charset="-120"/>
               </a:rPr>
-              <a:t>22</a:t>
+              <a:t>23</a:t>
             </a:r>
             <a:endParaRPr lang="en-US" sz="1100" dirty="0"/>
           </a:p>
@@ -11020,7 +11021,7 @@
                   <a:srgbClr val="5B6B77"/>
                 </a:solidFill>
               </a:rPr>
-              <a:t>23</a:t>
+              <a:t>24</a:t>
             </a:r>
           </a:p>
         </p:txBody>
@@ -11168,7 +11169,7 @@
                 <a:ea typeface="Calibri" pitchFamily="34" charset="-122"/>
                 <a:cs typeface="Calibri" pitchFamily="34" charset="-120"/>
               </a:rPr>
-              <a:t>24</a:t>
+              <a:t>25</a:t>
             </a:r>
             <a:endParaRPr lang="en-US" sz="1100" dirty="0"/>
           </a:p>
@@ -11554,7 +11555,7 @@
                   <a:srgbClr val="5B6B77"/>
                 </a:solidFill>
               </a:rPr>
-              <a:t>25</a:t>
+              <a:t>26</a:t>
             </a:r>
           </a:p>
         </p:txBody>
@@ -11702,7 +11703,7 @@
                 <a:ea typeface="Calibri" pitchFamily="34" charset="-122"/>
                 <a:cs typeface="Calibri" pitchFamily="34" charset="-120"/>
               </a:rPr>
-              <a:t>26</a:t>
+              <a:t>27</a:t>
             </a:r>
             <a:endParaRPr lang="en-US" sz="1100" dirty="0"/>
           </a:p>
@@ -12006,7 +12007,7 @@
                 <a:ea typeface="Calibri" pitchFamily="34" charset="-122"/>
                 <a:cs typeface="Calibri" pitchFamily="34" charset="-120"/>
               </a:rPr>
-              <a:t>27</a:t>
+              <a:t>28</a:t>
             </a:r>
             <a:endParaRPr lang="en-US" sz="1100" dirty="0"/>
           </a:p>
@@ -13731,7 +13732,7 @@
                 <a:ea typeface="Calibri" pitchFamily="34" charset="-122"/>
                 <a:cs typeface="Calibri" pitchFamily="34" charset="-120"/>
               </a:rPr>
-              <a:t>28</a:t>
+              <a:t>29</a:t>
             </a:r>
             <a:endParaRPr lang="en-US" sz="1100" dirty="0"/>
           </a:p>
@@ -14653,7 +14654,7 @@
                 <a:ea typeface="Calibri" pitchFamily="34" charset="-122"/>
                 <a:cs typeface="Calibri" pitchFamily="34" charset="-120"/>
               </a:rPr>
-              <a:t>29</a:t>
+              <a:t>30</a:t>
             </a:r>
             <a:endParaRPr lang="en-US" sz="1100" dirty="0"/>
           </a:p>
@@ -15721,9 +15722,642 @@
                 <a:ea typeface="Calibri" pitchFamily="34" charset="-122"/>
                 <a:cs typeface="Calibri" pitchFamily="34" charset="-120"/>
               </a:rPr>
-              <a:t>30</a:t>
+              <a:t>31</a:t>
             </a:r>
             <a:endParaRPr lang="en-US" sz="1100" dirty="0"/>
+          </a:p>
+        </p:txBody>
+      </p:sp>
+    </p:spTree>
+  </p:cSld>
+  <p:clrMapOvr>
+    <a:masterClrMapping/>
+  </p:clrMapOvr>
+</p:sld>
+</file>
+
+<file path=ppt/slides/slide31.xml><?xml version="1.0" encoding="utf-8"?>
+<p:sld xmlns:a="http://schemas.openxmlformats.org/drawingml/2006/main" xmlns:p="http://schemas.openxmlformats.org/presentationml/2006/main" xmlns:r="http://schemas.openxmlformats.org/officeDocument/2006/relationships">
+  <p:cSld>
+    <p:bg>
+      <p:bgPr>
+        <a:solidFill>
+          <a:srgbClr val="F4F7F9"/>
+        </a:solidFill>
+      </p:bgPr>
+    </p:bg>
+    <p:spTree>
+      <p:nvGrpSpPr>
+        <p:cNvPr id="1" name=""/>
+        <p:cNvGrpSpPr/>
+        <p:nvPr/>
+      </p:nvGrpSpPr>
+      <p:grpSpPr/>
+      <p:sp>
+        <p:nvSpPr>
+          <p:cNvPr id="2" name="Text 0"/>
+          <p:cNvSpPr txBox="1"/>
+          <p:nvPr/>
+        </p:nvSpPr>
+        <p:spPr>
+          <a:xfrm>
+            <a:off x="548640" y="457200"/>
+            <a:ext cx="9144000" cy="365760"/>
+          </a:xfrm>
+          <a:prstGeom prst="rect">
+            <a:avLst/>
+          </a:prstGeom>
+          <a:noFill/>
+          <a:ln/>
+        </p:spPr>
+        <p:txBody>
+          <a:bodyPr wrap="square" lIns="0" tIns="0" rIns="0" bIns="0" rtlCol="0" anchor="ctr"/>
+          <a:lstStyle/>
+          <a:p>
+            <a:pPr indent="0" marL="0">
+              <a:buNone/>
+            </a:pPr>
+            <a:r>
+              <a:rPr lang="en-US" sz="1300" b="1" spc="200" kern="0" dirty="0">
+                <a:solidFill>
+                  <a:srgbClr val="F2A541"/>
+                </a:solidFill>
+                <a:latin typeface="Calibri" pitchFamily="34" charset="0"/>
+                <a:ea typeface="Calibri" pitchFamily="34" charset="-122"/>
+                <a:cs typeface="Calibri" pitchFamily="34" charset="-120"/>
+              </a:rPr>
+              <a:t>RAID 5 · LA PARITAT</a:t>
+            </a:r>
+            <a:endParaRPr lang="en-US" sz="1300" dirty="0"/>
+          </a:p>
+        </p:txBody>
+      </p:sp>
+      <p:sp>
+        <p:nvSpPr>
+          <p:cNvPr id="3" name="Text 1"/>
+          <p:cNvSpPr txBox="1"/>
+          <p:nvPr/>
+        </p:nvSpPr>
+        <p:spPr>
+          <a:xfrm>
+            <a:off x="548640" y="822960"/>
+            <a:ext cx="10789920" cy="640080"/>
+          </a:xfrm>
+          <a:prstGeom prst="rect">
+            <a:avLst/>
+          </a:prstGeom>
+          <a:noFill/>
+          <a:ln/>
+        </p:spPr>
+        <p:txBody>
+          <a:bodyPr wrap="square" lIns="0" tIns="0" rIns="0" bIns="0" rtlCol="0" anchor="ctr"/>
+          <a:lstStyle/>
+          <a:p>
+            <a:pPr indent="0" marL="0">
+              <a:buNone/>
+            </a:pPr>
+            <a:r>
+              <a:rPr lang="en-US" sz="2800" b="1" dirty="0">
+                <a:solidFill>
+                  <a:srgbClr val="16242E"/>
+                </a:solidFill>
+                <a:latin typeface="Cambria" pitchFamily="34" charset="0"/>
+                <a:ea typeface="Cambria" pitchFamily="34" charset="-122"/>
+                <a:cs typeface="Cambria" pitchFamily="34" charset="-120"/>
+              </a:rPr>
+              <a:t>Com funciona la paritat?</a:t>
+            </a:r>
+            <a:endParaRPr lang="en-US" sz="2800" dirty="0"/>
+          </a:p>
+        </p:txBody>
+      </p:sp>
+      <p:sp>
+        <p:nvSpPr>
+          <p:cNvPr id="4" name="Text 2"/>
+          <p:cNvSpPr txBox="1"/>
+          <p:nvPr/>
+        </p:nvSpPr>
+        <p:spPr>
+          <a:xfrm>
+            <a:off x="11551615" y="6446520"/>
+            <a:ext cx="457200" cy="274320"/>
+          </a:xfrm>
+          <a:prstGeom prst="rect">
+            <a:avLst/>
+          </a:prstGeom>
+          <a:noFill/>
+          <a:ln/>
+        </p:spPr>
+        <p:txBody>
+          <a:bodyPr wrap="square" lIns="0" tIns="0" rIns="0" bIns="0" rtlCol="0" anchor="ctr"/>
+          <a:lstStyle/>
+          <a:p>
+            <a:pPr algn="r" indent="0" marL="0">
+              <a:buNone/>
+            </a:pPr>
+            <a:r>
+              <a:rPr lang="en-US" sz="1100" dirty="0">
+                <a:solidFill>
+                  <a:srgbClr val="5B6B77"/>
+                </a:solidFill>
+                <a:latin typeface="Calibri" pitchFamily="34" charset="0"/>
+                <a:ea typeface="Calibri" pitchFamily="34" charset="-122"/>
+                <a:cs typeface="Calibri" pitchFamily="34" charset="-120"/>
+              </a:rPr>
+              <a:t>16</a:t>
+            </a:r>
+            <a:endParaRPr lang="en-US" sz="1100" dirty="0"/>
+          </a:p>
+        </p:txBody>
+      </p:sp>
+      <p:sp>
+        <p:nvSpPr>
+          <p:cNvPr id="5" name="Shape 3"/>
+          <p:cNvSpPr/>
+          <p:nvPr/>
+        </p:nvSpPr>
+        <p:spPr>
+          <a:xfrm>
+            <a:off x="655168" y="1661160"/>
+            <a:ext cx="5212080" cy="4279392"/>
+          </a:xfrm>
+          <a:prstGeom prst="roundRect">
+            <a:avLst>
+              <a:gd name="adj" fmla="val 2791"/>
+            </a:avLst>
+          </a:prstGeom>
+          <a:solidFill>
+            <a:srgbClr val="FFFFFF"/>
+          </a:solidFill>
+          <a:ln w="12700">
+            <a:solidFill>
+              <a:srgbClr val="E2E8ED"/>
+            </a:solidFill>
+            <a:prstDash val="solid"/>
+          </a:ln>
+          <a:effectLst>
+            <a:outerShdw sx="100000" sy="100000" kx="0" ky="0" algn="bl" rotWithShape="0" blurRad="101600" dist="38100" dir="5400000">
+              <a:srgbClr val="16242E">
+                <a:alpha val="12000"/>
+              </a:srgbClr>
+            </a:outerShdw>
+          </a:effectLst>
+        </p:spPr>
+        <p:txBody>
+          <a:bodyPr/>
+          <a:p/>
+        </p:txBody>
+      </p:sp>
+      <p:sp>
+        <p:nvSpPr>
+          <p:cNvPr id="6" name="Shape 4"/>
+          <p:cNvSpPr/>
+          <p:nvPr/>
+        </p:nvSpPr>
+        <p:spPr>
+          <a:xfrm>
+            <a:off x="1039216" y="2045208"/>
+            <a:ext cx="731520" cy="731520"/>
+          </a:xfrm>
+          <a:prstGeom prst="ellipse">
+            <a:avLst/>
+          </a:prstGeom>
+          <a:solidFill>
+            <a:srgbClr val="0B1B29"/>
+          </a:solidFill>
+          <a:ln/>
+        </p:spPr>
+        <p:txBody>
+          <a:bodyPr/>
+          <a:p/>
+        </p:txBody>
+      </p:sp>
+      <p:pic>
+        <p:nvPicPr>
+          <p:cNvPr id="7" name="Image 0" descr="/tmp/claude-0/-home-user-SMX-0226-Seguretat-Informatica/a92ac1fc-9241-54c9-9c87-68470d7a571f/scratchpad/aa2/icon_heartbeat.png">    </p:cNvPr>
+          <p:cNvPicPr>
+            <a:picLocks noChangeAspect="1"/>
+          </p:cNvPicPr>
+          <p:nvPr/>
+        </p:nvPicPr>
+        <p:blipFill>
+          <a:blip r:embed="rId4"/>
+          <a:stretch>
+            <a:fillRect/>
+          </a:stretch>
+        </p:blipFill>
+        <p:spPr>
+          <a:xfrm>
+            <a:off x="1203808" y="2209800"/>
+            <a:ext cx="402336" cy="402336"/>
+          </a:xfrm>
+          <a:prstGeom prst="rect">
+            <a:avLst/>
+          </a:prstGeom>
+        </p:spPr>
+      </p:pic>
+      <p:sp>
+        <p:nvSpPr>
+          <p:cNvPr id="8" name="Text 5"/>
+          <p:cNvSpPr txBox="1"/>
+          <p:nvPr/>
+        </p:nvSpPr>
+        <p:spPr>
+          <a:xfrm>
+            <a:off x="1999336" y="2243328"/>
+            <a:ext cx="3483864" cy="335280"/>
+          </a:xfrm>
+          <a:prstGeom prst="rect">
+            <a:avLst/>
+          </a:prstGeom>
+          <a:noFill/>
+          <a:ln/>
+        </p:spPr>
+        <p:txBody>
+          <a:bodyPr wrap="square" lIns="0" tIns="0" rIns="0" bIns="0" rtlCol="0" anchor="ctr"/>
+          <a:lstStyle/>
+          <a:p>
+            <a:pPr indent="0" marL="0">
+              <a:buNone/>
+            </a:pPr>
+            <a:r>
+              <a:rPr lang="en-US" sz="2200" b="1" dirty="0">
+                <a:solidFill>
+                  <a:srgbClr val="16242E"/>
+                </a:solidFill>
+                <a:latin typeface="Cambria" pitchFamily="34" charset="0"/>
+                <a:ea typeface="Cambria" pitchFamily="34" charset="-122"/>
+                <a:cs typeface="Cambria" pitchFamily="34" charset="-120"/>
+              </a:rPr>
+              <a:t>Analogia amb sumes</a:t>
+            </a:r>
+            <a:endParaRPr lang="en-US" sz="2200" dirty="0"/>
+          </a:p>
+        </p:txBody>
+      </p:sp>
+      <p:sp>
+        <p:nvSpPr>
+          <p:cNvPr id="9" name="Text 6"/>
+          <p:cNvSpPr txBox="1"/>
+          <p:nvPr/>
+        </p:nvSpPr>
+        <p:spPr>
+          <a:xfrm>
+            <a:off x="1039216" y="3069336"/>
+            <a:ext cx="4443984" cy="2176272"/>
+          </a:xfrm>
+          <a:prstGeom prst="rect">
+            <a:avLst/>
+          </a:prstGeom>
+          <a:noFill/>
+          <a:ln/>
+        </p:spPr>
+        <p:txBody>
+          <a:bodyPr wrap="square" lIns="0" tIns="0" rIns="0" bIns="0" rtlCol="0" anchor="t"/>
+          <a:lstStyle/>
+          <a:p>
+            <a:pPr indent="0" marL="0">
+              <a:lnSpc>
+                <a:spcPts val="2448"/>
+              </a:lnSpc>
+              <a:buNone/>
+            </a:pPr>
+            <a:r>
+              <a:rPr lang="en-US" sz="1800" dirty="0" b="0">
+                <a:solidFill>
+                  <a:srgbClr val="5B6B77"/>
+                </a:solidFill>
+                <a:latin typeface="Calibri" pitchFamily="34" charset="0"/>
+                <a:ea typeface="Calibri" pitchFamily="34" charset="-122"/>
+                <a:cs typeface="Calibri" pitchFamily="34" charset="-120"/>
+              </a:rPr>
+              <a:t>Caixa A = 3, caixa B = 5 i, a la caixa C, la paritat: 3 + 5 = 8.</a:t>
+            </a:r>
+            <a:endParaRPr lang="en-US" sz="1800" dirty="0"/>
+          </a:p>
+          <a:p>
+            <a:pPr indent="0" marL="0">
+              <a:lnSpc>
+                <a:spcPts val="2448"/>
+              </a:lnSpc>
+              <a:buNone/>
+            </a:pPr>
+            <a:r>
+              <a:rPr lang="en-US" sz="1800" dirty="0" b="0">
+                <a:solidFill>
+                  <a:srgbClr val="5B6B77"/>
+                </a:solidFill>
+                <a:latin typeface="Calibri" pitchFamily="34" charset="0"/>
+                <a:ea typeface="Calibri" pitchFamily="34" charset="-122"/>
+                <a:cs typeface="Calibri" pitchFamily="34" charset="-120"/>
+              </a:rPr>
+              <a:t>Es perd A → 8 − 5 = 3</a:t>
+            </a:r>
+            <a:endParaRPr lang="en-US" sz="1800" dirty="0"/>
+          </a:p>
+          <a:p>
+            <a:pPr indent="0" marL="0">
+              <a:lnSpc>
+                <a:spcPts val="2448"/>
+              </a:lnSpc>
+              <a:buNone/>
+            </a:pPr>
+            <a:r>
+              <a:rPr lang="en-US" sz="1800" dirty="0" b="0">
+                <a:solidFill>
+                  <a:srgbClr val="5B6B77"/>
+                </a:solidFill>
+                <a:latin typeface="Calibri" pitchFamily="34" charset="0"/>
+                <a:ea typeface="Calibri" pitchFamily="34" charset="-122"/>
+                <a:cs typeface="Calibri" pitchFamily="34" charset="-120"/>
+              </a:rPr>
+              <a:t>Es perd B → 8 − 3 = 5</a:t>
+            </a:r>
+            <a:endParaRPr lang="en-US" sz="1800" dirty="0"/>
+          </a:p>
+          <a:p>
+            <a:pPr indent="0" marL="0">
+              <a:lnSpc>
+                <a:spcPts val="2448"/>
+              </a:lnSpc>
+              <a:buNone/>
+            </a:pPr>
+            <a:r>
+              <a:rPr lang="en-US" sz="1800" dirty="0" b="0">
+                <a:solidFill>
+                  <a:srgbClr val="5B6B77"/>
+                </a:solidFill>
+                <a:latin typeface="Calibri" pitchFamily="34" charset="0"/>
+                <a:ea typeface="Calibri" pitchFamily="34" charset="-122"/>
+                <a:cs typeface="Calibri" pitchFamily="34" charset="-120"/>
+              </a:rPr>
+              <a:t>Es perd C → 3 + 5 = 8</a:t>
+            </a:r>
+            <a:endParaRPr lang="en-US" sz="1800" dirty="0"/>
+          </a:p>
+          <a:p>
+            <a:pPr indent="0" marL="0">
+              <a:lnSpc>
+                <a:spcPts val="2448"/>
+              </a:lnSpc>
+              <a:buNone/>
+            </a:pPr>
+            <a:r>
+              <a:rPr lang="en-US" sz="1800" dirty="0" b="1">
+                <a:solidFill>
+                  <a:srgbClr val="5B6B77"/>
+                </a:solidFill>
+                <a:latin typeface="Calibri" pitchFamily="34" charset="0"/>
+                <a:ea typeface="Calibri" pitchFamily="34" charset="-122"/>
+                <a:cs typeface="Calibri" pitchFamily="34" charset="-120"/>
+              </a:rPr>
+              <a:t>Es perden dues caixes → impossible: el RAID 5 només suporta 1 fallada.</a:t>
+            </a:r>
+            <a:endParaRPr lang="en-US" sz="1800" dirty="0"/>
+          </a:p>
+        </p:txBody>
+      </p:sp>
+      <p:sp>
+        <p:nvSpPr>
+          <p:cNvPr id="10" name="Shape 7"/>
+          <p:cNvSpPr/>
+          <p:nvPr/>
+        </p:nvSpPr>
+        <p:spPr>
+          <a:xfrm>
+            <a:off x="6324448" y="1661160"/>
+            <a:ext cx="5212080" cy="4279392"/>
+          </a:xfrm>
+          <a:prstGeom prst="roundRect">
+            <a:avLst>
+              <a:gd name="adj" fmla="val 2791"/>
+            </a:avLst>
+          </a:prstGeom>
+          <a:solidFill>
+            <a:srgbClr val="FFFFFF"/>
+          </a:solidFill>
+          <a:ln w="12700">
+            <a:solidFill>
+              <a:srgbClr val="E2E8ED"/>
+            </a:solidFill>
+            <a:prstDash val="solid"/>
+          </a:ln>
+          <a:effectLst>
+            <a:outerShdw sx="100000" sy="100000" kx="0" ky="0" algn="bl" rotWithShape="0" blurRad="101600" dist="38100" dir="5400000">
+              <a:srgbClr val="16242E">
+                <a:alpha val="12000"/>
+              </a:srgbClr>
+            </a:outerShdw>
+          </a:effectLst>
+        </p:spPr>
+        <p:txBody>
+          <a:bodyPr/>
+          <a:p/>
+        </p:txBody>
+      </p:sp>
+      <p:sp>
+        <p:nvSpPr>
+          <p:cNvPr id="11" name="Shape 8"/>
+          <p:cNvSpPr/>
+          <p:nvPr/>
+        </p:nvSpPr>
+        <p:spPr>
+          <a:xfrm>
+            <a:off x="6708496" y="2045208"/>
+            <a:ext cx="731520" cy="731520"/>
+          </a:xfrm>
+          <a:prstGeom prst="ellipse">
+            <a:avLst/>
+          </a:prstGeom>
+          <a:solidFill>
+            <a:srgbClr val="0B1B29"/>
+          </a:solidFill>
+          <a:ln/>
+        </p:spPr>
+        <p:txBody>
+          <a:bodyPr/>
+          <a:p/>
+        </p:txBody>
+      </p:sp>
+      <p:pic>
+        <p:nvPicPr>
+          <p:cNvPr id="12" name="Image 1" descr="/tmp/claude-0/-home-user-SMX-0226-Seguretat-Informatica/a92ac1fc-9241-54c9-9c87-68470d7a571f/scratchpad/aa2/icon_terminal.png">    </p:cNvPr>
+          <p:cNvPicPr>
+            <a:picLocks noChangeAspect="1"/>
+          </p:cNvPicPr>
+          <p:nvPr/>
+        </p:nvPicPr>
+        <p:blipFill>
+          <a:blip r:embed="rId3"/>
+          <a:stretch>
+            <a:fillRect/>
+          </a:stretch>
+        </p:blipFill>
+        <p:spPr>
+          <a:xfrm>
+            <a:off x="6873087" y="2209800"/>
+            <a:ext cx="402336" cy="402336"/>
+          </a:xfrm>
+          <a:prstGeom prst="rect">
+            <a:avLst/>
+          </a:prstGeom>
+        </p:spPr>
+      </p:pic>
+      <p:sp>
+        <p:nvSpPr>
+          <p:cNvPr id="13" name="Text 9"/>
+          <p:cNvSpPr txBox="1"/>
+          <p:nvPr/>
+        </p:nvSpPr>
+        <p:spPr>
+          <a:xfrm>
+            <a:off x="7668616" y="2243328"/>
+            <a:ext cx="3483864" cy="335280"/>
+          </a:xfrm>
+          <a:prstGeom prst="rect">
+            <a:avLst/>
+          </a:prstGeom>
+          <a:noFill/>
+          <a:ln/>
+        </p:spPr>
+        <p:txBody>
+          <a:bodyPr wrap="square" lIns="0" tIns="0" rIns="0" bIns="0" rtlCol="0" anchor="ctr"/>
+          <a:lstStyle/>
+          <a:p>
+            <a:pPr indent="0" marL="0">
+              <a:buNone/>
+            </a:pPr>
+            <a:r>
+              <a:rPr lang="en-US" sz="2200" b="1" dirty="0">
+                <a:solidFill>
+                  <a:srgbClr val="16242E"/>
+                </a:solidFill>
+                <a:latin typeface="Cambria" pitchFamily="34" charset="0"/>
+                <a:ea typeface="Cambria" pitchFamily="34" charset="-122"/>
+                <a:cs typeface="Cambria" pitchFamily="34" charset="-120"/>
+              </a:rPr>
+              <a:t>Amb bits: l'operació XOR</a:t>
+            </a:r>
+            <a:endParaRPr lang="en-US" sz="2200" dirty="0"/>
+          </a:p>
+        </p:txBody>
+      </p:sp>
+      <p:sp>
+        <p:nvSpPr>
+          <p:cNvPr id="14" name="Text 10"/>
+          <p:cNvSpPr txBox="1"/>
+          <p:nvPr/>
+        </p:nvSpPr>
+        <p:spPr>
+          <a:xfrm>
+            <a:off x="6708496" y="3069336"/>
+            <a:ext cx="4443984" cy="2487168"/>
+          </a:xfrm>
+          <a:prstGeom prst="rect">
+            <a:avLst/>
+          </a:prstGeom>
+          <a:noFill/>
+          <a:ln/>
+        </p:spPr>
+        <p:txBody>
+          <a:bodyPr wrap="square" lIns="0" tIns="0" rIns="0" bIns="0" rtlCol="0" anchor="t"/>
+          <a:lstStyle/>
+          <a:p>
+            <a:pPr indent="0" marL="0">
+              <a:lnSpc>
+                <a:spcPts val="2448"/>
+              </a:lnSpc>
+              <a:buNone/>
+            </a:pPr>
+            <a:r>
+              <a:rPr lang="en-US" sz="1800" dirty="0" b="0">
+                <a:solidFill>
+                  <a:srgbClr val="5B6B77"/>
+                </a:solidFill>
+                <a:ea typeface="Calibri" pitchFamily="34" charset="-122"/>
+                <a:latin typeface="Consolas"/>
+              </a:rPr>
+              <a:t>Disc 1:   1 0 1 1</a:t>
+            </a:r>
+            <a:endParaRPr lang="en-US" sz="1800" dirty="0"/>
+          </a:p>
+          <a:p>
+            <a:pPr indent="0" marL="0">
+              <a:lnSpc>
+                <a:spcPts val="2448"/>
+              </a:lnSpc>
+              <a:buNone/>
+            </a:pPr>
+            <a:r>
+              <a:rPr lang="en-US" sz="1800" dirty="0" b="0">
+                <a:solidFill>
+                  <a:srgbClr val="5B6B77"/>
+                </a:solidFill>
+                <a:ea typeface="Calibri" pitchFamily="34" charset="-122"/>
+                <a:latin typeface="Consolas"/>
+              </a:rPr>
+              <a:t>Disc 2:   0 1 1 0</a:t>
+            </a:r>
+            <a:endParaRPr lang="en-US" sz="1800" dirty="0"/>
+          </a:p>
+          <a:p>
+            <a:pPr indent="0" marL="0">
+              <a:lnSpc>
+                <a:spcPts val="2448"/>
+              </a:lnSpc>
+              <a:buNone/>
+            </a:pPr>
+            <a:r>
+              <a:rPr lang="en-US" sz="1800" dirty="0" b="1">
+                <a:solidFill>
+                  <a:srgbClr val="5B6B77"/>
+                </a:solidFill>
+                <a:ea typeface="Calibri" pitchFamily="34" charset="-122"/>
+                <a:latin typeface="Consolas"/>
+              </a:rPr>
+              <a:t>Paritat:  1 1 0 1</a:t>
+            </a:r>
+            <a:endParaRPr lang="en-US" sz="1800" dirty="0"/>
+          </a:p>
+          <a:p>
+            <a:pPr indent="0" marL="0">
+              <a:lnSpc>
+                <a:spcPts val="2448"/>
+              </a:lnSpc>
+              <a:buNone/>
+            </a:pPr>
+            <a:r>
+              <a:rPr lang="en-US" sz="1800" dirty="0" b="0">
+                <a:solidFill>
+                  <a:srgbClr val="5B6B77"/>
+                </a:solidFill>
+                <a:latin typeface="Calibri" pitchFamily="34" charset="0"/>
+                <a:ea typeface="Calibri" pitchFamily="34" charset="-122"/>
+                <a:cs typeface="Calibri" pitchFamily="34" charset="-120"/>
+              </a:rPr>
+              <a:t>XOR: 1 si els bits són diferents, 0 si són iguals.</a:t>
+            </a:r>
+            <a:endParaRPr lang="en-US" sz="1800" dirty="0"/>
+          </a:p>
+          <a:p>
+            <a:pPr indent="0" marL="0">
+              <a:lnSpc>
+                <a:spcPts val="2448"/>
+              </a:lnSpc>
+              <a:buNone/>
+            </a:pPr>
+            <a:r>
+              <a:rPr lang="en-US" sz="1800" dirty="0" b="1">
+                <a:solidFill>
+                  <a:srgbClr val="5B6B77"/>
+                </a:solidFill>
+                <a:latin typeface="Calibri" pitchFamily="34" charset="0"/>
+                <a:ea typeface="Calibri" pitchFamily="34" charset="-122"/>
+                <a:cs typeface="Calibri" pitchFamily="34" charset="-120"/>
+              </a:rPr>
+              <a:t>Si falla el disc 1: disc 2 XOR paritat = 1 0 1 1 → recuperat.</a:t>
+            </a:r>
+            <a:endParaRPr lang="en-US" sz="1800" dirty="0"/>
           </a:p>
         </p:txBody>
       </p:sp>

--- a/RA2 - Emmagatzematge i copies de seguretat/AA2 - Sistemes demmagatzematge/RA2_AA2_Sistemes_emmagatzematge.pptx
+++ b/RA2 - Emmagatzematge i copies de seguretat/AA2 - Sistemes demmagatzematge/RA2_AA2_Sistemes_emmagatzematge.pptx
@@ -4775,6 +4775,639 @@
 </file>
 
 <file path=ppt/slides/slide16.xml><?xml version="1.0" encoding="utf-8"?>
+<p:sld xmlns:a="http://schemas.openxmlformats.org/drawingml/2006/main" xmlns:p="http://schemas.openxmlformats.org/presentationml/2006/main" xmlns:r="http://schemas.openxmlformats.org/officeDocument/2006/relationships">
+  <p:cSld>
+    <p:bg>
+      <p:bgPr>
+        <a:solidFill>
+          <a:srgbClr val="F4F7F9"/>
+        </a:solidFill>
+      </p:bgPr>
+    </p:bg>
+    <p:spTree>
+      <p:nvGrpSpPr>
+        <p:cNvPr id="1" name=""/>
+        <p:cNvGrpSpPr/>
+        <p:nvPr/>
+      </p:nvGrpSpPr>
+      <p:grpSpPr/>
+      <p:sp>
+        <p:nvSpPr>
+          <p:cNvPr id="2" name="Text 0"/>
+          <p:cNvSpPr txBox="1"/>
+          <p:nvPr/>
+        </p:nvSpPr>
+        <p:spPr>
+          <a:xfrm>
+            <a:off x="548640" y="457200"/>
+            <a:ext cx="9144000" cy="365760"/>
+          </a:xfrm>
+          <a:prstGeom prst="rect">
+            <a:avLst/>
+          </a:prstGeom>
+          <a:noFill/>
+          <a:ln/>
+        </p:spPr>
+        <p:txBody>
+          <a:bodyPr wrap="square" lIns="0" tIns="0" rIns="0" bIns="0" rtlCol="0" anchor="ctr"/>
+          <a:lstStyle/>
+          <a:p>
+            <a:pPr indent="0" marL="0">
+              <a:buNone/>
+            </a:pPr>
+            <a:r>
+              <a:rPr lang="en-US" sz="1300" b="1" spc="200" kern="0" dirty="0">
+                <a:solidFill>
+                  <a:srgbClr val="F2A541"/>
+                </a:solidFill>
+                <a:latin typeface="Calibri" pitchFamily="34" charset="0"/>
+                <a:ea typeface="Calibri" pitchFamily="34" charset="-122"/>
+                <a:cs typeface="Calibri" pitchFamily="34" charset="-120"/>
+              </a:rPr>
+              <a:t>RAID 5 · LA PARITAT</a:t>
+            </a:r>
+            <a:endParaRPr lang="en-US" sz="1300" dirty="0"/>
+          </a:p>
+        </p:txBody>
+      </p:sp>
+      <p:sp>
+        <p:nvSpPr>
+          <p:cNvPr id="3" name="Text 1"/>
+          <p:cNvSpPr txBox="1"/>
+          <p:nvPr/>
+        </p:nvSpPr>
+        <p:spPr>
+          <a:xfrm>
+            <a:off x="548640" y="822960"/>
+            <a:ext cx="10789920" cy="640080"/>
+          </a:xfrm>
+          <a:prstGeom prst="rect">
+            <a:avLst/>
+          </a:prstGeom>
+          <a:noFill/>
+          <a:ln/>
+        </p:spPr>
+        <p:txBody>
+          <a:bodyPr wrap="square" lIns="0" tIns="0" rIns="0" bIns="0" rtlCol="0" anchor="ctr"/>
+          <a:lstStyle/>
+          <a:p>
+            <a:pPr indent="0" marL="0">
+              <a:buNone/>
+            </a:pPr>
+            <a:r>
+              <a:rPr lang="en-US" sz="2800" b="1" dirty="0">
+                <a:solidFill>
+                  <a:srgbClr val="16242E"/>
+                </a:solidFill>
+                <a:latin typeface="Cambria" pitchFamily="34" charset="0"/>
+                <a:ea typeface="Cambria" pitchFamily="34" charset="-122"/>
+                <a:cs typeface="Cambria" pitchFamily="34" charset="-120"/>
+              </a:rPr>
+              <a:t>Com funciona la paritat?</a:t>
+            </a:r>
+            <a:endParaRPr lang="en-US" sz="2800" dirty="0"/>
+          </a:p>
+        </p:txBody>
+      </p:sp>
+      <p:sp>
+        <p:nvSpPr>
+          <p:cNvPr id="4" name="Text 2"/>
+          <p:cNvSpPr txBox="1"/>
+          <p:nvPr/>
+        </p:nvSpPr>
+        <p:spPr>
+          <a:xfrm>
+            <a:off x="11551615" y="6446520"/>
+            <a:ext cx="457200" cy="274320"/>
+          </a:xfrm>
+          <a:prstGeom prst="rect">
+            <a:avLst/>
+          </a:prstGeom>
+          <a:noFill/>
+          <a:ln/>
+        </p:spPr>
+        <p:txBody>
+          <a:bodyPr wrap="square" lIns="0" tIns="0" rIns="0" bIns="0" rtlCol="0" anchor="ctr"/>
+          <a:lstStyle/>
+          <a:p>
+            <a:pPr algn="r" indent="0" marL="0">
+              <a:buNone/>
+            </a:pPr>
+            <a:r>
+              <a:rPr lang="en-US" sz="1100" dirty="0">
+                <a:solidFill>
+                  <a:srgbClr val="5B6B77"/>
+                </a:solidFill>
+                <a:latin typeface="Calibri" pitchFamily="34" charset="0"/>
+                <a:ea typeface="Calibri" pitchFamily="34" charset="-122"/>
+                <a:cs typeface="Calibri" pitchFamily="34" charset="-120"/>
+              </a:rPr>
+              <a:t>16</a:t>
+            </a:r>
+            <a:endParaRPr lang="en-US" sz="1100" dirty="0"/>
+          </a:p>
+        </p:txBody>
+      </p:sp>
+      <p:sp>
+        <p:nvSpPr>
+          <p:cNvPr id="5" name="Shape 3"/>
+          <p:cNvSpPr/>
+          <p:nvPr/>
+        </p:nvSpPr>
+        <p:spPr>
+          <a:xfrm>
+            <a:off x="655168" y="1661160"/>
+            <a:ext cx="5212080" cy="4279392"/>
+          </a:xfrm>
+          <a:prstGeom prst="roundRect">
+            <a:avLst>
+              <a:gd name="adj" fmla="val 2791"/>
+            </a:avLst>
+          </a:prstGeom>
+          <a:solidFill>
+            <a:srgbClr val="FFFFFF"/>
+          </a:solidFill>
+          <a:ln w="12700">
+            <a:solidFill>
+              <a:srgbClr val="E2E8ED"/>
+            </a:solidFill>
+            <a:prstDash val="solid"/>
+          </a:ln>
+          <a:effectLst>
+            <a:outerShdw sx="100000" sy="100000" kx="0" ky="0" algn="bl" rotWithShape="0" blurRad="101600" dist="38100" dir="5400000">
+              <a:srgbClr val="16242E">
+                <a:alpha val="12000"/>
+              </a:srgbClr>
+            </a:outerShdw>
+          </a:effectLst>
+        </p:spPr>
+        <p:txBody>
+          <a:bodyPr/>
+          <a:p/>
+        </p:txBody>
+      </p:sp>
+      <p:sp>
+        <p:nvSpPr>
+          <p:cNvPr id="6" name="Shape 4"/>
+          <p:cNvSpPr/>
+          <p:nvPr/>
+        </p:nvSpPr>
+        <p:spPr>
+          <a:xfrm>
+            <a:off x="1039216" y="2045208"/>
+            <a:ext cx="731520" cy="731520"/>
+          </a:xfrm>
+          <a:prstGeom prst="ellipse">
+            <a:avLst/>
+          </a:prstGeom>
+          <a:solidFill>
+            <a:srgbClr val="0B1B29"/>
+          </a:solidFill>
+          <a:ln/>
+        </p:spPr>
+        <p:txBody>
+          <a:bodyPr/>
+          <a:p/>
+        </p:txBody>
+      </p:sp>
+      <p:pic>
+        <p:nvPicPr>
+          <p:cNvPr id="7" name="Image 0" descr="/tmp/claude-0/-home-user-SMX-0226-Seguretat-Informatica/a92ac1fc-9241-54c9-9c87-68470d7a571f/scratchpad/aa2/icon_heartbeat.png">    </p:cNvPr>
+          <p:cNvPicPr>
+            <a:picLocks noChangeAspect="1"/>
+          </p:cNvPicPr>
+          <p:nvPr/>
+        </p:nvPicPr>
+        <p:blipFill>
+          <a:blip r:embed="rId4"/>
+          <a:stretch>
+            <a:fillRect/>
+          </a:stretch>
+        </p:blipFill>
+        <p:spPr>
+          <a:xfrm>
+            <a:off x="1203808" y="2209800"/>
+            <a:ext cx="402336" cy="402336"/>
+          </a:xfrm>
+          <a:prstGeom prst="rect">
+            <a:avLst/>
+          </a:prstGeom>
+        </p:spPr>
+      </p:pic>
+      <p:sp>
+        <p:nvSpPr>
+          <p:cNvPr id="8" name="Text 5"/>
+          <p:cNvSpPr txBox="1"/>
+          <p:nvPr/>
+        </p:nvSpPr>
+        <p:spPr>
+          <a:xfrm>
+            <a:off x="1999336" y="2243328"/>
+            <a:ext cx="3483864" cy="335280"/>
+          </a:xfrm>
+          <a:prstGeom prst="rect">
+            <a:avLst/>
+          </a:prstGeom>
+          <a:noFill/>
+          <a:ln/>
+        </p:spPr>
+        <p:txBody>
+          <a:bodyPr wrap="square" lIns="0" tIns="0" rIns="0" bIns="0" rtlCol="0" anchor="ctr"/>
+          <a:lstStyle/>
+          <a:p>
+            <a:pPr indent="0" marL="0">
+              <a:buNone/>
+            </a:pPr>
+            <a:r>
+              <a:rPr lang="en-US" sz="2200" b="1" dirty="0">
+                <a:solidFill>
+                  <a:srgbClr val="16242E"/>
+                </a:solidFill>
+                <a:latin typeface="Cambria" pitchFamily="34" charset="0"/>
+                <a:ea typeface="Cambria" pitchFamily="34" charset="-122"/>
+                <a:cs typeface="Cambria" pitchFamily="34" charset="-120"/>
+              </a:rPr>
+              <a:t>Analogia amb sumes</a:t>
+            </a:r>
+            <a:endParaRPr lang="en-US" sz="2200" dirty="0"/>
+          </a:p>
+        </p:txBody>
+      </p:sp>
+      <p:sp>
+        <p:nvSpPr>
+          <p:cNvPr id="9" name="Text 6"/>
+          <p:cNvSpPr txBox="1"/>
+          <p:nvPr/>
+        </p:nvSpPr>
+        <p:spPr>
+          <a:xfrm>
+            <a:off x="1039216" y="3069336"/>
+            <a:ext cx="4443984" cy="2176272"/>
+          </a:xfrm>
+          <a:prstGeom prst="rect">
+            <a:avLst/>
+          </a:prstGeom>
+          <a:noFill/>
+          <a:ln/>
+        </p:spPr>
+        <p:txBody>
+          <a:bodyPr wrap="square" lIns="0" tIns="0" rIns="0" bIns="0" rtlCol="0" anchor="t"/>
+          <a:lstStyle/>
+          <a:p>
+            <a:pPr indent="0" marL="0">
+              <a:lnSpc>
+                <a:spcPts val="2448"/>
+              </a:lnSpc>
+              <a:buNone/>
+            </a:pPr>
+            <a:r>
+              <a:rPr lang="en-US" sz="1800" dirty="0" b="0">
+                <a:solidFill>
+                  <a:srgbClr val="5B6B77"/>
+                </a:solidFill>
+                <a:latin typeface="Calibri" pitchFamily="34" charset="0"/>
+                <a:ea typeface="Calibri" pitchFamily="34" charset="-122"/>
+                <a:cs typeface="Calibri" pitchFamily="34" charset="-120"/>
+              </a:rPr>
+              <a:t>Caixa A = 3, caixa B = 5 i, a la caixa C, la paritat: 3 + 5 = 8.</a:t>
+            </a:r>
+            <a:endParaRPr lang="en-US" sz="1800" dirty="0"/>
+          </a:p>
+          <a:p>
+            <a:pPr indent="0" marL="0">
+              <a:lnSpc>
+                <a:spcPts val="2448"/>
+              </a:lnSpc>
+              <a:buNone/>
+            </a:pPr>
+            <a:r>
+              <a:rPr lang="en-US" sz="1800" dirty="0" b="0">
+                <a:solidFill>
+                  <a:srgbClr val="5B6B77"/>
+                </a:solidFill>
+                <a:latin typeface="Calibri" pitchFamily="34" charset="0"/>
+                <a:ea typeface="Calibri" pitchFamily="34" charset="-122"/>
+                <a:cs typeface="Calibri" pitchFamily="34" charset="-120"/>
+              </a:rPr>
+              <a:t>Es perd A → 8 − 5 = 3</a:t>
+            </a:r>
+            <a:endParaRPr lang="en-US" sz="1800" dirty="0"/>
+          </a:p>
+          <a:p>
+            <a:pPr indent="0" marL="0">
+              <a:lnSpc>
+                <a:spcPts val="2448"/>
+              </a:lnSpc>
+              <a:buNone/>
+            </a:pPr>
+            <a:r>
+              <a:rPr lang="en-US" sz="1800" dirty="0" b="0">
+                <a:solidFill>
+                  <a:srgbClr val="5B6B77"/>
+                </a:solidFill>
+                <a:latin typeface="Calibri" pitchFamily="34" charset="0"/>
+                <a:ea typeface="Calibri" pitchFamily="34" charset="-122"/>
+                <a:cs typeface="Calibri" pitchFamily="34" charset="-120"/>
+              </a:rPr>
+              <a:t>Es perd B → 8 − 3 = 5</a:t>
+            </a:r>
+            <a:endParaRPr lang="en-US" sz="1800" dirty="0"/>
+          </a:p>
+          <a:p>
+            <a:pPr indent="0" marL="0">
+              <a:lnSpc>
+                <a:spcPts val="2448"/>
+              </a:lnSpc>
+              <a:buNone/>
+            </a:pPr>
+            <a:r>
+              <a:rPr lang="en-US" sz="1800" dirty="0" b="0">
+                <a:solidFill>
+                  <a:srgbClr val="5B6B77"/>
+                </a:solidFill>
+                <a:latin typeface="Calibri" pitchFamily="34" charset="0"/>
+                <a:ea typeface="Calibri" pitchFamily="34" charset="-122"/>
+                <a:cs typeface="Calibri" pitchFamily="34" charset="-120"/>
+              </a:rPr>
+              <a:t>Es perd C → 3 + 5 = 8</a:t>
+            </a:r>
+            <a:endParaRPr lang="en-US" sz="1800" dirty="0"/>
+          </a:p>
+          <a:p>
+            <a:pPr indent="0" marL="0">
+              <a:lnSpc>
+                <a:spcPts val="2448"/>
+              </a:lnSpc>
+              <a:buNone/>
+            </a:pPr>
+            <a:r>
+              <a:rPr lang="en-US" sz="1800" dirty="0" b="1">
+                <a:solidFill>
+                  <a:srgbClr val="5B6B77"/>
+                </a:solidFill>
+                <a:latin typeface="Calibri" pitchFamily="34" charset="0"/>
+                <a:ea typeface="Calibri" pitchFamily="34" charset="-122"/>
+                <a:cs typeface="Calibri" pitchFamily="34" charset="-120"/>
+              </a:rPr>
+              <a:t>Es perden dues caixes → impossible: el RAID 5 només suporta 1 fallada.</a:t>
+            </a:r>
+            <a:endParaRPr lang="en-US" sz="1800" dirty="0"/>
+          </a:p>
+        </p:txBody>
+      </p:sp>
+      <p:sp>
+        <p:nvSpPr>
+          <p:cNvPr id="10" name="Shape 7"/>
+          <p:cNvSpPr/>
+          <p:nvPr/>
+        </p:nvSpPr>
+        <p:spPr>
+          <a:xfrm>
+            <a:off x="6324448" y="1661160"/>
+            <a:ext cx="5212080" cy="4279392"/>
+          </a:xfrm>
+          <a:prstGeom prst="roundRect">
+            <a:avLst>
+              <a:gd name="adj" fmla="val 2791"/>
+            </a:avLst>
+          </a:prstGeom>
+          <a:solidFill>
+            <a:srgbClr val="FFFFFF"/>
+          </a:solidFill>
+          <a:ln w="12700">
+            <a:solidFill>
+              <a:srgbClr val="E2E8ED"/>
+            </a:solidFill>
+            <a:prstDash val="solid"/>
+          </a:ln>
+          <a:effectLst>
+            <a:outerShdw sx="100000" sy="100000" kx="0" ky="0" algn="bl" rotWithShape="0" blurRad="101600" dist="38100" dir="5400000">
+              <a:srgbClr val="16242E">
+                <a:alpha val="12000"/>
+              </a:srgbClr>
+            </a:outerShdw>
+          </a:effectLst>
+        </p:spPr>
+        <p:txBody>
+          <a:bodyPr/>
+          <a:p/>
+        </p:txBody>
+      </p:sp>
+      <p:sp>
+        <p:nvSpPr>
+          <p:cNvPr id="11" name="Shape 8"/>
+          <p:cNvSpPr/>
+          <p:nvPr/>
+        </p:nvSpPr>
+        <p:spPr>
+          <a:xfrm>
+            <a:off x="6708496" y="2045208"/>
+            <a:ext cx="731520" cy="731520"/>
+          </a:xfrm>
+          <a:prstGeom prst="ellipse">
+            <a:avLst/>
+          </a:prstGeom>
+          <a:solidFill>
+            <a:srgbClr val="0B1B29"/>
+          </a:solidFill>
+          <a:ln/>
+        </p:spPr>
+        <p:txBody>
+          <a:bodyPr/>
+          <a:p/>
+        </p:txBody>
+      </p:sp>
+      <p:pic>
+        <p:nvPicPr>
+          <p:cNvPr id="12" name="Image 1" descr="/tmp/claude-0/-home-user-SMX-0226-Seguretat-Informatica/a92ac1fc-9241-54c9-9c87-68470d7a571f/scratchpad/aa2/icon_terminal.png">    </p:cNvPr>
+          <p:cNvPicPr>
+            <a:picLocks noChangeAspect="1"/>
+          </p:cNvPicPr>
+          <p:nvPr/>
+        </p:nvPicPr>
+        <p:blipFill>
+          <a:blip r:embed="rId3"/>
+          <a:stretch>
+            <a:fillRect/>
+          </a:stretch>
+        </p:blipFill>
+        <p:spPr>
+          <a:xfrm>
+            <a:off x="6873087" y="2209800"/>
+            <a:ext cx="402336" cy="402336"/>
+          </a:xfrm>
+          <a:prstGeom prst="rect">
+            <a:avLst/>
+          </a:prstGeom>
+        </p:spPr>
+      </p:pic>
+      <p:sp>
+        <p:nvSpPr>
+          <p:cNvPr id="13" name="Text 9"/>
+          <p:cNvSpPr txBox="1"/>
+          <p:nvPr/>
+        </p:nvSpPr>
+        <p:spPr>
+          <a:xfrm>
+            <a:off x="7668616" y="2243328"/>
+            <a:ext cx="3483864" cy="335280"/>
+          </a:xfrm>
+          <a:prstGeom prst="rect">
+            <a:avLst/>
+          </a:prstGeom>
+          <a:noFill/>
+          <a:ln/>
+        </p:spPr>
+        <p:txBody>
+          <a:bodyPr wrap="square" lIns="0" tIns="0" rIns="0" bIns="0" rtlCol="0" anchor="ctr"/>
+          <a:lstStyle/>
+          <a:p>
+            <a:pPr indent="0" marL="0">
+              <a:buNone/>
+            </a:pPr>
+            <a:r>
+              <a:rPr lang="en-US" sz="2200" b="1" dirty="0">
+                <a:solidFill>
+                  <a:srgbClr val="16242E"/>
+                </a:solidFill>
+                <a:latin typeface="Cambria" pitchFamily="34" charset="0"/>
+                <a:ea typeface="Cambria" pitchFamily="34" charset="-122"/>
+                <a:cs typeface="Cambria" pitchFamily="34" charset="-120"/>
+              </a:rPr>
+              <a:t>Amb bits: l'operació XOR</a:t>
+            </a:r>
+            <a:endParaRPr lang="en-US" sz="2200" dirty="0"/>
+          </a:p>
+        </p:txBody>
+      </p:sp>
+      <p:sp>
+        <p:nvSpPr>
+          <p:cNvPr id="14" name="Text 10"/>
+          <p:cNvSpPr txBox="1"/>
+          <p:nvPr/>
+        </p:nvSpPr>
+        <p:spPr>
+          <a:xfrm>
+            <a:off x="6708496" y="3069336"/>
+            <a:ext cx="4443984" cy="2487168"/>
+          </a:xfrm>
+          <a:prstGeom prst="rect">
+            <a:avLst/>
+          </a:prstGeom>
+          <a:noFill/>
+          <a:ln/>
+        </p:spPr>
+        <p:txBody>
+          <a:bodyPr wrap="square" lIns="0" tIns="0" rIns="0" bIns="0" rtlCol="0" anchor="t"/>
+          <a:lstStyle/>
+          <a:p>
+            <a:pPr indent="0" marL="0">
+              <a:lnSpc>
+                <a:spcPts val="2448"/>
+              </a:lnSpc>
+              <a:buNone/>
+            </a:pPr>
+            <a:r>
+              <a:rPr lang="en-US" sz="1800" dirty="0" b="0">
+                <a:solidFill>
+                  <a:srgbClr val="5B6B77"/>
+                </a:solidFill>
+                <a:ea typeface="Calibri" pitchFamily="34" charset="-122"/>
+                <a:latin typeface="Consolas"/>
+              </a:rPr>
+              <a:t>Disc 1:   1 0 1 1</a:t>
+            </a:r>
+            <a:endParaRPr lang="en-US" sz="1800" dirty="0"/>
+          </a:p>
+          <a:p>
+            <a:pPr indent="0" marL="0">
+              <a:lnSpc>
+                <a:spcPts val="2448"/>
+              </a:lnSpc>
+              <a:buNone/>
+            </a:pPr>
+            <a:r>
+              <a:rPr lang="en-US" sz="1800" dirty="0" b="0">
+                <a:solidFill>
+                  <a:srgbClr val="5B6B77"/>
+                </a:solidFill>
+                <a:ea typeface="Calibri" pitchFamily="34" charset="-122"/>
+                <a:latin typeface="Consolas"/>
+              </a:rPr>
+              <a:t>Disc 2:   0 1 1 0</a:t>
+            </a:r>
+            <a:endParaRPr lang="en-US" sz="1800" dirty="0"/>
+          </a:p>
+          <a:p>
+            <a:pPr indent="0" marL="0">
+              <a:lnSpc>
+                <a:spcPts val="2448"/>
+              </a:lnSpc>
+              <a:buNone/>
+            </a:pPr>
+            <a:r>
+              <a:rPr lang="en-US" sz="1800" dirty="0" b="1">
+                <a:solidFill>
+                  <a:srgbClr val="5B6B77"/>
+                </a:solidFill>
+                <a:ea typeface="Calibri" pitchFamily="34" charset="-122"/>
+                <a:latin typeface="Consolas"/>
+              </a:rPr>
+              <a:t>Paritat:  1 1 0 1</a:t>
+            </a:r>
+            <a:endParaRPr lang="en-US" sz="1800" dirty="0"/>
+          </a:p>
+          <a:p>
+            <a:pPr indent="0" marL="0">
+              <a:lnSpc>
+                <a:spcPts val="2448"/>
+              </a:lnSpc>
+              <a:buNone/>
+            </a:pPr>
+            <a:r>
+              <a:rPr lang="en-US" sz="1800" dirty="0" b="0">
+                <a:solidFill>
+                  <a:srgbClr val="5B6B77"/>
+                </a:solidFill>
+                <a:latin typeface="Calibri" pitchFamily="34" charset="0"/>
+                <a:ea typeface="Calibri" pitchFamily="34" charset="-122"/>
+                <a:cs typeface="Calibri" pitchFamily="34" charset="-120"/>
+              </a:rPr>
+              <a:t>XOR: 1 si els bits són diferents, 0 si són iguals.</a:t>
+            </a:r>
+            <a:endParaRPr lang="en-US" sz="1800" dirty="0"/>
+          </a:p>
+          <a:p>
+            <a:pPr indent="0" marL="0">
+              <a:lnSpc>
+                <a:spcPts val="2448"/>
+              </a:lnSpc>
+              <a:buNone/>
+            </a:pPr>
+            <a:r>
+              <a:rPr lang="en-US" sz="1800" dirty="0" b="1">
+                <a:solidFill>
+                  <a:srgbClr val="5B6B77"/>
+                </a:solidFill>
+                <a:latin typeface="Calibri" pitchFamily="34" charset="0"/>
+                <a:ea typeface="Calibri" pitchFamily="34" charset="-122"/>
+                <a:cs typeface="Calibri" pitchFamily="34" charset="-120"/>
+              </a:rPr>
+              <a:t>Si falla el disc 1: disc 2 XOR paritat = 1 0 1 1 → recuperat.</a:t>
+            </a:r>
+            <a:endParaRPr lang="en-US" sz="1800" dirty="0"/>
+          </a:p>
+        </p:txBody>
+      </p:sp>
+    </p:spTree>
+  </p:cSld>
+  <p:clrMapOvr>
+    <a:masterClrMapping/>
+  </p:clrMapOvr>
+</p:sld>
+</file>
+
+<file path=ppt/slides/slide17.xml><?xml version="1.0" encoding="utf-8"?>
 <p:sld xmlns:a="http://schemas.openxmlformats.org/drawingml/2006/main" xmlns:r="http://schemas.openxmlformats.org/officeDocument/2006/relationships" xmlns:p="http://schemas.openxmlformats.org/presentationml/2006/main">
   <p:cSld name="Slide 9">
     <p:bg>
@@ -5257,7 +5890,7 @@
 </p:sld>
 </file>
 
-<file path=ppt/slides/slide17.xml><?xml version="1.0" encoding="utf-8"?>
+<file path=ppt/slides/slide18.xml><?xml version="1.0" encoding="utf-8"?>
 <p:sld xmlns:a="http://schemas.openxmlformats.org/drawingml/2006/main" xmlns:p="http://schemas.openxmlformats.org/presentationml/2006/main" xmlns:r="http://schemas.openxmlformats.org/officeDocument/2006/relationships">
   <p:cSld>
     <p:bg>
@@ -5446,7 +6079,7 @@
 </p:sld>
 </file>
 
-<file path=ppt/slides/slide18.xml><?xml version="1.0" encoding="utf-8"?>
+<file path=ppt/slides/slide19.xml><?xml version="1.0" encoding="utf-8"?>
 <p:sld xmlns:a="http://schemas.openxmlformats.org/drawingml/2006/main" xmlns:r="http://schemas.openxmlformats.org/officeDocument/2006/relationships" xmlns:p="http://schemas.openxmlformats.org/presentationml/2006/main">
   <p:cSld name="Slide 10">
     <p:bg>
@@ -8561,249 +9194,6 @@
 </p:sld>
 </file>
 
-<file path=ppt/slides/slide19.xml><?xml version="1.0" encoding="utf-8"?>
-<p:sld xmlns:a="http://schemas.openxmlformats.org/drawingml/2006/main" xmlns:r="http://schemas.openxmlformats.org/officeDocument/2006/relationships" xmlns:p="http://schemas.openxmlformats.org/presentationml/2006/main">
-  <p:cSld name="Slide 11">
-    <p:bg>
-      <p:bgPr>
-        <a:solidFill>
-          <a:srgbClr val="F4F7F9"/>
-        </a:solidFill>
-      </p:bgPr>
-    </p:bg>
-    <p:spTree>
-      <p:nvGrpSpPr>
-        <p:cNvPr id="1" name=""/>
-        <p:cNvGrpSpPr/>
-        <p:nvPr/>
-      </p:nvGrpSpPr>
-      <p:grpSpPr>
-        <a:xfrm>
-          <a:off x="0" y="0"/>
-          <a:ext cx="0" cy="0"/>
-          <a:chOff x="0" y="0"/>
-          <a:chExt cx="0" cy="0"/>
-        </a:xfrm>
-      </p:grpSpPr>
-      <p:sp>
-        <p:nvSpPr>
-          <p:cNvPr id="2" name="Text 0"/>
-          <p:cNvSpPr txBox="1"/>
-          <p:nvPr/>
-        </p:nvSpPr>
-        <p:spPr>
-          <a:xfrm>
-            <a:off x="548640" y="457200"/>
-            <a:ext cx="9144000" cy="365760"/>
-          </a:xfrm>
-          <a:prstGeom prst="rect">
-            <a:avLst/>
-          </a:prstGeom>
-          <a:noFill/>
-          <a:ln/>
-        </p:spPr>
-        <p:txBody>
-          <a:bodyPr wrap="square" lIns="0" tIns="0" rIns="0" bIns="0" rtlCol="0" anchor="ctr"/>
-          <a:lstStyle/>
-          <a:p>
-            <a:pPr indent="0" marL="0">
-              <a:buNone/>
-            </a:pPr>
-            <a:r>
-              <a:rPr lang="en-US" sz="1300" b="1" spc="200" kern="0" dirty="0">
-                <a:solidFill>
-                  <a:srgbClr val="F2A541"/>
-                </a:solidFill>
-                <a:latin typeface="Calibri" pitchFamily="34" charset="0"/>
-                <a:ea typeface="Calibri" pitchFamily="34" charset="-122"/>
-                <a:cs typeface="Calibri" pitchFamily="34" charset="-120"/>
-              </a:rPr>
-              <a:t>CENTRALITZAR L'EMMAGATZEMATGE</a:t>
-            </a:r>
-            <a:endParaRPr lang="en-US" sz="1300" dirty="0"/>
-          </a:p>
-        </p:txBody>
-      </p:sp>
-      <p:sp>
-        <p:nvSpPr>
-          <p:cNvPr id="3" name="Text 1"/>
-          <p:cNvSpPr txBox="1"/>
-          <p:nvPr/>
-        </p:nvSpPr>
-        <p:spPr>
-          <a:xfrm>
-            <a:off x="548640" y="822960"/>
-            <a:ext cx="10789920" cy="640080"/>
-          </a:xfrm>
-          <a:prstGeom prst="rect">
-            <a:avLst/>
-          </a:prstGeom>
-          <a:noFill/>
-          <a:ln/>
-        </p:spPr>
-        <p:txBody>
-          <a:bodyPr wrap="square" lIns="0" tIns="0" rIns="0" bIns="0" rtlCol="0" anchor="ctr"/>
-          <a:lstStyle/>
-          <a:p>
-            <a:pPr indent="0" marL="0">
-              <a:buNone/>
-            </a:pPr>
-            <a:r>
-              <a:rPr lang="en-US" sz="2800" b="1" dirty="0">
-                <a:solidFill>
-                  <a:srgbClr val="16242E"/>
-                </a:solidFill>
-                <a:latin typeface="Cambria" pitchFamily="34" charset="0"/>
-                <a:ea typeface="Cambria" pitchFamily="34" charset="-122"/>
-                <a:cs typeface="Cambria" pitchFamily="34" charset="-120"/>
-              </a:rPr>
-              <a:t>Per què les dades no haurien d'estar a les estacions de treball</a:t>
-            </a:r>
-            <a:endParaRPr lang="en-US" sz="2800" dirty="0"/>
-          </a:p>
-        </p:txBody>
-      </p:sp>
-      <p:sp>
-        <p:nvSpPr>
-          <p:cNvPr id="4" name="Text 2"/>
-          <p:cNvSpPr txBox="1"/>
-          <p:nvPr/>
-        </p:nvSpPr>
-        <p:spPr>
-          <a:xfrm>
-            <a:off x="11551615" y="6446520"/>
-            <a:ext cx="457200" cy="274320"/>
-          </a:xfrm>
-          <a:prstGeom prst="rect">
-            <a:avLst/>
-          </a:prstGeom>
-          <a:noFill/>
-          <a:ln/>
-        </p:spPr>
-        <p:txBody>
-          <a:bodyPr wrap="square" lIns="0" tIns="0" rIns="0" bIns="0" rtlCol="0" anchor="ctr"/>
-          <a:lstStyle/>
-          <a:p>
-            <a:pPr algn="r" indent="0" marL="0">
-              <a:buNone/>
-            </a:pPr>
-            <a:r>
-              <a:rPr lang="en-US" sz="1100" dirty="0">
-                <a:solidFill>
-                  <a:srgbClr val="5B6B77"/>
-                </a:solidFill>
-                <a:latin typeface="Calibri" pitchFamily="34" charset="0"/>
-                <a:ea typeface="Calibri" pitchFamily="34" charset="-122"/>
-                <a:cs typeface="Calibri" pitchFamily="34" charset="-120"/>
-              </a:rPr>
-              <a:t>20</a:t>
-            </a:r>
-            <a:endParaRPr lang="en-US" sz="1100" dirty="0"/>
-          </a:p>
-        </p:txBody>
-      </p:sp>
-      <p:sp>
-        <p:nvSpPr>
-          <p:cNvPr id="5" name="Text 3"/>
-          <p:cNvSpPr txBox="1"/>
-          <p:nvPr/>
-        </p:nvSpPr>
-        <p:spPr>
-          <a:xfrm>
-            <a:off x="640080" y="1661160"/>
-            <a:ext cx="10789920" cy="2574417"/>
-          </a:xfrm>
-          <a:prstGeom prst="rect">
-            <a:avLst/>
-          </a:prstGeom>
-          <a:noFill/>
-          <a:ln/>
-        </p:spPr>
-        <p:txBody>
-          <a:bodyPr wrap="square" lIns="0" tIns="0" rIns="0" bIns="0" rtlCol="0" anchor="t"/>
-          <a:lstStyle/>
-          <a:p>
-            <a:pPr marL="342900" indent="-342900">
-              <a:lnSpc>
-                <a:spcPts val="2508"/>
-              </a:lnSpc>
-              <a:spcAft>
-                <a:spcPts val="1741"/>
-              </a:spcAft>
-              <a:buSzPct val="100000"/>
-              <a:buChar char="▪"/>
-            </a:pPr>
-            <a:r>
-              <a:rPr lang="en-US" sz="1800" dirty="0">
-                <a:solidFill>
-                  <a:srgbClr val="16242E"/>
-                </a:solidFill>
-                <a:latin typeface="Calibri" pitchFamily="34" charset="0"/>
-                <a:ea typeface="Calibri" pitchFamily="34" charset="-122"/>
-                <a:cs typeface="Calibri" pitchFamily="34" charset="-120"/>
-              </a:rPr>
-              <a:t>Les dades centralitzades eviten la inconsistència de les dades: quan un mateix document existeix en diversos equips amb versions diferents.</a:t>
-            </a:r>
-            <a:endParaRPr lang="en-US" sz="1800" dirty="0"/>
-          </a:p>
-          <a:p>
-            <a:pPr marL="342900" indent="-342900">
-              <a:lnSpc>
-                <a:spcPts val="2508"/>
-              </a:lnSpc>
-              <a:spcAft>
-                <a:spcPts val="1741"/>
-              </a:spcAft>
-              <a:buSzPct val="100000"/>
-              <a:buChar char="▪"/>
-            </a:pPr>
-            <a:r>
-              <a:rPr lang="en-US" sz="1800" dirty="0">
-                <a:solidFill>
-                  <a:srgbClr val="16242E"/>
-                </a:solidFill>
-                <a:latin typeface="Calibri" pitchFamily="34" charset="0"/>
-                <a:ea typeface="Calibri" pitchFamily="34" charset="-122"/>
-                <a:cs typeface="Calibri" pitchFamily="34" charset="-120"/>
-              </a:rPr>
-              <a:t>A més, permeten fer còpies de seguretat de forma centralitzada i amb més facilitat, en lloc de dependre que cada usuari en faci al seu propi equip.</a:t>
-            </a:r>
-            <a:endParaRPr lang="en-US" sz="1800" dirty="0"/>
-          </a:p>
-          <a:p>
-            <a:pPr marL="342900" indent="-342900">
-              <a:lnSpc>
-                <a:spcPts val="2508"/>
-              </a:lnSpc>
-              <a:spcAft>
-                <a:spcPts val="1741"/>
-              </a:spcAft>
-              <a:buSzPct val="100000"/>
-              <a:buChar char="▪"/>
-            </a:pPr>
-            <a:r>
-              <a:rPr lang="en-US" sz="1800" dirty="0">
-                <a:solidFill>
-                  <a:srgbClr val="16242E"/>
-                </a:solidFill>
-                <a:latin typeface="Calibri" pitchFamily="34" charset="0"/>
-                <a:ea typeface="Calibri" pitchFamily="34" charset="-122"/>
-                <a:cs typeface="Calibri" pitchFamily="34" charset="-120"/>
-              </a:rPr>
-              <a:t>Tres sistemes principals: DAS, NAS i SAN. Internament, el dispositiu que fa de servidor d'arxius sol usar RAID per tenir alta disponibilitat.</a:t>
-            </a:r>
-            <a:endParaRPr lang="en-US" sz="1800" dirty="0"/>
-          </a:p>
-        </p:txBody>
-      </p:sp>
-    </p:spTree>
-  </p:cSld>
-  <p:clrMapOvr>
-    <a:masterClrMapping/>
-  </p:clrMapOvr>
-</p:sld>
-</file>
-
 <file path=ppt/slides/slide2.xml><?xml version="1.0" encoding="utf-8"?>
 <p:sld xmlns:a="http://schemas.openxmlformats.org/drawingml/2006/main" xmlns:r="http://schemas.openxmlformats.org/officeDocument/2006/relationships" xmlns:p="http://schemas.openxmlformats.org/presentationml/2006/main">
   <p:cSld name="Slide 2">
@@ -9623,6 +10013,249 @@
 
 <file path=ppt/slides/slide20.xml><?xml version="1.0" encoding="utf-8"?>
 <p:sld xmlns:a="http://schemas.openxmlformats.org/drawingml/2006/main" xmlns:r="http://schemas.openxmlformats.org/officeDocument/2006/relationships" xmlns:p="http://schemas.openxmlformats.org/presentationml/2006/main">
+  <p:cSld name="Slide 11">
+    <p:bg>
+      <p:bgPr>
+        <a:solidFill>
+          <a:srgbClr val="F4F7F9"/>
+        </a:solidFill>
+      </p:bgPr>
+    </p:bg>
+    <p:spTree>
+      <p:nvGrpSpPr>
+        <p:cNvPr id="1" name=""/>
+        <p:cNvGrpSpPr/>
+        <p:nvPr/>
+      </p:nvGrpSpPr>
+      <p:grpSpPr>
+        <a:xfrm>
+          <a:off x="0" y="0"/>
+          <a:ext cx="0" cy="0"/>
+          <a:chOff x="0" y="0"/>
+          <a:chExt cx="0" cy="0"/>
+        </a:xfrm>
+      </p:grpSpPr>
+      <p:sp>
+        <p:nvSpPr>
+          <p:cNvPr id="2" name="Text 0"/>
+          <p:cNvSpPr txBox="1"/>
+          <p:nvPr/>
+        </p:nvSpPr>
+        <p:spPr>
+          <a:xfrm>
+            <a:off x="548640" y="457200"/>
+            <a:ext cx="9144000" cy="365760"/>
+          </a:xfrm>
+          <a:prstGeom prst="rect">
+            <a:avLst/>
+          </a:prstGeom>
+          <a:noFill/>
+          <a:ln/>
+        </p:spPr>
+        <p:txBody>
+          <a:bodyPr wrap="square" lIns="0" tIns="0" rIns="0" bIns="0" rtlCol="0" anchor="ctr"/>
+          <a:lstStyle/>
+          <a:p>
+            <a:pPr indent="0" marL="0">
+              <a:buNone/>
+            </a:pPr>
+            <a:r>
+              <a:rPr lang="en-US" sz="1300" b="1" spc="200" kern="0" dirty="0">
+                <a:solidFill>
+                  <a:srgbClr val="F2A541"/>
+                </a:solidFill>
+                <a:latin typeface="Calibri" pitchFamily="34" charset="0"/>
+                <a:ea typeface="Calibri" pitchFamily="34" charset="-122"/>
+                <a:cs typeface="Calibri" pitchFamily="34" charset="-120"/>
+              </a:rPr>
+              <a:t>CENTRALITZAR L'EMMAGATZEMATGE</a:t>
+            </a:r>
+            <a:endParaRPr lang="en-US" sz="1300" dirty="0"/>
+          </a:p>
+        </p:txBody>
+      </p:sp>
+      <p:sp>
+        <p:nvSpPr>
+          <p:cNvPr id="3" name="Text 1"/>
+          <p:cNvSpPr txBox="1"/>
+          <p:nvPr/>
+        </p:nvSpPr>
+        <p:spPr>
+          <a:xfrm>
+            <a:off x="548640" y="822960"/>
+            <a:ext cx="10789920" cy="640080"/>
+          </a:xfrm>
+          <a:prstGeom prst="rect">
+            <a:avLst/>
+          </a:prstGeom>
+          <a:noFill/>
+          <a:ln/>
+        </p:spPr>
+        <p:txBody>
+          <a:bodyPr wrap="square" lIns="0" tIns="0" rIns="0" bIns="0" rtlCol="0" anchor="ctr"/>
+          <a:lstStyle/>
+          <a:p>
+            <a:pPr indent="0" marL="0">
+              <a:buNone/>
+            </a:pPr>
+            <a:r>
+              <a:rPr lang="en-US" sz="2800" b="1" dirty="0">
+                <a:solidFill>
+                  <a:srgbClr val="16242E"/>
+                </a:solidFill>
+                <a:latin typeface="Cambria" pitchFamily="34" charset="0"/>
+                <a:ea typeface="Cambria" pitchFamily="34" charset="-122"/>
+                <a:cs typeface="Cambria" pitchFamily="34" charset="-120"/>
+              </a:rPr>
+              <a:t>Per què les dades no haurien d'estar a les estacions de treball</a:t>
+            </a:r>
+            <a:endParaRPr lang="en-US" sz="2800" dirty="0"/>
+          </a:p>
+        </p:txBody>
+      </p:sp>
+      <p:sp>
+        <p:nvSpPr>
+          <p:cNvPr id="4" name="Text 2"/>
+          <p:cNvSpPr txBox="1"/>
+          <p:nvPr/>
+        </p:nvSpPr>
+        <p:spPr>
+          <a:xfrm>
+            <a:off x="11551615" y="6446520"/>
+            <a:ext cx="457200" cy="274320"/>
+          </a:xfrm>
+          <a:prstGeom prst="rect">
+            <a:avLst/>
+          </a:prstGeom>
+          <a:noFill/>
+          <a:ln/>
+        </p:spPr>
+        <p:txBody>
+          <a:bodyPr wrap="square" lIns="0" tIns="0" rIns="0" bIns="0" rtlCol="0" anchor="ctr"/>
+          <a:lstStyle/>
+          <a:p>
+            <a:pPr algn="r" indent="0" marL="0">
+              <a:buNone/>
+            </a:pPr>
+            <a:r>
+              <a:rPr lang="en-US" sz="1100" dirty="0">
+                <a:solidFill>
+                  <a:srgbClr val="5B6B77"/>
+                </a:solidFill>
+                <a:latin typeface="Calibri" pitchFamily="34" charset="0"/>
+                <a:ea typeface="Calibri" pitchFamily="34" charset="-122"/>
+                <a:cs typeface="Calibri" pitchFamily="34" charset="-120"/>
+              </a:rPr>
+              <a:t>20</a:t>
+            </a:r>
+            <a:endParaRPr lang="en-US" sz="1100" dirty="0"/>
+          </a:p>
+        </p:txBody>
+      </p:sp>
+      <p:sp>
+        <p:nvSpPr>
+          <p:cNvPr id="5" name="Text 3"/>
+          <p:cNvSpPr txBox="1"/>
+          <p:nvPr/>
+        </p:nvSpPr>
+        <p:spPr>
+          <a:xfrm>
+            <a:off x="640080" y="1661160"/>
+            <a:ext cx="10789920" cy="2574417"/>
+          </a:xfrm>
+          <a:prstGeom prst="rect">
+            <a:avLst/>
+          </a:prstGeom>
+          <a:noFill/>
+          <a:ln/>
+        </p:spPr>
+        <p:txBody>
+          <a:bodyPr wrap="square" lIns="0" tIns="0" rIns="0" bIns="0" rtlCol="0" anchor="t"/>
+          <a:lstStyle/>
+          <a:p>
+            <a:pPr marL="342900" indent="-342900">
+              <a:lnSpc>
+                <a:spcPts val="2508"/>
+              </a:lnSpc>
+              <a:spcAft>
+                <a:spcPts val="1741"/>
+              </a:spcAft>
+              <a:buSzPct val="100000"/>
+              <a:buChar char="▪"/>
+            </a:pPr>
+            <a:r>
+              <a:rPr lang="en-US" sz="1800" dirty="0">
+                <a:solidFill>
+                  <a:srgbClr val="16242E"/>
+                </a:solidFill>
+                <a:latin typeface="Calibri" pitchFamily="34" charset="0"/>
+                <a:ea typeface="Calibri" pitchFamily="34" charset="-122"/>
+                <a:cs typeface="Calibri" pitchFamily="34" charset="-120"/>
+              </a:rPr>
+              <a:t>Les dades centralitzades eviten la inconsistència de les dades: quan un mateix document existeix en diversos equips amb versions diferents.</a:t>
+            </a:r>
+            <a:endParaRPr lang="en-US" sz="1800" dirty="0"/>
+          </a:p>
+          <a:p>
+            <a:pPr marL="342900" indent="-342900">
+              <a:lnSpc>
+                <a:spcPts val="2508"/>
+              </a:lnSpc>
+              <a:spcAft>
+                <a:spcPts val="1741"/>
+              </a:spcAft>
+              <a:buSzPct val="100000"/>
+              <a:buChar char="▪"/>
+            </a:pPr>
+            <a:r>
+              <a:rPr lang="en-US" sz="1800" dirty="0">
+                <a:solidFill>
+                  <a:srgbClr val="16242E"/>
+                </a:solidFill>
+                <a:latin typeface="Calibri" pitchFamily="34" charset="0"/>
+                <a:ea typeface="Calibri" pitchFamily="34" charset="-122"/>
+                <a:cs typeface="Calibri" pitchFamily="34" charset="-120"/>
+              </a:rPr>
+              <a:t>A més, permeten fer còpies de seguretat de forma centralitzada i amb més facilitat, en lloc de dependre que cada usuari en faci al seu propi equip.</a:t>
+            </a:r>
+            <a:endParaRPr lang="en-US" sz="1800" dirty="0"/>
+          </a:p>
+          <a:p>
+            <a:pPr marL="342900" indent="-342900">
+              <a:lnSpc>
+                <a:spcPts val="2508"/>
+              </a:lnSpc>
+              <a:spcAft>
+                <a:spcPts val="1741"/>
+              </a:spcAft>
+              <a:buSzPct val="100000"/>
+              <a:buChar char="▪"/>
+            </a:pPr>
+            <a:r>
+              <a:rPr lang="en-US" sz="1800" dirty="0">
+                <a:solidFill>
+                  <a:srgbClr val="16242E"/>
+                </a:solidFill>
+                <a:latin typeface="Calibri" pitchFamily="34" charset="0"/>
+                <a:ea typeface="Calibri" pitchFamily="34" charset="-122"/>
+                <a:cs typeface="Calibri" pitchFamily="34" charset="-120"/>
+              </a:rPr>
+              <a:t>Tres sistemes principals: DAS, NAS i SAN. Internament, el dispositiu que fa de servidor d'arxius sol usar RAID per tenir alta disponibilitat.</a:t>
+            </a:r>
+            <a:endParaRPr lang="en-US" sz="1800" dirty="0"/>
+          </a:p>
+        </p:txBody>
+      </p:sp>
+    </p:spTree>
+  </p:cSld>
+  <p:clrMapOvr>
+    <a:masterClrMapping/>
+  </p:clrMapOvr>
+</p:sld>
+</file>
+
+<file path=ppt/slides/slide21.xml><?xml version="1.0" encoding="utf-8"?>
+<p:sld xmlns:a="http://schemas.openxmlformats.org/drawingml/2006/main" xmlns:r="http://schemas.openxmlformats.org/officeDocument/2006/relationships" xmlns:p="http://schemas.openxmlformats.org/presentationml/2006/main">
   <p:cSld name="Slide 12">
     <p:bg>
       <p:bgPr>
@@ -10104,7 +10737,7 @@
 </p:sld>
 </file>
 
-<file path=ppt/slides/slide21.xml><?xml version="1.0" encoding="utf-8"?>
+<file path=ppt/slides/slide22.xml><?xml version="1.0" encoding="utf-8"?>
 <p:sld xmlns:a="http://schemas.openxmlformats.org/drawingml/2006/main" xmlns:p="http://schemas.openxmlformats.org/presentationml/2006/main" xmlns:r="http://schemas.openxmlformats.org/officeDocument/2006/relationships">
   <p:cSld>
     <p:bg>
@@ -10362,7 +10995,7 @@
 </p:sld>
 </file>
 
-<file path=ppt/slides/slide22.xml><?xml version="1.0" encoding="utf-8"?>
+<file path=ppt/slides/slide23.xml><?xml version="1.0" encoding="utf-8"?>
 <p:sld xmlns:a="http://schemas.openxmlformats.org/drawingml/2006/main" xmlns:r="http://schemas.openxmlformats.org/officeDocument/2006/relationships" xmlns:p="http://schemas.openxmlformats.org/presentationml/2006/main">
   <p:cSld name="Slide 13">
     <p:bg>
@@ -10845,7 +11478,7 @@
 </p:sld>
 </file>
 
-<file path=ppt/slides/slide23.xml><?xml version="1.0" encoding="utf-8"?>
+<file path=ppt/slides/slide24.xml><?xml version="1.0" encoding="utf-8"?>
 <p:sld xmlns:a="http://schemas.openxmlformats.org/drawingml/2006/main" xmlns:p="http://schemas.openxmlformats.org/presentationml/2006/main" xmlns:r="http://schemas.openxmlformats.org/officeDocument/2006/relationships">
   <p:cSld>
     <p:bg>
@@ -11034,7 +11667,7 @@
 </p:sld>
 </file>
 
-<file path=ppt/slides/slide24.xml><?xml version="1.0" encoding="utf-8"?>
+<file path=ppt/slides/slide25.xml><?xml version="1.0" encoding="utf-8"?>
 <p:sld xmlns:a="http://schemas.openxmlformats.org/drawingml/2006/main" xmlns:r="http://schemas.openxmlformats.org/officeDocument/2006/relationships" xmlns:p="http://schemas.openxmlformats.org/presentationml/2006/main">
   <p:cSld name="Slide 14">
     <p:bg>
@@ -11369,7 +12002,7 @@
 </p:sld>
 </file>
 
-<file path=ppt/slides/slide25.xml><?xml version="1.0" encoding="utf-8"?>
+<file path=ppt/slides/slide26.xml><?xml version="1.0" encoding="utf-8"?>
 <p:sld xmlns:a="http://schemas.openxmlformats.org/drawingml/2006/main" xmlns:p="http://schemas.openxmlformats.org/presentationml/2006/main" xmlns:r="http://schemas.openxmlformats.org/officeDocument/2006/relationships">
   <p:cSld>
     <p:bg>
@@ -11568,7 +12201,7 @@
 </p:sld>
 </file>
 
-<file path=ppt/slides/slide26.xml><?xml version="1.0" encoding="utf-8"?>
+<file path=ppt/slides/slide27.xml><?xml version="1.0" encoding="utf-8"?>
 <p:sld xmlns:a="http://schemas.openxmlformats.org/drawingml/2006/main" xmlns:r="http://schemas.openxmlformats.org/officeDocument/2006/relationships" xmlns:p="http://schemas.openxmlformats.org/presentationml/2006/main">
   <p:cSld name="Slide 15">
     <p:bg>
@@ -11879,7 +12512,7 @@
 </p:sld>
 </file>
 
-<file path=ppt/slides/slide27.xml><?xml version="1.0" encoding="utf-8"?>
+<file path=ppt/slides/slide28.xml><?xml version="1.0" encoding="utf-8"?>
 <p:sld xmlns:a="http://schemas.openxmlformats.org/drawingml/2006/main" xmlns:p="http://schemas.openxmlformats.org/presentationml/2006/main" xmlns:r="http://schemas.openxmlformats.org/officeDocument/2006/relationships">
   <p:cSld>
     <p:bg>
@@ -13583,7 +14216,7 @@
                 <a:ea typeface="Calibri" pitchFamily="34" charset="-122"/>
                 <a:cs typeface="Calibri" pitchFamily="34" charset="-120"/>
               </a:rPr>
-              <a:t>moltes empreses combinen tots dos. Guarden en local les dades sensibles i les que necessiten més velocitat, i fan servir el núvol per a les còpies fora de l'empresa i per créixer quan cal.</a:t>
+              <a:t>moltes empreses combinen tots dos. Guarden en local les dades sensibles i les que necessiten més velocitat, i fan servir el núvol per a les còpies fora de l'empresa, per ampliar l'espai o la potència només quan cal i per col·laborar a distància.</a:t>
             </a:r>
             <a:endParaRPr lang="en-US" sz="1800" dirty="0"/>
           </a:p>
@@ -13597,7 +14230,7 @@
 </p:sld>
 </file>
 
-<file path=ppt/slides/slide28.xml><?xml version="1.0" encoding="utf-8"?>
+<file path=ppt/slides/slide29.xml><?xml version="1.0" encoding="utf-8"?>
 <p:sld xmlns:a="http://schemas.openxmlformats.org/drawingml/2006/main" xmlns:r="http://schemas.openxmlformats.org/officeDocument/2006/relationships" xmlns:p="http://schemas.openxmlformats.org/presentationml/2006/main">
   <p:cSld name="Slide 16">
     <p:bg>
@@ -14403,260 +15036,6 @@
               <a:t>Rendiment (latència, IOPS, throughput), disponibilitat i accessibilitat. SMART avisa abans que un disc falli.</a:t>
             </a:r>
             <a:endParaRPr lang="en-US" sz="1800" dirty="0"/>
-          </a:p>
-        </p:txBody>
-      </p:sp>
-    </p:spTree>
-  </p:cSld>
-  <p:clrMapOvr>
-    <a:masterClrMapping/>
-  </p:clrMapOvr>
-</p:sld>
-</file>
-
-<file path=ppt/slides/slide29.xml><?xml version="1.0" encoding="utf-8"?>
-<p:sld xmlns:a="http://schemas.openxmlformats.org/drawingml/2006/main" xmlns:r="http://schemas.openxmlformats.org/officeDocument/2006/relationships" xmlns:p="http://schemas.openxmlformats.org/presentationml/2006/main">
-  <p:cSld name="Slide 17">
-    <p:bg>
-      <p:bgPr>
-        <a:solidFill>
-          <a:srgbClr val="0B1B29"/>
-        </a:solidFill>
-      </p:bgPr>
-    </p:bg>
-    <p:spTree>
-      <p:nvGrpSpPr>
-        <p:cNvPr id="1" name=""/>
-        <p:cNvGrpSpPr/>
-        <p:nvPr/>
-      </p:nvGrpSpPr>
-      <p:grpSpPr>
-        <a:xfrm>
-          <a:off x="0" y="0"/>
-          <a:ext cx="0" cy="0"/>
-          <a:chOff x="0" y="0"/>
-          <a:chExt cx="0" cy="0"/>
-        </a:xfrm>
-      </p:grpSpPr>
-      <p:sp>
-        <p:nvSpPr>
-          <p:cNvPr id="2" name="Text 0"/>
-          <p:cNvSpPr txBox="1"/>
-          <p:nvPr/>
-        </p:nvSpPr>
-        <p:spPr>
-          <a:xfrm>
-            <a:off x="822960" y="1188720"/>
-            <a:ext cx="9144000" cy="365760"/>
-          </a:xfrm>
-          <a:prstGeom prst="rect">
-            <a:avLst/>
-          </a:prstGeom>
-          <a:noFill/>
-          <a:ln/>
-        </p:spPr>
-        <p:txBody>
-          <a:bodyPr wrap="square" lIns="0" tIns="0" rIns="0" bIns="0" rtlCol="0" anchor="ctr"/>
-          <a:lstStyle/>
-          <a:p>
-            <a:pPr indent="0" marL="0">
-              <a:buNone/>
-            </a:pPr>
-            <a:r>
-              <a:rPr lang="en-US" sz="1400" b="1" spc="200" kern="0" dirty="0">
-                <a:solidFill>
-                  <a:srgbClr val="F2A541"/>
-                </a:solidFill>
-                <a:latin typeface="Calibri" pitchFamily="34" charset="0"/>
-                <a:ea typeface="Calibri" pitchFamily="34" charset="-122"/>
-                <a:cs typeface="Calibri" pitchFamily="34" charset="-120"/>
-              </a:rPr>
-              <a:t>ARA ÉS EL TORN VOSTRE</a:t>
-            </a:r>
-            <a:endParaRPr lang="en-US" sz="1400" dirty="0"/>
-          </a:p>
-        </p:txBody>
-      </p:sp>
-      <p:pic>
-        <p:nvPicPr>
-          <p:cNvPr id="3" name="Image 0" descr="/tmp/claude-0/-home-user-SMX-0226-Seguretat-Informatica/cec25c9b-7e93-584a-a64a-196540977a59/scratchpad/build/icons/question_F2A541.png">    </p:cNvPr>
-          <p:cNvPicPr>
-            <a:picLocks noChangeAspect="1"/>
-          </p:cNvPicPr>
-          <p:nvPr/>
-        </p:nvPicPr>
-        <p:blipFill>
-          <a:blip r:embed="rId1"/>
-          <a:stretch>
-            <a:fillRect/>
-          </a:stretch>
-        </p:blipFill>
-        <p:spPr>
-          <a:xfrm>
-            <a:off x="9875520" y="1097280"/>
-            <a:ext cx="731520" cy="731520"/>
-          </a:xfrm>
-          <a:prstGeom prst="rect">
-            <a:avLst/>
-          </a:prstGeom>
-        </p:spPr>
-      </p:pic>
-      <p:sp>
-        <p:nvSpPr>
-          <p:cNvPr id="4" name="Text 1"/>
-          <p:cNvSpPr txBox="1"/>
-          <p:nvPr/>
-        </p:nvSpPr>
-        <p:spPr>
-          <a:xfrm>
-            <a:off x="822960" y="1737360"/>
-            <a:ext cx="10332720" cy="1463040"/>
-          </a:xfrm>
-          <a:prstGeom prst="rect">
-            <a:avLst/>
-          </a:prstGeom>
-          <a:noFill/>
-          <a:ln/>
-        </p:spPr>
-        <p:txBody>
-          <a:bodyPr wrap="square" lIns="0" tIns="0" rIns="0" bIns="0" rtlCol="0" anchor="ctr"/>
-          <a:lstStyle/>
-          <a:p>
-            <a:pPr indent="0" marL="0">
-              <a:buNone/>
-            </a:pPr>
-            <a:r>
-              <a:rPr lang="en-US" sz="2600" b="1" dirty="0">
-                <a:solidFill>
-                  <a:srgbClr val="FFFFFF"/>
-                </a:solidFill>
-                <a:latin typeface="Cambria" pitchFamily="34" charset="0"/>
-                <a:ea typeface="Cambria" pitchFamily="34" charset="-122"/>
-                <a:cs typeface="Cambria" pitchFamily="34" charset="-120"/>
-              </a:rPr>
-              <a:t>Un petit despatx d'advocats (5 persones) vol centralitzar els seus documents.</a:t>
-            </a:r>
-            <a:endParaRPr lang="en-US" sz="2600" dirty="0"/>
-          </a:p>
-        </p:txBody>
-      </p:sp>
-      <p:sp>
-        <p:nvSpPr>
-          <p:cNvPr id="5" name="Text 2"/>
-          <p:cNvSpPr txBox="1"/>
-          <p:nvPr/>
-        </p:nvSpPr>
-        <p:spPr>
-          <a:xfrm>
-            <a:off x="822960" y="3291840"/>
-            <a:ext cx="9875520" cy="1463040"/>
-          </a:xfrm>
-          <a:prstGeom prst="rect">
-            <a:avLst/>
-          </a:prstGeom>
-          <a:noFill/>
-          <a:ln/>
-        </p:spPr>
-        <p:txBody>
-          <a:bodyPr wrap="square" lIns="0" tIns="0" rIns="0" bIns="0" rtlCol="0" anchor="ctr"/>
-          <a:lstStyle/>
-          <a:p>
-            <a:pPr indent="0" marL="0">
-              <a:lnSpc>
-                <a:spcPts val="2592"/>
-              </a:lnSpc>
-              <a:buNone/>
-            </a:pPr>
-            <a:r>
-              <a:rPr lang="en-US" sz="1800" dirty="0">
-                <a:solidFill>
-                  <a:srgbClr val="CADCE8"/>
-                </a:solidFill>
-                <a:latin typeface="Calibri" pitchFamily="34" charset="0"/>
-                <a:ea typeface="Calibri" pitchFamily="34" charset="-122"/>
-                <a:cs typeface="Calibri" pitchFamily="34" charset="-120"/>
-              </a:rPr>
-              <a:t>En grups de 3: decidiu si recomanaríeu un DAS, un NAS o un servei de núvol, tenint en compte que gestionen dades de clients (confidencials) i tenen un pressupost limitat. Justifiqueu quin nivell de RAID hi aplicaríeu internament.</a:t>
-            </a:r>
-            <a:endParaRPr lang="en-US" sz="1800" dirty="0"/>
-          </a:p>
-        </p:txBody>
-      </p:sp>
-      <p:sp>
-        <p:nvSpPr>
-          <p:cNvPr id="6" name="Text 3"/>
-          <p:cNvSpPr txBox="1"/>
-          <p:nvPr/>
-        </p:nvSpPr>
-        <p:spPr>
-          <a:xfrm>
-            <a:off x="822960" y="6035040"/>
-            <a:ext cx="9144000" cy="365760"/>
-          </a:xfrm>
-          <a:prstGeom prst="rect">
-            <a:avLst/>
-          </a:prstGeom>
-          <a:noFill/>
-          <a:ln/>
-        </p:spPr>
-        <p:txBody>
-          <a:bodyPr wrap="square" lIns="0" tIns="0" rIns="0" bIns="0" rtlCol="0" anchor="ctr"/>
-          <a:lstStyle/>
-          <a:p>
-            <a:pPr indent="0" marL="0">
-              <a:buNone/>
-            </a:pPr>
-            <a:r>
-              <a:rPr lang="en-US" sz="1800" i="1" dirty="0">
-                <a:solidFill>
-                  <a:srgbClr val="8FA6B8"/>
-                </a:solidFill>
-                <a:latin typeface="Calibri" pitchFamily="34" charset="0"/>
-                <a:ea typeface="Calibri" pitchFamily="34" charset="-122"/>
-                <a:cs typeface="Calibri" pitchFamily="34" charset="-120"/>
-              </a:rPr>
-              <a:t>10 minuts en grup + posada en comú</a:t>
-            </a:r>
-            <a:endParaRPr lang="en-US" sz="1800" dirty="0"/>
-          </a:p>
-        </p:txBody>
-      </p:sp>
-      <p:sp>
-        <p:nvSpPr>
-          <p:cNvPr id="7" name="Text 4"/>
-          <p:cNvSpPr txBox="1"/>
-          <p:nvPr/>
-        </p:nvSpPr>
-        <p:spPr>
-          <a:xfrm>
-            <a:off x="11551615" y="6446520"/>
-            <a:ext cx="457200" cy="274320"/>
-          </a:xfrm>
-          <a:prstGeom prst="rect">
-            <a:avLst/>
-          </a:prstGeom>
-          <a:noFill/>
-          <a:ln/>
-        </p:spPr>
-        <p:txBody>
-          <a:bodyPr wrap="square" lIns="0" tIns="0" rIns="0" bIns="0" rtlCol="0" anchor="ctr"/>
-          <a:lstStyle/>
-          <a:p>
-            <a:pPr algn="r" indent="0" marL="0">
-              <a:buNone/>
-            </a:pPr>
-            <a:r>
-              <a:rPr lang="en-US" sz="1100" dirty="0">
-                <a:solidFill>
-                  <a:srgbClr val="5B6B77"/>
-                </a:solidFill>
-                <a:latin typeface="Calibri" pitchFamily="34" charset="0"/>
-                <a:ea typeface="Calibri" pitchFamily="34" charset="-122"/>
-                <a:cs typeface="Calibri" pitchFamily="34" charset="-120"/>
-              </a:rPr>
-              <a:t>30</a:t>
-            </a:r>
-            <a:endParaRPr lang="en-US" sz="1100" dirty="0"/>
           </a:p>
         </p:txBody>
       </p:sp>
@@ -15153,6 +15532,260 @@
 
 <file path=ppt/slides/slide30.xml><?xml version="1.0" encoding="utf-8"?>
 <p:sld xmlns:a="http://schemas.openxmlformats.org/drawingml/2006/main" xmlns:r="http://schemas.openxmlformats.org/officeDocument/2006/relationships" xmlns:p="http://schemas.openxmlformats.org/presentationml/2006/main">
+  <p:cSld name="Slide 17">
+    <p:bg>
+      <p:bgPr>
+        <a:solidFill>
+          <a:srgbClr val="0B1B29"/>
+        </a:solidFill>
+      </p:bgPr>
+    </p:bg>
+    <p:spTree>
+      <p:nvGrpSpPr>
+        <p:cNvPr id="1" name=""/>
+        <p:cNvGrpSpPr/>
+        <p:nvPr/>
+      </p:nvGrpSpPr>
+      <p:grpSpPr>
+        <a:xfrm>
+          <a:off x="0" y="0"/>
+          <a:ext cx="0" cy="0"/>
+          <a:chOff x="0" y="0"/>
+          <a:chExt cx="0" cy="0"/>
+        </a:xfrm>
+      </p:grpSpPr>
+      <p:sp>
+        <p:nvSpPr>
+          <p:cNvPr id="2" name="Text 0"/>
+          <p:cNvSpPr txBox="1"/>
+          <p:nvPr/>
+        </p:nvSpPr>
+        <p:spPr>
+          <a:xfrm>
+            <a:off x="822960" y="1188720"/>
+            <a:ext cx="9144000" cy="365760"/>
+          </a:xfrm>
+          <a:prstGeom prst="rect">
+            <a:avLst/>
+          </a:prstGeom>
+          <a:noFill/>
+          <a:ln/>
+        </p:spPr>
+        <p:txBody>
+          <a:bodyPr wrap="square" lIns="0" tIns="0" rIns="0" bIns="0" rtlCol="0" anchor="ctr"/>
+          <a:lstStyle/>
+          <a:p>
+            <a:pPr indent="0" marL="0">
+              <a:buNone/>
+            </a:pPr>
+            <a:r>
+              <a:rPr lang="en-US" sz="1400" b="1" spc="200" kern="0" dirty="0">
+                <a:solidFill>
+                  <a:srgbClr val="F2A541"/>
+                </a:solidFill>
+                <a:latin typeface="Calibri" pitchFamily="34" charset="0"/>
+                <a:ea typeface="Calibri" pitchFamily="34" charset="-122"/>
+                <a:cs typeface="Calibri" pitchFamily="34" charset="-120"/>
+              </a:rPr>
+              <a:t>ARA ÉS EL TORN VOSTRE</a:t>
+            </a:r>
+            <a:endParaRPr lang="en-US" sz="1400" dirty="0"/>
+          </a:p>
+        </p:txBody>
+      </p:sp>
+      <p:pic>
+        <p:nvPicPr>
+          <p:cNvPr id="3" name="Image 0" descr="/tmp/claude-0/-home-user-SMX-0226-Seguretat-Informatica/cec25c9b-7e93-584a-a64a-196540977a59/scratchpad/build/icons/question_F2A541.png">    </p:cNvPr>
+          <p:cNvPicPr>
+            <a:picLocks noChangeAspect="1"/>
+          </p:cNvPicPr>
+          <p:nvPr/>
+        </p:nvPicPr>
+        <p:blipFill>
+          <a:blip r:embed="rId1"/>
+          <a:stretch>
+            <a:fillRect/>
+          </a:stretch>
+        </p:blipFill>
+        <p:spPr>
+          <a:xfrm>
+            <a:off x="9875520" y="1097280"/>
+            <a:ext cx="731520" cy="731520"/>
+          </a:xfrm>
+          <a:prstGeom prst="rect">
+            <a:avLst/>
+          </a:prstGeom>
+        </p:spPr>
+      </p:pic>
+      <p:sp>
+        <p:nvSpPr>
+          <p:cNvPr id="4" name="Text 1"/>
+          <p:cNvSpPr txBox="1"/>
+          <p:nvPr/>
+        </p:nvSpPr>
+        <p:spPr>
+          <a:xfrm>
+            <a:off x="822960" y="1737360"/>
+            <a:ext cx="10332720" cy="1463040"/>
+          </a:xfrm>
+          <a:prstGeom prst="rect">
+            <a:avLst/>
+          </a:prstGeom>
+          <a:noFill/>
+          <a:ln/>
+        </p:spPr>
+        <p:txBody>
+          <a:bodyPr wrap="square" lIns="0" tIns="0" rIns="0" bIns="0" rtlCol="0" anchor="ctr"/>
+          <a:lstStyle/>
+          <a:p>
+            <a:pPr indent="0" marL="0">
+              <a:buNone/>
+            </a:pPr>
+            <a:r>
+              <a:rPr lang="en-US" sz="2600" b="1" dirty="0">
+                <a:solidFill>
+                  <a:srgbClr val="FFFFFF"/>
+                </a:solidFill>
+                <a:latin typeface="Cambria" pitchFamily="34" charset="0"/>
+                <a:ea typeface="Cambria" pitchFamily="34" charset="-122"/>
+                <a:cs typeface="Cambria" pitchFamily="34" charset="-120"/>
+              </a:rPr>
+              <a:t>Un petit despatx d'advocats (5 persones) vol centralitzar els seus documents.</a:t>
+            </a:r>
+            <a:endParaRPr lang="en-US" sz="2600" dirty="0"/>
+          </a:p>
+        </p:txBody>
+      </p:sp>
+      <p:sp>
+        <p:nvSpPr>
+          <p:cNvPr id="5" name="Text 2"/>
+          <p:cNvSpPr txBox="1"/>
+          <p:nvPr/>
+        </p:nvSpPr>
+        <p:spPr>
+          <a:xfrm>
+            <a:off x="822960" y="3291840"/>
+            <a:ext cx="9875520" cy="1463040"/>
+          </a:xfrm>
+          <a:prstGeom prst="rect">
+            <a:avLst/>
+          </a:prstGeom>
+          <a:noFill/>
+          <a:ln/>
+        </p:spPr>
+        <p:txBody>
+          <a:bodyPr wrap="square" lIns="0" tIns="0" rIns="0" bIns="0" rtlCol="0" anchor="ctr"/>
+          <a:lstStyle/>
+          <a:p>
+            <a:pPr indent="0" marL="0">
+              <a:lnSpc>
+                <a:spcPts val="2592"/>
+              </a:lnSpc>
+              <a:buNone/>
+            </a:pPr>
+            <a:r>
+              <a:rPr lang="en-US" sz="1800" dirty="0">
+                <a:solidFill>
+                  <a:srgbClr val="CADCE8"/>
+                </a:solidFill>
+                <a:latin typeface="Calibri" pitchFamily="34" charset="0"/>
+                <a:ea typeface="Calibri" pitchFamily="34" charset="-122"/>
+                <a:cs typeface="Calibri" pitchFamily="34" charset="-120"/>
+              </a:rPr>
+              <a:t>En grups de 3: decidiu si recomanaríeu un DAS, un NAS o un servei de núvol, tenint en compte que gestionen dades de clients (confidencials) i tenen un pressupost limitat. Justifiqueu quin nivell de RAID hi aplicaríeu internament.</a:t>
+            </a:r>
+            <a:endParaRPr lang="en-US" sz="1800" dirty="0"/>
+          </a:p>
+        </p:txBody>
+      </p:sp>
+      <p:sp>
+        <p:nvSpPr>
+          <p:cNvPr id="6" name="Text 3"/>
+          <p:cNvSpPr txBox="1"/>
+          <p:nvPr/>
+        </p:nvSpPr>
+        <p:spPr>
+          <a:xfrm>
+            <a:off x="822960" y="6035040"/>
+            <a:ext cx="9144000" cy="365760"/>
+          </a:xfrm>
+          <a:prstGeom prst="rect">
+            <a:avLst/>
+          </a:prstGeom>
+          <a:noFill/>
+          <a:ln/>
+        </p:spPr>
+        <p:txBody>
+          <a:bodyPr wrap="square" lIns="0" tIns="0" rIns="0" bIns="0" rtlCol="0" anchor="ctr"/>
+          <a:lstStyle/>
+          <a:p>
+            <a:pPr indent="0" marL="0">
+              <a:buNone/>
+            </a:pPr>
+            <a:r>
+              <a:rPr lang="en-US" sz="1800" i="1" dirty="0">
+                <a:solidFill>
+                  <a:srgbClr val="8FA6B8"/>
+                </a:solidFill>
+                <a:latin typeface="Calibri" pitchFamily="34" charset="0"/>
+                <a:ea typeface="Calibri" pitchFamily="34" charset="-122"/>
+                <a:cs typeface="Calibri" pitchFamily="34" charset="-120"/>
+              </a:rPr>
+              <a:t>10 minuts en grup + posada en comú</a:t>
+            </a:r>
+            <a:endParaRPr lang="en-US" sz="1800" dirty="0"/>
+          </a:p>
+        </p:txBody>
+      </p:sp>
+      <p:sp>
+        <p:nvSpPr>
+          <p:cNvPr id="7" name="Text 4"/>
+          <p:cNvSpPr txBox="1"/>
+          <p:nvPr/>
+        </p:nvSpPr>
+        <p:spPr>
+          <a:xfrm>
+            <a:off x="11551615" y="6446520"/>
+            <a:ext cx="457200" cy="274320"/>
+          </a:xfrm>
+          <a:prstGeom prst="rect">
+            <a:avLst/>
+          </a:prstGeom>
+          <a:noFill/>
+          <a:ln/>
+        </p:spPr>
+        <p:txBody>
+          <a:bodyPr wrap="square" lIns="0" tIns="0" rIns="0" bIns="0" rtlCol="0" anchor="ctr"/>
+          <a:lstStyle/>
+          <a:p>
+            <a:pPr algn="r" indent="0" marL="0">
+              <a:buNone/>
+            </a:pPr>
+            <a:r>
+              <a:rPr lang="en-US" sz="1100" dirty="0">
+                <a:solidFill>
+                  <a:srgbClr val="5B6B77"/>
+                </a:solidFill>
+                <a:latin typeface="Calibri" pitchFamily="34" charset="0"/>
+                <a:ea typeface="Calibri" pitchFamily="34" charset="-122"/>
+                <a:cs typeface="Calibri" pitchFamily="34" charset="-120"/>
+              </a:rPr>
+              <a:t>30</a:t>
+            </a:r>
+            <a:endParaRPr lang="en-US" sz="1100" dirty="0"/>
+          </a:p>
+        </p:txBody>
+      </p:sp>
+    </p:spTree>
+  </p:cSld>
+  <p:clrMapOvr>
+    <a:masterClrMapping/>
+  </p:clrMapOvr>
+</p:sld>
+</file>
+
+<file path=ppt/slides/slide31.xml><?xml version="1.0" encoding="utf-8"?>
+<p:sld xmlns:a="http://schemas.openxmlformats.org/drawingml/2006/main" xmlns:r="http://schemas.openxmlformats.org/officeDocument/2006/relationships" xmlns:p="http://schemas.openxmlformats.org/presentationml/2006/main">
   <p:cSld name="Slide 18">
     <p:bg>
       <p:bgPr>
@@ -15725,639 +16358,6 @@
               <a:t>31</a:t>
             </a:r>
             <a:endParaRPr lang="en-US" sz="1100" dirty="0"/>
-          </a:p>
-        </p:txBody>
-      </p:sp>
-    </p:spTree>
-  </p:cSld>
-  <p:clrMapOvr>
-    <a:masterClrMapping/>
-  </p:clrMapOvr>
-</p:sld>
-</file>
-
-<file path=ppt/slides/slide31.xml><?xml version="1.0" encoding="utf-8"?>
-<p:sld xmlns:a="http://schemas.openxmlformats.org/drawingml/2006/main" xmlns:p="http://schemas.openxmlformats.org/presentationml/2006/main" xmlns:r="http://schemas.openxmlformats.org/officeDocument/2006/relationships">
-  <p:cSld>
-    <p:bg>
-      <p:bgPr>
-        <a:solidFill>
-          <a:srgbClr val="F4F7F9"/>
-        </a:solidFill>
-      </p:bgPr>
-    </p:bg>
-    <p:spTree>
-      <p:nvGrpSpPr>
-        <p:cNvPr id="1" name=""/>
-        <p:cNvGrpSpPr/>
-        <p:nvPr/>
-      </p:nvGrpSpPr>
-      <p:grpSpPr/>
-      <p:sp>
-        <p:nvSpPr>
-          <p:cNvPr id="2" name="Text 0"/>
-          <p:cNvSpPr txBox="1"/>
-          <p:nvPr/>
-        </p:nvSpPr>
-        <p:spPr>
-          <a:xfrm>
-            <a:off x="548640" y="457200"/>
-            <a:ext cx="9144000" cy="365760"/>
-          </a:xfrm>
-          <a:prstGeom prst="rect">
-            <a:avLst/>
-          </a:prstGeom>
-          <a:noFill/>
-          <a:ln/>
-        </p:spPr>
-        <p:txBody>
-          <a:bodyPr wrap="square" lIns="0" tIns="0" rIns="0" bIns="0" rtlCol="0" anchor="ctr"/>
-          <a:lstStyle/>
-          <a:p>
-            <a:pPr indent="0" marL="0">
-              <a:buNone/>
-            </a:pPr>
-            <a:r>
-              <a:rPr lang="en-US" sz="1300" b="1" spc="200" kern="0" dirty="0">
-                <a:solidFill>
-                  <a:srgbClr val="F2A541"/>
-                </a:solidFill>
-                <a:latin typeface="Calibri" pitchFamily="34" charset="0"/>
-                <a:ea typeface="Calibri" pitchFamily="34" charset="-122"/>
-                <a:cs typeface="Calibri" pitchFamily="34" charset="-120"/>
-              </a:rPr>
-              <a:t>RAID 5 · LA PARITAT</a:t>
-            </a:r>
-            <a:endParaRPr lang="en-US" sz="1300" dirty="0"/>
-          </a:p>
-        </p:txBody>
-      </p:sp>
-      <p:sp>
-        <p:nvSpPr>
-          <p:cNvPr id="3" name="Text 1"/>
-          <p:cNvSpPr txBox="1"/>
-          <p:nvPr/>
-        </p:nvSpPr>
-        <p:spPr>
-          <a:xfrm>
-            <a:off x="548640" y="822960"/>
-            <a:ext cx="10789920" cy="640080"/>
-          </a:xfrm>
-          <a:prstGeom prst="rect">
-            <a:avLst/>
-          </a:prstGeom>
-          <a:noFill/>
-          <a:ln/>
-        </p:spPr>
-        <p:txBody>
-          <a:bodyPr wrap="square" lIns="0" tIns="0" rIns="0" bIns="0" rtlCol="0" anchor="ctr"/>
-          <a:lstStyle/>
-          <a:p>
-            <a:pPr indent="0" marL="0">
-              <a:buNone/>
-            </a:pPr>
-            <a:r>
-              <a:rPr lang="en-US" sz="2800" b="1" dirty="0">
-                <a:solidFill>
-                  <a:srgbClr val="16242E"/>
-                </a:solidFill>
-                <a:latin typeface="Cambria" pitchFamily="34" charset="0"/>
-                <a:ea typeface="Cambria" pitchFamily="34" charset="-122"/>
-                <a:cs typeface="Cambria" pitchFamily="34" charset="-120"/>
-              </a:rPr>
-              <a:t>Com funciona la paritat?</a:t>
-            </a:r>
-            <a:endParaRPr lang="en-US" sz="2800" dirty="0"/>
-          </a:p>
-        </p:txBody>
-      </p:sp>
-      <p:sp>
-        <p:nvSpPr>
-          <p:cNvPr id="4" name="Text 2"/>
-          <p:cNvSpPr txBox="1"/>
-          <p:nvPr/>
-        </p:nvSpPr>
-        <p:spPr>
-          <a:xfrm>
-            <a:off x="11551615" y="6446520"/>
-            <a:ext cx="457200" cy="274320"/>
-          </a:xfrm>
-          <a:prstGeom prst="rect">
-            <a:avLst/>
-          </a:prstGeom>
-          <a:noFill/>
-          <a:ln/>
-        </p:spPr>
-        <p:txBody>
-          <a:bodyPr wrap="square" lIns="0" tIns="0" rIns="0" bIns="0" rtlCol="0" anchor="ctr"/>
-          <a:lstStyle/>
-          <a:p>
-            <a:pPr algn="r" indent="0" marL="0">
-              <a:buNone/>
-            </a:pPr>
-            <a:r>
-              <a:rPr lang="en-US" sz="1100" dirty="0">
-                <a:solidFill>
-                  <a:srgbClr val="5B6B77"/>
-                </a:solidFill>
-                <a:latin typeface="Calibri" pitchFamily="34" charset="0"/>
-                <a:ea typeface="Calibri" pitchFamily="34" charset="-122"/>
-                <a:cs typeface="Calibri" pitchFamily="34" charset="-120"/>
-              </a:rPr>
-              <a:t>16</a:t>
-            </a:r>
-            <a:endParaRPr lang="en-US" sz="1100" dirty="0"/>
-          </a:p>
-        </p:txBody>
-      </p:sp>
-      <p:sp>
-        <p:nvSpPr>
-          <p:cNvPr id="5" name="Shape 3"/>
-          <p:cNvSpPr/>
-          <p:nvPr/>
-        </p:nvSpPr>
-        <p:spPr>
-          <a:xfrm>
-            <a:off x="655168" y="1661160"/>
-            <a:ext cx="5212080" cy="4279392"/>
-          </a:xfrm>
-          <a:prstGeom prst="roundRect">
-            <a:avLst>
-              <a:gd name="adj" fmla="val 2791"/>
-            </a:avLst>
-          </a:prstGeom>
-          <a:solidFill>
-            <a:srgbClr val="FFFFFF"/>
-          </a:solidFill>
-          <a:ln w="12700">
-            <a:solidFill>
-              <a:srgbClr val="E2E8ED"/>
-            </a:solidFill>
-            <a:prstDash val="solid"/>
-          </a:ln>
-          <a:effectLst>
-            <a:outerShdw sx="100000" sy="100000" kx="0" ky="0" algn="bl" rotWithShape="0" blurRad="101600" dist="38100" dir="5400000">
-              <a:srgbClr val="16242E">
-                <a:alpha val="12000"/>
-              </a:srgbClr>
-            </a:outerShdw>
-          </a:effectLst>
-        </p:spPr>
-        <p:txBody>
-          <a:bodyPr/>
-          <a:p/>
-        </p:txBody>
-      </p:sp>
-      <p:sp>
-        <p:nvSpPr>
-          <p:cNvPr id="6" name="Shape 4"/>
-          <p:cNvSpPr/>
-          <p:nvPr/>
-        </p:nvSpPr>
-        <p:spPr>
-          <a:xfrm>
-            <a:off x="1039216" y="2045208"/>
-            <a:ext cx="731520" cy="731520"/>
-          </a:xfrm>
-          <a:prstGeom prst="ellipse">
-            <a:avLst/>
-          </a:prstGeom>
-          <a:solidFill>
-            <a:srgbClr val="0B1B29"/>
-          </a:solidFill>
-          <a:ln/>
-        </p:spPr>
-        <p:txBody>
-          <a:bodyPr/>
-          <a:p/>
-        </p:txBody>
-      </p:sp>
-      <p:pic>
-        <p:nvPicPr>
-          <p:cNvPr id="7" name="Image 0" descr="/tmp/claude-0/-home-user-SMX-0226-Seguretat-Informatica/a92ac1fc-9241-54c9-9c87-68470d7a571f/scratchpad/aa2/icon_heartbeat.png">    </p:cNvPr>
-          <p:cNvPicPr>
-            <a:picLocks noChangeAspect="1"/>
-          </p:cNvPicPr>
-          <p:nvPr/>
-        </p:nvPicPr>
-        <p:blipFill>
-          <a:blip r:embed="rId4"/>
-          <a:stretch>
-            <a:fillRect/>
-          </a:stretch>
-        </p:blipFill>
-        <p:spPr>
-          <a:xfrm>
-            <a:off x="1203808" y="2209800"/>
-            <a:ext cx="402336" cy="402336"/>
-          </a:xfrm>
-          <a:prstGeom prst="rect">
-            <a:avLst/>
-          </a:prstGeom>
-        </p:spPr>
-      </p:pic>
-      <p:sp>
-        <p:nvSpPr>
-          <p:cNvPr id="8" name="Text 5"/>
-          <p:cNvSpPr txBox="1"/>
-          <p:nvPr/>
-        </p:nvSpPr>
-        <p:spPr>
-          <a:xfrm>
-            <a:off x="1999336" y="2243328"/>
-            <a:ext cx="3483864" cy="335280"/>
-          </a:xfrm>
-          <a:prstGeom prst="rect">
-            <a:avLst/>
-          </a:prstGeom>
-          <a:noFill/>
-          <a:ln/>
-        </p:spPr>
-        <p:txBody>
-          <a:bodyPr wrap="square" lIns="0" tIns="0" rIns="0" bIns="0" rtlCol="0" anchor="ctr"/>
-          <a:lstStyle/>
-          <a:p>
-            <a:pPr indent="0" marL="0">
-              <a:buNone/>
-            </a:pPr>
-            <a:r>
-              <a:rPr lang="en-US" sz="2200" b="1" dirty="0">
-                <a:solidFill>
-                  <a:srgbClr val="16242E"/>
-                </a:solidFill>
-                <a:latin typeface="Cambria" pitchFamily="34" charset="0"/>
-                <a:ea typeface="Cambria" pitchFamily="34" charset="-122"/>
-                <a:cs typeface="Cambria" pitchFamily="34" charset="-120"/>
-              </a:rPr>
-              <a:t>Analogia amb sumes</a:t>
-            </a:r>
-            <a:endParaRPr lang="en-US" sz="2200" dirty="0"/>
-          </a:p>
-        </p:txBody>
-      </p:sp>
-      <p:sp>
-        <p:nvSpPr>
-          <p:cNvPr id="9" name="Text 6"/>
-          <p:cNvSpPr txBox="1"/>
-          <p:nvPr/>
-        </p:nvSpPr>
-        <p:spPr>
-          <a:xfrm>
-            <a:off x="1039216" y="3069336"/>
-            <a:ext cx="4443984" cy="2176272"/>
-          </a:xfrm>
-          <a:prstGeom prst="rect">
-            <a:avLst/>
-          </a:prstGeom>
-          <a:noFill/>
-          <a:ln/>
-        </p:spPr>
-        <p:txBody>
-          <a:bodyPr wrap="square" lIns="0" tIns="0" rIns="0" bIns="0" rtlCol="0" anchor="t"/>
-          <a:lstStyle/>
-          <a:p>
-            <a:pPr indent="0" marL="0">
-              <a:lnSpc>
-                <a:spcPts val="2448"/>
-              </a:lnSpc>
-              <a:buNone/>
-            </a:pPr>
-            <a:r>
-              <a:rPr lang="en-US" sz="1800" dirty="0" b="0">
-                <a:solidFill>
-                  <a:srgbClr val="5B6B77"/>
-                </a:solidFill>
-                <a:latin typeface="Calibri" pitchFamily="34" charset="0"/>
-                <a:ea typeface="Calibri" pitchFamily="34" charset="-122"/>
-                <a:cs typeface="Calibri" pitchFamily="34" charset="-120"/>
-              </a:rPr>
-              <a:t>Caixa A = 3, caixa B = 5 i, a la caixa C, la paritat: 3 + 5 = 8.</a:t>
-            </a:r>
-            <a:endParaRPr lang="en-US" sz="1800" dirty="0"/>
-          </a:p>
-          <a:p>
-            <a:pPr indent="0" marL="0">
-              <a:lnSpc>
-                <a:spcPts val="2448"/>
-              </a:lnSpc>
-              <a:buNone/>
-            </a:pPr>
-            <a:r>
-              <a:rPr lang="en-US" sz="1800" dirty="0" b="0">
-                <a:solidFill>
-                  <a:srgbClr val="5B6B77"/>
-                </a:solidFill>
-                <a:latin typeface="Calibri" pitchFamily="34" charset="0"/>
-                <a:ea typeface="Calibri" pitchFamily="34" charset="-122"/>
-                <a:cs typeface="Calibri" pitchFamily="34" charset="-120"/>
-              </a:rPr>
-              <a:t>Es perd A → 8 − 5 = 3</a:t>
-            </a:r>
-            <a:endParaRPr lang="en-US" sz="1800" dirty="0"/>
-          </a:p>
-          <a:p>
-            <a:pPr indent="0" marL="0">
-              <a:lnSpc>
-                <a:spcPts val="2448"/>
-              </a:lnSpc>
-              <a:buNone/>
-            </a:pPr>
-            <a:r>
-              <a:rPr lang="en-US" sz="1800" dirty="0" b="0">
-                <a:solidFill>
-                  <a:srgbClr val="5B6B77"/>
-                </a:solidFill>
-                <a:latin typeface="Calibri" pitchFamily="34" charset="0"/>
-                <a:ea typeface="Calibri" pitchFamily="34" charset="-122"/>
-                <a:cs typeface="Calibri" pitchFamily="34" charset="-120"/>
-              </a:rPr>
-              <a:t>Es perd B → 8 − 3 = 5</a:t>
-            </a:r>
-            <a:endParaRPr lang="en-US" sz="1800" dirty="0"/>
-          </a:p>
-          <a:p>
-            <a:pPr indent="0" marL="0">
-              <a:lnSpc>
-                <a:spcPts val="2448"/>
-              </a:lnSpc>
-              <a:buNone/>
-            </a:pPr>
-            <a:r>
-              <a:rPr lang="en-US" sz="1800" dirty="0" b="0">
-                <a:solidFill>
-                  <a:srgbClr val="5B6B77"/>
-                </a:solidFill>
-                <a:latin typeface="Calibri" pitchFamily="34" charset="0"/>
-                <a:ea typeface="Calibri" pitchFamily="34" charset="-122"/>
-                <a:cs typeface="Calibri" pitchFamily="34" charset="-120"/>
-              </a:rPr>
-              <a:t>Es perd C → 3 + 5 = 8</a:t>
-            </a:r>
-            <a:endParaRPr lang="en-US" sz="1800" dirty="0"/>
-          </a:p>
-          <a:p>
-            <a:pPr indent="0" marL="0">
-              <a:lnSpc>
-                <a:spcPts val="2448"/>
-              </a:lnSpc>
-              <a:buNone/>
-            </a:pPr>
-            <a:r>
-              <a:rPr lang="en-US" sz="1800" dirty="0" b="1">
-                <a:solidFill>
-                  <a:srgbClr val="5B6B77"/>
-                </a:solidFill>
-                <a:latin typeface="Calibri" pitchFamily="34" charset="0"/>
-                <a:ea typeface="Calibri" pitchFamily="34" charset="-122"/>
-                <a:cs typeface="Calibri" pitchFamily="34" charset="-120"/>
-              </a:rPr>
-              <a:t>Es perden dues caixes → impossible: el RAID 5 només suporta 1 fallada.</a:t>
-            </a:r>
-            <a:endParaRPr lang="en-US" sz="1800" dirty="0"/>
-          </a:p>
-        </p:txBody>
-      </p:sp>
-      <p:sp>
-        <p:nvSpPr>
-          <p:cNvPr id="10" name="Shape 7"/>
-          <p:cNvSpPr/>
-          <p:nvPr/>
-        </p:nvSpPr>
-        <p:spPr>
-          <a:xfrm>
-            <a:off x="6324448" y="1661160"/>
-            <a:ext cx="5212080" cy="4279392"/>
-          </a:xfrm>
-          <a:prstGeom prst="roundRect">
-            <a:avLst>
-              <a:gd name="adj" fmla="val 2791"/>
-            </a:avLst>
-          </a:prstGeom>
-          <a:solidFill>
-            <a:srgbClr val="FFFFFF"/>
-          </a:solidFill>
-          <a:ln w="12700">
-            <a:solidFill>
-              <a:srgbClr val="E2E8ED"/>
-            </a:solidFill>
-            <a:prstDash val="solid"/>
-          </a:ln>
-          <a:effectLst>
-            <a:outerShdw sx="100000" sy="100000" kx="0" ky="0" algn="bl" rotWithShape="0" blurRad="101600" dist="38100" dir="5400000">
-              <a:srgbClr val="16242E">
-                <a:alpha val="12000"/>
-              </a:srgbClr>
-            </a:outerShdw>
-          </a:effectLst>
-        </p:spPr>
-        <p:txBody>
-          <a:bodyPr/>
-          <a:p/>
-        </p:txBody>
-      </p:sp>
-      <p:sp>
-        <p:nvSpPr>
-          <p:cNvPr id="11" name="Shape 8"/>
-          <p:cNvSpPr/>
-          <p:nvPr/>
-        </p:nvSpPr>
-        <p:spPr>
-          <a:xfrm>
-            <a:off x="6708496" y="2045208"/>
-            <a:ext cx="731520" cy="731520"/>
-          </a:xfrm>
-          <a:prstGeom prst="ellipse">
-            <a:avLst/>
-          </a:prstGeom>
-          <a:solidFill>
-            <a:srgbClr val="0B1B29"/>
-          </a:solidFill>
-          <a:ln/>
-        </p:spPr>
-        <p:txBody>
-          <a:bodyPr/>
-          <a:p/>
-        </p:txBody>
-      </p:sp>
-      <p:pic>
-        <p:nvPicPr>
-          <p:cNvPr id="12" name="Image 1" descr="/tmp/claude-0/-home-user-SMX-0226-Seguretat-Informatica/a92ac1fc-9241-54c9-9c87-68470d7a571f/scratchpad/aa2/icon_terminal.png">    </p:cNvPr>
-          <p:cNvPicPr>
-            <a:picLocks noChangeAspect="1"/>
-          </p:cNvPicPr>
-          <p:nvPr/>
-        </p:nvPicPr>
-        <p:blipFill>
-          <a:blip r:embed="rId3"/>
-          <a:stretch>
-            <a:fillRect/>
-          </a:stretch>
-        </p:blipFill>
-        <p:spPr>
-          <a:xfrm>
-            <a:off x="6873087" y="2209800"/>
-            <a:ext cx="402336" cy="402336"/>
-          </a:xfrm>
-          <a:prstGeom prst="rect">
-            <a:avLst/>
-          </a:prstGeom>
-        </p:spPr>
-      </p:pic>
-      <p:sp>
-        <p:nvSpPr>
-          <p:cNvPr id="13" name="Text 9"/>
-          <p:cNvSpPr txBox="1"/>
-          <p:nvPr/>
-        </p:nvSpPr>
-        <p:spPr>
-          <a:xfrm>
-            <a:off x="7668616" y="2243328"/>
-            <a:ext cx="3483864" cy="335280"/>
-          </a:xfrm>
-          <a:prstGeom prst="rect">
-            <a:avLst/>
-          </a:prstGeom>
-          <a:noFill/>
-          <a:ln/>
-        </p:spPr>
-        <p:txBody>
-          <a:bodyPr wrap="square" lIns="0" tIns="0" rIns="0" bIns="0" rtlCol="0" anchor="ctr"/>
-          <a:lstStyle/>
-          <a:p>
-            <a:pPr indent="0" marL="0">
-              <a:buNone/>
-            </a:pPr>
-            <a:r>
-              <a:rPr lang="en-US" sz="2200" b="1" dirty="0">
-                <a:solidFill>
-                  <a:srgbClr val="16242E"/>
-                </a:solidFill>
-                <a:latin typeface="Cambria" pitchFamily="34" charset="0"/>
-                <a:ea typeface="Cambria" pitchFamily="34" charset="-122"/>
-                <a:cs typeface="Cambria" pitchFamily="34" charset="-120"/>
-              </a:rPr>
-              <a:t>Amb bits: l'operació XOR</a:t>
-            </a:r>
-            <a:endParaRPr lang="en-US" sz="2200" dirty="0"/>
-          </a:p>
-        </p:txBody>
-      </p:sp>
-      <p:sp>
-        <p:nvSpPr>
-          <p:cNvPr id="14" name="Text 10"/>
-          <p:cNvSpPr txBox="1"/>
-          <p:nvPr/>
-        </p:nvSpPr>
-        <p:spPr>
-          <a:xfrm>
-            <a:off x="6708496" y="3069336"/>
-            <a:ext cx="4443984" cy="2487168"/>
-          </a:xfrm>
-          <a:prstGeom prst="rect">
-            <a:avLst/>
-          </a:prstGeom>
-          <a:noFill/>
-          <a:ln/>
-        </p:spPr>
-        <p:txBody>
-          <a:bodyPr wrap="square" lIns="0" tIns="0" rIns="0" bIns="0" rtlCol="0" anchor="t"/>
-          <a:lstStyle/>
-          <a:p>
-            <a:pPr indent="0" marL="0">
-              <a:lnSpc>
-                <a:spcPts val="2448"/>
-              </a:lnSpc>
-              <a:buNone/>
-            </a:pPr>
-            <a:r>
-              <a:rPr lang="en-US" sz="1800" dirty="0" b="0">
-                <a:solidFill>
-                  <a:srgbClr val="5B6B77"/>
-                </a:solidFill>
-                <a:ea typeface="Calibri" pitchFamily="34" charset="-122"/>
-                <a:latin typeface="Consolas"/>
-              </a:rPr>
-              <a:t>Disc 1:   1 0 1 1</a:t>
-            </a:r>
-            <a:endParaRPr lang="en-US" sz="1800" dirty="0"/>
-          </a:p>
-          <a:p>
-            <a:pPr indent="0" marL="0">
-              <a:lnSpc>
-                <a:spcPts val="2448"/>
-              </a:lnSpc>
-              <a:buNone/>
-            </a:pPr>
-            <a:r>
-              <a:rPr lang="en-US" sz="1800" dirty="0" b="0">
-                <a:solidFill>
-                  <a:srgbClr val="5B6B77"/>
-                </a:solidFill>
-                <a:ea typeface="Calibri" pitchFamily="34" charset="-122"/>
-                <a:latin typeface="Consolas"/>
-              </a:rPr>
-              <a:t>Disc 2:   0 1 1 0</a:t>
-            </a:r>
-            <a:endParaRPr lang="en-US" sz="1800" dirty="0"/>
-          </a:p>
-          <a:p>
-            <a:pPr indent="0" marL="0">
-              <a:lnSpc>
-                <a:spcPts val="2448"/>
-              </a:lnSpc>
-              <a:buNone/>
-            </a:pPr>
-            <a:r>
-              <a:rPr lang="en-US" sz="1800" dirty="0" b="1">
-                <a:solidFill>
-                  <a:srgbClr val="5B6B77"/>
-                </a:solidFill>
-                <a:ea typeface="Calibri" pitchFamily="34" charset="-122"/>
-                <a:latin typeface="Consolas"/>
-              </a:rPr>
-              <a:t>Paritat:  1 1 0 1</a:t>
-            </a:r>
-            <a:endParaRPr lang="en-US" sz="1800" dirty="0"/>
-          </a:p>
-          <a:p>
-            <a:pPr indent="0" marL="0">
-              <a:lnSpc>
-                <a:spcPts val="2448"/>
-              </a:lnSpc>
-              <a:buNone/>
-            </a:pPr>
-            <a:r>
-              <a:rPr lang="en-US" sz="1800" dirty="0" b="0">
-                <a:solidFill>
-                  <a:srgbClr val="5B6B77"/>
-                </a:solidFill>
-                <a:latin typeface="Calibri" pitchFamily="34" charset="0"/>
-                <a:ea typeface="Calibri" pitchFamily="34" charset="-122"/>
-                <a:cs typeface="Calibri" pitchFamily="34" charset="-120"/>
-              </a:rPr>
-              <a:t>XOR: 1 si els bits són diferents, 0 si són iguals.</a:t>
-            </a:r>
-            <a:endParaRPr lang="en-US" sz="1800" dirty="0"/>
-          </a:p>
-          <a:p>
-            <a:pPr indent="0" marL="0">
-              <a:lnSpc>
-                <a:spcPts val="2448"/>
-              </a:lnSpc>
-              <a:buNone/>
-            </a:pPr>
-            <a:r>
-              <a:rPr lang="en-US" sz="1800" dirty="0" b="1">
-                <a:solidFill>
-                  <a:srgbClr val="5B6B77"/>
-                </a:solidFill>
-                <a:latin typeface="Calibri" pitchFamily="34" charset="0"/>
-                <a:ea typeface="Calibri" pitchFamily="34" charset="-122"/>
-                <a:cs typeface="Calibri" pitchFamily="34" charset="-120"/>
-              </a:rPr>
-              <a:t>Si falla el disc 1: disc 2 XOR paritat = 1 0 1 1 → recuperat.</a:t>
-            </a:r>
-            <a:endParaRPr lang="en-US" sz="1800" dirty="0"/>
           </a:p>
         </p:txBody>
       </p:sp>
